--- a/blocks/C_drive_visualization/M11_rviz_integration/M11_RViz2_구동_상태_검증.pptx
+++ b/blocks/C_drive_visualization/M11_rviz_integration/M11_RViz2_구동_상태_검증.pptx
@@ -8092,7 +8092,7 @@
         </p:nvSpPr>
         <p:spPr>
           <a:xfrm>
-            <a:off x="914400" y="1810512"/>
+            <a:off x="914400" y="1773936"/>
             <a:ext cx="3840480" cy="256032"/>
           </a:xfrm>
           <a:prstGeom prst="rect">
@@ -8131,8 +8131,8 @@
         </p:nvSpPr>
         <p:spPr>
           <a:xfrm>
-            <a:off x="914400" y="2121408"/>
-            <a:ext cx="9966960" cy="256032"/>
+            <a:off x="914400" y="2048255"/>
+            <a:ext cx="9966960" cy="475488"/>
           </a:xfrm>
           <a:prstGeom prst="rect">
             <a:avLst/>
@@ -8149,7 +8149,7 @@
               <a:spcAft>
                 <a:spcPts val="0"/>
               </a:spcAft>
-              <a:defRPr sz="1200" b="0">
+              <a:defRPr sz="1000" b="0">
                 <a:solidFill>
                   <a:srgbClr val="225B9B"/>
                 </a:solidFill>
@@ -8170,7 +8170,7 @@
         </p:nvSpPr>
         <p:spPr>
           <a:xfrm>
-            <a:off x="914400" y="2816352"/>
+            <a:off x="914400" y="2852928"/>
             <a:ext cx="3840480" cy="256032"/>
           </a:xfrm>
           <a:prstGeom prst="rect">
@@ -8210,7 +8210,7 @@
         <p:spPr>
           <a:xfrm>
             <a:off x="914400" y="3127248"/>
-            <a:ext cx="9966960" cy="256032"/>
+            <a:ext cx="9966960" cy="475488"/>
           </a:xfrm>
           <a:prstGeom prst="rect">
             <a:avLst/>
@@ -8227,7 +8227,7 @@
               <a:spcAft>
                 <a:spcPts val="0"/>
               </a:spcAft>
-              <a:defRPr sz="1200" b="0">
+              <a:defRPr sz="1000" b="0">
                 <a:solidFill>
                   <a:srgbClr val="225B9B"/>
                 </a:solidFill>
@@ -8248,7 +8248,7 @@
         </p:nvSpPr>
         <p:spPr>
           <a:xfrm>
-            <a:off x="914400" y="3822191"/>
+            <a:off x="914400" y="3931920"/>
             <a:ext cx="3840480" cy="256032"/>
           </a:xfrm>
           <a:prstGeom prst="rect">
@@ -8287,8 +8287,8 @@
         </p:nvSpPr>
         <p:spPr>
           <a:xfrm>
-            <a:off x="914400" y="4133087"/>
-            <a:ext cx="9966960" cy="256032"/>
+            <a:off x="914400" y="4206240"/>
+            <a:ext cx="9966960" cy="475488"/>
           </a:xfrm>
           <a:prstGeom prst="rect">
             <a:avLst/>
@@ -8305,7 +8305,7 @@
               <a:spcAft>
                 <a:spcPts val="0"/>
               </a:spcAft>
-              <a:defRPr sz="1200" b="0">
+              <a:defRPr sz="1000" b="0">
                 <a:solidFill>
                   <a:srgbClr val="225B9B"/>
                 </a:solidFill>
@@ -8326,7 +8326,7 @@
         </p:nvSpPr>
         <p:spPr>
           <a:xfrm>
-            <a:off x="914400" y="4828032"/>
+            <a:off x="914400" y="5010912"/>
             <a:ext cx="3840480" cy="256032"/>
           </a:xfrm>
           <a:prstGeom prst="rect">
@@ -8365,8 +8365,8 @@
         </p:nvSpPr>
         <p:spPr>
           <a:xfrm>
-            <a:off x="914400" y="5138928"/>
-            <a:ext cx="9966960" cy="256032"/>
+            <a:off x="914400" y="5285232"/>
+            <a:ext cx="9966960" cy="475488"/>
           </a:xfrm>
           <a:prstGeom prst="rect">
             <a:avLst/>
@@ -8383,7 +8383,7 @@
               <a:spcAft>
                 <a:spcPts val="0"/>
               </a:spcAft>
-              <a:defRPr sz="1200" b="0">
+              <a:defRPr sz="1000" b="0">
                 <a:solidFill>
                   <a:srgbClr val="225B9B"/>
                 </a:solidFill>

--- a/blocks/C_drive_visualization/M11_rviz_integration/M11_RViz2_구동_상태_검증.pptx
+++ b/blocks/C_drive_visualization/M11_rviz_integration/M11_RViz2_구동_상태_검증.pptx
@@ -613,7 +613,7 @@
           </a:p>
           <a:p>
             <a:r>
-              <a:t>[실행] source ~/agv_ws/install/setup.bash</a:t>
+              <a:t>[실행] source ~/ros2_curri/agv_ws/install/setup.bash</a:t>
             </a:r>
           </a:p>
           <a:p>
@@ -1438,7 +1438,7 @@
           </a:p>
           <a:p>
             <a:r>
-              <a:t>[실행] pwd; source /opt/ros/jazzy/setup.bash; source ~/agv_ws/install/setup.bash</a:t>
+              <a:t>[실행] pwd; source /opt/ros/jazzy/setup.bash; source ~/ros2_curri/agv_ws/install/setup.bash</a:t>
             </a:r>
           </a:p>
           <a:p>
@@ -1798,12 +1798,12 @@
           </a:p>
           <a:p>
             <a:r>
-              <a:t>[실행] source ~/agv_ws/install/setup.bash</a:t>
-            </a:r>
-          </a:p>
-          <a:p>
-            <a:r>
-              <a:t>rviz2 -d ~/agv_ws/src/agv_description/rviz/agv.rviz</a:t>
+              <a:t>[실행] source ~/ros2_curri/agv_ws/install/setup.bash</a:t>
+            </a:r>
+          </a:p>
+          <a:p>
+            <a:r>
+              <a:t>rviz2 -d ~/ros2_curri/agv_ws/src/agv_description/rviz/agv.rviz</a:t>
             </a:r>
           </a:p>
           <a:p>
@@ -5566,7 +5566,7 @@
               </a:defRPr>
             </a:pPr>
             <a:r>
-              <a:t>현재 단계 실행    |    현재 폴더 ~/agv_ws    |    현재 터미널</a:t>
+              <a:t>현재 단계 실행    |    현재 폴더 ~/ros2_curri/agv_ws    |    현재 터미널</a:t>
             </a:r>
           </a:p>
         </p:txBody>
@@ -5624,7 +5624,7 @@
               </a:defRPr>
             </a:pPr>
             <a:r>
-              <a:t>source ~/agv_ws/install/setup.bash</a:t>
+              <a:t>source ~/ros2_curri/agv_ws/install/setup.bash</a:t>
             </a:r>
             <a:br/>
             <a:r>
@@ -6039,7 +6039,7 @@
               </a:defRPr>
             </a:pPr>
             <a:r>
-              <a:t>실제 RViz2: AGV body·wheel·camera·LiDAR·IMU frame</a:t>
+              <a:t>실제 RViz2: RobotModel·TF·Odometry·LaserScan·Path·Marker display를 함께 연 상태</a:t>
             </a:r>
           </a:p>
         </p:txBody>
@@ -6124,7 +6124,7 @@
       </p:sp>
       <p:pic>
         <p:nvPicPr>
-          <p:cNvPr id="6" name="Picture 5" descr="rviz_agv_sensors_actual.png"/>
+          <p:cNvPr id="6" name="Picture 5" descr="01_rviz_integrated_actual.png"/>
           <p:cNvPicPr>
             <a:picLocks noChangeAspect="1"/>
           </p:cNvPicPr>
@@ -6138,8 +6138,8 @@
         </p:blipFill>
         <p:spPr>
           <a:xfrm>
-            <a:off x="3201399" y="1353312"/>
-            <a:ext cx="5786153" cy="4800600"/>
+            <a:off x="2971409" y="1353312"/>
+            <a:ext cx="6246133" cy="4800600"/>
           </a:xfrm>
           <a:prstGeom prst="rect">
             <a:avLst/>
@@ -6412,7 +6412,7 @@
               </a:defRPr>
             </a:pPr>
             <a:r>
-              <a:t>현재 단계 검증    |    현재 폴더 ~/agv_ws    |    현재 터미널</a:t>
+              <a:t>현재 단계 검증    |    현재 폴더 ~/ros2_curri/agv_ws    |    현재 터미널</a:t>
             </a:r>
           </a:p>
         </p:txBody>
@@ -6819,7 +6819,7 @@
               </a:defRPr>
             </a:pPr>
             <a:r>
-              <a:t>현재 단계 오류 대응    |    현재 폴더 ~/agv_ws    |    현재 터미널</a:t>
+              <a:t>현재 단계 오류 대응    |    현재 폴더 ~/ros2_curri/agv_ws    |    현재 터미널</a:t>
             </a:r>
           </a:p>
         </p:txBody>
@@ -7344,7 +7344,7 @@
               </a:defRPr>
             </a:pPr>
             <a:r>
-              <a:t>현재 단계 미니 실습    |    현재 폴더 ~/agv_ws    |    현재 터미널</a:t>
+              <a:t>현재 단계 미니 실습    |    현재 폴더 ~/ros2_curri/agv_ws    |    현재 터미널</a:t>
             </a:r>
           </a:p>
         </p:txBody>
@@ -7673,7 +7673,7 @@
               </a:defRPr>
             </a:pPr>
             <a:r>
-              <a:t>현재 단계 체크포인트    |    현재 폴더 ~/agv_ws    |    현재 터미널</a:t>
+              <a:t>현재 단계 체크포인트    |    현재 폴더 ~/ros2_curri/agv_ws    |    현재 터미널</a:t>
             </a:r>
           </a:p>
         </p:txBody>
@@ -9084,7 +9084,7 @@
               </a:defRPr>
             </a:pPr>
             <a:r>
-              <a:t>현재 단계 시작    |    현재 폴더 ~/agv_ws    |    현재 터미널</a:t>
+              <a:t>현재 단계 시작    |    현재 폴더 ~/ros2_curri/agv_ws    |    현재 터미널</a:t>
             </a:r>
           </a:p>
         </p:txBody>
@@ -9200,7 +9200,7 @@
               </a:defRPr>
             </a:pPr>
             <a:r>
-              <a:t>• 현재 폴더: ~/agv_ws</a:t>
+              <a:t>• 현재 폴더: ~/ros2_curri/agv_ws</a:t>
             </a:r>
           </a:p>
           <a:p>
@@ -9271,7 +9271,7 @@
               </a:defRPr>
             </a:pPr>
             <a:r>
-              <a:t>확인: pwd가 ~/agv_ws이고, 이전 모듈의 완료 조건을 한 문장으로 설명할 수 있으면 시작합니다.</a:t>
+              <a:t>확인: pwd가 ~/ros2_curri/agv_ws이고, 이전 모듈의 완료 조건을 한 문장으로 설명할 수 있으면 시작합니다.</a:t>
             </a:r>
           </a:p>
         </p:txBody>
@@ -10293,7 +10293,7 @@
               </a:defRPr>
             </a:pPr>
             <a:r>
-              <a:t>~/agv_ws/src/</a:t>
+              <a:t>~/ros2_curri/agv_ws/src/</a:t>
             </a:r>
             <a:br/>
             <a:r>
@@ -10568,7 +10568,7 @@
               </a:defRPr>
             </a:pPr>
             <a:r>
-              <a:t>현재 단계 1/3    |    현재 폴더 ~/agv_ws    |    현재 터미널</a:t>
+              <a:t>현재 단계 1/3    |    현재 폴더 ~/ros2_curri/agv_ws    |    현재 터미널</a:t>
             </a:r>
           </a:p>
         </p:txBody>
@@ -10704,11 +10704,11 @@
               </a:defRPr>
             </a:pPr>
             <a:r>
-              <a:t>source ~/agv_ws/install/setup.bash</a:t>
+              <a:t>source ~/ros2_curri/agv_ws/install/setup.bash</a:t>
             </a:r>
             <a:br/>
             <a:r>
-              <a:t>rviz2 -d ~/agv_ws/src/agv_description/rviz/agv.rviz</a:t>
+              <a:t>rviz2 -d ~/ros2_curri/agv_ws/src/agv_description/rviz/agv.rviz</a:t>
             </a:r>
           </a:p>
         </p:txBody>
@@ -11018,7 +11018,7 @@
               </a:defRPr>
             </a:pPr>
             <a:r>
-              <a:t>현재 단계 2/3    |    현재 폴더 ~/agv_ws    |    현재 터미널</a:t>
+              <a:t>현재 단계 2/3    |    현재 폴더 ~/ros2_curri/agv_ws    |    현재 터미널</a:t>
             </a:r>
           </a:p>
         </p:txBody>
@@ -11472,7 +11472,7 @@
               </a:defRPr>
             </a:pPr>
             <a:r>
-              <a:t>현재 단계 3/3    |    현재 폴더 ~/agv_ws    |    현재 터미널</a:t>
+              <a:t>현재 단계 3/3    |    현재 폴더 ~/ros2_curri/agv_ws    |    현재 터미널</a:t>
             </a:r>
           </a:p>
         </p:txBody>

--- a/blocks/C_drive_visualization/M11_rviz_integration/M11_RViz2_구동_상태_검증.pptx
+++ b/blocks/C_drive_visualization/M11_rviz_integration/M11_RViz2_구동_상태_검증.pptx
@@ -713,7 +713,7 @@
           </a:p>
           <a:p>
             <a:r>
-              <a:t>[확인] 캡처의 명령과 다음 슬라이드의 검증 명령을 비교한다.</a:t>
+              <a:t>[확인] ① 명령/설정  ② 정상 출력 또는 화면  ③ 다음 검증 명령으로 재확인</a:t>
             </a:r>
           </a:p>
           <a:p>
@@ -803,7 +803,7 @@
           </a:p>
           <a:p>
             <a:r>
-              <a:t>[확인] 캡처의 명령과 다음 슬라이드의 검증 명령을 비교한다.</a:t>
+              <a:t>[확인] 명령·설정과 화면의 topic·frame·결과 이름을 대조합니다.</a:t>
             </a:r>
           </a:p>
           <a:p>
@@ -5917,8 +5917,8 @@
         </p:nvSpPr>
         <p:spPr>
           <a:xfrm>
-            <a:off x="777240" y="6217920"/>
-            <a:ext cx="10607040" cy="182880"/>
+            <a:off x="777240" y="6144768"/>
+            <a:ext cx="10607040" cy="310896"/>
           </a:xfrm>
           <a:prstGeom prst="rect">
             <a:avLst/>
@@ -5943,7 +5943,7 @@
               </a:defRPr>
             </a:pPr>
             <a:r>
-              <a:t>① 명령/설정  ② 정상 출력 또는 화면  ③ 다음 검증 명령으로 재확인</a:t>
+              <a:t>화면에서 확인: ① 명령/설정  ② 정상 출력 또는 화면  ③ 다음 검증 명령으로 재확인</a:t>
             </a:r>
           </a:p>
         </p:txBody>
@@ -6154,8 +6154,8 @@
         </p:nvSpPr>
         <p:spPr>
           <a:xfrm>
-            <a:off x="777240" y="6217920"/>
-            <a:ext cx="10607040" cy="182880"/>
+            <a:off x="777240" y="6144768"/>
+            <a:ext cx="10607040" cy="310896"/>
           </a:xfrm>
           <a:prstGeom prst="rect">
             <a:avLst/>
@@ -6180,7 +6180,7 @@
               </a:defRPr>
             </a:pPr>
             <a:r>
-              <a:t>① 명령/설정  ② 정상 출력 또는 화면  ③ 다음 검증 명령으로 재확인</a:t>
+              <a:t>화면에서 확인: 명령·설정과 화면의 topic·frame·결과 이름을 대조합니다.</a:t>
             </a:r>
           </a:p>
         </p:txBody>

--- a/blocks/C_drive_visualization/M11_rviz_integration/M11_RViz2_구동_상태_검증.pptx
+++ b/blocks/C_drive_visualization/M11_rviz_integration/M11_RViz2_구동_상태_검증.pptx
@@ -22,6 +22,7 @@
     <p:sldId id="270" r:id="rId22"/>
     <p:sldId id="271" r:id="rId23"/>
     <p:sldId id="272" r:id="rId24"/>
+    <p:sldId id="273" r:id="rId25"/>
   </p:sldIdLst>
   <p:sldSz cx="12191999" cy="6858000" type="screen4x3"/>
   <p:notesSz cx="6858000" cy="9144000"/>
@@ -608,22 +609,27 @@
           <a:lstStyle/>
           <a:p>
             <a:r>
-              <a:t>[설명] build/source/run을 생략 없이 실행한다.</a:t>
-            </a:r>
-          </a:p>
-          <a:p>
-            <a:r>
-              <a:t>[실행] source ~/ros2_curri/agv_ws/install/setup.bash</a:t>
-            </a:r>
-          </a:p>
-          <a:p>
-            <a:r>
-              <a:t>ros2 launch agv_bringup agv_sim.launch.py</a:t>
-            </a:r>
-          </a:p>
-          <a:p>
-            <a:r>
-              <a:t>[확인] agv.rviz에 RobotModel·TF·LaserScan·Odometry 설정을 저장하고 실제 화면을 확인한다.</a:t>
+              <a:t>[설명] 모델과 frame이 맞아야 scan·image 위치도 맞는다.</a:t>
+            </a:r>
+          </a:p>
+          <a:p>
+            <a:r>
+              <a:t>[실행] Fixed Frame: odom 또는 base_link</a:t>
+            </a:r>
+          </a:p>
+          <a:p>
+            <a:r>
+              <a:t>Add → RobotModel → Description Topic: /robot_description</a:t>
+            </a:r>
+          </a:p>
+          <a:p>
+            <a:r>
+              <a:t>Add → TF</a:t>
+            </a:r>
+          </a:p>
+          <a:p>
+            <a:r>
+              <a:t>[확인] 명령 출력에서 슬라이드의 확인 항목을 찾는다.</a:t>
             </a:r>
           </a:p>
           <a:p>
@@ -703,17 +709,27 @@
           <a:lstStyle/>
           <a:p>
             <a:r>
-              <a:t>[설명] 실제 Ubuntu/ROS 2 환경에서 생성한 검증 화면이다.</a:t>
-            </a:r>
-          </a:p>
-          <a:p>
-            <a:r>
-              <a:t>[실행] 슬라이드의 명령 또는 파일 작성 단계를 진행한다.</a:t>
-            </a:r>
-          </a:p>
-          <a:p>
-            <a:r>
-              <a:t>[확인] ① 명령/설정  ② 정상 출력 또는 화면  ③ 다음 검증 명령으로 재확인</a:t>
+              <a:t>[설명] 각 display는 topic과 message frame_id를 TF로 변환한다.</a:t>
+            </a:r>
+          </a:p>
+          <a:p>
+            <a:r>
+              <a:t>[실행] Add → LaserScan → Topic: /scan</a:t>
+            </a:r>
+          </a:p>
+          <a:p>
+            <a:r>
+              <a:t>Add → Odometry → Topic: /odom</a:t>
+            </a:r>
+          </a:p>
+          <a:p>
+            <a:r>
+              <a:t>File → Save Config As → agv.rviz</a:t>
+            </a:r>
+          </a:p>
+          <a:p>
+            <a:r>
+              <a:t>[확인] 명령 출력에서 슬라이드의 확인 항목을 찾는다.</a:t>
             </a:r>
           </a:p>
           <a:p>
@@ -793,17 +809,22 @@
           <a:lstStyle/>
           <a:p>
             <a:r>
-              <a:t>[설명] 실제 Ubuntu/ROS 2 환경에서 생성한 검증 화면이다.</a:t>
-            </a:r>
-          </a:p>
-          <a:p>
-            <a:r>
-              <a:t>[실행] 슬라이드의 명령 또는 파일 작성 단계를 진행한다.</a:t>
-            </a:r>
-          </a:p>
-          <a:p>
-            <a:r>
-              <a:t>[확인] 명령·설정과 화면의 topic·frame·결과 이름을 대조합니다.</a:t>
+              <a:t>[설명] build/source/run을 생략 없이 실행한다.</a:t>
+            </a:r>
+          </a:p>
+          <a:p>
+            <a:r>
+              <a:t>[실행] source ~/ros2_curri/my_agv_ws/install/setup.bash</a:t>
+            </a:r>
+          </a:p>
+          <a:p>
+            <a:r>
+              <a:t>ros2 launch agv_bringup agv_sim.launch.py</a:t>
+            </a:r>
+          </a:p>
+          <a:p>
+            <a:r>
+              <a:t>[확인] agv.rviz에 RobotModel·TF·LaserScan·Odometry 설정을 저장하고 실제 화면을 확인한다.</a:t>
             </a:r>
           </a:p>
           <a:p>
@@ -883,27 +904,17 @@
           <a:lstStyle/>
           <a:p>
             <a:r>
-              <a:t>[설명] 검증 명령은 GUI 결과와 별도로 실행해 재현 가능한 완료 기준을 만든다.</a:t>
-            </a:r>
-          </a:p>
-          <a:p>
-            <a:r>
-              <a:t>[실행] ros2 topic info /robot_description</a:t>
-            </a:r>
-          </a:p>
-          <a:p>
-            <a:r>
-              <a:t>ros2 topic echo /scan --once</a:t>
-            </a:r>
-          </a:p>
-          <a:p>
-            <a:r>
-              <a:t>ros2 topic echo /odom --once</a:t>
-            </a:r>
-          </a:p>
-          <a:p>
-            <a:r>
-              <a:t>[확인] agv.rviz에 RobotModel·TF·LaserScan·Odometry 설정을 저장하고 실제 화면을 확인한다.</a:t>
+              <a:t>[설명] 실제 Ubuntu/ROS 2 환경에서 생성한 검증 화면이다.</a:t>
+            </a:r>
+          </a:p>
+          <a:p>
+            <a:r>
+              <a:t>[실행] 슬라이드의 명령 또는 파일 작성 단계를 진행한다.</a:t>
+            </a:r>
+          </a:p>
+          <a:p>
+            <a:r>
+              <a:t>[확인] ① 명령/설정  ② 정상 출력 또는 화면  ③ 다음 검증 명령으로 재확인</a:t>
             </a:r>
           </a:p>
           <a:p>
@@ -983,17 +994,27 @@
           <a:lstStyle/>
           <a:p>
             <a:r>
-              <a:t>[설명] 오류를 대신 해결하지 말고 증상부터 우선 확인 순서대로 교육생이 실행하게 한다.</a:t>
-            </a:r>
-          </a:p>
-          <a:p>
-            <a:r>
-              <a:t>[실행] 슬라이드의 명령 또는 파일 작성 단계를 진행한다.</a:t>
-            </a:r>
-          </a:p>
-          <a:p>
-            <a:r>
-              <a:t>[확인] 수정 뒤 첫 검증 명령을 다시 실행한다.</a:t>
+              <a:t>[설명] 검증 명령은 GUI 결과와 별도로 실행해 재현 가능한 완료 기준을 만든다.</a:t>
+            </a:r>
+          </a:p>
+          <a:p>
+            <a:r>
+              <a:t>[실행] ros2 topic info /robot_description</a:t>
+            </a:r>
+          </a:p>
+          <a:p>
+            <a:r>
+              <a:t>ros2 topic echo /scan --once</a:t>
+            </a:r>
+          </a:p>
+          <a:p>
+            <a:r>
+              <a:t>ros2 topic echo /odom --once</a:t>
+            </a:r>
+          </a:p>
+          <a:p>
+            <a:r>
+              <a:t>[확인] agv.rviz에 RobotModel·TF·LaserScan·Odometry 설정을 저장하고 실제 화면을 확인한다.</a:t>
             </a:r>
           </a:p>
           <a:p>
@@ -1003,7 +1024,7 @@
           </a:p>
           <a:p>
             <a:r>
-              <a:t>[오류] 슬라이드의 두 대표 오류를 먼저 사용한다.</a:t>
+              <a:t>[오류] 오류가 나면 현재 폴더, source, 파일 경로를 먼저 확인한다.</a:t>
             </a:r>
           </a:p>
         </p:txBody>
@@ -1073,7 +1094,7 @@
           <a:lstStyle/>
           <a:p>
             <a:r>
-              <a:t>[설명] 교육생이 직접 한 값만 바꿔 원인과 결과를 연결하게 한다.</a:t>
+              <a:t>[설명] 오류를 대신 해결하지 말고 증상부터 우선 확인 순서대로 교육생이 실행하게 한다.</a:t>
             </a:r>
           </a:p>
           <a:p>
@@ -1083,7 +1104,7 @@
           </a:p>
           <a:p>
             <a:r>
-              <a:t>[확인] 원래 값과 변경 값을 모두 기록한다.</a:t>
+              <a:t>[확인] 수정 뒤 첫 검증 명령을 다시 실행한다.</a:t>
             </a:r>
           </a:p>
           <a:p>
@@ -1093,7 +1114,7 @@
           </a:p>
           <a:p>
             <a:r>
-              <a:t>[오류] 오류가 나면 현재 폴더, source, 파일 경로를 먼저 확인한다.</a:t>
+              <a:t>[오류] 슬라이드의 두 대표 오류를 먼저 사용한다.</a:t>
             </a:r>
           </a:p>
         </p:txBody>
@@ -1163,7 +1184,7 @@
           <a:lstStyle/>
           <a:p>
             <a:r>
-              <a:t>[설명] 교육생이 Complete·캡처·로그를 저장했는지 확인하고 다음 모듈의 시작 상태를 읽는다.</a:t>
+              <a:t>[설명] 교육생이 직접 한 값만 바꿔 원인과 결과를 연결하게 한다.</a:t>
             </a:r>
           </a:p>
           <a:p>
@@ -1173,7 +1194,7 @@
           </a:p>
           <a:p>
             <a:r>
-              <a:t>[확인] M12~M15 센서 display 시작 조건을 말할 수 있다.</a:t>
+              <a:t>[확인] 원래 값과 변경 값을 모두 기록한다.</a:t>
             </a:r>
           </a:p>
           <a:p>
@@ -1253,6 +1274,96 @@
           <a:lstStyle/>
           <a:p>
             <a:r>
+              <a:t>[설명] 교육생이 자신의 workspace·캡처·로그를 저장했는지 확인하고 다음 모듈의 시작 상태를 읽는다.</a:t>
+            </a:r>
+          </a:p>
+          <a:p>
+            <a:r>
+              <a:t>[실행] 슬라이드의 명령 또는 파일 작성 단계를 진행한다.</a:t>
+            </a:r>
+          </a:p>
+          <a:p>
+            <a:r>
+              <a:t>[확인] M12~M15 센서 display 시작 조건을 말할 수 있다.</a:t>
+            </a:r>
+          </a:p>
+          <a:p>
+            <a:r>
+              <a:t>[멈춤] 교육생이 현재 체크포인트를 통과할 때까지 기다린다.</a:t>
+            </a:r>
+          </a:p>
+          <a:p>
+            <a:r>
+              <a:t>[오류] 오류가 나면 현재 폴더, source, 파일 경로를 먼저 확인한다.</a:t>
+            </a:r>
+          </a:p>
+        </p:txBody>
+      </p:sp>
+      <p:sp>
+        <p:nvSpPr>
+          <p:cNvPr id="4" name="Slide Number Placeholder 3"/>
+          <p:cNvSpPr>
+            <a:spLocks noGrp="1"/>
+          </p:cNvSpPr>
+          <p:nvPr>
+            <p:ph type="sldNum" idx="5" sz="quarter"/>
+          </p:nvPr>
+        </p:nvSpPr>
+        <p:spPr/>
+      </p:sp>
+    </p:spTree>
+  </p:cSld>
+  <p:clrMapOvr>
+    <a:masterClrMapping/>
+  </p:clrMapOvr>
+</p:notes>
+</file>
+
+<file path=ppt/notesSlides/notesSlide18.xml><?xml version="1.0" encoding="utf-8"?>
+<p:notes xmlns:a="http://schemas.openxmlformats.org/drawingml/2006/main" xmlns:p="http://schemas.openxmlformats.org/presentationml/2006/main" xmlns:r="http://schemas.openxmlformats.org/officeDocument/2006/relationships">
+  <p:cSld>
+    <p:spTree>
+      <p:nvGrpSpPr>
+        <p:cNvPr id="1" name=""/>
+        <p:cNvGrpSpPr/>
+        <p:nvPr/>
+      </p:nvGrpSpPr>
+      <p:grpSpPr>
+        <a:xfrm>
+          <a:off x="0" y="0"/>
+          <a:ext cx="0" cy="0"/>
+          <a:chOff x="0" y="0"/>
+          <a:chExt cx="0" cy="0"/>
+        </a:xfrm>
+      </p:grpSpPr>
+      <p:sp>
+        <p:nvSpPr>
+          <p:cNvPr id="2" name="Slide Image Placeholder 1"/>
+          <p:cNvSpPr>
+            <a:spLocks noGrp="1"/>
+          </p:cNvSpPr>
+          <p:nvPr>
+            <p:ph type="sldImg" idx="2"/>
+          </p:nvPr>
+        </p:nvSpPr>
+        <p:spPr/>
+      </p:sp>
+      <p:sp>
+        <p:nvSpPr>
+          <p:cNvPr id="3" name="Notes Placeholder 2"/>
+          <p:cNvSpPr>
+            <a:spLocks noGrp="1"/>
+          </p:cNvSpPr>
+          <p:nvPr>
+            <p:ph type="body" idx="3" sz="quarter"/>
+          </p:nvPr>
+        </p:nvSpPr>
+        <p:spPr/>
+        <p:txBody>
+          <a:bodyPr/>
+          <a:lstStyle/>
+          <a:p>
+            <a:r>
               <a:t>[설명] 공식 문서는 버전 차이와 확장 학습을 확인할 때 사용한다.</a:t>
             </a:r>
           </a:p>
@@ -1438,7 +1549,7 @@
           </a:p>
           <a:p>
             <a:r>
-              <a:t>[실행] pwd; source /opt/ros/jazzy/setup.bash; source ~/ros2_curri/agv_ws/install/setup.bash</a:t>
+              <a:t>[실행] pwd; source /opt/ros/jazzy/setup.bash; source ~/ros2_curri/my_agv_ws/install/setup.bash</a:t>
             </a:r>
           </a:p>
           <a:p>
@@ -1613,7 +1724,7 @@
           <a:lstStyle/>
           <a:p>
             <a:r>
-              <a:t>[설명] 도식의 각 상자가 무엇을 만들고 화살표가 어떤 방향으로 데이터를 보내는지 설명한다.</a:t>
+              <a:t>[설명] 이 모듈이 전체 AGV 프로젝트에 추가하는 기능을 먼저 선언한다.</a:t>
             </a:r>
           </a:p>
           <a:p>
@@ -1623,7 +1734,7 @@
           </a:p>
           <a:p>
             <a:r>
-              <a:t>[확인] 교육생이 왼쪽에서 오른쪽(또는 제어 방향)으로 흐름을 말할 수 있다.</a:t>
+              <a:t>[확인] agv.rviz에 RobotModel·TF·LaserScan·Odometry 설정을 저장하고 실제 화면을 확인한다.</a:t>
             </a:r>
           </a:p>
           <a:p>
@@ -1703,7 +1814,7 @@
           <a:lstStyle/>
           <a:p>
             <a:r>
-              <a:t>[설명] 실제 파일 경로를 보여 주고 어떤 package의 책임인지 설명한다.</a:t>
+              <a:t>[설명] 코드를 입력하기 전에 완성 결과와 관찰 기준을 보여 준다.</a:t>
             </a:r>
           </a:p>
           <a:p>
@@ -1713,7 +1824,7 @@
           </a:p>
           <a:p>
             <a:r>
-              <a:t>[확인] 교육생이 파일의 부모 package를 찾을 수 있다.</a:t>
+              <a:t>[확인] 명령·설정과 화면의 topic·frame·결과 이름을 대조합니다.</a:t>
             </a:r>
           </a:p>
           <a:p>
@@ -1793,22 +1904,17 @@
           <a:lstStyle/>
           <a:p>
             <a:r>
-              <a:t>[설명] 같은 display 설정을 다음 센서 모듈에서도 재사용한다.</a:t>
-            </a:r>
-          </a:p>
-          <a:p>
-            <a:r>
-              <a:t>[실행] source ~/ros2_curri/agv_ws/install/setup.bash</a:t>
-            </a:r>
-          </a:p>
-          <a:p>
-            <a:r>
-              <a:t>rviz2 -d ~/ros2_curri/agv_ws/src/agv_description/rviz/agv.rviz</a:t>
-            </a:r>
-          </a:p>
-          <a:p>
-            <a:r>
-              <a:t>[확인] 명령 출력에서 슬라이드의 확인 항목을 찾는다.</a:t>
+              <a:t>[설명] 도식의 각 상자가 무엇을 만들고 화살표가 어떤 방향으로 데이터를 보내는지 설명한다.</a:t>
+            </a:r>
+          </a:p>
+          <a:p>
+            <a:r>
+              <a:t>[실행] 슬라이드의 명령 또는 파일 작성 단계를 진행한다.</a:t>
+            </a:r>
+          </a:p>
+          <a:p>
+            <a:r>
+              <a:t>[확인] 교육생이 왼쪽에서 오른쪽(또는 제어 방향)으로 흐름을 말할 수 있다.</a:t>
             </a:r>
           </a:p>
           <a:p>
@@ -1888,27 +1994,17 @@
           <a:lstStyle/>
           <a:p>
             <a:r>
-              <a:t>[설명] 모델과 frame이 맞아야 scan·image 위치도 맞는다.</a:t>
-            </a:r>
-          </a:p>
-          <a:p>
-            <a:r>
-              <a:t>[실행] Fixed Frame: odom 또는 base_link</a:t>
-            </a:r>
-          </a:p>
-          <a:p>
-            <a:r>
-              <a:t>Add → RobotModel → Description Topic: /robot_description</a:t>
-            </a:r>
-          </a:p>
-          <a:p>
-            <a:r>
-              <a:t>Add → TF</a:t>
-            </a:r>
-          </a:p>
-          <a:p>
-            <a:r>
-              <a:t>[확인] 명령 출력에서 슬라이드의 확인 항목을 찾는다.</a:t>
+              <a:t>[설명] 실제 파일 경로를 보여 주고 어떤 package의 책임인지 설명한다.</a:t>
+            </a:r>
+          </a:p>
+          <a:p>
+            <a:r>
+              <a:t>[실행] 슬라이드의 명령 또는 파일 작성 단계를 진행한다.</a:t>
+            </a:r>
+          </a:p>
+          <a:p>
+            <a:r>
+              <a:t>[확인] 교육생이 파일의 부모 package를 찾을 수 있다.</a:t>
             </a:r>
           </a:p>
           <a:p>
@@ -1988,22 +2084,17 @@
           <a:lstStyle/>
           <a:p>
             <a:r>
-              <a:t>[설명] 각 display는 topic과 message frame_id를 TF로 변환한다.</a:t>
-            </a:r>
-          </a:p>
-          <a:p>
-            <a:r>
-              <a:t>[실행] Add → LaserScan → Topic: /scan</a:t>
-            </a:r>
-          </a:p>
-          <a:p>
-            <a:r>
-              <a:t>Add → Odometry → Topic: /odom</a:t>
-            </a:r>
-          </a:p>
-          <a:p>
-            <a:r>
-              <a:t>File → Save Config As → agv.rviz</a:t>
+              <a:t>[설명] 같은 display 설정을 다음 센서 모듈에서도 재사용한다.</a:t>
+            </a:r>
+          </a:p>
+          <a:p>
+            <a:r>
+              <a:t>[실행] source ~/ros2_curri/my_agv_ws/install/setup.bash</a:t>
+            </a:r>
+          </a:p>
+          <a:p>
+            <a:r>
+              <a:t>rviz2 -d ~/ros2_curri/my_agv_ws/src/agv_description/rviz/agv.rviz</a:t>
             </a:r>
           </a:p>
           <a:p>
@@ -5256,7 +5347,7 @@
               </a:defRPr>
             </a:pPr>
             <a:r>
-              <a:t>이 PPT만 보고 시작 상태 → 파일 작성 → build/run → 검증 → 오류 대응 → checkpoint를 순서대로 수행합니다.</a:t>
+              <a:t>이 PPT에서 폴더 생성 → 빈 파일 열기 → 코드 입력·저장 → build/run → 검증을 직접 반복합니다.</a:t>
             </a:r>
           </a:p>
         </p:txBody>
@@ -5391,7 +5482,7 @@
               </a:defRPr>
             </a:pPr>
             <a:r>
-              <a:t>build → source → run 순서로 실행한다</a:t>
+              <a:t>구현 뒤 실행 2/3: RobotModel과 TF를 먼저 확인한다</a:t>
             </a:r>
           </a:p>
         </p:txBody>
@@ -5430,7 +5521,7 @@
               </a:defRPr>
             </a:pPr>
             <a:r>
-              <a:t>새 파일 또는 수정 파일은 build와 source 뒤에만 실행 이름·설정에 반영됩니다.</a:t>
+              <a:t>방금 직접 만든 파일을 실행·검사하며 다음 파일로 넘어갈 기준을 만듭니다.</a:t>
             </a:r>
           </a:p>
         </p:txBody>
@@ -5566,21 +5657,99 @@
               </a:defRPr>
             </a:pPr>
             <a:r>
-              <a:t>현재 단계 실행    |    현재 폴더 ~/ros2_curri/agv_ws    |    현재 터미널</a:t>
-            </a:r>
-          </a:p>
-        </p:txBody>
-      </p:sp>
-      <p:sp>
-        <p:nvSpPr>
-          <p:cNvPr id="7" name="Rounded Rectangle 6"/>
+              <a:t>현재 단계 실행 2/3    |    현재 폴더 ~/ros2_curri/my_agv_ws    |    현재 터미널</a:t>
+            </a:r>
+          </a:p>
+        </p:txBody>
+      </p:sp>
+      <p:sp>
+        <p:nvSpPr>
+          <p:cNvPr id="7" name="TextBox 6"/>
+          <p:cNvSpPr txBox="1"/>
+          <p:nvPr/>
+        </p:nvSpPr>
+        <p:spPr>
+          <a:xfrm>
+            <a:off x="676656" y="1764792"/>
+            <a:ext cx="1828800" cy="347472"/>
+          </a:xfrm>
+          <a:prstGeom prst="rect">
+            <a:avLst/>
+          </a:prstGeom>
+          <a:noFill/>
+        </p:spPr>
+        <p:txBody>
+          <a:bodyPr wrap="square" lIns="73152" rIns="73152" tIns="36576" bIns="36576">
+            <a:spAutoFit/>
+          </a:bodyPr>
+          <a:lstStyle/>
+          <a:p>
+            <a:pPr algn="l">
+              <a:spcAft>
+                <a:spcPts val="0"/>
+              </a:spcAft>
+              <a:defRPr sz="1800" b="1">
+                <a:solidFill>
+                  <a:srgbClr val="225B9B"/>
+                </a:solidFill>
+                <a:latin typeface="Noto Sans CJK KR"/>
+              </a:defRPr>
+            </a:pPr>
+            <a:r>
+              <a:t>왜 하는가</a:t>
+            </a:r>
+          </a:p>
+        </p:txBody>
+      </p:sp>
+      <p:sp>
+        <p:nvSpPr>
+          <p:cNvPr id="8" name="TextBox 7"/>
+          <p:cNvSpPr txBox="1"/>
+          <p:nvPr/>
+        </p:nvSpPr>
+        <p:spPr>
+          <a:xfrm>
+            <a:off x="676656" y="2103120"/>
+            <a:ext cx="10789920" cy="512064"/>
+          </a:xfrm>
+          <a:prstGeom prst="rect">
+            <a:avLst/>
+          </a:prstGeom>
+          <a:noFill/>
+        </p:spPr>
+        <p:txBody>
+          <a:bodyPr wrap="square" lIns="73152" rIns="73152" tIns="36576" bIns="36576">
+            <a:spAutoFit/>
+          </a:bodyPr>
+          <a:lstStyle/>
+          <a:p>
+            <a:pPr algn="l">
+              <a:spcAft>
+                <a:spcPts val="0"/>
+              </a:spcAft>
+              <a:defRPr sz="2000" b="0">
+                <a:solidFill>
+                  <a:srgbClr val="122C4E"/>
+                </a:solidFill>
+                <a:latin typeface="Noto Sans CJK KR"/>
+              </a:defRPr>
+            </a:pPr>
+            <a:r>
+              <a:t>모델과 frame이 맞아야 scan·image 위치도 맞는다.</a:t>
+            </a:r>
+          </a:p>
+        </p:txBody>
+      </p:sp>
+      <p:sp>
+        <p:nvSpPr>
+          <p:cNvPr id="9" name="Rounded Rectangle 8"/>
           <p:cNvSpPr/>
           <p:nvPr/>
         </p:nvSpPr>
         <p:spPr>
           <a:xfrm>
-            <a:off x="658368" y="1700784"/>
-            <a:ext cx="10972800" cy="3182112"/>
+            <a:off x="676656" y="2871216"/>
+            <a:ext cx="10835640" cy="2331720"/>
           </a:xfrm>
           <a:prstGeom prst="roundRect">
             <a:avLst/>
@@ -5624,25 +5793,29 @@
               </a:defRPr>
             </a:pPr>
             <a:r>
-              <a:t>source ~/ros2_curri/agv_ws/install/setup.bash</a:t>
+              <a:t>Fixed Frame: odom 또는 base_link</a:t>
             </a:r>
             <a:br/>
             <a:r>
-              <a:t>ros2 launch agv_bringup agv_sim.launch.py</a:t>
-            </a:r>
-          </a:p>
-        </p:txBody>
-      </p:sp>
-      <p:sp>
-        <p:nvSpPr>
-          <p:cNvPr id="8" name="TextBox 7"/>
+              <a:t>Add → RobotModel → Description Topic: /robot_description</a:t>
+            </a:r>
+            <a:br/>
+            <a:r>
+              <a:t>Add → TF</a:t>
+            </a:r>
+          </a:p>
+        </p:txBody>
+      </p:sp>
+      <p:sp>
+        <p:nvSpPr>
+          <p:cNvPr id="10" name="TextBox 9"/>
           <p:cNvSpPr txBox="1"/>
           <p:nvPr/>
         </p:nvSpPr>
         <p:spPr>
           <a:xfrm>
-            <a:off x="786384" y="5239512"/>
-            <a:ext cx="1261872" cy="237744"/>
+            <a:off x="768096" y="5468112"/>
+            <a:ext cx="1143000" cy="256032"/>
           </a:xfrm>
           <a:prstGeom prst="rect">
             <a:avLst/>
@@ -5667,21 +5840,21 @@
               </a:defRPr>
             </a:pPr>
             <a:r>
-              <a:t>확인 기준</a:t>
-            </a:r>
-          </a:p>
-        </p:txBody>
-      </p:sp>
-      <p:sp>
-        <p:nvSpPr>
-          <p:cNvPr id="9" name="TextBox 8"/>
+              <a:t>확인</a:t>
+            </a:r>
+          </a:p>
+        </p:txBody>
+      </p:sp>
+      <p:sp>
+        <p:nvSpPr>
+          <p:cNvPr id="11" name="TextBox 10"/>
           <p:cNvSpPr txBox="1"/>
           <p:nvPr/>
         </p:nvSpPr>
         <p:spPr>
           <a:xfrm>
-            <a:off x="786384" y="5532120"/>
-            <a:ext cx="10469880" cy="420624"/>
+            <a:off x="768096" y="5742432"/>
+            <a:ext cx="10561320" cy="347472"/>
           </a:xfrm>
           <a:prstGeom prst="rect">
             <a:avLst/>
@@ -5706,7 +5879,7 @@
               </a:defRPr>
             </a:pPr>
             <a:r>
-              <a:t>agv.rviz에 RobotModel·TF·LaserScan·Odometry 설정을 저장하고 실제 화면을 확인한다.</a:t>
+              <a:t>출력에서 topic·frame·파일 이름 또는 성공 메시지를 찾고, 맞지 않으면 다음 파일로 가지 않습니다.</a:t>
             </a:r>
           </a:p>
         </p:txBody>
@@ -5763,7 +5936,7 @@
               </a:defRPr>
             </a:pPr>
             <a:r>
-              <a:t>정상 결과: 실제 환경에서 확인한 출력</a:t>
+              <a:t>구현 뒤 실행 3/3: 센서 display를 추가한다</a:t>
             </a:r>
           </a:p>
         </p:txBody>
@@ -5802,7 +5975,7 @@
               </a:defRPr>
             </a:pPr>
             <a:r>
-              <a:t>실제 ROS 2 환경의 파일·패키지·구성 검증 로그</a:t>
+              <a:t>방금 직접 만든 파일을 실행·검사하며 다음 파일로 넘어갈 기준을 만듭니다.</a:t>
             </a:r>
           </a:p>
         </p:txBody>
@@ -5885,30 +6058,64 @@
           </a:p>
         </p:txBody>
       </p:sp>
-      <p:pic>
-        <p:nvPicPr>
-          <p:cNvPr id="6" name="Picture 5" descr="validation_terminal.png"/>
-          <p:cNvPicPr>
-            <a:picLocks noChangeAspect="1"/>
-          </p:cNvPicPr>
-          <p:nvPr/>
-        </p:nvPicPr>
-        <p:blipFill>
-          <a:blip r:embed="rId2"/>
-          <a:stretch>
-            <a:fillRect/>
-          </a:stretch>
-        </p:blipFill>
-        <p:spPr>
-          <a:xfrm>
-            <a:off x="790956" y="1884338"/>
-            <a:ext cx="10607040" cy="3738546"/>
-          </a:xfrm>
-          <a:prstGeom prst="rect">
-            <a:avLst/>
-          </a:prstGeom>
-        </p:spPr>
-      </p:pic>
+      <p:sp>
+        <p:nvSpPr>
+          <p:cNvPr id="6" name="Rectangle 5"/>
+          <p:cNvSpPr/>
+          <p:nvPr/>
+        </p:nvSpPr>
+        <p:spPr>
+          <a:xfrm>
+            <a:off x="566928" y="1188720"/>
+            <a:ext cx="11064240" cy="347472"/>
+          </a:xfrm>
+          <a:prstGeom prst="rect">
+            <a:avLst/>
+          </a:prstGeom>
+          <a:solidFill>
+            <a:srgbClr val="F4F7FB"/>
+          </a:solidFill>
+          <a:ln>
+            <a:solidFill>
+              <a:srgbClr val="F4F7FB"/>
+            </a:solidFill>
+          </a:ln>
+        </p:spPr>
+        <p:style>
+          <a:lnRef idx="1">
+            <a:schemeClr val="accent1"/>
+          </a:lnRef>
+          <a:fillRef idx="3">
+            <a:schemeClr val="accent1"/>
+          </a:fillRef>
+          <a:effectRef idx="2">
+            <a:schemeClr val="accent1"/>
+          </a:effectRef>
+          <a:fontRef idx="minor">
+            <a:schemeClr val="lt1"/>
+          </a:fontRef>
+        </p:style>
+        <p:txBody>
+          <a:bodyPr rtlCol="0" anchor="ctr" wrap="square" lIns="73152" rIns="73152" tIns="36576" bIns="36576"/>
+          <a:lstStyle/>
+          <a:p>
+            <a:pPr algn="l">
+              <a:spcAft>
+                <a:spcPts val="0"/>
+              </a:spcAft>
+              <a:defRPr sz="1300" b="1">
+                <a:solidFill>
+                  <a:srgbClr val="122C4E"/>
+                </a:solidFill>
+                <a:latin typeface="Noto Sans CJK KR"/>
+              </a:defRPr>
+            </a:pPr>
+            <a:r>
+              <a:t>현재 단계 실행 3/3    |    현재 폴더 ~/ros2_curri/my_agv_ws    |    현재 터미널</a:t>
+            </a:r>
+          </a:p>
+        </p:txBody>
+      </p:sp>
       <p:sp>
         <p:nvSpPr>
           <p:cNvPr id="7" name="TextBox 6"/>
@@ -5917,8 +6124,8 @@
         </p:nvSpPr>
         <p:spPr>
           <a:xfrm>
-            <a:off x="777240" y="6144768"/>
-            <a:ext cx="10607040" cy="310896"/>
+            <a:off x="676656" y="1764792"/>
+            <a:ext cx="1828800" cy="347472"/>
           </a:xfrm>
           <a:prstGeom prst="rect">
             <a:avLst/>
@@ -5931,11 +6138,155 @@
           </a:bodyPr>
           <a:lstStyle/>
           <a:p>
-            <a:pPr algn="ctr">
-              <a:spcAft>
-                <a:spcPts val="0"/>
-              </a:spcAft>
-              <a:defRPr sz="1100" b="1">
+            <a:pPr algn="l">
+              <a:spcAft>
+                <a:spcPts val="0"/>
+              </a:spcAft>
+              <a:defRPr sz="1800" b="1">
+                <a:solidFill>
+                  <a:srgbClr val="225B9B"/>
+                </a:solidFill>
+                <a:latin typeface="Noto Sans CJK KR"/>
+              </a:defRPr>
+            </a:pPr>
+            <a:r>
+              <a:t>왜 하는가</a:t>
+            </a:r>
+          </a:p>
+        </p:txBody>
+      </p:sp>
+      <p:sp>
+        <p:nvSpPr>
+          <p:cNvPr id="8" name="TextBox 7"/>
+          <p:cNvSpPr txBox="1"/>
+          <p:nvPr/>
+        </p:nvSpPr>
+        <p:spPr>
+          <a:xfrm>
+            <a:off x="676656" y="2103120"/>
+            <a:ext cx="10789920" cy="512064"/>
+          </a:xfrm>
+          <a:prstGeom prst="rect">
+            <a:avLst/>
+          </a:prstGeom>
+          <a:noFill/>
+        </p:spPr>
+        <p:txBody>
+          <a:bodyPr wrap="square" lIns="73152" rIns="73152" tIns="36576" bIns="36576">
+            <a:spAutoFit/>
+          </a:bodyPr>
+          <a:lstStyle/>
+          <a:p>
+            <a:pPr algn="l">
+              <a:spcAft>
+                <a:spcPts val="0"/>
+              </a:spcAft>
+              <a:defRPr sz="2000" b="0">
+                <a:solidFill>
+                  <a:srgbClr val="122C4E"/>
+                </a:solidFill>
+                <a:latin typeface="Noto Sans CJK KR"/>
+              </a:defRPr>
+            </a:pPr>
+            <a:r>
+              <a:t>각 display는 topic과 message frame_id를 TF로 변환한다.</a:t>
+            </a:r>
+          </a:p>
+        </p:txBody>
+      </p:sp>
+      <p:sp>
+        <p:nvSpPr>
+          <p:cNvPr id="9" name="Rounded Rectangle 8"/>
+          <p:cNvSpPr/>
+          <p:nvPr/>
+        </p:nvSpPr>
+        <p:spPr>
+          <a:xfrm>
+            <a:off x="676656" y="2871216"/>
+            <a:ext cx="10835640" cy="2331720"/>
+          </a:xfrm>
+          <a:prstGeom prst="roundRect">
+            <a:avLst/>
+          </a:prstGeom>
+          <a:solidFill>
+            <a:srgbClr val="1D232D"/>
+          </a:solidFill>
+          <a:ln>
+            <a:solidFill>
+              <a:srgbClr val="1D232D"/>
+            </a:solidFill>
+          </a:ln>
+        </p:spPr>
+        <p:style>
+          <a:lnRef idx="1">
+            <a:schemeClr val="accent1"/>
+          </a:lnRef>
+          <a:fillRef idx="3">
+            <a:schemeClr val="accent1"/>
+          </a:fillRef>
+          <a:effectRef idx="2">
+            <a:schemeClr val="accent1"/>
+          </a:effectRef>
+          <a:fontRef idx="minor">
+            <a:schemeClr val="lt1"/>
+          </a:fontRef>
+        </p:style>
+        <p:txBody>
+          <a:bodyPr rtlCol="0" anchor="ctr" wrap="square" lIns="73152" rIns="73152" tIns="36576" bIns="36576"/>
+          <a:lstStyle/>
+          <a:p>
+            <a:pPr algn="l">
+              <a:spcAft>
+                <a:spcPts val="0"/>
+              </a:spcAft>
+              <a:defRPr sz="1600" b="0">
+                <a:solidFill>
+                  <a:srgbClr val="FFFFFF"/>
+                </a:solidFill>
+                <a:latin typeface="DejaVu Sans Mono"/>
+              </a:defRPr>
+            </a:pPr>
+            <a:r>
+              <a:t>Add → LaserScan → Topic: /scan</a:t>
+            </a:r>
+            <a:br/>
+            <a:r>
+              <a:t>Add → Odometry → Topic: /odom</a:t>
+            </a:r>
+            <a:br/>
+            <a:r>
+              <a:t>File → Save Config As → agv.rviz</a:t>
+            </a:r>
+          </a:p>
+        </p:txBody>
+      </p:sp>
+      <p:sp>
+        <p:nvSpPr>
+          <p:cNvPr id="10" name="TextBox 9"/>
+          <p:cNvSpPr txBox="1"/>
+          <p:nvPr/>
+        </p:nvSpPr>
+        <p:spPr>
+          <a:xfrm>
+            <a:off x="768096" y="5468112"/>
+            <a:ext cx="1143000" cy="256032"/>
+          </a:xfrm>
+          <a:prstGeom prst="rect">
+            <a:avLst/>
+          </a:prstGeom>
+          <a:noFill/>
+        </p:spPr>
+        <p:txBody>
+          <a:bodyPr wrap="square" lIns="73152" rIns="73152" tIns="36576" bIns="36576">
+            <a:spAutoFit/>
+          </a:bodyPr>
+          <a:lstStyle/>
+          <a:p>
+            <a:pPr algn="l">
+              <a:spcAft>
+                <a:spcPts val="0"/>
+              </a:spcAft>
+              <a:defRPr sz="1800" b="1">
                 <a:solidFill>
                   <a:srgbClr val="2A8B5A"/>
                 </a:solidFill>
@@ -5943,7 +6294,46 @@
               </a:defRPr>
             </a:pPr>
             <a:r>
-              <a:t>화면에서 확인: ① 명령/설정  ② 정상 출력 또는 화면  ③ 다음 검증 명령으로 재확인</a:t>
+              <a:t>확인</a:t>
+            </a:r>
+          </a:p>
+        </p:txBody>
+      </p:sp>
+      <p:sp>
+        <p:nvSpPr>
+          <p:cNvPr id="11" name="TextBox 10"/>
+          <p:cNvSpPr txBox="1"/>
+          <p:nvPr/>
+        </p:nvSpPr>
+        <p:spPr>
+          <a:xfrm>
+            <a:off x="768096" y="5742432"/>
+            <a:ext cx="10561320" cy="347472"/>
+          </a:xfrm>
+          <a:prstGeom prst="rect">
+            <a:avLst/>
+          </a:prstGeom>
+          <a:noFill/>
+        </p:spPr>
+        <p:txBody>
+          <a:bodyPr wrap="square" lIns="73152" rIns="73152" tIns="36576" bIns="36576">
+            <a:spAutoFit/>
+          </a:bodyPr>
+          <a:lstStyle/>
+          <a:p>
+            <a:pPr algn="l">
+              <a:spcAft>
+                <a:spcPts val="0"/>
+              </a:spcAft>
+              <a:defRPr sz="1800" b="0">
+                <a:solidFill>
+                  <a:srgbClr val="122C4E"/>
+                </a:solidFill>
+                <a:latin typeface="Noto Sans CJK KR"/>
+              </a:defRPr>
+            </a:pPr>
+            <a:r>
+              <a:t>출력에서 topic·frame·파일 이름 또는 성공 메시지를 찾고, 맞지 않으면 다음 파일로 가지 않습니다.</a:t>
             </a:r>
           </a:p>
         </p:txBody>
@@ -6000,7 +6390,7 @@
               </a:defRPr>
             </a:pPr>
             <a:r>
-              <a:t>정상 결과: 실제 환경에서 확인한 출력</a:t>
+              <a:t>build → source → run 순서로 실행한다</a:t>
             </a:r>
           </a:p>
         </p:txBody>
@@ -6039,7 +6429,7 @@
               </a:defRPr>
             </a:pPr>
             <a:r>
-              <a:t>실제 RViz2: RobotModel·TF·Odometry·LaserScan·Path·Marker display를 함께 연 상태</a:t>
+              <a:t>새 파일 또는 수정 파일은 build와 source 뒤에만 실행 이름·설정에 반영됩니다.</a:t>
             </a:r>
           </a:p>
         </p:txBody>
@@ -6122,40 +6512,136 @@
           </a:p>
         </p:txBody>
       </p:sp>
-      <p:pic>
-        <p:nvPicPr>
-          <p:cNvPr id="6" name="Picture 5" descr="01_rviz_integrated_actual.png"/>
-          <p:cNvPicPr>
-            <a:picLocks noChangeAspect="1"/>
-          </p:cNvPicPr>
-          <p:nvPr/>
-        </p:nvPicPr>
-        <p:blipFill>
-          <a:blip r:embed="rId2"/>
-          <a:stretch>
-            <a:fillRect/>
-          </a:stretch>
-        </p:blipFill>
-        <p:spPr>
-          <a:xfrm>
-            <a:off x="2971409" y="1353312"/>
-            <a:ext cx="6246133" cy="4800600"/>
-          </a:xfrm>
-          <a:prstGeom prst="rect">
-            <a:avLst/>
-          </a:prstGeom>
-        </p:spPr>
-      </p:pic>
-      <p:sp>
-        <p:nvSpPr>
-          <p:cNvPr id="7" name="TextBox 6"/>
+      <p:sp>
+        <p:nvSpPr>
+          <p:cNvPr id="6" name="Rectangle 5"/>
+          <p:cNvSpPr/>
+          <p:nvPr/>
+        </p:nvSpPr>
+        <p:spPr>
+          <a:xfrm>
+            <a:off x="566928" y="1188720"/>
+            <a:ext cx="11064240" cy="347472"/>
+          </a:xfrm>
+          <a:prstGeom prst="rect">
+            <a:avLst/>
+          </a:prstGeom>
+          <a:solidFill>
+            <a:srgbClr val="F4F7FB"/>
+          </a:solidFill>
+          <a:ln>
+            <a:solidFill>
+              <a:srgbClr val="F4F7FB"/>
+            </a:solidFill>
+          </a:ln>
+        </p:spPr>
+        <p:style>
+          <a:lnRef idx="1">
+            <a:schemeClr val="accent1"/>
+          </a:lnRef>
+          <a:fillRef idx="3">
+            <a:schemeClr val="accent1"/>
+          </a:fillRef>
+          <a:effectRef idx="2">
+            <a:schemeClr val="accent1"/>
+          </a:effectRef>
+          <a:fontRef idx="minor">
+            <a:schemeClr val="lt1"/>
+          </a:fontRef>
+        </p:style>
+        <p:txBody>
+          <a:bodyPr rtlCol="0" anchor="ctr" wrap="square" lIns="73152" rIns="73152" tIns="36576" bIns="36576"/>
+          <a:lstStyle/>
+          <a:p>
+            <a:pPr algn="l">
+              <a:spcAft>
+                <a:spcPts val="0"/>
+              </a:spcAft>
+              <a:defRPr sz="1300" b="1">
+                <a:solidFill>
+                  <a:srgbClr val="122C4E"/>
+                </a:solidFill>
+                <a:latin typeface="Noto Sans CJK KR"/>
+              </a:defRPr>
+            </a:pPr>
+            <a:r>
+              <a:t>현재 단계 실행    |    현재 폴더 ~/ros2_curri/my_agv_ws    |    현재 터미널</a:t>
+            </a:r>
+          </a:p>
+        </p:txBody>
+      </p:sp>
+      <p:sp>
+        <p:nvSpPr>
+          <p:cNvPr id="7" name="Rounded Rectangle 6"/>
+          <p:cNvSpPr/>
+          <p:nvPr/>
+        </p:nvSpPr>
+        <p:spPr>
+          <a:xfrm>
+            <a:off x="658368" y="1700784"/>
+            <a:ext cx="10972800" cy="3182112"/>
+          </a:xfrm>
+          <a:prstGeom prst="roundRect">
+            <a:avLst/>
+          </a:prstGeom>
+          <a:solidFill>
+            <a:srgbClr val="1D232D"/>
+          </a:solidFill>
+          <a:ln>
+            <a:solidFill>
+              <a:srgbClr val="1D232D"/>
+            </a:solidFill>
+          </a:ln>
+        </p:spPr>
+        <p:style>
+          <a:lnRef idx="1">
+            <a:schemeClr val="accent1"/>
+          </a:lnRef>
+          <a:fillRef idx="3">
+            <a:schemeClr val="accent1"/>
+          </a:fillRef>
+          <a:effectRef idx="2">
+            <a:schemeClr val="accent1"/>
+          </a:effectRef>
+          <a:fontRef idx="minor">
+            <a:schemeClr val="lt1"/>
+          </a:fontRef>
+        </p:style>
+        <p:txBody>
+          <a:bodyPr rtlCol="0" anchor="ctr" wrap="square" lIns="73152" rIns="73152" tIns="36576" bIns="36576"/>
+          <a:lstStyle/>
+          <a:p>
+            <a:pPr algn="l">
+              <a:spcAft>
+                <a:spcPts val="0"/>
+              </a:spcAft>
+              <a:defRPr sz="1600" b="0">
+                <a:solidFill>
+                  <a:srgbClr val="FFFFFF"/>
+                </a:solidFill>
+                <a:latin typeface="DejaVu Sans Mono"/>
+              </a:defRPr>
+            </a:pPr>
+            <a:r>
+              <a:t>source ~/ros2_curri/my_agv_ws/install/setup.bash</a:t>
+            </a:r>
+            <a:br/>
+            <a:r>
+              <a:t>ros2 launch agv_bringup agv_sim.launch.py</a:t>
+            </a:r>
+          </a:p>
+        </p:txBody>
+      </p:sp>
+      <p:sp>
+        <p:nvSpPr>
+          <p:cNvPr id="8" name="TextBox 7"/>
           <p:cNvSpPr txBox="1"/>
           <p:nvPr/>
         </p:nvSpPr>
         <p:spPr>
           <a:xfrm>
-            <a:off x="777240" y="6144768"/>
-            <a:ext cx="10607040" cy="310896"/>
+            <a:off x="786384" y="5239512"/>
+            <a:ext cx="1261872" cy="237744"/>
           </a:xfrm>
           <a:prstGeom prst="rect">
             <a:avLst/>
@@ -6168,11 +6654,11 @@
           </a:bodyPr>
           <a:lstStyle/>
           <a:p>
-            <a:pPr algn="ctr">
-              <a:spcAft>
-                <a:spcPts val="0"/>
-              </a:spcAft>
-              <a:defRPr sz="1100" b="1">
+            <a:pPr algn="l">
+              <a:spcAft>
+                <a:spcPts val="0"/>
+              </a:spcAft>
+              <a:defRPr sz="1800" b="1">
                 <a:solidFill>
                   <a:srgbClr val="2A8B5A"/>
                 </a:solidFill>
@@ -6180,7 +6666,46 @@
               </a:defRPr>
             </a:pPr>
             <a:r>
-              <a:t>화면에서 확인: 명령·설정과 화면의 topic·frame·결과 이름을 대조합니다.</a:t>
+              <a:t>확인 기준</a:t>
+            </a:r>
+          </a:p>
+        </p:txBody>
+      </p:sp>
+      <p:sp>
+        <p:nvSpPr>
+          <p:cNvPr id="9" name="TextBox 8"/>
+          <p:cNvSpPr txBox="1"/>
+          <p:nvPr/>
+        </p:nvSpPr>
+        <p:spPr>
+          <a:xfrm>
+            <a:off x="786384" y="5532120"/>
+            <a:ext cx="10469880" cy="420624"/>
+          </a:xfrm>
+          <a:prstGeom prst="rect">
+            <a:avLst/>
+          </a:prstGeom>
+          <a:noFill/>
+        </p:spPr>
+        <p:txBody>
+          <a:bodyPr wrap="square" lIns="73152" rIns="73152" tIns="36576" bIns="36576">
+            <a:spAutoFit/>
+          </a:bodyPr>
+          <a:lstStyle/>
+          <a:p>
+            <a:pPr algn="l">
+              <a:spcAft>
+                <a:spcPts val="0"/>
+              </a:spcAft>
+              <a:defRPr sz="1800" b="0">
+                <a:solidFill>
+                  <a:srgbClr val="122C4E"/>
+                </a:solidFill>
+                <a:latin typeface="Noto Sans CJK KR"/>
+              </a:defRPr>
+            </a:pPr>
+            <a:r>
+              <a:t>agv.rviz에 RobotModel·TF·LaserScan·Odometry 설정을 저장하고 실제 화면을 확인한다.</a:t>
             </a:r>
           </a:p>
         </p:txBody>
@@ -6237,7 +6762,7 @@
               </a:defRPr>
             </a:pPr>
             <a:r>
-              <a:t>객관적 검증 명령으로 완료를 확인한다</a:t>
+              <a:t>정상 결과: 실제 환경에서 확인한 출력</a:t>
             </a:r>
           </a:p>
         </p:txBody>
@@ -6276,7 +6801,7 @@
               </a:defRPr>
             </a:pPr>
             <a:r>
-              <a:t>화면만 보지 말고 topic·frame·파일·parameter를 다시 확인합니다.</a:t>
+              <a:t>실제 ROS 2 환경의 파일·패키지·구성 검증 로그</a:t>
             </a:r>
           </a:p>
         </p:txBody>
@@ -6359,210 +6884,40 @@
           </a:p>
         </p:txBody>
       </p:sp>
-      <p:sp>
-        <p:nvSpPr>
-          <p:cNvPr id="6" name="Rectangle 5"/>
-          <p:cNvSpPr/>
-          <p:nvPr/>
-        </p:nvSpPr>
-        <p:spPr>
-          <a:xfrm>
-            <a:off x="566928" y="1188720"/>
-            <a:ext cx="11064240" cy="347472"/>
-          </a:xfrm>
-          <a:prstGeom prst="rect">
-            <a:avLst/>
-          </a:prstGeom>
-          <a:solidFill>
-            <a:srgbClr val="F4F7FB"/>
-          </a:solidFill>
-          <a:ln>
-            <a:solidFill>
-              <a:srgbClr val="F4F7FB"/>
-            </a:solidFill>
-          </a:ln>
-        </p:spPr>
-        <p:style>
-          <a:lnRef idx="1">
-            <a:schemeClr val="accent1"/>
-          </a:lnRef>
-          <a:fillRef idx="3">
-            <a:schemeClr val="accent1"/>
-          </a:fillRef>
-          <a:effectRef idx="2">
-            <a:schemeClr val="accent1"/>
-          </a:effectRef>
-          <a:fontRef idx="minor">
-            <a:schemeClr val="lt1"/>
-          </a:fontRef>
-        </p:style>
-        <p:txBody>
-          <a:bodyPr rtlCol="0" anchor="ctr" wrap="square" lIns="73152" rIns="73152" tIns="36576" bIns="36576"/>
-          <a:lstStyle/>
-          <a:p>
-            <a:pPr algn="l">
-              <a:spcAft>
-                <a:spcPts val="0"/>
-              </a:spcAft>
-              <a:defRPr sz="1300" b="1">
-                <a:solidFill>
-                  <a:srgbClr val="122C4E"/>
-                </a:solidFill>
-                <a:latin typeface="Noto Sans CJK KR"/>
-              </a:defRPr>
-            </a:pPr>
-            <a:r>
-              <a:t>현재 단계 검증    |    현재 폴더 ~/ros2_curri/agv_ws    |    현재 터미널</a:t>
-            </a:r>
-          </a:p>
-        </p:txBody>
-      </p:sp>
-      <p:sp>
-        <p:nvSpPr>
-          <p:cNvPr id="7" name="Rounded Rectangle 6"/>
-          <p:cNvSpPr/>
-          <p:nvPr/>
-        </p:nvSpPr>
-        <p:spPr>
-          <a:xfrm>
-            <a:off x="658368" y="1755648"/>
-            <a:ext cx="10972800" cy="2148840"/>
-          </a:xfrm>
-          <a:prstGeom prst="roundRect">
-            <a:avLst/>
-          </a:prstGeom>
-          <a:solidFill>
-            <a:srgbClr val="1D232D"/>
-          </a:solidFill>
-          <a:ln>
-            <a:solidFill>
-              <a:srgbClr val="1D232D"/>
-            </a:solidFill>
-          </a:ln>
-        </p:spPr>
-        <p:style>
-          <a:lnRef idx="1">
-            <a:schemeClr val="accent1"/>
-          </a:lnRef>
-          <a:fillRef idx="3">
-            <a:schemeClr val="accent1"/>
-          </a:fillRef>
-          <a:effectRef idx="2">
-            <a:schemeClr val="accent1"/>
-          </a:effectRef>
-          <a:fontRef idx="minor">
-            <a:schemeClr val="lt1"/>
-          </a:fontRef>
-        </p:style>
-        <p:txBody>
-          <a:bodyPr rtlCol="0" anchor="ctr" wrap="square" lIns="73152" rIns="73152" tIns="36576" bIns="36576"/>
-          <a:lstStyle/>
-          <a:p>
-            <a:pPr algn="l">
-              <a:spcAft>
-                <a:spcPts val="0"/>
-              </a:spcAft>
-              <a:defRPr sz="1600" b="0">
-                <a:solidFill>
-                  <a:srgbClr val="FFFFFF"/>
-                </a:solidFill>
-                <a:latin typeface="DejaVu Sans Mono"/>
-              </a:defRPr>
-            </a:pPr>
-            <a:r>
-              <a:t>ros2 topic info /robot_description</a:t>
-            </a:r>
-            <a:br/>
-            <a:r>
-              <a:t>ros2 topic echo /scan --once</a:t>
-            </a:r>
-            <a:br/>
-            <a:r>
-              <a:t>ros2 topic echo /odom --once</a:t>
-            </a:r>
-          </a:p>
-        </p:txBody>
-      </p:sp>
-      <p:sp>
-        <p:nvSpPr>
-          <p:cNvPr id="8" name="Rounded Rectangle 7"/>
-          <p:cNvSpPr/>
-          <p:nvPr/>
-        </p:nvSpPr>
-        <p:spPr>
-          <a:xfrm>
-            <a:off x="658368" y="4206240"/>
-            <a:ext cx="10972800" cy="1554480"/>
-          </a:xfrm>
-          <a:prstGeom prst="roundRect">
-            <a:avLst/>
-          </a:prstGeom>
-          <a:solidFill>
-            <a:srgbClr val="F4F7FB"/>
-          </a:solidFill>
-          <a:ln>
-            <a:solidFill>
-              <a:srgbClr val="D1DFD5"/>
-            </a:solidFill>
-          </a:ln>
-        </p:spPr>
-        <p:style>
-          <a:lnRef idx="1">
-            <a:schemeClr val="accent1"/>
-          </a:lnRef>
-          <a:fillRef idx="3">
-            <a:schemeClr val="accent1"/>
-          </a:fillRef>
-          <a:effectRef idx="2">
-            <a:schemeClr val="accent1"/>
-          </a:effectRef>
-          <a:fontRef idx="minor">
-            <a:schemeClr val="lt1"/>
-          </a:fontRef>
-        </p:style>
-        <p:txBody>
-          <a:bodyPr rtlCol="0" anchor="ctr" wrap="square" lIns="73152" rIns="73152" tIns="36576" bIns="36576"/>
-          <a:lstStyle/>
-          <a:p>
-            <a:pPr algn="l">
-              <a:spcAft>
-                <a:spcPts val="0"/>
-              </a:spcAft>
-              <a:defRPr sz="1800" b="1">
-                <a:solidFill>
-                  <a:srgbClr val="2A8B5A"/>
-                </a:solidFill>
-                <a:latin typeface="Noto Sans CJK KR"/>
-              </a:defRPr>
-            </a:pPr>
-            <a:r>
-              <a:t>완료 체크</a:t>
-            </a:r>
-            <a:br/>
-            <a:r>
-              <a:t>□ 명령이 오류 없이 실행된다.</a:t>
-            </a:r>
-            <a:br/>
-            <a:r>
-              <a:t>□ 기대한 파일·topic·frame·parameter 이름이 보인다.</a:t>
-            </a:r>
-            <a:br/>
-            <a:r>
-              <a:t>□ 값의 단위와 방향을 한 문장으로 설명할 수 있다.</a:t>
-            </a:r>
-          </a:p>
-        </p:txBody>
-      </p:sp>
-      <p:sp>
-        <p:nvSpPr>
-          <p:cNvPr id="9" name="TextBox 8"/>
+      <p:pic>
+        <p:nvPicPr>
+          <p:cNvPr id="6" name="Picture 5" descr="validation_terminal.png"/>
+          <p:cNvPicPr>
+            <a:picLocks noChangeAspect="1"/>
+          </p:cNvPicPr>
+          <p:nvPr/>
+        </p:nvPicPr>
+        <p:blipFill>
+          <a:blip r:embed="rId2"/>
+          <a:stretch>
+            <a:fillRect/>
+          </a:stretch>
+        </p:blipFill>
+        <p:spPr>
+          <a:xfrm>
+            <a:off x="790956" y="1884338"/>
+            <a:ext cx="10607040" cy="3738546"/>
+          </a:xfrm>
+          <a:prstGeom prst="rect">
+            <a:avLst/>
+          </a:prstGeom>
+        </p:spPr>
+      </p:pic>
+      <p:sp>
+        <p:nvSpPr>
+          <p:cNvPr id="7" name="TextBox 6"/>
           <p:cNvSpPr txBox="1"/>
           <p:nvPr/>
         </p:nvSpPr>
         <p:spPr>
           <a:xfrm>
-            <a:off x="731520" y="5989320"/>
-            <a:ext cx="10789920" cy="237744"/>
+            <a:off x="777240" y="6144768"/>
+            <a:ext cx="10607040" cy="310896"/>
           </a:xfrm>
           <a:prstGeom prst="rect">
             <a:avLst/>
@@ -6575,19 +6930,19 @@
           </a:bodyPr>
           <a:lstStyle/>
           <a:p>
-            <a:pPr algn="l">
-              <a:spcAft>
-                <a:spcPts val="0"/>
-              </a:spcAft>
-              <a:defRPr sz="1500" b="1">
-                <a:solidFill>
-                  <a:srgbClr val="122C4E"/>
-                </a:solidFill>
-                <a:latin typeface="Noto Sans CJK KR"/>
-              </a:defRPr>
-            </a:pPr>
-            <a:r>
-              <a:t>완료 조건: agv.rviz에 RobotModel·TF·LaserScan·Odometry 설정을 저장하고 실제 화면을 확인한다.</a:t>
+            <a:pPr algn="ctr">
+              <a:spcAft>
+                <a:spcPts val="0"/>
+              </a:spcAft>
+              <a:defRPr sz="1100" b="1">
+                <a:solidFill>
+                  <a:srgbClr val="2A8B5A"/>
+                </a:solidFill>
+                <a:latin typeface="Noto Sans CJK KR"/>
+              </a:defRPr>
+            </a:pPr>
+            <a:r>
+              <a:t>화면에서 확인: ① 명령/설정  ② 정상 출력 또는 화면  ③ 다음 검증 명령으로 재확인</a:t>
             </a:r>
           </a:p>
         </p:txBody>
@@ -6644,7 +6999,7 @@
               </a:defRPr>
             </a:pPr>
             <a:r>
-              <a:t>막히면: 증상 → 우선 확인 → 재검증</a:t>
+              <a:t>객관적 검증 명령으로 완료를 확인한다</a:t>
             </a:r>
           </a:p>
         </p:txBody>
@@ -6683,7 +7038,7 @@
               </a:defRPr>
             </a:pPr>
             <a:r>
-              <a:t>오류 메시지를 숨기지 않고 같은 순서로 점검합니다.</a:t>
+              <a:t>화면만 보지 말고 topic·frame·파일·parameter를 다시 확인합니다.</a:t>
             </a:r>
           </a:p>
         </p:txBody>
@@ -6819,7 +7174,7 @@
               </a:defRPr>
             </a:pPr>
             <a:r>
-              <a:t>현재 단계 오류 대응    |    현재 폴더 ~/ros2_curri/agv_ws    |    현재 터미널</a:t>
+              <a:t>현재 단계 검증    |    현재 폴더 ~/ros2_curri/my_agv_ws    |    현재 터미널</a:t>
             </a:r>
           </a:p>
         </p:txBody>
@@ -6832,18 +7187,18 @@
         </p:nvSpPr>
         <p:spPr>
           <a:xfrm>
-            <a:off x="694944" y="1755648"/>
-            <a:ext cx="10972800" cy="1115568"/>
+            <a:off x="658368" y="1755648"/>
+            <a:ext cx="10972800" cy="2148840"/>
           </a:xfrm>
           <a:prstGeom prst="roundRect">
             <a:avLst/>
           </a:prstGeom>
           <a:solidFill>
-            <a:srgbClr val="FFF7F4"/>
+            <a:srgbClr val="1D232D"/>
           </a:solidFill>
           <a:ln>
             <a:solidFill>
-              <a:srgbClr val="EDBEB4"/>
+              <a:srgbClr val="1D232D"/>
             </a:solidFill>
           </a:ln>
         </p:spPr>
@@ -6862,115 +7217,54 @@
           </a:fontRef>
         </p:style>
         <p:txBody>
-          <a:bodyPr rtlCol="0" anchor="ctr"/>
-          <a:lstStyle/>
-          <a:p>
-            <a:pPr algn="ctr"/>
-          </a:p>
-        </p:txBody>
-      </p:sp>
-      <p:sp>
-        <p:nvSpPr>
-          <p:cNvPr id="8" name="TextBox 7"/>
-          <p:cNvSpPr txBox="1"/>
-          <p:nvPr/>
-        </p:nvSpPr>
-        <p:spPr>
-          <a:xfrm>
-            <a:off x="896112" y="1901952"/>
-            <a:ext cx="2926080" cy="274320"/>
-          </a:xfrm>
-          <a:prstGeom prst="rect">
-            <a:avLst/>
-          </a:prstGeom>
-          <a:noFill/>
-        </p:spPr>
-        <p:txBody>
-          <a:bodyPr wrap="square" lIns="73152" rIns="73152" tIns="36576" bIns="36576">
-            <a:spAutoFit/>
-          </a:bodyPr>
+          <a:bodyPr rtlCol="0" anchor="ctr" wrap="square" lIns="73152" rIns="73152" tIns="36576" bIns="36576"/>
           <a:lstStyle/>
           <a:p>
             <a:pPr algn="l">
               <a:spcAft>
                 <a:spcPts val="0"/>
               </a:spcAft>
-              <a:defRPr sz="1800" b="1">
-                <a:solidFill>
-                  <a:srgbClr val="BE3B3B"/>
-                </a:solidFill>
-                <a:latin typeface="Noto Sans CJK KR"/>
-              </a:defRPr>
-            </a:pPr>
-            <a:r>
-              <a:t>증상 1: RobotModel이 안 보임</a:t>
-            </a:r>
-          </a:p>
-        </p:txBody>
-      </p:sp>
-      <p:sp>
-        <p:nvSpPr>
-          <p:cNvPr id="9" name="TextBox 8"/>
-          <p:cNvSpPr txBox="1"/>
-          <p:nvPr/>
-        </p:nvSpPr>
-        <p:spPr>
-          <a:xfrm>
-            <a:off x="3794760" y="1883664"/>
-            <a:ext cx="7543800" cy="621792"/>
-          </a:xfrm>
-          <a:prstGeom prst="rect">
-            <a:avLst/>
-          </a:prstGeom>
-          <a:noFill/>
-        </p:spPr>
-        <p:txBody>
-          <a:bodyPr wrap="square" lIns="73152" rIns="73152" tIns="36576" bIns="36576">
-            <a:spAutoFit/>
-          </a:bodyPr>
-          <a:lstStyle/>
-          <a:p>
-            <a:pPr algn="l">
-              <a:spcAft>
-                <a:spcPts val="0"/>
-              </a:spcAft>
               <a:defRPr sz="1600" b="0">
                 <a:solidFill>
-                  <a:srgbClr val="122C4E"/>
-                </a:solidFill>
-                <a:latin typeface="Noto Sans CJK KR"/>
-              </a:defRPr>
-            </a:pPr>
-            <a:r>
-              <a:t>우선 확인: robot_description·Fixed Frame·TF를 순서대로 확인한다.</a:t>
+                  <a:srgbClr val="FFFFFF"/>
+                </a:solidFill>
+                <a:latin typeface="DejaVu Sans Mono"/>
+              </a:defRPr>
+            </a:pPr>
+            <a:r>
+              <a:t>ros2 topic info /robot_description</a:t>
             </a:r>
             <a:br/>
             <a:r>
-              <a:t>수정 후: ros2 topic info /robot_description</a:t>
-            </a:r>
-          </a:p>
-        </p:txBody>
-      </p:sp>
-      <p:sp>
-        <p:nvSpPr>
-          <p:cNvPr id="10" name="Rounded Rectangle 9"/>
+              <a:t>ros2 topic echo /scan --once</a:t>
+            </a:r>
+            <a:br/>
+            <a:r>
+              <a:t>ros2 topic echo /odom --once</a:t>
+            </a:r>
+          </a:p>
+        </p:txBody>
+      </p:sp>
+      <p:sp>
+        <p:nvSpPr>
+          <p:cNvPr id="8" name="Rounded Rectangle 7"/>
           <p:cNvSpPr/>
           <p:nvPr/>
         </p:nvSpPr>
         <p:spPr>
           <a:xfrm>
-            <a:off x="694944" y="3172968"/>
-            <a:ext cx="10972800" cy="1115568"/>
+            <a:off x="658368" y="4206240"/>
+            <a:ext cx="10972800" cy="1554480"/>
           </a:xfrm>
           <a:prstGeom prst="roundRect">
             <a:avLst/>
           </a:prstGeom>
           <a:solidFill>
-            <a:srgbClr val="FFF7F4"/>
+            <a:srgbClr val="F4F7FB"/>
           </a:solidFill>
           <a:ln>
             <a:solidFill>
-              <a:srgbClr val="EDBEB4"/>
+              <a:srgbClr val="D1DFD5"/>
             </a:solidFill>
           </a:ln>
         </p:spPr>
@@ -6989,23 +7283,48 @@
           </a:fontRef>
         </p:style>
         <p:txBody>
-          <a:bodyPr rtlCol="0" anchor="ctr"/>
-          <a:lstStyle/>
-          <a:p>
-            <a:pPr algn="ctr"/>
-          </a:p>
-        </p:txBody>
-      </p:sp>
-      <p:sp>
-        <p:nvSpPr>
-          <p:cNvPr id="11" name="TextBox 10"/>
+          <a:bodyPr rtlCol="0" anchor="ctr" wrap="square" lIns="73152" rIns="73152" tIns="36576" bIns="36576"/>
+          <a:lstStyle/>
+          <a:p>
+            <a:pPr algn="l">
+              <a:spcAft>
+                <a:spcPts val="0"/>
+              </a:spcAft>
+              <a:defRPr sz="1800" b="1">
+                <a:solidFill>
+                  <a:srgbClr val="2A8B5A"/>
+                </a:solidFill>
+                <a:latin typeface="Noto Sans CJK KR"/>
+              </a:defRPr>
+            </a:pPr>
+            <a:r>
+              <a:t>완료 체크</a:t>
+            </a:r>
+            <a:br/>
+            <a:r>
+              <a:t>□ 명령이 오류 없이 실행된다.</a:t>
+            </a:r>
+            <a:br/>
+            <a:r>
+              <a:t>□ 기대한 파일·topic·frame·parameter 이름이 보인다.</a:t>
+            </a:r>
+            <a:br/>
+            <a:r>
+              <a:t>□ 값의 단위와 방향을 한 문장으로 설명할 수 있다.</a:t>
+            </a:r>
+          </a:p>
+        </p:txBody>
+      </p:sp>
+      <p:sp>
+        <p:nvSpPr>
+          <p:cNvPr id="9" name="TextBox 8"/>
           <p:cNvSpPr txBox="1"/>
           <p:nvPr/>
         </p:nvSpPr>
         <p:spPr>
           <a:xfrm>
-            <a:off x="896112" y="3319272"/>
-            <a:ext cx="2926080" cy="274320"/>
+            <a:off x="731520" y="5989320"/>
+            <a:ext cx="10789920" cy="237744"/>
           </a:xfrm>
           <a:prstGeom prst="rect">
             <a:avLst/>
@@ -7022,46 +7341,7 @@
               <a:spcAft>
                 <a:spcPts val="0"/>
               </a:spcAft>
-              <a:defRPr sz="1800" b="1">
-                <a:solidFill>
-                  <a:srgbClr val="BE3B3B"/>
-                </a:solidFill>
-                <a:latin typeface="Noto Sans CJK KR"/>
-              </a:defRPr>
-            </a:pPr>
-            <a:r>
-              <a:t>증상 2: LaserScan 위치가 이상함</a:t>
-            </a:r>
-          </a:p>
-        </p:txBody>
-      </p:sp>
-      <p:sp>
-        <p:nvSpPr>
-          <p:cNvPr id="12" name="TextBox 11"/>
-          <p:cNvSpPr txBox="1"/>
-          <p:nvPr/>
-        </p:nvSpPr>
-        <p:spPr>
-          <a:xfrm>
-            <a:off x="3794760" y="3300984"/>
-            <a:ext cx="7543800" cy="621792"/>
-          </a:xfrm>
-          <a:prstGeom prst="rect">
-            <a:avLst/>
-          </a:prstGeom>
-          <a:noFill/>
-        </p:spPr>
-        <p:txBody>
-          <a:bodyPr wrap="square" lIns="73152" rIns="73152" tIns="36576" bIns="36576">
-            <a:spAutoFit/>
-          </a:bodyPr>
-          <a:lstStyle/>
-          <a:p>
-            <a:pPr algn="l">
-              <a:spcAft>
-                <a:spcPts val="0"/>
-              </a:spcAft>
-              <a:defRPr sz="1600" b="0">
+              <a:defRPr sz="1500" b="1">
                 <a:solidFill>
                   <a:srgbClr val="122C4E"/>
                 </a:solidFill>
@@ -7069,50 +7349,7 @@
               </a:defRPr>
             </a:pPr>
             <a:r>
-              <a:t>우선 확인: scan header.frame_id와 lidar TF를 확인한다.</a:t>
-            </a:r>
-            <a:br/>
-            <a:r>
-              <a:t>수정 후: ros2 topic info /robot_description</a:t>
-            </a:r>
-          </a:p>
-        </p:txBody>
-      </p:sp>
-      <p:sp>
-        <p:nvSpPr>
-          <p:cNvPr id="13" name="TextBox 12"/>
-          <p:cNvSpPr txBox="1"/>
-          <p:nvPr/>
-        </p:nvSpPr>
-        <p:spPr>
-          <a:xfrm>
-            <a:off x="822960" y="5102352"/>
-            <a:ext cx="10607040" cy="402336"/>
-          </a:xfrm>
-          <a:prstGeom prst="rect">
-            <a:avLst/>
-          </a:prstGeom>
-          <a:noFill/>
-        </p:spPr>
-        <p:txBody>
-          <a:bodyPr wrap="square" lIns="73152" rIns="73152" tIns="36576" bIns="36576">
-            <a:spAutoFit/>
-          </a:bodyPr>
-          <a:lstStyle/>
-          <a:p>
-            <a:pPr algn="ctr">
-              <a:spcAft>
-                <a:spcPts val="0"/>
-              </a:spcAft>
-              <a:defRPr sz="1800" b="1">
-                <a:solidFill>
-                  <a:srgbClr val="DB7E22"/>
-                </a:solidFill>
-                <a:latin typeface="Noto Sans CJK KR"/>
-              </a:defRPr>
-            </a:pPr>
-            <a:r>
-              <a:t>공통 순서: ① 현재 폴더 ② source ③ 파일 경로 ④ 이름/타입/단위 ⑤ build·source 후 재실행</a:t>
+              <a:t>완료 조건: agv.rviz에 RobotModel·TF·LaserScan·Odometry 설정을 저장하고 실제 화면을 확인한다.</a:t>
             </a:r>
           </a:p>
         </p:txBody>
@@ -7169,7 +7406,7 @@
               </a:defRPr>
             </a:pPr>
             <a:r>
-              <a:t>미니 실습: 값 하나를 바꾸고 결과를 비교한다</a:t>
+              <a:t>막히면: 증상 → 우선 확인 → 재검증</a:t>
             </a:r>
           </a:p>
         </p:txBody>
@@ -7208,7 +7445,7 @@
               </a:defRPr>
             </a:pPr>
             <a:r>
-              <a:t>정상 결과를 만든 뒤에는 한 번에 하나의 값만 바꿉니다.</a:t>
+              <a:t>오류 메시지를 숨기지 않고 같은 순서로 점검합니다.</a:t>
             </a:r>
           </a:p>
         </p:txBody>
@@ -7344,7 +7581,7 @@
               </a:defRPr>
             </a:pPr>
             <a:r>
-              <a:t>현재 단계 미니 실습    |    현재 폴더 ~/ros2_curri/agv_ws    |    현재 터미널</a:t>
+              <a:t>현재 단계 오류 대응    |    현재 폴더 ~/ros2_curri/my_agv_ws    |    현재 터미널</a:t>
             </a:r>
           </a:p>
         </p:txBody>
@@ -7357,18 +7594,18 @@
         </p:nvSpPr>
         <p:spPr>
           <a:xfrm>
-            <a:off x="749808" y="1874519"/>
-            <a:ext cx="10652760" cy="1993392"/>
+            <a:off x="694944" y="1755648"/>
+            <a:ext cx="10972800" cy="1115568"/>
           </a:xfrm>
           <a:prstGeom prst="roundRect">
             <a:avLst/>
           </a:prstGeom>
           <a:solidFill>
-            <a:srgbClr val="FFF8EB"/>
+            <a:srgbClr val="FFF7F4"/>
           </a:solidFill>
           <a:ln>
             <a:solidFill>
-              <a:srgbClr val="ECC680"/>
+              <a:srgbClr val="EDBEB4"/>
             </a:solidFill>
           </a:ln>
         </p:spPr>
@@ -7387,23 +7624,10 @@
           </a:fontRef>
         </p:style>
         <p:txBody>
-          <a:bodyPr rtlCol="0" anchor="ctr" wrap="square" lIns="73152" rIns="73152" tIns="36576" bIns="36576"/>
-          <a:lstStyle/>
-          <a:p>
-            <a:pPr algn="ctr">
-              <a:spcAft>
-                <a:spcPts val="0"/>
-              </a:spcAft>
-              <a:defRPr sz="2300" b="1">
-                <a:solidFill>
-                  <a:srgbClr val="122C4E"/>
-                </a:solidFill>
-                <a:latin typeface="Noto Sans CJK KR"/>
-              </a:defRPr>
-            </a:pPr>
-            <a:r>
-              <a:t>Fixed Frame을 의도적으로 없는 이름으로 바꾼 뒤 Global Status 오류를 읽고 odom으로 되돌린다.</a:t>
-            </a:r>
+          <a:bodyPr rtlCol="0" anchor="ctr"/>
+          <a:lstStyle/>
+          <a:p>
+            <a:pPr algn="ctr"/>
           </a:p>
         </p:txBody>
       </p:sp>
@@ -7415,8 +7639,8 @@
         </p:nvSpPr>
         <p:spPr>
           <a:xfrm>
-            <a:off x="877824" y="4590288"/>
-            <a:ext cx="10241280" cy="594360"/>
+            <a:off x="896112" y="1901952"/>
+            <a:ext cx="2926080" cy="274320"/>
           </a:xfrm>
           <a:prstGeom prst="rect">
             <a:avLst/>
@@ -7429,11 +7653,220 @@
           </a:bodyPr>
           <a:lstStyle/>
           <a:p>
+            <a:pPr algn="l">
+              <a:spcAft>
+                <a:spcPts val="0"/>
+              </a:spcAft>
+              <a:defRPr sz="1800" b="1">
+                <a:solidFill>
+                  <a:srgbClr val="BE3B3B"/>
+                </a:solidFill>
+                <a:latin typeface="Noto Sans CJK KR"/>
+              </a:defRPr>
+            </a:pPr>
+            <a:r>
+              <a:t>증상 1: RobotModel이 안 보임</a:t>
+            </a:r>
+          </a:p>
+        </p:txBody>
+      </p:sp>
+      <p:sp>
+        <p:nvSpPr>
+          <p:cNvPr id="9" name="TextBox 8"/>
+          <p:cNvSpPr txBox="1"/>
+          <p:nvPr/>
+        </p:nvSpPr>
+        <p:spPr>
+          <a:xfrm>
+            <a:off x="3794760" y="1883664"/>
+            <a:ext cx="7543800" cy="621792"/>
+          </a:xfrm>
+          <a:prstGeom prst="rect">
+            <a:avLst/>
+          </a:prstGeom>
+          <a:noFill/>
+        </p:spPr>
+        <p:txBody>
+          <a:bodyPr wrap="square" lIns="73152" rIns="73152" tIns="36576" bIns="36576">
+            <a:spAutoFit/>
+          </a:bodyPr>
+          <a:lstStyle/>
+          <a:p>
+            <a:pPr algn="l">
+              <a:spcAft>
+                <a:spcPts val="0"/>
+              </a:spcAft>
+              <a:defRPr sz="1600" b="0">
+                <a:solidFill>
+                  <a:srgbClr val="122C4E"/>
+                </a:solidFill>
+                <a:latin typeface="Noto Sans CJK KR"/>
+              </a:defRPr>
+            </a:pPr>
+            <a:r>
+              <a:t>우선 확인: robot_description·Fixed Frame·TF를 순서대로 확인한다.</a:t>
+            </a:r>
+            <a:br/>
+            <a:r>
+              <a:t>수정 후: ros2 topic info /robot_description</a:t>
+            </a:r>
+          </a:p>
+        </p:txBody>
+      </p:sp>
+      <p:sp>
+        <p:nvSpPr>
+          <p:cNvPr id="10" name="Rounded Rectangle 9"/>
+          <p:cNvSpPr/>
+          <p:nvPr/>
+        </p:nvSpPr>
+        <p:spPr>
+          <a:xfrm>
+            <a:off x="694944" y="3172968"/>
+            <a:ext cx="10972800" cy="1115568"/>
+          </a:xfrm>
+          <a:prstGeom prst="roundRect">
+            <a:avLst/>
+          </a:prstGeom>
+          <a:solidFill>
+            <a:srgbClr val="FFF7F4"/>
+          </a:solidFill>
+          <a:ln>
+            <a:solidFill>
+              <a:srgbClr val="EDBEB4"/>
+            </a:solidFill>
+          </a:ln>
+        </p:spPr>
+        <p:style>
+          <a:lnRef idx="1">
+            <a:schemeClr val="accent1"/>
+          </a:lnRef>
+          <a:fillRef idx="3">
+            <a:schemeClr val="accent1"/>
+          </a:fillRef>
+          <a:effectRef idx="2">
+            <a:schemeClr val="accent1"/>
+          </a:effectRef>
+          <a:fontRef idx="minor">
+            <a:schemeClr val="lt1"/>
+          </a:fontRef>
+        </p:style>
+        <p:txBody>
+          <a:bodyPr rtlCol="0" anchor="ctr"/>
+          <a:lstStyle/>
+          <a:p>
+            <a:pPr algn="ctr"/>
+          </a:p>
+        </p:txBody>
+      </p:sp>
+      <p:sp>
+        <p:nvSpPr>
+          <p:cNvPr id="11" name="TextBox 10"/>
+          <p:cNvSpPr txBox="1"/>
+          <p:nvPr/>
+        </p:nvSpPr>
+        <p:spPr>
+          <a:xfrm>
+            <a:off x="896112" y="3319272"/>
+            <a:ext cx="2926080" cy="274320"/>
+          </a:xfrm>
+          <a:prstGeom prst="rect">
+            <a:avLst/>
+          </a:prstGeom>
+          <a:noFill/>
+        </p:spPr>
+        <p:txBody>
+          <a:bodyPr wrap="square" lIns="73152" rIns="73152" tIns="36576" bIns="36576">
+            <a:spAutoFit/>
+          </a:bodyPr>
+          <a:lstStyle/>
+          <a:p>
+            <a:pPr algn="l">
+              <a:spcAft>
+                <a:spcPts val="0"/>
+              </a:spcAft>
+              <a:defRPr sz="1800" b="1">
+                <a:solidFill>
+                  <a:srgbClr val="BE3B3B"/>
+                </a:solidFill>
+                <a:latin typeface="Noto Sans CJK KR"/>
+              </a:defRPr>
+            </a:pPr>
+            <a:r>
+              <a:t>증상 2: LaserScan 위치가 이상함</a:t>
+            </a:r>
+          </a:p>
+        </p:txBody>
+      </p:sp>
+      <p:sp>
+        <p:nvSpPr>
+          <p:cNvPr id="12" name="TextBox 11"/>
+          <p:cNvSpPr txBox="1"/>
+          <p:nvPr/>
+        </p:nvSpPr>
+        <p:spPr>
+          <a:xfrm>
+            <a:off x="3794760" y="3300984"/>
+            <a:ext cx="7543800" cy="621792"/>
+          </a:xfrm>
+          <a:prstGeom prst="rect">
+            <a:avLst/>
+          </a:prstGeom>
+          <a:noFill/>
+        </p:spPr>
+        <p:txBody>
+          <a:bodyPr wrap="square" lIns="73152" rIns="73152" tIns="36576" bIns="36576">
+            <a:spAutoFit/>
+          </a:bodyPr>
+          <a:lstStyle/>
+          <a:p>
+            <a:pPr algn="l">
+              <a:spcAft>
+                <a:spcPts val="0"/>
+              </a:spcAft>
+              <a:defRPr sz="1600" b="0">
+                <a:solidFill>
+                  <a:srgbClr val="122C4E"/>
+                </a:solidFill>
+                <a:latin typeface="Noto Sans CJK KR"/>
+              </a:defRPr>
+            </a:pPr>
+            <a:r>
+              <a:t>우선 확인: scan header.frame_id와 lidar TF를 확인한다.</a:t>
+            </a:r>
+            <a:br/>
+            <a:r>
+              <a:t>수정 후: ros2 topic info /robot_description</a:t>
+            </a:r>
+          </a:p>
+        </p:txBody>
+      </p:sp>
+      <p:sp>
+        <p:nvSpPr>
+          <p:cNvPr id="13" name="TextBox 12"/>
+          <p:cNvSpPr txBox="1"/>
+          <p:nvPr/>
+        </p:nvSpPr>
+        <p:spPr>
+          <a:xfrm>
+            <a:off x="822960" y="5102352"/>
+            <a:ext cx="10607040" cy="402336"/>
+          </a:xfrm>
+          <a:prstGeom prst="rect">
+            <a:avLst/>
+          </a:prstGeom>
+          <a:noFill/>
+        </p:spPr>
+        <p:txBody>
+          <a:bodyPr wrap="square" lIns="73152" rIns="73152" tIns="36576" bIns="36576">
+            <a:spAutoFit/>
+          </a:bodyPr>
+          <a:lstStyle/>
+          <a:p>
             <a:pPr algn="ctr">
               <a:spcAft>
                 <a:spcPts val="0"/>
               </a:spcAft>
-              <a:defRPr sz="1900" b="1">
+              <a:defRPr sz="1800" b="1">
                 <a:solidFill>
                   <a:srgbClr val="DB7E22"/>
                 </a:solidFill>
@@ -7441,7 +7874,7 @@
               </a:defRPr>
             </a:pPr>
             <a:r>
-              <a:t>기록할 것: 바꾼 값(단위) · 기대한 변화 · 실제 출력/화면 · 원래 값으로 되돌린 결과</a:t>
+              <a:t>공통 순서: ① 현재 폴더 ② source ③ 파일 경로 ④ 이름/타입/단위 ⑤ build·source 후 재실행</a:t>
             </a:r>
           </a:p>
         </p:txBody>
@@ -7498,7 +7931,7 @@
               </a:defRPr>
             </a:pPr>
             <a:r>
-              <a:t>체크포인트를 저장하고 다음 모듈로 넘긴다</a:t>
+              <a:t>미니 실습: 값 하나를 바꾸고 결과를 비교한다</a:t>
             </a:r>
           </a:p>
         </p:txBody>
@@ -7537,7 +7970,7 @@
               </a:defRPr>
             </a:pPr>
             <a:r>
-              <a:t>현재 Complete는 다음 Starter의 기준선입니다.</a:t>
+              <a:t>정상 결과를 만든 뒤에는 한 번에 하나의 값만 바꿉니다.</a:t>
             </a:r>
           </a:p>
         </p:txBody>
@@ -7673,7 +8106,7 @@
               </a:defRPr>
             </a:pPr>
             <a:r>
-              <a:t>현재 단계 체크포인트    |    현재 폴더 ~/ros2_curri/agv_ws    |    현재 터미널</a:t>
+              <a:t>현재 단계 미니 실습    |    현재 폴더 ~/ros2_curri/my_agv_ws    |    현재 터미널</a:t>
             </a:r>
           </a:p>
         </p:txBody>
@@ -7686,18 +8119,18 @@
         </p:nvSpPr>
         <p:spPr>
           <a:xfrm>
-            <a:off x="685800" y="1737360"/>
-            <a:ext cx="10972800" cy="3611880"/>
+            <a:off x="749808" y="1874519"/>
+            <a:ext cx="10652760" cy="1993392"/>
           </a:xfrm>
           <a:prstGeom prst="roundRect">
             <a:avLst/>
           </a:prstGeom>
           <a:solidFill>
-            <a:srgbClr val="F4F7FB"/>
+            <a:srgbClr val="FFF8EB"/>
           </a:solidFill>
           <a:ln>
             <a:solidFill>
-              <a:srgbClr val="D2DCE8"/>
+              <a:srgbClr val="ECC680"/>
             </a:solidFill>
           </a:ln>
         </p:spPr>
@@ -7716,10 +8149,23 @@
           </a:fontRef>
         </p:style>
         <p:txBody>
-          <a:bodyPr rtlCol="0" anchor="ctr"/>
-          <a:lstStyle/>
-          <a:p>
-            <a:pPr algn="ctr"/>
+          <a:bodyPr rtlCol="0" anchor="ctr" wrap="square" lIns="73152" rIns="73152" tIns="36576" bIns="36576"/>
+          <a:lstStyle/>
+          <a:p>
+            <a:pPr algn="ctr">
+              <a:spcAft>
+                <a:spcPts val="0"/>
+              </a:spcAft>
+              <a:defRPr sz="2300" b="1">
+                <a:solidFill>
+                  <a:srgbClr val="122C4E"/>
+                </a:solidFill>
+                <a:latin typeface="Noto Sans CJK KR"/>
+              </a:defRPr>
+            </a:pPr>
+            <a:r>
+              <a:t>Fixed Frame을 의도적으로 없는 이름으로 바꾼 뒤 Global Status 오류를 읽고 odom으로 되돌린다.</a:t>
+            </a:r>
           </a:p>
         </p:txBody>
       </p:sp>
@@ -7731,111 +8177,8 @@
         </p:nvSpPr>
         <p:spPr>
           <a:xfrm>
-            <a:off x="896112" y="1993392"/>
-            <a:ext cx="10332720" cy="2971800"/>
-          </a:xfrm>
-          <a:prstGeom prst="rect">
-            <a:avLst/>
-          </a:prstGeom>
-          <a:noFill/>
-        </p:spPr>
-        <p:txBody>
-          <a:bodyPr wrap="square" lIns="109728" rIns="109728">
-            <a:spAutoFit/>
-          </a:bodyPr>
-          <a:lstStyle/>
-          <a:p>
-            <a:pPr>
-              <a:spcAft>
-                <a:spcPts val="800"/>
-              </a:spcAft>
-              <a:defRPr sz="1800">
-                <a:solidFill>
-                  <a:srgbClr val="122C4E"/>
-                </a:solidFill>
-                <a:latin typeface="Noto Sans CJK KR"/>
-              </a:defRPr>
-            </a:pPr>
-            <a:r>
-              <a:t>• □ 완료 화면: agv.rviz에 RobotModel·TF·LaserScan·Odometry 설정을 저장하고 실제 화면을 확인한다.</a:t>
-            </a:r>
-          </a:p>
-          <a:p>
-            <a:pPr>
-              <a:spcAft>
-                <a:spcPts val="800"/>
-              </a:spcAft>
-              <a:defRPr sz="1800">
-                <a:solidFill>
-                  <a:srgbClr val="122C4E"/>
-                </a:solidFill>
-                <a:latin typeface="Noto Sans CJK KR"/>
-              </a:defRPr>
-            </a:pPr>
-            <a:r>
-              <a:t>• □ Complete 파일: blocks/C_drive_visualization/M11_rviz_integration/complete/</a:t>
-            </a:r>
-          </a:p>
-          <a:p>
-            <a:pPr>
-              <a:spcAft>
-                <a:spcPts val="800"/>
-              </a:spcAft>
-              <a:defRPr sz="1800">
-                <a:solidFill>
-                  <a:srgbClr val="122C4E"/>
-                </a:solidFill>
-                <a:latin typeface="Noto Sans CJK KR"/>
-              </a:defRPr>
-            </a:pPr>
-            <a:r>
-              <a:t>• □ 정상 로그·캡처: logs/validation.log, screenshots/validation_terminal.png</a:t>
-            </a:r>
-          </a:p>
-          <a:p>
-            <a:pPr>
-              <a:spcAft>
-                <a:spcPts val="800"/>
-              </a:spcAft>
-              <a:defRPr sz="1800">
-                <a:solidFill>
-                  <a:srgbClr val="122C4E"/>
-                </a:solidFill>
-                <a:latin typeface="Noto Sans CJK KR"/>
-              </a:defRPr>
-            </a:pPr>
-            <a:r>
-              <a:t>• □ 버전 식별: CHECKSUM_or_TAG.txt의 SHA-256 manifest</a:t>
-            </a:r>
-          </a:p>
-          <a:p>
-            <a:pPr>
-              <a:spcAft>
-                <a:spcPts val="800"/>
-              </a:spcAft>
-              <a:defRPr sz="1800">
-                <a:solidFill>
-                  <a:srgbClr val="122C4E"/>
-                </a:solidFill>
-                <a:latin typeface="Noto Sans CJK KR"/>
-              </a:defRPr>
-            </a:pPr>
-            <a:r>
-              <a:t>• □ 다음 시작 조건: M12~M15 센서 display</a:t>
-            </a:r>
-          </a:p>
-        </p:txBody>
-      </p:sp>
-      <p:sp>
-        <p:nvSpPr>
-          <p:cNvPr id="9" name="TextBox 8"/>
-          <p:cNvSpPr txBox="1"/>
-          <p:nvPr/>
-        </p:nvSpPr>
-        <p:spPr>
-          <a:xfrm>
-            <a:off x="868680" y="5596128"/>
-            <a:ext cx="10515600" cy="338328"/>
+            <a:off x="877824" y="4590288"/>
+            <a:ext cx="10241280" cy="594360"/>
           </a:xfrm>
           <a:prstGeom prst="rect">
             <a:avLst/>
@@ -7852,15 +8195,15 @@
               <a:spcAft>
                 <a:spcPts val="0"/>
               </a:spcAft>
-              <a:defRPr sz="1700" b="1">
-                <a:solidFill>
-                  <a:srgbClr val="2A8B5A"/>
-                </a:solidFill>
-                <a:latin typeface="Noto Sans CJK KR"/>
-              </a:defRPr>
-            </a:pPr>
-            <a:r>
-              <a:t>다음 모듈을 시작하기 전, 이 슬라이드의 Complete와 다음 모듈의 Starter를 비교합니다.</a:t>
+              <a:defRPr sz="1900" b="1">
+                <a:solidFill>
+                  <a:srgbClr val="DB7E22"/>
+                </a:solidFill>
+                <a:latin typeface="Noto Sans CJK KR"/>
+              </a:defRPr>
+            </a:pPr>
+            <a:r>
+              <a:t>기록할 것: 바꾼 값(단위) · 기대한 변화 · 실제 출력/화면 · 원래 값으로 되돌린 결과</a:t>
             </a:r>
           </a:p>
         </p:txBody>
@@ -7917,6 +8260,425 @@
               </a:defRPr>
             </a:pPr>
             <a:r>
+              <a:t>내 프로젝트 체크포인트를 저장하고 다음 모듈로 넘긴다</a:t>
+            </a:r>
+          </a:p>
+        </p:txBody>
+      </p:sp>
+      <p:sp>
+        <p:nvSpPr>
+          <p:cNvPr id="3" name="TextBox 2"/>
+          <p:cNvSpPr txBox="1"/>
+          <p:nvPr/>
+        </p:nvSpPr>
+        <p:spPr>
+          <a:xfrm>
+            <a:off x="603504" y="859536"/>
+            <a:ext cx="10698480" cy="292608"/>
+          </a:xfrm>
+          <a:prstGeom prst="rect">
+            <a:avLst/>
+          </a:prstGeom>
+          <a:noFill/>
+        </p:spPr>
+        <p:txBody>
+          <a:bodyPr wrap="square" lIns="73152" rIns="73152" tIns="36576" bIns="36576">
+            <a:spAutoFit/>
+          </a:bodyPr>
+          <a:lstStyle/>
+          <a:p>
+            <a:pPr algn="l">
+              <a:spcAft>
+                <a:spcPts val="0"/>
+              </a:spcAft>
+              <a:defRPr sz="1700" b="0">
+                <a:solidFill>
+                  <a:srgbClr val="5C6672"/>
+                </a:solidFill>
+                <a:latin typeface="Noto Sans CJK KR"/>
+              </a:defRPr>
+            </a:pPr>
+            <a:r>
+              <a:t>Complete는 복구용 비교 기준이고, 다음 단계는 내가 직접 만든 workspace에서 계속합니다.</a:t>
+            </a:r>
+          </a:p>
+        </p:txBody>
+      </p:sp>
+      <p:sp>
+        <p:nvSpPr>
+          <p:cNvPr id="4" name="TextBox 3"/>
+          <p:cNvSpPr txBox="1"/>
+          <p:nvPr/>
+        </p:nvSpPr>
+        <p:spPr>
+          <a:xfrm>
+            <a:off x="530352" y="6510528"/>
+            <a:ext cx="7772400" cy="201168"/>
+          </a:xfrm>
+          <a:prstGeom prst="rect">
+            <a:avLst/>
+          </a:prstGeom>
+          <a:noFill/>
+        </p:spPr>
+        <p:txBody>
+          <a:bodyPr wrap="square" lIns="73152" rIns="73152" tIns="36576" bIns="36576">
+            <a:spAutoFit/>
+          </a:bodyPr>
+          <a:lstStyle/>
+          <a:p>
+            <a:pPr algn="l">
+              <a:spcAft>
+                <a:spcPts val="0"/>
+              </a:spcAft>
+              <a:defRPr sz="1000" b="0">
+                <a:solidFill>
+                  <a:srgbClr val="5C6672"/>
+                </a:solidFill>
+                <a:latin typeface="Noto Sans CJK KR"/>
+              </a:defRPr>
+            </a:pPr>
+            <a:r>
+              <a:t>ROS 2 Jazzy · Gazebo Harmonic · M11 · 따라 하기형 AGV 실습</a:t>
+            </a:r>
+          </a:p>
+        </p:txBody>
+      </p:sp>
+      <p:sp>
+        <p:nvSpPr>
+          <p:cNvPr id="5" name="TextBox 4"/>
+          <p:cNvSpPr txBox="1"/>
+          <p:nvPr/>
+        </p:nvSpPr>
+        <p:spPr>
+          <a:xfrm>
+            <a:off x="9144000" y="6510528"/>
+            <a:ext cx="2468880" cy="201168"/>
+          </a:xfrm>
+          <a:prstGeom prst="rect">
+            <a:avLst/>
+          </a:prstGeom>
+          <a:noFill/>
+        </p:spPr>
+        <p:txBody>
+          <a:bodyPr wrap="square" lIns="73152" rIns="73152" tIns="36576" bIns="36576">
+            <a:spAutoFit/>
+          </a:bodyPr>
+          <a:lstStyle/>
+          <a:p>
+            <a:pPr algn="r">
+              <a:spcAft>
+                <a:spcPts val="0"/>
+              </a:spcAft>
+              <a:defRPr sz="1000" b="0">
+                <a:solidFill>
+                  <a:srgbClr val="5C6672"/>
+                </a:solidFill>
+                <a:latin typeface="Noto Sans CJK KR"/>
+              </a:defRPr>
+            </a:pPr>
+            <a:r>
+              <a:t>명령·파일 경로는 슬라이드에서 복사 가능</a:t>
+            </a:r>
+          </a:p>
+        </p:txBody>
+      </p:sp>
+      <p:sp>
+        <p:nvSpPr>
+          <p:cNvPr id="6" name="Rectangle 5"/>
+          <p:cNvSpPr/>
+          <p:nvPr/>
+        </p:nvSpPr>
+        <p:spPr>
+          <a:xfrm>
+            <a:off x="566928" y="1188720"/>
+            <a:ext cx="11064240" cy="347472"/>
+          </a:xfrm>
+          <a:prstGeom prst="rect">
+            <a:avLst/>
+          </a:prstGeom>
+          <a:solidFill>
+            <a:srgbClr val="F4F7FB"/>
+          </a:solidFill>
+          <a:ln>
+            <a:solidFill>
+              <a:srgbClr val="F4F7FB"/>
+            </a:solidFill>
+          </a:ln>
+        </p:spPr>
+        <p:style>
+          <a:lnRef idx="1">
+            <a:schemeClr val="accent1"/>
+          </a:lnRef>
+          <a:fillRef idx="3">
+            <a:schemeClr val="accent1"/>
+          </a:fillRef>
+          <a:effectRef idx="2">
+            <a:schemeClr val="accent1"/>
+          </a:effectRef>
+          <a:fontRef idx="minor">
+            <a:schemeClr val="lt1"/>
+          </a:fontRef>
+        </p:style>
+        <p:txBody>
+          <a:bodyPr rtlCol="0" anchor="ctr" wrap="square" lIns="73152" rIns="73152" tIns="36576" bIns="36576"/>
+          <a:lstStyle/>
+          <a:p>
+            <a:pPr algn="l">
+              <a:spcAft>
+                <a:spcPts val="0"/>
+              </a:spcAft>
+              <a:defRPr sz="1300" b="1">
+                <a:solidFill>
+                  <a:srgbClr val="122C4E"/>
+                </a:solidFill>
+                <a:latin typeface="Noto Sans CJK KR"/>
+              </a:defRPr>
+            </a:pPr>
+            <a:r>
+              <a:t>현재 단계 체크포인트    |    현재 폴더 ~/ros2_curri/my_agv_ws    |    현재 터미널</a:t>
+            </a:r>
+          </a:p>
+        </p:txBody>
+      </p:sp>
+      <p:sp>
+        <p:nvSpPr>
+          <p:cNvPr id="7" name="Rounded Rectangle 6"/>
+          <p:cNvSpPr/>
+          <p:nvPr/>
+        </p:nvSpPr>
+        <p:spPr>
+          <a:xfrm>
+            <a:off x="685800" y="1737360"/>
+            <a:ext cx="10972800" cy="3611880"/>
+          </a:xfrm>
+          <a:prstGeom prst="roundRect">
+            <a:avLst/>
+          </a:prstGeom>
+          <a:solidFill>
+            <a:srgbClr val="F4F7FB"/>
+          </a:solidFill>
+          <a:ln>
+            <a:solidFill>
+              <a:srgbClr val="D2DCE8"/>
+            </a:solidFill>
+          </a:ln>
+        </p:spPr>
+        <p:style>
+          <a:lnRef idx="1">
+            <a:schemeClr val="accent1"/>
+          </a:lnRef>
+          <a:fillRef idx="3">
+            <a:schemeClr val="accent1"/>
+          </a:fillRef>
+          <a:effectRef idx="2">
+            <a:schemeClr val="accent1"/>
+          </a:effectRef>
+          <a:fontRef idx="minor">
+            <a:schemeClr val="lt1"/>
+          </a:fontRef>
+        </p:style>
+        <p:txBody>
+          <a:bodyPr rtlCol="0" anchor="ctr"/>
+          <a:lstStyle/>
+          <a:p>
+            <a:pPr algn="ctr"/>
+          </a:p>
+        </p:txBody>
+      </p:sp>
+      <p:sp>
+        <p:nvSpPr>
+          <p:cNvPr id="8" name="TextBox 7"/>
+          <p:cNvSpPr txBox="1"/>
+          <p:nvPr/>
+        </p:nvSpPr>
+        <p:spPr>
+          <a:xfrm>
+            <a:off x="896112" y="1993392"/>
+            <a:ext cx="10332720" cy="2971800"/>
+          </a:xfrm>
+          <a:prstGeom prst="rect">
+            <a:avLst/>
+          </a:prstGeom>
+          <a:noFill/>
+        </p:spPr>
+        <p:txBody>
+          <a:bodyPr wrap="square" lIns="109728" rIns="109728">
+            <a:spAutoFit/>
+          </a:bodyPr>
+          <a:lstStyle/>
+          <a:p>
+            <a:pPr>
+              <a:spcAft>
+                <a:spcPts val="800"/>
+              </a:spcAft>
+              <a:defRPr sz="1800">
+                <a:solidFill>
+                  <a:srgbClr val="122C4E"/>
+                </a:solidFill>
+                <a:latin typeface="Noto Sans CJK KR"/>
+              </a:defRPr>
+            </a:pPr>
+            <a:r>
+              <a:t>• □ 완료 화면: agv.rviz에 RobotModel·TF·LaserScan·Odometry 설정을 저장하고 실제 화면을 확인한다.</a:t>
+            </a:r>
+          </a:p>
+          <a:p>
+            <a:pPr>
+              <a:spcAft>
+                <a:spcPts val="800"/>
+              </a:spcAft>
+              <a:defRPr sz="1800">
+                <a:solidFill>
+                  <a:srgbClr val="122C4E"/>
+                </a:solidFill>
+                <a:latin typeface="Noto Sans CJK KR"/>
+              </a:defRPr>
+            </a:pPr>
+            <a:r>
+              <a:t>• □ 막혔을 때 비교할 Complete: blocks/C_drive_visualization/M11_rviz_integration/complete/</a:t>
+            </a:r>
+          </a:p>
+          <a:p>
+            <a:pPr>
+              <a:spcAft>
+                <a:spcPts val="800"/>
+              </a:spcAft>
+              <a:defRPr sz="1800">
+                <a:solidFill>
+                  <a:srgbClr val="122C4E"/>
+                </a:solidFill>
+                <a:latin typeface="Noto Sans CJK KR"/>
+              </a:defRPr>
+            </a:pPr>
+            <a:r>
+              <a:t>• □ 정상 로그·캡처: logs/validation.log, screenshots/validation_terminal.png</a:t>
+            </a:r>
+          </a:p>
+          <a:p>
+            <a:pPr>
+              <a:spcAft>
+                <a:spcPts val="800"/>
+              </a:spcAft>
+              <a:defRPr sz="1800">
+                <a:solidFill>
+                  <a:srgbClr val="122C4E"/>
+                </a:solidFill>
+                <a:latin typeface="Noto Sans CJK KR"/>
+              </a:defRPr>
+            </a:pPr>
+            <a:r>
+              <a:t>• □ 버전 식별: CHECKSUM_or_TAG.txt의 SHA-256 manifest</a:t>
+            </a:r>
+          </a:p>
+          <a:p>
+            <a:pPr>
+              <a:spcAft>
+                <a:spcPts val="800"/>
+              </a:spcAft>
+              <a:defRPr sz="1800">
+                <a:solidFill>
+                  <a:srgbClr val="122C4E"/>
+                </a:solidFill>
+                <a:latin typeface="Noto Sans CJK KR"/>
+              </a:defRPr>
+            </a:pPr>
+            <a:r>
+              <a:t>• □ 다음 시작 조건: M12~M15 센서 display</a:t>
+            </a:r>
+          </a:p>
+        </p:txBody>
+      </p:sp>
+      <p:sp>
+        <p:nvSpPr>
+          <p:cNvPr id="9" name="TextBox 8"/>
+          <p:cNvSpPr txBox="1"/>
+          <p:nvPr/>
+        </p:nvSpPr>
+        <p:spPr>
+          <a:xfrm>
+            <a:off x="868680" y="5596128"/>
+            <a:ext cx="10515600" cy="338328"/>
+          </a:xfrm>
+          <a:prstGeom prst="rect">
+            <a:avLst/>
+          </a:prstGeom>
+          <a:noFill/>
+        </p:spPr>
+        <p:txBody>
+          <a:bodyPr wrap="square" lIns="73152" rIns="73152" tIns="36576" bIns="36576">
+            <a:spAutoFit/>
+          </a:bodyPr>
+          <a:lstStyle/>
+          <a:p>
+            <a:pPr algn="ctr">
+              <a:spcAft>
+                <a:spcPts val="0"/>
+              </a:spcAft>
+              <a:defRPr sz="1700" b="1">
+                <a:solidFill>
+                  <a:srgbClr val="2A8B5A"/>
+                </a:solidFill>
+                <a:latin typeface="Noto Sans CJK KR"/>
+              </a:defRPr>
+            </a:pPr>
+            <a:r>
+              <a:t>다음 모듈을 시작하기 전, 내 src의 변경사항을 저장하고 현재 완료 조건을 다시 확인합니다.</a:t>
+            </a:r>
+          </a:p>
+        </p:txBody>
+      </p:sp>
+    </p:spTree>
+  </p:cSld>
+  <p:clrMapOvr>
+    <a:masterClrMapping/>
+  </p:clrMapOvr>
+</p:sld>
+</file>
+
+<file path=ppt/slides/slide18.xml><?xml version="1.0" encoding="utf-8"?>
+<p:sld xmlns:a="http://schemas.openxmlformats.org/drawingml/2006/main" xmlns:p="http://schemas.openxmlformats.org/presentationml/2006/main" xmlns:r="http://schemas.openxmlformats.org/officeDocument/2006/relationships">
+  <p:cSld>
+    <p:spTree>
+      <p:nvGrpSpPr>
+        <p:cNvPr id="1" name=""/>
+        <p:cNvGrpSpPr/>
+        <p:nvPr/>
+      </p:nvGrpSpPr>
+      <p:grpSpPr/>
+      <p:sp>
+        <p:nvSpPr>
+          <p:cNvPr id="2" name="TextBox 1"/>
+          <p:cNvSpPr txBox="1"/>
+          <p:nvPr/>
+        </p:nvSpPr>
+        <p:spPr>
+          <a:xfrm>
+            <a:off x="566928" y="347472"/>
+            <a:ext cx="10881360" cy="438912"/>
+          </a:xfrm>
+          <a:prstGeom prst="rect">
+            <a:avLst/>
+          </a:prstGeom>
+          <a:noFill/>
+        </p:spPr>
+        <p:txBody>
+          <a:bodyPr wrap="square" lIns="73152" rIns="73152" tIns="36576" bIns="36576">
+            <a:spAutoFit/>
+          </a:bodyPr>
+          <a:lstStyle/>
+          <a:p>
+            <a:pPr algn="l">
+              <a:spcAft>
+                <a:spcPts val="0"/>
+              </a:spcAft>
+              <a:defRPr sz="3200" b="1">
+                <a:solidFill>
+                  <a:srgbClr val="122C4E"/>
+                </a:solidFill>
+                <a:latin typeface="Noto Sans CJK KR"/>
+              </a:defRPr>
+            </a:pPr>
+            <a:r>
               <a:t>공식 참고 자료</a:t>
             </a:r>
           </a:p>
@@ -9084,7 +9846,7 @@
               </a:defRPr>
             </a:pPr>
             <a:r>
-              <a:t>현재 단계 시작    |    현재 폴더 ~/ros2_curri/agv_ws    |    현재 터미널</a:t>
+              <a:t>현재 단계 시작    |    현재 폴더 ~/ros2_curri/my_agv_ws    |    현재 터미널</a:t>
             </a:r>
           </a:p>
         </p:txBody>
@@ -9200,7 +9962,7 @@
               </a:defRPr>
             </a:pPr>
             <a:r>
-              <a:t>• 현재 폴더: ~/ros2_curri/agv_ws</a:t>
+              <a:t>• 현재 폴더: ~/ros2_curri/my_agv_ws</a:t>
             </a:r>
           </a:p>
           <a:p>
@@ -9271,7 +10033,7 @@
               </a:defRPr>
             </a:pPr>
             <a:r>
-              <a:t>확인: pwd가 ~/ros2_curri/agv_ws이고, 이전 모듈의 완료 조건을 한 문장으로 설명할 수 있으면 시작합니다.</a:t>
+              <a:t>확인: pwd가 ~/ros2_curri/my_agv_ws이고, 이전 모듈의 완료 조건을 한 문장으로 설명할 수 있으면 시작합니다.</a:t>
             </a:r>
           </a:p>
         </p:txBody>
@@ -9661,7 +10423,7 @@
               </a:defRPr>
             </a:pPr>
             <a:r>
-              <a:t>핵심 흐름을 한 장으로 이해하기</a:t>
+              <a:t>프로젝트에 이번 기능을 직접 추가한다</a:t>
             </a:r>
           </a:p>
         </p:txBody>
@@ -9700,7 +10462,7 @@
               </a:defRPr>
             </a:pPr>
             <a:r>
-              <a:t>상자와 화살표의 방향을 따라 데이터 또는 제어의 흐름을 읽습니다.</a:t>
+              <a:t>완성본을 먼저 복사하지 않습니다. 빈 workspace에 지금 필요한 폴더와 파일을 하나씩 만듭니다.</a:t>
             </a:r>
           </a:p>
         </p:txBody>
@@ -9785,24 +10547,24 @@
       </p:sp>
       <p:sp>
         <p:nvSpPr>
-          <p:cNvPr id="6" name="Rounded Rectangle 5"/>
+          <p:cNvPr id="6" name="Rectangle 5"/>
           <p:cNvSpPr/>
           <p:nvPr/>
         </p:nvSpPr>
         <p:spPr>
           <a:xfrm>
-            <a:off x="2738628" y="2743200"/>
-            <a:ext cx="2029968" cy="1051560"/>
-          </a:xfrm>
-          <a:prstGeom prst="roundRect">
+            <a:off x="566928" y="1188720"/>
+            <a:ext cx="11064240" cy="347472"/>
+          </a:xfrm>
+          <a:prstGeom prst="rect">
             <a:avLst/>
           </a:prstGeom>
           <a:solidFill>
-            <a:srgbClr val="FFFFFF"/>
+            <a:srgbClr val="F4F7FB"/>
           </a:solidFill>
           <a:ln>
             <a:solidFill>
-              <a:srgbClr val="225B9B"/>
+              <a:srgbClr val="F4F7FB"/>
             </a:solidFill>
           </a:ln>
         </p:spPr>
@@ -9824,11 +10586,11 @@
           <a:bodyPr rtlCol="0" anchor="ctr" wrap="square" lIns="73152" rIns="73152" tIns="36576" bIns="36576"/>
           <a:lstStyle/>
           <a:p>
-            <a:pPr algn="ctr">
-              <a:spcAft>
-                <a:spcPts val="0"/>
-              </a:spcAft>
-              <a:defRPr sz="1900" b="1">
+            <a:pPr algn="l">
+              <a:spcAft>
+                <a:spcPts val="0"/>
+              </a:spcAft>
+              <a:defRPr sz="1300" b="1">
                 <a:solidFill>
                   <a:srgbClr val="122C4E"/>
                 </a:solidFill>
@@ -9836,66 +10598,31 @@
               </a:defRPr>
             </a:pPr>
             <a:r>
-              <a:t>robot_description</a:t>
-            </a:r>
-          </a:p>
-        </p:txBody>
-      </p:sp>
-      <p:cxnSp>
-        <p:nvCxnSpPr>
-          <p:cNvPr id="7" name="Connector 6"/>
-          <p:cNvCxnSpPr/>
-          <p:nvPr/>
-        </p:nvCxnSpPr>
-        <p:spPr>
-          <a:xfrm>
-            <a:off x="4768596" y="3264408"/>
-            <a:ext cx="283463" cy="0"/>
-          </a:xfrm>
-          <a:prstGeom prst="line">
-            <a:avLst/>
-          </a:prstGeom>
-          <a:ln w="31750">
-            <a:solidFill>
-              <a:srgbClr val="225B9B"/>
-            </a:solidFill>
-          </a:ln>
-        </p:spPr>
-        <p:style>
-          <a:lnRef idx="2">
-            <a:schemeClr val="accent1"/>
-          </a:lnRef>
-          <a:fillRef idx="0">
-            <a:schemeClr val="accent1"/>
-          </a:fillRef>
-          <a:effectRef idx="1">
-            <a:schemeClr val="accent1"/>
-          </a:effectRef>
-          <a:fontRef idx="minor">
-            <a:schemeClr val="tx1"/>
-          </a:fontRef>
-        </p:style>
-      </p:cxnSp>
-      <p:sp>
-        <p:nvSpPr>
-          <p:cNvPr id="8" name="Rounded Rectangle 7"/>
+              <a:t>현재 단계 프로젝트 조립    |    현재 폴더 ~/ros2_curri/my_agv_ws    |    현재 터미널</a:t>
+            </a:r>
+          </a:p>
+        </p:txBody>
+      </p:sp>
+      <p:sp>
+        <p:nvSpPr>
+          <p:cNvPr id="7" name="Rounded Rectangle 6"/>
           <p:cNvSpPr/>
           <p:nvPr/>
         </p:nvSpPr>
         <p:spPr>
           <a:xfrm>
-            <a:off x="5079492" y="2743200"/>
-            <a:ext cx="2029968" cy="1051560"/>
+            <a:off x="731520" y="1755648"/>
+            <a:ext cx="10835640" cy="1033271"/>
           </a:xfrm>
           <a:prstGeom prst="roundRect">
             <a:avLst/>
           </a:prstGeom>
           <a:solidFill>
-            <a:srgbClr val="FFFFFF"/>
+            <a:srgbClr val="F4F7FB"/>
           </a:solidFill>
           <a:ln>
             <a:solidFill>
-              <a:srgbClr val="225B9B"/>
+              <a:srgbClr val="5C6672"/>
             </a:solidFill>
           </a:ln>
         </p:spPr>
@@ -9914,14 +10641,79 @@
           </a:fontRef>
         </p:style>
         <p:txBody>
-          <a:bodyPr rtlCol="0" anchor="ctr" wrap="square" lIns="73152" rIns="73152" tIns="36576" bIns="36576"/>
-          <a:lstStyle/>
-          <a:p>
-            <a:pPr algn="ctr">
-              <a:spcAft>
-                <a:spcPts val="0"/>
-              </a:spcAft>
-              <a:defRPr sz="1900" b="1">
+          <a:bodyPr rtlCol="0" anchor="ctr"/>
+          <a:lstStyle/>
+          <a:p>
+            <a:pPr algn="ctr"/>
+          </a:p>
+        </p:txBody>
+      </p:sp>
+      <p:sp>
+        <p:nvSpPr>
+          <p:cNvPr id="8" name="TextBox 7"/>
+          <p:cNvSpPr txBox="1"/>
+          <p:nvPr/>
+        </p:nvSpPr>
+        <p:spPr>
+          <a:xfrm>
+            <a:off x="960120" y="1911095"/>
+            <a:ext cx="1920240" cy="228600"/>
+          </a:xfrm>
+          <a:prstGeom prst="rect">
+            <a:avLst/>
+          </a:prstGeom>
+          <a:noFill/>
+        </p:spPr>
+        <p:txBody>
+          <a:bodyPr wrap="square" lIns="73152" rIns="73152" tIns="36576" bIns="36576">
+            <a:spAutoFit/>
+          </a:bodyPr>
+          <a:lstStyle/>
+          <a:p>
+            <a:pPr algn="l">
+              <a:spcAft>
+                <a:spcPts val="0"/>
+              </a:spcAft>
+              <a:defRPr sz="1700" b="1">
+                <a:solidFill>
+                  <a:srgbClr val="5C6672"/>
+                </a:solidFill>
+                <a:latin typeface="Noto Sans CJK KR"/>
+              </a:defRPr>
+            </a:pPr>
+            <a:r>
+              <a:t>이미 있는 것</a:t>
+            </a:r>
+          </a:p>
+        </p:txBody>
+      </p:sp>
+      <p:sp>
+        <p:nvSpPr>
+          <p:cNvPr id="9" name="TextBox 8"/>
+          <p:cNvSpPr txBox="1"/>
+          <p:nvPr/>
+        </p:nvSpPr>
+        <p:spPr>
+          <a:xfrm>
+            <a:off x="2788920" y="1892807"/>
+            <a:ext cx="8229600" cy="566928"/>
+          </a:xfrm>
+          <a:prstGeom prst="rect">
+            <a:avLst/>
+          </a:prstGeom>
+          <a:noFill/>
+        </p:spPr>
+        <p:txBody>
+          <a:bodyPr wrap="square" lIns="73152" rIns="73152" tIns="36576" bIns="36576">
+            <a:spAutoFit/>
+          </a:bodyPr>
+          <a:lstStyle/>
+          <a:p>
+            <a:pPr algn="l">
+              <a:spcAft>
+                <a:spcPts val="0"/>
+              </a:spcAft>
+              <a:defRPr sz="1700" b="0">
                 <a:solidFill>
                   <a:srgbClr val="122C4E"/>
                 </a:solidFill>
@@ -9929,46 +10721,11 @@
               </a:defRPr>
             </a:pPr>
             <a:r>
-              <a:t>TF / odom</a:t>
-            </a:r>
-          </a:p>
-        </p:txBody>
-      </p:sp>
-      <p:cxnSp>
-        <p:nvCxnSpPr>
-          <p:cNvPr id="9" name="Connector 8"/>
-          <p:cNvCxnSpPr/>
-          <p:nvPr/>
-        </p:nvCxnSpPr>
-        <p:spPr>
-          <a:xfrm>
-            <a:off x="7109460" y="3264408"/>
-            <a:ext cx="283464" cy="0"/>
-          </a:xfrm>
-          <a:prstGeom prst="line">
-            <a:avLst/>
-          </a:prstGeom>
-          <a:ln w="31750">
-            <a:solidFill>
-              <a:srgbClr val="225B9B"/>
-            </a:solidFill>
-          </a:ln>
-        </p:spPr>
-        <p:style>
-          <a:lnRef idx="2">
-            <a:schemeClr val="accent1"/>
-          </a:lnRef>
-          <a:fillRef idx="0">
-            <a:schemeClr val="accent1"/>
-          </a:fillRef>
-          <a:effectRef idx="1">
-            <a:schemeClr val="accent1"/>
-          </a:effectRef>
-          <a:fontRef idx="minor">
-            <a:schemeClr val="tx1"/>
-          </a:fontRef>
-        </p:style>
-      </p:cxnSp>
+              <a:t>M10 bridge topic</a:t>
+            </a:r>
+          </a:p>
+        </p:txBody>
+      </p:sp>
       <p:sp>
         <p:nvSpPr>
           <p:cNvPr id="10" name="Rounded Rectangle 9"/>
@@ -9977,14 +10734,14 @@
         </p:nvSpPr>
         <p:spPr>
           <a:xfrm>
-            <a:off x="7420356" y="2743200"/>
-            <a:ext cx="2029968" cy="1051560"/>
+            <a:off x="731520" y="3081528"/>
+            <a:ext cx="10835640" cy="1033271"/>
           </a:xfrm>
           <a:prstGeom prst="roundRect">
             <a:avLst/>
           </a:prstGeom>
           <a:solidFill>
-            <a:srgbClr val="FFFFFF"/>
+            <a:srgbClr val="F4F7FB"/>
           </a:solidFill>
           <a:ln>
             <a:solidFill>
@@ -10007,23 +10764,10 @@
           </a:fontRef>
         </p:style>
         <p:txBody>
-          <a:bodyPr rtlCol="0" anchor="ctr" wrap="square" lIns="73152" rIns="73152" tIns="36576" bIns="36576"/>
-          <a:lstStyle/>
-          <a:p>
-            <a:pPr algn="ctr">
-              <a:spcAft>
-                <a:spcPts val="0"/>
-              </a:spcAft>
-              <a:defRPr sz="1900" b="1">
-                <a:solidFill>
-                  <a:srgbClr val="122C4E"/>
-                </a:solidFill>
-                <a:latin typeface="Noto Sans CJK KR"/>
-              </a:defRPr>
-            </a:pPr>
-            <a:r>
-              <a:t>RViz Displays</a:t>
-            </a:r>
+          <a:bodyPr rtlCol="0" anchor="ctr"/>
+          <a:lstStyle/>
+          <a:p>
+            <a:pPr algn="ctr"/>
           </a:p>
         </p:txBody>
       </p:sp>
@@ -10035,8 +10779,8 @@
         </p:nvSpPr>
         <p:spPr>
           <a:xfrm>
-            <a:off x="914400" y="4800600"/>
-            <a:ext cx="10332720" cy="502920"/>
+            <a:off x="960120" y="3236976"/>
+            <a:ext cx="1920240" cy="228600"/>
           </a:xfrm>
           <a:prstGeom prst="rect">
             <a:avLst/>
@@ -10049,19 +10793,220 @@
           </a:bodyPr>
           <a:lstStyle/>
           <a:p>
+            <a:pPr algn="l">
+              <a:spcAft>
+                <a:spcPts val="0"/>
+              </a:spcAft>
+              <a:defRPr sz="1700" b="1">
+                <a:solidFill>
+                  <a:srgbClr val="225B9B"/>
+                </a:solidFill>
+                <a:latin typeface="Noto Sans CJK KR"/>
+              </a:defRPr>
+            </a:pPr>
+            <a:r>
+              <a:t>이번에 직접 만들 것</a:t>
+            </a:r>
+          </a:p>
+        </p:txBody>
+      </p:sp>
+      <p:sp>
+        <p:nvSpPr>
+          <p:cNvPr id="12" name="TextBox 11"/>
+          <p:cNvSpPr txBox="1"/>
+          <p:nvPr/>
+        </p:nvSpPr>
+        <p:spPr>
+          <a:xfrm>
+            <a:off x="2788920" y="3218688"/>
+            <a:ext cx="8229600" cy="566928"/>
+          </a:xfrm>
+          <a:prstGeom prst="rect">
+            <a:avLst/>
+          </a:prstGeom>
+          <a:noFill/>
+        </p:spPr>
+        <p:txBody>
+          <a:bodyPr wrap="square" lIns="73152" rIns="73152" tIns="36576" bIns="36576">
+            <a:spAutoFit/>
+          </a:bodyPr>
+          <a:lstStyle/>
+          <a:p>
+            <a:pPr algn="l">
+              <a:spcAft>
+                <a:spcPts val="0"/>
+              </a:spcAft>
+              <a:defRPr sz="1700" b="0">
+                <a:solidFill>
+                  <a:srgbClr val="122C4E"/>
+                </a:solidFill>
+                <a:latin typeface="Noto Sans CJK KR"/>
+              </a:defRPr>
+            </a:pPr>
+            <a:r>
+              <a:t>Gazebo와 RViz2 역할을 분리하고 RobotModel·TF·센서 display를 같은 frame에서 검증한다.</a:t>
+            </a:r>
+          </a:p>
+        </p:txBody>
+      </p:sp>
+      <p:sp>
+        <p:nvSpPr>
+          <p:cNvPr id="13" name="Rounded Rectangle 12"/>
+          <p:cNvSpPr/>
+          <p:nvPr/>
+        </p:nvSpPr>
+        <p:spPr>
+          <a:xfrm>
+            <a:off x="731520" y="4407408"/>
+            <a:ext cx="10835640" cy="1033271"/>
+          </a:xfrm>
+          <a:prstGeom prst="roundRect">
+            <a:avLst/>
+          </a:prstGeom>
+          <a:solidFill>
+            <a:srgbClr val="F4F7FB"/>
+          </a:solidFill>
+          <a:ln>
+            <a:solidFill>
+              <a:srgbClr val="2A8B5A"/>
+            </a:solidFill>
+          </a:ln>
+        </p:spPr>
+        <p:style>
+          <a:lnRef idx="1">
+            <a:schemeClr val="accent1"/>
+          </a:lnRef>
+          <a:fillRef idx="3">
+            <a:schemeClr val="accent1"/>
+          </a:fillRef>
+          <a:effectRef idx="2">
+            <a:schemeClr val="accent1"/>
+          </a:effectRef>
+          <a:fontRef idx="minor">
+            <a:schemeClr val="lt1"/>
+          </a:fontRef>
+        </p:style>
+        <p:txBody>
+          <a:bodyPr rtlCol="0" anchor="ctr"/>
+          <a:lstStyle/>
+          <a:p>
+            <a:pPr algn="ctr"/>
+          </a:p>
+        </p:txBody>
+      </p:sp>
+      <p:sp>
+        <p:nvSpPr>
+          <p:cNvPr id="14" name="TextBox 13"/>
+          <p:cNvSpPr txBox="1"/>
+          <p:nvPr/>
+        </p:nvSpPr>
+        <p:spPr>
+          <a:xfrm>
+            <a:off x="960120" y="4562856"/>
+            <a:ext cx="1920240" cy="228600"/>
+          </a:xfrm>
+          <a:prstGeom prst="rect">
+            <a:avLst/>
+          </a:prstGeom>
+          <a:noFill/>
+        </p:spPr>
+        <p:txBody>
+          <a:bodyPr wrap="square" lIns="73152" rIns="73152" tIns="36576" bIns="36576">
+            <a:spAutoFit/>
+          </a:bodyPr>
+          <a:lstStyle/>
+          <a:p>
+            <a:pPr algn="l">
+              <a:spcAft>
+                <a:spcPts val="0"/>
+              </a:spcAft>
+              <a:defRPr sz="1700" b="1">
+                <a:solidFill>
+                  <a:srgbClr val="2A8B5A"/>
+                </a:solidFill>
+                <a:latin typeface="Noto Sans CJK KR"/>
+              </a:defRPr>
+            </a:pPr>
+            <a:r>
+              <a:t>만들고 나서 확인할 것</a:t>
+            </a:r>
+          </a:p>
+        </p:txBody>
+      </p:sp>
+      <p:sp>
+        <p:nvSpPr>
+          <p:cNvPr id="15" name="TextBox 14"/>
+          <p:cNvSpPr txBox="1"/>
+          <p:nvPr/>
+        </p:nvSpPr>
+        <p:spPr>
+          <a:xfrm>
+            <a:off x="2788920" y="4544568"/>
+            <a:ext cx="8229600" cy="566928"/>
+          </a:xfrm>
+          <a:prstGeom prst="rect">
+            <a:avLst/>
+          </a:prstGeom>
+          <a:noFill/>
+        </p:spPr>
+        <p:txBody>
+          <a:bodyPr wrap="square" lIns="73152" rIns="73152" tIns="36576" bIns="36576">
+            <a:spAutoFit/>
+          </a:bodyPr>
+          <a:lstStyle/>
+          <a:p>
+            <a:pPr algn="l">
+              <a:spcAft>
+                <a:spcPts val="0"/>
+              </a:spcAft>
+              <a:defRPr sz="1700" b="0">
+                <a:solidFill>
+                  <a:srgbClr val="122C4E"/>
+                </a:solidFill>
+                <a:latin typeface="Noto Sans CJK KR"/>
+              </a:defRPr>
+            </a:pPr>
+            <a:r>
+              <a:t>agv.rviz에 RobotModel·TF·LaserScan·Odometry 설정을 저장하고 실제 화면을 확인한다.</a:t>
+            </a:r>
+          </a:p>
+        </p:txBody>
+      </p:sp>
+      <p:sp>
+        <p:nvSpPr>
+          <p:cNvPr id="16" name="TextBox 15"/>
+          <p:cNvSpPr txBox="1"/>
+          <p:nvPr/>
+        </p:nvSpPr>
+        <p:spPr>
+          <a:xfrm>
+            <a:off x="841248" y="5833872"/>
+            <a:ext cx="10561320" cy="365760"/>
+          </a:xfrm>
+          <a:prstGeom prst="rect">
+            <a:avLst/>
+          </a:prstGeom>
+          <a:noFill/>
+        </p:spPr>
+        <p:txBody>
+          <a:bodyPr wrap="square" lIns="73152" rIns="73152" tIns="36576" bIns="36576">
+            <a:spAutoFit/>
+          </a:bodyPr>
+          <a:lstStyle/>
+          <a:p>
             <a:pPr algn="ctr">
               <a:spcAft>
                 <a:spcPts val="0"/>
               </a:spcAft>
-              <a:defRPr sz="2000" b="1">
-                <a:solidFill>
-                  <a:srgbClr val="225B9B"/>
-                </a:solidFill>
-                <a:latin typeface="Noto Sans CJK KR"/>
-              </a:defRPr>
-            </a:pPr>
-            <a:r>
-              <a:t>기억할 한 문장: 앞 단계의 출력이 다음 단계의 입력이 되도록 topic·frame·파일 이름을 끝까지 유지합니다.</a:t>
+              <a:defRPr sz="1500" b="1">
+                <a:solidFill>
+                  <a:srgbClr val="DB7E22"/>
+                </a:solidFill>
+                <a:latin typeface="Noto Sans CJK KR"/>
+              </a:defRPr>
+            </a:pPr>
+            <a:r>
+              <a:t>이번 모듈은 사용자 파일 없이 ROS 2 기본 도구를 실행해 이후 프로젝트에 필요한 동작을 관찰합니다.</a:t>
             </a:r>
           </a:p>
         </p:txBody>
@@ -10118,7 +11063,7 @@
               </a:defRPr>
             </a:pPr>
             <a:r>
-              <a:t>이번 모듈에서 생성·수정하는 파일</a:t>
+              <a:t>먼저 이번 단계의 완료 모습을 본다</a:t>
             </a:r>
           </a:p>
         </p:txBody>
@@ -10157,7 +11102,7 @@
               </a:defRPr>
             </a:pPr>
             <a:r>
-              <a:t>파일명과 package 경로를 끝까지 동일하게 사용합니다.</a:t>
+              <a:t>지금부터 폴더·파일·코드를 만들면 아래의 실제 결과에 도달합니다. 보이는 기준을 기억한 뒤 구현합니다.</a:t>
             </a:r>
           </a:p>
         </p:txBody>
@@ -10240,68 +11185,30 @@
           </a:p>
         </p:txBody>
       </p:sp>
-      <p:sp>
-        <p:nvSpPr>
-          <p:cNvPr id="6" name="Rounded Rectangle 5"/>
-          <p:cNvSpPr/>
-          <p:nvPr/>
-        </p:nvSpPr>
-        <p:spPr>
-          <a:xfrm>
-            <a:off x="777240" y="1600200"/>
-            <a:ext cx="10789920" cy="4407408"/>
-          </a:xfrm>
-          <a:prstGeom prst="roundRect">
-            <a:avLst/>
-          </a:prstGeom>
-          <a:solidFill>
-            <a:srgbClr val="1D232D"/>
-          </a:solidFill>
-          <a:ln>
-            <a:solidFill>
-              <a:srgbClr val="1D232D"/>
-            </a:solidFill>
-          </a:ln>
-        </p:spPr>
-        <p:style>
-          <a:lnRef idx="1">
-            <a:schemeClr val="accent1"/>
-          </a:lnRef>
-          <a:fillRef idx="3">
-            <a:schemeClr val="accent1"/>
-          </a:fillRef>
-          <a:effectRef idx="2">
-            <a:schemeClr val="accent1"/>
-          </a:effectRef>
-          <a:fontRef idx="minor">
-            <a:schemeClr val="lt1"/>
-          </a:fontRef>
-        </p:style>
-        <p:txBody>
-          <a:bodyPr rtlCol="0" anchor="ctr" wrap="square" lIns="73152" rIns="73152" tIns="36576" bIns="36576"/>
-          <a:lstStyle/>
-          <a:p>
-            <a:pPr algn="l">
-              <a:spcAft>
-                <a:spcPts val="0"/>
-              </a:spcAft>
-              <a:defRPr sz="1600" b="0">
-                <a:solidFill>
-                  <a:srgbClr val="FFFFFF"/>
-                </a:solidFill>
-                <a:latin typeface="DejaVu Sans Mono"/>
-              </a:defRPr>
-            </a:pPr>
-            <a:r>
-              <a:t>~/ros2_curri/agv_ws/src/</a:t>
-            </a:r>
-            <a:br/>
-            <a:r>
-              <a:t>└── (M01은 사용자 파일 없이 ROS 2 내장 demo node를 사용합니다.)</a:t>
-            </a:r>
-          </a:p>
-        </p:txBody>
-      </p:sp>
+      <p:pic>
+        <p:nvPicPr>
+          <p:cNvPr id="6" name="Picture 5" descr="01_rviz_integrated_actual.png"/>
+          <p:cNvPicPr>
+            <a:picLocks noChangeAspect="1"/>
+          </p:cNvPicPr>
+          <p:nvPr/>
+        </p:nvPicPr>
+        <p:blipFill>
+          <a:blip r:embed="rId2"/>
+          <a:stretch>
+            <a:fillRect/>
+          </a:stretch>
+        </p:blipFill>
+        <p:spPr>
+          <a:xfrm>
+            <a:off x="3060639" y="1389888"/>
+            <a:ext cx="6067672" cy="4663440"/>
+          </a:xfrm>
+          <a:prstGeom prst="rect">
+            <a:avLst/>
+          </a:prstGeom>
+        </p:spPr>
+      </p:pic>
       <p:sp>
         <p:nvSpPr>
           <p:cNvPr id="7" name="TextBox 6"/>
@@ -10310,8 +11217,8 @@
         </p:nvSpPr>
         <p:spPr>
           <a:xfrm>
-            <a:off x="877824" y="6144768"/>
-            <a:ext cx="10332720" cy="201168"/>
+            <a:off x="777240" y="6126480"/>
+            <a:ext cx="10607040" cy="228600"/>
           </a:xfrm>
           <a:prstGeom prst="rect">
             <a:avLst/>
@@ -10328,15 +11235,15 @@
               <a:spcAft>
                 <a:spcPts val="0"/>
               </a:spcAft>
-              <a:defRPr sz="1100" b="0">
-                <a:solidFill>
-                  <a:srgbClr val="5C6672"/>
-                </a:solidFill>
-                <a:latin typeface="Noto Sans CJK KR"/>
-              </a:defRPr>
-            </a:pPr>
-            <a:r>
-              <a:t>파일 전체 코드는 다음 슬라이드에 이어집니다. 중간 줄을 빼지 않고 끝까지 제공합니다.</a:t>
+              <a:defRPr sz="1000" b="1">
+                <a:solidFill>
+                  <a:srgbClr val="2A8B5A"/>
+                </a:solidFill>
+                <a:latin typeface="Noto Sans CJK KR"/>
+              </a:defRPr>
+            </a:pPr>
+            <a:r>
+              <a:t>목표 화면: 실제 RViz2: RobotModel·TF·Odometry·LaserScan·Path·Marker display를 함께 연 상태  |  나중에 확인할 것: 명령·설정과 화면의 topic·frame·결과 이름을 대조합니다.</a:t>
             </a:r>
           </a:p>
         </p:txBody>
@@ -10393,7 +11300,7 @@
               </a:defRPr>
             </a:pPr>
             <a:r>
-              <a:t>RViz를 설정 파일로 연다</a:t>
+              <a:t>핵심 흐름을 한 장으로 이해하기</a:t>
             </a:r>
           </a:p>
         </p:txBody>
@@ -10432,7 +11339,7 @@
               </a:defRPr>
             </a:pPr>
             <a:r>
-              <a:t>한 장에는 한 행동만 수행합니다.</a:t>
+              <a:t>상자와 화살표의 방향을 따라 데이터 또는 제어의 흐름을 읽습니다.</a:t>
             </a:r>
           </a:p>
         </p:txBody>
@@ -10517,24 +11424,24 @@
       </p:sp>
       <p:sp>
         <p:nvSpPr>
-          <p:cNvPr id="6" name="Rectangle 5"/>
+          <p:cNvPr id="6" name="Rounded Rectangle 5"/>
           <p:cNvSpPr/>
           <p:nvPr/>
         </p:nvSpPr>
         <p:spPr>
           <a:xfrm>
-            <a:off x="566928" y="1188720"/>
-            <a:ext cx="11064240" cy="347472"/>
-          </a:xfrm>
-          <a:prstGeom prst="rect">
+            <a:off x="2738628" y="2743200"/>
+            <a:ext cx="2029968" cy="1051560"/>
+          </a:xfrm>
+          <a:prstGeom prst="roundRect">
             <a:avLst/>
           </a:prstGeom>
           <a:solidFill>
-            <a:srgbClr val="F4F7FB"/>
+            <a:srgbClr val="FFFFFF"/>
           </a:solidFill>
           <a:ln>
             <a:solidFill>
-              <a:srgbClr val="F4F7FB"/>
+              <a:srgbClr val="225B9B"/>
             </a:solidFill>
           </a:ln>
         </p:spPr>
@@ -10556,11 +11463,11 @@
           <a:bodyPr rtlCol="0" anchor="ctr" wrap="square" lIns="73152" rIns="73152" tIns="36576" bIns="36576"/>
           <a:lstStyle/>
           <a:p>
-            <a:pPr algn="l">
-              <a:spcAft>
-                <a:spcPts val="0"/>
-              </a:spcAft>
-              <a:defRPr sz="1300" b="1">
+            <a:pPr algn="ctr">
+              <a:spcAft>
+                <a:spcPts val="0"/>
+              </a:spcAft>
+              <a:defRPr sz="1900" b="1">
                 <a:solidFill>
                   <a:srgbClr val="122C4E"/>
                 </a:solidFill>
@@ -10568,109 +11475,66 @@
               </a:defRPr>
             </a:pPr>
             <a:r>
-              <a:t>현재 단계 1/3    |    현재 폴더 ~/ros2_curri/agv_ws    |    현재 터미널</a:t>
-            </a:r>
-          </a:p>
-        </p:txBody>
-      </p:sp>
-      <p:sp>
-        <p:nvSpPr>
-          <p:cNvPr id="7" name="TextBox 6"/>
-          <p:cNvSpPr txBox="1"/>
-          <p:nvPr/>
-        </p:nvSpPr>
-        <p:spPr>
-          <a:xfrm>
-            <a:off x="676656" y="1764792"/>
-            <a:ext cx="1828800" cy="347472"/>
-          </a:xfrm>
-          <a:prstGeom prst="rect">
-            <a:avLst/>
-          </a:prstGeom>
-          <a:noFill/>
-        </p:spPr>
-        <p:txBody>
-          <a:bodyPr wrap="square" lIns="73152" rIns="73152" tIns="36576" bIns="36576">
-            <a:spAutoFit/>
-          </a:bodyPr>
-          <a:lstStyle/>
-          <a:p>
-            <a:pPr algn="l">
-              <a:spcAft>
-                <a:spcPts val="0"/>
-              </a:spcAft>
-              <a:defRPr sz="1800" b="1">
-                <a:solidFill>
-                  <a:srgbClr val="225B9B"/>
-                </a:solidFill>
-                <a:latin typeface="Noto Sans CJK KR"/>
-              </a:defRPr>
-            </a:pPr>
-            <a:r>
-              <a:t>왜 하는가</a:t>
-            </a:r>
-          </a:p>
-        </p:txBody>
-      </p:sp>
-      <p:sp>
-        <p:nvSpPr>
-          <p:cNvPr id="8" name="TextBox 7"/>
-          <p:cNvSpPr txBox="1"/>
-          <p:nvPr/>
-        </p:nvSpPr>
-        <p:spPr>
-          <a:xfrm>
-            <a:off x="676656" y="2103120"/>
-            <a:ext cx="10789920" cy="512064"/>
-          </a:xfrm>
-          <a:prstGeom prst="rect">
-            <a:avLst/>
-          </a:prstGeom>
-          <a:noFill/>
-        </p:spPr>
-        <p:txBody>
-          <a:bodyPr wrap="square" lIns="73152" rIns="73152" tIns="36576" bIns="36576">
-            <a:spAutoFit/>
-          </a:bodyPr>
-          <a:lstStyle/>
-          <a:p>
-            <a:pPr algn="l">
-              <a:spcAft>
-                <a:spcPts val="0"/>
-              </a:spcAft>
-              <a:defRPr sz="2000" b="0">
-                <a:solidFill>
-                  <a:srgbClr val="122C4E"/>
-                </a:solidFill>
-                <a:latin typeface="Noto Sans CJK KR"/>
-              </a:defRPr>
-            </a:pPr>
-            <a:r>
-              <a:t>같은 display 설정을 다음 센서 모듈에서도 재사용한다.</a:t>
-            </a:r>
-          </a:p>
-        </p:txBody>
-      </p:sp>
-      <p:sp>
-        <p:nvSpPr>
-          <p:cNvPr id="9" name="Rounded Rectangle 8"/>
+              <a:t>robot_description</a:t>
+            </a:r>
+          </a:p>
+        </p:txBody>
+      </p:sp>
+      <p:cxnSp>
+        <p:nvCxnSpPr>
+          <p:cNvPr id="7" name="Connector 6"/>
+          <p:cNvCxnSpPr/>
+          <p:nvPr/>
+        </p:nvCxnSpPr>
+        <p:spPr>
+          <a:xfrm>
+            <a:off x="4768596" y="3264408"/>
+            <a:ext cx="283463" cy="0"/>
+          </a:xfrm>
+          <a:prstGeom prst="line">
+            <a:avLst/>
+          </a:prstGeom>
+          <a:ln w="31750">
+            <a:solidFill>
+              <a:srgbClr val="225B9B"/>
+            </a:solidFill>
+          </a:ln>
+        </p:spPr>
+        <p:style>
+          <a:lnRef idx="2">
+            <a:schemeClr val="accent1"/>
+          </a:lnRef>
+          <a:fillRef idx="0">
+            <a:schemeClr val="accent1"/>
+          </a:fillRef>
+          <a:effectRef idx="1">
+            <a:schemeClr val="accent1"/>
+          </a:effectRef>
+          <a:fontRef idx="minor">
+            <a:schemeClr val="tx1"/>
+          </a:fontRef>
+        </p:style>
+      </p:cxnSp>
+      <p:sp>
+        <p:nvSpPr>
+          <p:cNvPr id="8" name="Rounded Rectangle 7"/>
           <p:cNvSpPr/>
           <p:nvPr/>
         </p:nvSpPr>
         <p:spPr>
           <a:xfrm>
-            <a:off x="676656" y="2871216"/>
-            <a:ext cx="10835640" cy="2331720"/>
+            <a:off x="5079492" y="2743200"/>
+            <a:ext cx="2029968" cy="1051560"/>
           </a:xfrm>
           <a:prstGeom prst="roundRect">
             <a:avLst/>
           </a:prstGeom>
           <a:solidFill>
-            <a:srgbClr val="1D232D"/>
+            <a:srgbClr val="FFFFFF"/>
           </a:solidFill>
           <a:ln>
             <a:solidFill>
-              <a:srgbClr val="1D232D"/>
+              <a:srgbClr val="225B9B"/>
             </a:solidFill>
           </a:ln>
         </p:spPr>
@@ -10692,37 +11556,126 @@
           <a:bodyPr rtlCol="0" anchor="ctr" wrap="square" lIns="73152" rIns="73152" tIns="36576" bIns="36576"/>
           <a:lstStyle/>
           <a:p>
-            <a:pPr algn="l">
-              <a:spcAft>
-                <a:spcPts val="0"/>
-              </a:spcAft>
-              <a:defRPr sz="1600" b="0">
-                <a:solidFill>
-                  <a:srgbClr val="FFFFFF"/>
-                </a:solidFill>
-                <a:latin typeface="DejaVu Sans Mono"/>
-              </a:defRPr>
-            </a:pPr>
-            <a:r>
-              <a:t>source ~/ros2_curri/agv_ws/install/setup.bash</a:t>
-            </a:r>
-            <a:br/>
-            <a:r>
-              <a:t>rviz2 -d ~/ros2_curri/agv_ws/src/agv_description/rviz/agv.rviz</a:t>
-            </a:r>
-          </a:p>
-        </p:txBody>
-      </p:sp>
-      <p:sp>
-        <p:nvSpPr>
-          <p:cNvPr id="10" name="TextBox 9"/>
+            <a:pPr algn="ctr">
+              <a:spcAft>
+                <a:spcPts val="0"/>
+              </a:spcAft>
+              <a:defRPr sz="1900" b="1">
+                <a:solidFill>
+                  <a:srgbClr val="122C4E"/>
+                </a:solidFill>
+                <a:latin typeface="Noto Sans CJK KR"/>
+              </a:defRPr>
+            </a:pPr>
+            <a:r>
+              <a:t>TF / odom</a:t>
+            </a:r>
+          </a:p>
+        </p:txBody>
+      </p:sp>
+      <p:cxnSp>
+        <p:nvCxnSpPr>
+          <p:cNvPr id="9" name="Connector 8"/>
+          <p:cNvCxnSpPr/>
+          <p:nvPr/>
+        </p:nvCxnSpPr>
+        <p:spPr>
+          <a:xfrm>
+            <a:off x="7109460" y="3264408"/>
+            <a:ext cx="283464" cy="0"/>
+          </a:xfrm>
+          <a:prstGeom prst="line">
+            <a:avLst/>
+          </a:prstGeom>
+          <a:ln w="31750">
+            <a:solidFill>
+              <a:srgbClr val="225B9B"/>
+            </a:solidFill>
+          </a:ln>
+        </p:spPr>
+        <p:style>
+          <a:lnRef idx="2">
+            <a:schemeClr val="accent1"/>
+          </a:lnRef>
+          <a:fillRef idx="0">
+            <a:schemeClr val="accent1"/>
+          </a:fillRef>
+          <a:effectRef idx="1">
+            <a:schemeClr val="accent1"/>
+          </a:effectRef>
+          <a:fontRef idx="minor">
+            <a:schemeClr val="tx1"/>
+          </a:fontRef>
+        </p:style>
+      </p:cxnSp>
+      <p:sp>
+        <p:nvSpPr>
+          <p:cNvPr id="10" name="Rounded Rectangle 9"/>
+          <p:cNvSpPr/>
+          <p:nvPr/>
+        </p:nvSpPr>
+        <p:spPr>
+          <a:xfrm>
+            <a:off x="7420356" y="2743200"/>
+            <a:ext cx="2029968" cy="1051560"/>
+          </a:xfrm>
+          <a:prstGeom prst="roundRect">
+            <a:avLst/>
+          </a:prstGeom>
+          <a:solidFill>
+            <a:srgbClr val="FFFFFF"/>
+          </a:solidFill>
+          <a:ln>
+            <a:solidFill>
+              <a:srgbClr val="225B9B"/>
+            </a:solidFill>
+          </a:ln>
+        </p:spPr>
+        <p:style>
+          <a:lnRef idx="1">
+            <a:schemeClr val="accent1"/>
+          </a:lnRef>
+          <a:fillRef idx="3">
+            <a:schemeClr val="accent1"/>
+          </a:fillRef>
+          <a:effectRef idx="2">
+            <a:schemeClr val="accent1"/>
+          </a:effectRef>
+          <a:fontRef idx="minor">
+            <a:schemeClr val="lt1"/>
+          </a:fontRef>
+        </p:style>
+        <p:txBody>
+          <a:bodyPr rtlCol="0" anchor="ctr" wrap="square" lIns="73152" rIns="73152" tIns="36576" bIns="36576"/>
+          <a:lstStyle/>
+          <a:p>
+            <a:pPr algn="ctr">
+              <a:spcAft>
+                <a:spcPts val="0"/>
+              </a:spcAft>
+              <a:defRPr sz="1900" b="1">
+                <a:solidFill>
+                  <a:srgbClr val="122C4E"/>
+                </a:solidFill>
+                <a:latin typeface="Noto Sans CJK KR"/>
+              </a:defRPr>
+            </a:pPr>
+            <a:r>
+              <a:t>RViz Displays</a:t>
+            </a:r>
+          </a:p>
+        </p:txBody>
+      </p:sp>
+      <p:sp>
+        <p:nvSpPr>
+          <p:cNvPr id="11" name="TextBox 10"/>
           <p:cNvSpPr txBox="1"/>
           <p:nvPr/>
         </p:nvSpPr>
         <p:spPr>
           <a:xfrm>
-            <a:off x="768096" y="5468112"/>
-            <a:ext cx="1143000" cy="256032"/>
+            <a:off x="914400" y="4800600"/>
+            <a:ext cx="10332720" cy="502920"/>
           </a:xfrm>
           <a:prstGeom prst="rect">
             <a:avLst/>
@@ -10735,58 +11688,19 @@
           </a:bodyPr>
           <a:lstStyle/>
           <a:p>
-            <a:pPr algn="l">
-              <a:spcAft>
-                <a:spcPts val="0"/>
-              </a:spcAft>
-              <a:defRPr sz="1800" b="1">
-                <a:solidFill>
-                  <a:srgbClr val="2A8B5A"/>
-                </a:solidFill>
-                <a:latin typeface="Noto Sans CJK KR"/>
-              </a:defRPr>
-            </a:pPr>
-            <a:r>
-              <a:t>확인</a:t>
-            </a:r>
-          </a:p>
-        </p:txBody>
-      </p:sp>
-      <p:sp>
-        <p:nvSpPr>
-          <p:cNvPr id="11" name="TextBox 10"/>
-          <p:cNvSpPr txBox="1"/>
-          <p:nvPr/>
-        </p:nvSpPr>
-        <p:spPr>
-          <a:xfrm>
-            <a:off x="768096" y="5742432"/>
-            <a:ext cx="10561320" cy="347472"/>
-          </a:xfrm>
-          <a:prstGeom prst="rect">
-            <a:avLst/>
-          </a:prstGeom>
-          <a:noFill/>
-        </p:spPr>
-        <p:txBody>
-          <a:bodyPr wrap="square" lIns="73152" rIns="73152" tIns="36576" bIns="36576">
-            <a:spAutoFit/>
-          </a:bodyPr>
-          <a:lstStyle/>
-          <a:p>
-            <a:pPr algn="l">
-              <a:spcAft>
-                <a:spcPts val="0"/>
-              </a:spcAft>
-              <a:defRPr sz="1800" b="0">
-                <a:solidFill>
-                  <a:srgbClr val="122C4E"/>
-                </a:solidFill>
-                <a:latin typeface="Noto Sans CJK KR"/>
-              </a:defRPr>
-            </a:pPr>
-            <a:r>
-              <a:t>명령의 출력에서 topic·frame·파일 이름 또는 성공 메시지를 찾으면 이 단계가 완료됩니다.</a:t>
+            <a:pPr algn="ctr">
+              <a:spcAft>
+                <a:spcPts val="0"/>
+              </a:spcAft>
+              <a:defRPr sz="2000" b="1">
+                <a:solidFill>
+                  <a:srgbClr val="225B9B"/>
+                </a:solidFill>
+                <a:latin typeface="Noto Sans CJK KR"/>
+              </a:defRPr>
+            </a:pPr>
+            <a:r>
+              <a:t>기억할 한 문장: 앞 단계의 출력이 다음 단계의 입력이 되도록 topic·frame·파일 이름을 끝까지 유지합니다.</a:t>
             </a:r>
           </a:p>
         </p:txBody>
@@ -10843,7 +11757,7 @@
               </a:defRPr>
             </a:pPr>
             <a:r>
-              <a:t>RobotModel과 TF를 먼저 확인한다</a:t>
+              <a:t>이번에 프로젝트 안에 새로 만드는 파일</a:t>
             </a:r>
           </a:p>
         </p:txBody>
@@ -10882,7 +11796,7 @@
               </a:defRPr>
             </a:pPr>
             <a:r>
-              <a:t>한 장에는 한 행동만 수행합니다.</a:t>
+              <a:t>아래 파일은 완성본을 복사하지 않고, 다음 슬라이드에서 폴더·빈 파일부터 직접 만듭니다.</a:t>
             </a:r>
           </a:p>
         </p:txBody>
@@ -10967,24 +11881,24 @@
       </p:sp>
       <p:sp>
         <p:nvSpPr>
-          <p:cNvPr id="6" name="Rectangle 5"/>
+          <p:cNvPr id="6" name="Rounded Rectangle 5"/>
           <p:cNvSpPr/>
           <p:nvPr/>
         </p:nvSpPr>
         <p:spPr>
           <a:xfrm>
-            <a:off x="566928" y="1188720"/>
-            <a:ext cx="11064240" cy="347472"/>
-          </a:xfrm>
-          <a:prstGeom prst="rect">
+            <a:off x="777240" y="1600200"/>
+            <a:ext cx="10789920" cy="4407408"/>
+          </a:xfrm>
+          <a:prstGeom prst="roundRect">
             <a:avLst/>
           </a:prstGeom>
           <a:solidFill>
-            <a:srgbClr val="F4F7FB"/>
+            <a:srgbClr val="1D232D"/>
           </a:solidFill>
           <a:ln>
             <a:solidFill>
-              <a:srgbClr val="F4F7FB"/>
+              <a:srgbClr val="1D232D"/>
             </a:solidFill>
           </a:ln>
         </p:spPr>
@@ -11010,15 +11924,19 @@
               <a:spcAft>
                 <a:spcPts val="0"/>
               </a:spcAft>
-              <a:defRPr sz="1300" b="1">
-                <a:solidFill>
-                  <a:srgbClr val="122C4E"/>
-                </a:solidFill>
-                <a:latin typeface="Noto Sans CJK KR"/>
-              </a:defRPr>
-            </a:pPr>
-            <a:r>
-              <a:t>현재 단계 2/3    |    현재 폴더 ~/ros2_curri/agv_ws    |    현재 터미널</a:t>
+              <a:defRPr sz="1600" b="0">
+                <a:solidFill>
+                  <a:srgbClr val="FFFFFF"/>
+                </a:solidFill>
+                <a:latin typeface="DejaVu Sans Mono"/>
+              </a:defRPr>
+            </a:pPr>
+            <a:r>
+              <a:t>~/ros2_curri/my_agv_ws/src/</a:t>
+            </a:r>
+            <a:br/>
+            <a:r>
+              <a:t>└── (M01은 사용자 파일 없이 ROS 2 내장 demo node를 사용합니다.)</a:t>
             </a:r>
           </a:p>
         </p:txBody>
@@ -11031,8 +11949,8 @@
         </p:nvSpPr>
         <p:spPr>
           <a:xfrm>
-            <a:off x="676656" y="1764792"/>
-            <a:ext cx="1828800" cy="347472"/>
+            <a:off x="877824" y="6144768"/>
+            <a:ext cx="10332720" cy="201168"/>
           </a:xfrm>
           <a:prstGeom prst="rect">
             <a:avLst/>
@@ -11045,202 +11963,19 @@
           </a:bodyPr>
           <a:lstStyle/>
           <a:p>
-            <a:pPr algn="l">
-              <a:spcAft>
-                <a:spcPts val="0"/>
-              </a:spcAft>
-              <a:defRPr sz="1800" b="1">
-                <a:solidFill>
-                  <a:srgbClr val="225B9B"/>
-                </a:solidFill>
-                <a:latin typeface="Noto Sans CJK KR"/>
-              </a:defRPr>
-            </a:pPr>
-            <a:r>
-              <a:t>왜 하는가</a:t>
-            </a:r>
-          </a:p>
-        </p:txBody>
-      </p:sp>
-      <p:sp>
-        <p:nvSpPr>
-          <p:cNvPr id="8" name="TextBox 7"/>
-          <p:cNvSpPr txBox="1"/>
-          <p:nvPr/>
-        </p:nvSpPr>
-        <p:spPr>
-          <a:xfrm>
-            <a:off x="676656" y="2103120"/>
-            <a:ext cx="10789920" cy="512064"/>
-          </a:xfrm>
-          <a:prstGeom prst="rect">
-            <a:avLst/>
-          </a:prstGeom>
-          <a:noFill/>
-        </p:spPr>
-        <p:txBody>
-          <a:bodyPr wrap="square" lIns="73152" rIns="73152" tIns="36576" bIns="36576">
-            <a:spAutoFit/>
-          </a:bodyPr>
-          <a:lstStyle/>
-          <a:p>
-            <a:pPr algn="l">
-              <a:spcAft>
-                <a:spcPts val="0"/>
-              </a:spcAft>
-              <a:defRPr sz="2000" b="0">
-                <a:solidFill>
-                  <a:srgbClr val="122C4E"/>
-                </a:solidFill>
-                <a:latin typeface="Noto Sans CJK KR"/>
-              </a:defRPr>
-            </a:pPr>
-            <a:r>
-              <a:t>모델과 frame이 맞아야 scan·image 위치도 맞는다.</a:t>
-            </a:r>
-          </a:p>
-        </p:txBody>
-      </p:sp>
-      <p:sp>
-        <p:nvSpPr>
-          <p:cNvPr id="9" name="Rounded Rectangle 8"/>
-          <p:cNvSpPr/>
-          <p:nvPr/>
-        </p:nvSpPr>
-        <p:spPr>
-          <a:xfrm>
-            <a:off x="676656" y="2871216"/>
-            <a:ext cx="10835640" cy="2331720"/>
-          </a:xfrm>
-          <a:prstGeom prst="roundRect">
-            <a:avLst/>
-          </a:prstGeom>
-          <a:solidFill>
-            <a:srgbClr val="1D232D"/>
-          </a:solidFill>
-          <a:ln>
-            <a:solidFill>
-              <a:srgbClr val="1D232D"/>
-            </a:solidFill>
-          </a:ln>
-        </p:spPr>
-        <p:style>
-          <a:lnRef idx="1">
-            <a:schemeClr val="accent1"/>
-          </a:lnRef>
-          <a:fillRef idx="3">
-            <a:schemeClr val="accent1"/>
-          </a:fillRef>
-          <a:effectRef idx="2">
-            <a:schemeClr val="accent1"/>
-          </a:effectRef>
-          <a:fontRef idx="minor">
-            <a:schemeClr val="lt1"/>
-          </a:fontRef>
-        </p:style>
-        <p:txBody>
-          <a:bodyPr rtlCol="0" anchor="ctr" wrap="square" lIns="73152" rIns="73152" tIns="36576" bIns="36576"/>
-          <a:lstStyle/>
-          <a:p>
-            <a:pPr algn="l">
-              <a:spcAft>
-                <a:spcPts val="0"/>
-              </a:spcAft>
-              <a:defRPr sz="1600" b="0">
-                <a:solidFill>
-                  <a:srgbClr val="FFFFFF"/>
-                </a:solidFill>
-                <a:latin typeface="DejaVu Sans Mono"/>
-              </a:defRPr>
-            </a:pPr>
-            <a:r>
-              <a:t>Fixed Frame: odom 또는 base_link</a:t>
-            </a:r>
-            <a:br/>
-            <a:r>
-              <a:t>Add → RobotModel → Description Topic: /robot_description</a:t>
-            </a:r>
-            <a:br/>
-            <a:r>
-              <a:t>Add → TF</a:t>
-            </a:r>
-          </a:p>
-        </p:txBody>
-      </p:sp>
-      <p:sp>
-        <p:nvSpPr>
-          <p:cNvPr id="10" name="TextBox 9"/>
-          <p:cNvSpPr txBox="1"/>
-          <p:nvPr/>
-        </p:nvSpPr>
-        <p:spPr>
-          <a:xfrm>
-            <a:off x="768096" y="5468112"/>
-            <a:ext cx="1143000" cy="256032"/>
-          </a:xfrm>
-          <a:prstGeom prst="rect">
-            <a:avLst/>
-          </a:prstGeom>
-          <a:noFill/>
-        </p:spPr>
-        <p:txBody>
-          <a:bodyPr wrap="square" lIns="73152" rIns="73152" tIns="36576" bIns="36576">
-            <a:spAutoFit/>
-          </a:bodyPr>
-          <a:lstStyle/>
-          <a:p>
-            <a:pPr algn="l">
-              <a:spcAft>
-                <a:spcPts val="0"/>
-              </a:spcAft>
-              <a:defRPr sz="1800" b="1">
-                <a:solidFill>
-                  <a:srgbClr val="2A8B5A"/>
-                </a:solidFill>
-                <a:latin typeface="Noto Sans CJK KR"/>
-              </a:defRPr>
-            </a:pPr>
-            <a:r>
-              <a:t>확인</a:t>
-            </a:r>
-          </a:p>
-        </p:txBody>
-      </p:sp>
-      <p:sp>
-        <p:nvSpPr>
-          <p:cNvPr id="11" name="TextBox 10"/>
-          <p:cNvSpPr txBox="1"/>
-          <p:nvPr/>
-        </p:nvSpPr>
-        <p:spPr>
-          <a:xfrm>
-            <a:off x="768096" y="5742432"/>
-            <a:ext cx="10561320" cy="347472"/>
-          </a:xfrm>
-          <a:prstGeom prst="rect">
-            <a:avLst/>
-          </a:prstGeom>
-          <a:noFill/>
-        </p:spPr>
-        <p:txBody>
-          <a:bodyPr wrap="square" lIns="73152" rIns="73152" tIns="36576" bIns="36576">
-            <a:spAutoFit/>
-          </a:bodyPr>
-          <a:lstStyle/>
-          <a:p>
-            <a:pPr algn="l">
-              <a:spcAft>
-                <a:spcPts val="0"/>
-              </a:spcAft>
-              <a:defRPr sz="1800" b="0">
-                <a:solidFill>
-                  <a:srgbClr val="122C4E"/>
-                </a:solidFill>
-                <a:latin typeface="Noto Sans CJK KR"/>
-              </a:defRPr>
-            </a:pPr>
-            <a:r>
-              <a:t>명령의 출력에서 topic·frame·파일 이름 또는 성공 메시지를 찾으면 이 단계가 완료됩니다.</a:t>
+            <a:pPr algn="ctr">
+              <a:spcAft>
+                <a:spcPts val="0"/>
+              </a:spcAft>
+              <a:defRPr sz="1100" b="0">
+                <a:solidFill>
+                  <a:srgbClr val="5C6672"/>
+                </a:solidFill>
+                <a:latin typeface="Noto Sans CJK KR"/>
+              </a:defRPr>
+            </a:pPr>
+            <a:r>
+              <a:t>파일 하나를 만들고 저장한 뒤에만 다음 파일로 넘어갑니다. Complete는 오류가 풀리지 않을 때만 비교합니다.</a:t>
             </a:r>
           </a:p>
         </p:txBody>
@@ -11297,7 +12032,7 @@
               </a:defRPr>
             </a:pPr>
             <a:r>
-              <a:t>센서 display를 추가한다</a:t>
+              <a:t>구현 뒤 실행 1/3: RViz를 설정 파일로 연다</a:t>
             </a:r>
           </a:p>
         </p:txBody>
@@ -11336,7 +12071,7 @@
               </a:defRPr>
             </a:pPr>
             <a:r>
-              <a:t>한 장에는 한 행동만 수행합니다.</a:t>
+              <a:t>방금 직접 만든 파일을 실행·검사하며 다음 파일로 넘어갈 기준을 만듭니다.</a:t>
             </a:r>
           </a:p>
         </p:txBody>
@@ -11472,7 +12207,7 @@
               </a:defRPr>
             </a:pPr>
             <a:r>
-              <a:t>현재 단계 3/3    |    현재 폴더 ~/ros2_curri/agv_ws    |    현재 터미널</a:t>
+              <a:t>현재 단계 실행 1/3    |    현재 폴더 ~/ros2_curri/my_agv_ws    |    현재 터미널</a:t>
             </a:r>
           </a:p>
         </p:txBody>
@@ -11550,7 +12285,7 @@
               </a:defRPr>
             </a:pPr>
             <a:r>
-              <a:t>각 display는 topic과 message frame_id를 TF로 변환한다.</a:t>
+              <a:t>같은 display 설정을 다음 센서 모듈에서도 재사용한다.</a:t>
             </a:r>
           </a:p>
         </p:txBody>
@@ -11608,15 +12343,11 @@
               </a:defRPr>
             </a:pPr>
             <a:r>
-              <a:t>Add → LaserScan → Topic: /scan</a:t>
+              <a:t>source ~/ros2_curri/my_agv_ws/install/setup.bash</a:t>
             </a:r>
             <a:br/>
             <a:r>
-              <a:t>Add → Odometry → Topic: /odom</a:t>
-            </a:r>
-            <a:br/>
-            <a:r>
-              <a:t>File → Save Config As → agv.rviz</a:t>
+              <a:t>rviz2 -d ~/ros2_curri/my_agv_ws/src/agv_description/rviz/agv.rviz</a:t>
             </a:r>
           </a:p>
         </p:txBody>
@@ -11694,7 +12425,7 @@
               </a:defRPr>
             </a:pPr>
             <a:r>
-              <a:t>명령의 출력에서 topic·frame·파일 이름 또는 성공 메시지를 찾으면 이 단계가 완료됩니다.</a:t>
+              <a:t>출력에서 topic·frame·파일 이름 또는 성공 메시지를 찾고, 맞지 않으면 다음 파일로 가지 않습니다.</a:t>
             </a:r>
           </a:p>
         </p:txBody>

--- a/blocks/C_drive_visualization/M11_rviz_integration/M11_RViz2_구동_상태_검증.pptx
+++ b/blocks/C_drive_visualization/M11_rviz_integration/M11_RViz2_구동_상태_검증.pptx
@@ -23,6 +23,9 @@
     <p:sldId id="271" r:id="rId23"/>
     <p:sldId id="272" r:id="rId24"/>
     <p:sldId id="273" r:id="rId25"/>
+    <p:sldId id="274" r:id="rId26"/>
+    <p:sldId id="275" r:id="rId27"/>
+    <p:sldId id="276" r:id="rId28"/>
   </p:sldIdLst>
   <p:sldSz cx="12191999" cy="6858000" type="screen4x3"/>
   <p:notesSz cx="6858000" cy="9144000"/>
@@ -609,27 +612,17 @@
           <a:lstStyle/>
           <a:p>
             <a:r>
-              <a:t>[설명] 모델과 frame이 맞아야 scan·image 위치도 맞는다.</a:t>
-            </a:r>
-          </a:p>
-          <a:p>
-            <a:r>
-              <a:t>[실행] Fixed Frame: odom 또는 base_link</a:t>
-            </a:r>
-          </a:p>
-          <a:p>
-            <a:r>
-              <a:t>Add → RobotModel → Description Topic: /robot_description</a:t>
-            </a:r>
-          </a:p>
-          <a:p>
-            <a:r>
-              <a:t>Add → TF</a:t>
-            </a:r>
-          </a:p>
-          <a:p>
-            <a:r>
-              <a:t>[확인] 명령 출력에서 슬라이드의 확인 항목을 찾는다.</a:t>
+              <a:t>[설명] 파일 구현이 없는 모듈에서도 명령의 역할과 관찰 결과를 코드 설명처럼 연결한다.</a:t>
+            </a:r>
+          </a:p>
+          <a:p>
+            <a:r>
+              <a:t>[실행] 슬라이드의 명령 또는 파일 작성 단계를 진행한다.</a:t>
+            </a:r>
+          </a:p>
+          <a:p>
+            <a:r>
+              <a:t>[확인] agv.rviz에 RobotModel·TF·LaserScan·Odometry 설정을 저장하고 실제 화면을 확인한다.</a:t>
             </a:r>
           </a:p>
           <a:p>
@@ -709,27 +702,17 @@
           <a:lstStyle/>
           <a:p>
             <a:r>
-              <a:t>[설명] 각 display는 topic과 message frame_id를 TF로 변환한다.</a:t>
-            </a:r>
-          </a:p>
-          <a:p>
-            <a:r>
-              <a:t>[실행] Add → LaserScan → Topic: /scan</a:t>
-            </a:r>
-          </a:p>
-          <a:p>
-            <a:r>
-              <a:t>Add → Odometry → Topic: /odom</a:t>
-            </a:r>
-          </a:p>
-          <a:p>
-            <a:r>
-              <a:t>File → Save Config As → agv.rviz</a:t>
-            </a:r>
-          </a:p>
-          <a:p>
-            <a:r>
-              <a:t>[확인] 명령 출력에서 슬라이드의 확인 항목을 찾는다.</a:t>
+              <a:t>[설명] 파일 구현이 없는 모듈에서도 명령의 역할과 관찰 결과를 코드 설명처럼 연결한다.</a:t>
+            </a:r>
+          </a:p>
+          <a:p>
+            <a:r>
+              <a:t>[실행] 슬라이드의 명령 또는 파일 작성 단계를 진행한다.</a:t>
+            </a:r>
+          </a:p>
+          <a:p>
+            <a:r>
+              <a:t>[확인] agv.rviz에 RobotModel·TF·LaserScan·Odometry 설정을 저장하고 실제 화면을 확인한다.</a:t>
             </a:r>
           </a:p>
           <a:p>
@@ -809,7 +792,7 @@
           <a:lstStyle/>
           <a:p>
             <a:r>
-              <a:t>[설명] build/source/run을 생략 없이 실행한다.</a:t>
+              <a:t>[설명] 같은 display 설정을 다음 센서 모듈에서도 재사용한다.</a:t>
             </a:r>
           </a:p>
           <a:p>
@@ -819,12 +802,12 @@
           </a:p>
           <a:p>
             <a:r>
-              <a:t>ros2 launch agv_bringup agv_sim.launch.py</a:t>
-            </a:r>
-          </a:p>
-          <a:p>
-            <a:r>
-              <a:t>[확인] agv.rviz에 RobotModel·TF·LaserScan·Odometry 설정을 저장하고 실제 화면을 확인한다.</a:t>
+              <a:t>rviz2 -d ~/ros2_curri/my_agv_ws/src/agv_description/rviz/agv.rviz</a:t>
+            </a:r>
+          </a:p>
+          <a:p>
+            <a:r>
+              <a:t>[확인] 명령 출력에서 슬라이드의 확인 항목을 찾는다.</a:t>
             </a:r>
           </a:p>
           <a:p>
@@ -904,17 +887,27 @@
           <a:lstStyle/>
           <a:p>
             <a:r>
-              <a:t>[설명] 실제 Ubuntu/ROS 2 환경에서 생성한 검증 화면이다.</a:t>
-            </a:r>
-          </a:p>
-          <a:p>
-            <a:r>
-              <a:t>[실행] 슬라이드의 명령 또는 파일 작성 단계를 진행한다.</a:t>
-            </a:r>
-          </a:p>
-          <a:p>
-            <a:r>
-              <a:t>[확인] ① 명령/설정  ② 정상 출력 또는 화면  ③ 다음 검증 명령으로 재확인</a:t>
+              <a:t>[설명] 모델과 frame이 맞아야 scan·image 위치도 맞는다.</a:t>
+            </a:r>
+          </a:p>
+          <a:p>
+            <a:r>
+              <a:t>[실행] Fixed Frame: odom 또는 base_link</a:t>
+            </a:r>
+          </a:p>
+          <a:p>
+            <a:r>
+              <a:t>Add → RobotModel → Description Topic: /robot_description</a:t>
+            </a:r>
+          </a:p>
+          <a:p>
+            <a:r>
+              <a:t>Add → TF</a:t>
+            </a:r>
+          </a:p>
+          <a:p>
+            <a:r>
+              <a:t>[확인] 명령 출력에서 슬라이드의 확인 항목을 찾는다.</a:t>
             </a:r>
           </a:p>
           <a:p>
@@ -994,27 +987,27 @@
           <a:lstStyle/>
           <a:p>
             <a:r>
-              <a:t>[설명] 검증 명령은 GUI 결과와 별도로 실행해 재현 가능한 완료 기준을 만든다.</a:t>
-            </a:r>
-          </a:p>
-          <a:p>
-            <a:r>
-              <a:t>[실행] ros2 topic info /robot_description</a:t>
-            </a:r>
-          </a:p>
-          <a:p>
-            <a:r>
-              <a:t>ros2 topic echo /scan --once</a:t>
-            </a:r>
-          </a:p>
-          <a:p>
-            <a:r>
-              <a:t>ros2 topic echo /odom --once</a:t>
-            </a:r>
-          </a:p>
-          <a:p>
-            <a:r>
-              <a:t>[확인] agv.rviz에 RobotModel·TF·LaserScan·Odometry 설정을 저장하고 실제 화면을 확인한다.</a:t>
+              <a:t>[설명] 각 display는 topic과 message frame_id를 TF로 변환한다.</a:t>
+            </a:r>
+          </a:p>
+          <a:p>
+            <a:r>
+              <a:t>[실행] Add → LaserScan → Topic: /scan</a:t>
+            </a:r>
+          </a:p>
+          <a:p>
+            <a:r>
+              <a:t>Add → Odometry → Topic: /odom</a:t>
+            </a:r>
+          </a:p>
+          <a:p>
+            <a:r>
+              <a:t>File → Save Config As → agv.rviz</a:t>
+            </a:r>
+          </a:p>
+          <a:p>
+            <a:r>
+              <a:t>[확인] 명령 출력에서 슬라이드의 확인 항목을 찾는다.</a:t>
             </a:r>
           </a:p>
           <a:p>
@@ -1094,17 +1087,22 @@
           <a:lstStyle/>
           <a:p>
             <a:r>
-              <a:t>[설명] 오류를 대신 해결하지 말고 증상부터 우선 확인 순서대로 교육생이 실행하게 한다.</a:t>
-            </a:r>
-          </a:p>
-          <a:p>
-            <a:r>
-              <a:t>[실행] 슬라이드의 명령 또는 파일 작성 단계를 진행한다.</a:t>
-            </a:r>
-          </a:p>
-          <a:p>
-            <a:r>
-              <a:t>[확인] 수정 뒤 첫 검증 명령을 다시 실행한다.</a:t>
+              <a:t>[설명] build/source/run을 생략 없이 실행한다.</a:t>
+            </a:r>
+          </a:p>
+          <a:p>
+            <a:r>
+              <a:t>[실행] source ~/ros2_curri/my_agv_ws/install/setup.bash</a:t>
+            </a:r>
+          </a:p>
+          <a:p>
+            <a:r>
+              <a:t>ros2 launch agv_bringup agv_sim.launch.py</a:t>
+            </a:r>
+          </a:p>
+          <a:p>
+            <a:r>
+              <a:t>[확인] agv.rviz에 RobotModel·TF·LaserScan·Odometry 설정을 저장하고 실제 화면을 확인한다.</a:t>
             </a:r>
           </a:p>
           <a:p>
@@ -1114,7 +1112,7 @@
           </a:p>
           <a:p>
             <a:r>
-              <a:t>[오류] 슬라이드의 두 대표 오류를 먼저 사용한다.</a:t>
+              <a:t>[오류] 오류가 나면 현재 폴더, source, 파일 경로를 먼저 확인한다.</a:t>
             </a:r>
           </a:p>
         </p:txBody>
@@ -1184,7 +1182,7 @@
           <a:lstStyle/>
           <a:p>
             <a:r>
-              <a:t>[설명] 교육생이 직접 한 값만 바꿔 원인과 결과를 연결하게 한다.</a:t>
+              <a:t>[설명] 실제 Ubuntu/ROS 2 환경에서 생성한 검증 화면이다.</a:t>
             </a:r>
           </a:p>
           <a:p>
@@ -1194,7 +1192,7 @@
           </a:p>
           <a:p>
             <a:r>
-              <a:t>[확인] 원래 값과 변경 값을 모두 기록한다.</a:t>
+              <a:t>[확인] ① 명령/설정  ② 정상 출력 또는 화면  ③ 다음 검증 명령으로 재확인</a:t>
             </a:r>
           </a:p>
           <a:p>
@@ -1274,17 +1272,27 @@
           <a:lstStyle/>
           <a:p>
             <a:r>
-              <a:t>[설명] 교육생이 자신의 workspace·캡처·로그를 저장했는지 확인하고 다음 모듈의 시작 상태를 읽는다.</a:t>
-            </a:r>
-          </a:p>
-          <a:p>
-            <a:r>
-              <a:t>[실행] 슬라이드의 명령 또는 파일 작성 단계를 진행한다.</a:t>
-            </a:r>
-          </a:p>
-          <a:p>
-            <a:r>
-              <a:t>[확인] M12~M15 센서 display 시작 조건을 말할 수 있다.</a:t>
+              <a:t>[설명] 검증 명령은 GUI 결과와 별도로 실행해 재현 가능한 완료 기준을 만든다.</a:t>
+            </a:r>
+          </a:p>
+          <a:p>
+            <a:r>
+              <a:t>[실행] ros2 topic info /robot_description</a:t>
+            </a:r>
+          </a:p>
+          <a:p>
+            <a:r>
+              <a:t>ros2 topic echo /scan --once</a:t>
+            </a:r>
+          </a:p>
+          <a:p>
+            <a:r>
+              <a:t>ros2 topic echo /odom --once</a:t>
+            </a:r>
+          </a:p>
+          <a:p>
+            <a:r>
+              <a:t>[확인] agv.rviz에 RobotModel·TF·LaserScan·Odometry 설정을 저장하고 실제 화면을 확인한다.</a:t>
             </a:r>
           </a:p>
           <a:p>
@@ -1364,7 +1372,7 @@
           <a:lstStyle/>
           <a:p>
             <a:r>
-              <a:t>[설명] 공식 문서는 버전 차이와 확장 학습을 확인할 때 사용한다.</a:t>
+              <a:t>[설명] 오류를 대신 해결하지 말고 증상부터 우선 확인 순서대로 교육생이 실행하게 한다.</a:t>
             </a:r>
           </a:p>
           <a:p>
@@ -1374,7 +1382,97 @@
           </a:p>
           <a:p>
             <a:r>
-              <a:t>[확인] 학습자는 본문만으로 현재 모듈을 완료한 상태여야 한다.</a:t>
+              <a:t>[확인] 수정 뒤 첫 검증 명령을 다시 실행한다.</a:t>
+            </a:r>
+          </a:p>
+          <a:p>
+            <a:r>
+              <a:t>[멈춤] 교육생이 현재 체크포인트를 통과할 때까지 기다린다.</a:t>
+            </a:r>
+          </a:p>
+          <a:p>
+            <a:r>
+              <a:t>[오류] 슬라이드의 두 대표 오류를 먼저 사용한다.</a:t>
+            </a:r>
+          </a:p>
+        </p:txBody>
+      </p:sp>
+      <p:sp>
+        <p:nvSpPr>
+          <p:cNvPr id="4" name="Slide Number Placeholder 3"/>
+          <p:cNvSpPr>
+            <a:spLocks noGrp="1"/>
+          </p:cNvSpPr>
+          <p:nvPr>
+            <p:ph type="sldNum" idx="5" sz="quarter"/>
+          </p:nvPr>
+        </p:nvSpPr>
+        <p:spPr/>
+      </p:sp>
+    </p:spTree>
+  </p:cSld>
+  <p:clrMapOvr>
+    <a:masterClrMapping/>
+  </p:clrMapOvr>
+</p:notes>
+</file>
+
+<file path=ppt/notesSlides/notesSlide19.xml><?xml version="1.0" encoding="utf-8"?>
+<p:notes xmlns:a="http://schemas.openxmlformats.org/drawingml/2006/main" xmlns:p="http://schemas.openxmlformats.org/presentationml/2006/main" xmlns:r="http://schemas.openxmlformats.org/officeDocument/2006/relationships">
+  <p:cSld>
+    <p:spTree>
+      <p:nvGrpSpPr>
+        <p:cNvPr id="1" name=""/>
+        <p:cNvGrpSpPr/>
+        <p:nvPr/>
+      </p:nvGrpSpPr>
+      <p:grpSpPr>
+        <a:xfrm>
+          <a:off x="0" y="0"/>
+          <a:ext cx="0" cy="0"/>
+          <a:chOff x="0" y="0"/>
+          <a:chExt cx="0" cy="0"/>
+        </a:xfrm>
+      </p:grpSpPr>
+      <p:sp>
+        <p:nvSpPr>
+          <p:cNvPr id="2" name="Slide Image Placeholder 1"/>
+          <p:cNvSpPr>
+            <a:spLocks noGrp="1"/>
+          </p:cNvSpPr>
+          <p:nvPr>
+            <p:ph type="sldImg" idx="2"/>
+          </p:nvPr>
+        </p:nvSpPr>
+        <p:spPr/>
+      </p:sp>
+      <p:sp>
+        <p:nvSpPr>
+          <p:cNvPr id="3" name="Notes Placeholder 2"/>
+          <p:cNvSpPr>
+            <a:spLocks noGrp="1"/>
+          </p:cNvSpPr>
+          <p:nvPr>
+            <p:ph type="body" idx="3" sz="quarter"/>
+          </p:nvPr>
+        </p:nvSpPr>
+        <p:spPr/>
+        <p:txBody>
+          <a:bodyPr/>
+          <a:lstStyle/>
+          <a:p>
+            <a:r>
+              <a:t>[설명] 교육생이 직접 한 값만 바꿔 원인과 결과를 연결하게 한다.</a:t>
+            </a:r>
+          </a:p>
+          <a:p>
+            <a:r>
+              <a:t>[실행] 슬라이드의 명령 또는 파일 작성 단계를 진행한다.</a:t>
+            </a:r>
+          </a:p>
+          <a:p>
+            <a:r>
+              <a:t>[확인] 원래 값과 변경 값을 모두 기록한다.</a:t>
             </a:r>
           </a:p>
           <a:p>
@@ -1499,6 +1597,186 @@
 </p:notes>
 </file>
 
+<file path=ppt/notesSlides/notesSlide20.xml><?xml version="1.0" encoding="utf-8"?>
+<p:notes xmlns:a="http://schemas.openxmlformats.org/drawingml/2006/main" xmlns:p="http://schemas.openxmlformats.org/presentationml/2006/main" xmlns:r="http://schemas.openxmlformats.org/officeDocument/2006/relationships">
+  <p:cSld>
+    <p:spTree>
+      <p:nvGrpSpPr>
+        <p:cNvPr id="1" name=""/>
+        <p:cNvGrpSpPr/>
+        <p:nvPr/>
+      </p:nvGrpSpPr>
+      <p:grpSpPr>
+        <a:xfrm>
+          <a:off x="0" y="0"/>
+          <a:ext cx="0" cy="0"/>
+          <a:chOff x="0" y="0"/>
+          <a:chExt cx="0" cy="0"/>
+        </a:xfrm>
+      </p:grpSpPr>
+      <p:sp>
+        <p:nvSpPr>
+          <p:cNvPr id="2" name="Slide Image Placeholder 1"/>
+          <p:cNvSpPr>
+            <a:spLocks noGrp="1"/>
+          </p:cNvSpPr>
+          <p:nvPr>
+            <p:ph type="sldImg" idx="2"/>
+          </p:nvPr>
+        </p:nvSpPr>
+        <p:spPr/>
+      </p:sp>
+      <p:sp>
+        <p:nvSpPr>
+          <p:cNvPr id="3" name="Notes Placeholder 2"/>
+          <p:cNvSpPr>
+            <a:spLocks noGrp="1"/>
+          </p:cNvSpPr>
+          <p:nvPr>
+            <p:ph type="body" idx="3" sz="quarter"/>
+          </p:nvPr>
+        </p:nvSpPr>
+        <p:spPr/>
+        <p:txBody>
+          <a:bodyPr/>
+          <a:lstStyle/>
+          <a:p>
+            <a:r>
+              <a:t>[설명] 교육생이 자신의 workspace·캡처·로그를 저장했는지 확인하고 다음 모듈의 시작 상태를 읽는다.</a:t>
+            </a:r>
+          </a:p>
+          <a:p>
+            <a:r>
+              <a:t>[실행] 슬라이드의 명령 또는 파일 작성 단계를 진행한다.</a:t>
+            </a:r>
+          </a:p>
+          <a:p>
+            <a:r>
+              <a:t>[확인] M12~M15 센서 display 시작 조건을 말할 수 있다.</a:t>
+            </a:r>
+          </a:p>
+          <a:p>
+            <a:r>
+              <a:t>[멈춤] 교육생이 현재 체크포인트를 통과할 때까지 기다린다.</a:t>
+            </a:r>
+          </a:p>
+          <a:p>
+            <a:r>
+              <a:t>[오류] 오류가 나면 현재 폴더, source, 파일 경로를 먼저 확인한다.</a:t>
+            </a:r>
+          </a:p>
+        </p:txBody>
+      </p:sp>
+      <p:sp>
+        <p:nvSpPr>
+          <p:cNvPr id="4" name="Slide Number Placeholder 3"/>
+          <p:cNvSpPr>
+            <a:spLocks noGrp="1"/>
+          </p:cNvSpPr>
+          <p:nvPr>
+            <p:ph type="sldNum" idx="5" sz="quarter"/>
+          </p:nvPr>
+        </p:nvSpPr>
+        <p:spPr/>
+      </p:sp>
+    </p:spTree>
+  </p:cSld>
+  <p:clrMapOvr>
+    <a:masterClrMapping/>
+  </p:clrMapOvr>
+</p:notes>
+</file>
+
+<file path=ppt/notesSlides/notesSlide21.xml><?xml version="1.0" encoding="utf-8"?>
+<p:notes xmlns:a="http://schemas.openxmlformats.org/drawingml/2006/main" xmlns:p="http://schemas.openxmlformats.org/presentationml/2006/main" xmlns:r="http://schemas.openxmlformats.org/officeDocument/2006/relationships">
+  <p:cSld>
+    <p:spTree>
+      <p:nvGrpSpPr>
+        <p:cNvPr id="1" name=""/>
+        <p:cNvGrpSpPr/>
+        <p:nvPr/>
+      </p:nvGrpSpPr>
+      <p:grpSpPr>
+        <a:xfrm>
+          <a:off x="0" y="0"/>
+          <a:ext cx="0" cy="0"/>
+          <a:chOff x="0" y="0"/>
+          <a:chExt cx="0" cy="0"/>
+        </a:xfrm>
+      </p:grpSpPr>
+      <p:sp>
+        <p:nvSpPr>
+          <p:cNvPr id="2" name="Slide Image Placeholder 1"/>
+          <p:cNvSpPr>
+            <a:spLocks noGrp="1"/>
+          </p:cNvSpPr>
+          <p:nvPr>
+            <p:ph type="sldImg" idx="2"/>
+          </p:nvPr>
+        </p:nvSpPr>
+        <p:spPr/>
+      </p:sp>
+      <p:sp>
+        <p:nvSpPr>
+          <p:cNvPr id="3" name="Notes Placeholder 2"/>
+          <p:cNvSpPr>
+            <a:spLocks noGrp="1"/>
+          </p:cNvSpPr>
+          <p:nvPr>
+            <p:ph type="body" idx="3" sz="quarter"/>
+          </p:nvPr>
+        </p:nvSpPr>
+        <p:spPr/>
+        <p:txBody>
+          <a:bodyPr/>
+          <a:lstStyle/>
+          <a:p>
+            <a:r>
+              <a:t>[설명] 공식 문서는 버전 차이와 확장 학습을 확인할 때 사용한다.</a:t>
+            </a:r>
+          </a:p>
+          <a:p>
+            <a:r>
+              <a:t>[실행] 슬라이드의 명령 또는 파일 작성 단계를 진행한다.</a:t>
+            </a:r>
+          </a:p>
+          <a:p>
+            <a:r>
+              <a:t>[확인] 학습자는 본문만으로 현재 모듈을 완료한 상태여야 한다.</a:t>
+            </a:r>
+          </a:p>
+          <a:p>
+            <a:r>
+              <a:t>[멈춤] 교육생이 현재 체크포인트를 통과할 때까지 기다린다.</a:t>
+            </a:r>
+          </a:p>
+          <a:p>
+            <a:r>
+              <a:t>[오류] 오류가 나면 현재 폴더, source, 파일 경로를 먼저 확인한다.</a:t>
+            </a:r>
+          </a:p>
+        </p:txBody>
+      </p:sp>
+      <p:sp>
+        <p:nvSpPr>
+          <p:cNvPr id="4" name="Slide Number Placeholder 3"/>
+          <p:cNvSpPr>
+            <a:spLocks noGrp="1"/>
+          </p:cNvSpPr>
+          <p:nvPr>
+            <p:ph type="sldNum" idx="5" sz="quarter"/>
+          </p:nvPr>
+        </p:nvSpPr>
+        <p:spPr/>
+      </p:sp>
+    </p:spTree>
+  </p:cSld>
+  <p:clrMapOvr>
+    <a:masterClrMapping/>
+  </p:clrMapOvr>
+</p:notes>
+</file>
+
 <file path=ppt/notesSlides/notesSlide3.xml><?xml version="1.0" encoding="utf-8"?>
 <p:notes xmlns:a="http://schemas.openxmlformats.org/drawingml/2006/main" xmlns:p="http://schemas.openxmlformats.org/presentationml/2006/main" xmlns:r="http://schemas.openxmlformats.org/officeDocument/2006/relationships">
   <p:cSld>
@@ -2084,22 +2362,17 @@
           <a:lstStyle/>
           <a:p>
             <a:r>
-              <a:t>[설명] 같은 display 설정을 다음 센서 모듈에서도 재사용한다.</a:t>
-            </a:r>
-          </a:p>
-          <a:p>
-            <a:r>
-              <a:t>[실행] source ~/ros2_curri/my_agv_ws/install/setup.bash</a:t>
-            </a:r>
-          </a:p>
-          <a:p>
-            <a:r>
-              <a:t>rviz2 -d ~/ros2_curri/my_agv_ws/src/agv_description/rviz/agv.rviz</a:t>
-            </a:r>
-          </a:p>
-          <a:p>
-            <a:r>
-              <a:t>[확인] 명령 출력에서 슬라이드의 확인 항목을 찾는다.</a:t>
+              <a:t>[설명] 파일 구현이 없는 모듈에서도 명령의 역할과 관찰 결과를 코드 설명처럼 연결한다.</a:t>
+            </a:r>
+          </a:p>
+          <a:p>
+            <a:r>
+              <a:t>[실행] 슬라이드의 명령 또는 파일 작성 단계를 진행한다.</a:t>
+            </a:r>
+          </a:p>
+          <a:p>
+            <a:r>
+              <a:t>[확인] agv.rviz에 RobotModel·TF·LaserScan·Odometry 설정을 저장하고 실제 화면을 확인한다.</a:t>
             </a:r>
           </a:p>
           <a:p>
@@ -5482,7 +5755,7 @@
               </a:defRPr>
             </a:pPr>
             <a:r>
-              <a:t>구현 뒤 실행 2/3: RobotModel과 TF를 먼저 확인한다</a:t>
+              <a:t>명령어를 코드처럼 읽기 (2/3)</a:t>
             </a:r>
           </a:p>
         </p:txBody>
@@ -5521,7 +5794,7 @@
               </a:defRPr>
             </a:pPr>
             <a:r>
-              <a:t>방금 직접 만든 파일을 실행·검사하며 다음 파일로 넘어갈 기준을 만듭니다.</a:t>
+              <a:t>새 파일을 만들지 않는 모듈도 한 줄씩 뜻과 화면에서 확인할 결과를 먼저 읽습니다.</a:t>
             </a:r>
           </a:p>
         </p:txBody>
@@ -5657,7 +5930,7 @@
               </a:defRPr>
             </a:pPr>
             <a:r>
-              <a:t>현재 단계 실행 2/3    |    현재 폴더 ~/ros2_curri/my_agv_ws    |    현재 터미널</a:t>
+              <a:t>현재 단계 명령 해설    |    현재 폴더 ~/ros2_curri/my_agv_ws    |    현재 터미널</a:t>
             </a:r>
           </a:p>
         </p:txBody>
@@ -5670,8 +5943,8 @@
         </p:nvSpPr>
         <p:spPr>
           <a:xfrm>
-            <a:off x="676656" y="1764792"/>
-            <a:ext cx="1828800" cy="347472"/>
+            <a:off x="694944" y="1664208"/>
+            <a:ext cx="10789920" cy="274320"/>
           </a:xfrm>
           <a:prstGeom prst="rect">
             <a:avLst/>
@@ -5684,72 +5957,33 @@
           </a:bodyPr>
           <a:lstStyle/>
           <a:p>
-            <a:pPr algn="l">
-              <a:spcAft>
-                <a:spcPts val="0"/>
-              </a:spcAft>
-              <a:defRPr sz="1800" b="1">
-                <a:solidFill>
-                  <a:srgbClr val="225B9B"/>
-                </a:solidFill>
-                <a:latin typeface="Noto Sans CJK KR"/>
-              </a:defRPr>
-            </a:pPr>
-            <a:r>
-              <a:t>왜 하는가</a:t>
-            </a:r>
-          </a:p>
-        </p:txBody>
-      </p:sp>
-      <p:sp>
-        <p:nvSpPr>
-          <p:cNvPr id="8" name="TextBox 7"/>
-          <p:cNvSpPr txBox="1"/>
-          <p:nvPr/>
-        </p:nvSpPr>
-        <p:spPr>
-          <a:xfrm>
-            <a:off x="676656" y="2103120"/>
-            <a:ext cx="10789920" cy="512064"/>
-          </a:xfrm>
-          <a:prstGeom prst="rect">
-            <a:avLst/>
-          </a:prstGeom>
-          <a:noFill/>
-        </p:spPr>
-        <p:txBody>
-          <a:bodyPr wrap="square" lIns="73152" rIns="73152" tIns="36576" bIns="36576">
-            <a:spAutoFit/>
-          </a:bodyPr>
-          <a:lstStyle/>
-          <a:p>
-            <a:pPr algn="l">
-              <a:spcAft>
-                <a:spcPts val="0"/>
-              </a:spcAft>
-              <a:defRPr sz="2000" b="0">
-                <a:solidFill>
-                  <a:srgbClr val="122C4E"/>
-                </a:solidFill>
-                <a:latin typeface="Noto Sans CJK KR"/>
-              </a:defRPr>
-            </a:pPr>
-            <a:r>
-              <a:t>모델과 frame이 맞아야 scan·image 위치도 맞는다.</a:t>
-            </a:r>
-          </a:p>
-        </p:txBody>
-      </p:sp>
-      <p:sp>
-        <p:nvSpPr>
-          <p:cNvPr id="9" name="Rounded Rectangle 8"/>
+            <a:pPr algn="ctr">
+              <a:spcAft>
+                <a:spcPts val="0"/>
+              </a:spcAft>
+              <a:defRPr sz="1500" b="1">
+                <a:solidFill>
+                  <a:srgbClr val="DB7E22"/>
+                </a:solidFill>
+                <a:latin typeface="Noto Sans CJK KR"/>
+              </a:defRPr>
+            </a:pPr>
+            <a:r>
+              <a:t>말로 먼저 답해 보세요: 이 명령은 무엇을 시작하고, 성공하면 어디에 무엇이 보일까요?</a:t>
+            </a:r>
+          </a:p>
+        </p:txBody>
+      </p:sp>
+      <p:sp>
+        <p:nvSpPr>
+          <p:cNvPr id="8" name="Rounded Rectangle 7"/>
           <p:cNvSpPr/>
           <p:nvPr/>
         </p:nvSpPr>
         <p:spPr>
           <a:xfrm>
-            <a:off x="676656" y="2871216"/>
-            <a:ext cx="10835640" cy="2331720"/>
+            <a:off x="658368" y="2359152"/>
+            <a:ext cx="4160520" cy="1417320"/>
           </a:xfrm>
           <a:prstGeom prst="roundRect">
             <a:avLst/>
@@ -5785,7 +6019,7 @@
               <a:spcAft>
                 <a:spcPts val="0"/>
               </a:spcAft>
-              <a:defRPr sz="1600" b="0">
+              <a:defRPr sz="1300" b="0">
                 <a:solidFill>
                   <a:srgbClr val="FFFFFF"/>
                 </a:solidFill>
@@ -5795,14 +6029,51 @@
             <a:r>
               <a:t>Fixed Frame: odom 또는 base_link</a:t>
             </a:r>
-            <a:br/>
-            <a:r>
-              <a:t>Add → RobotModel → Description Topic: /robot_description</a:t>
-            </a:r>
-            <a:br/>
-            <a:r>
-              <a:t>Add → TF</a:t>
-            </a:r>
+          </a:p>
+        </p:txBody>
+      </p:sp>
+      <p:sp>
+        <p:nvSpPr>
+          <p:cNvPr id="9" name="Rounded Rectangle 8"/>
+          <p:cNvSpPr/>
+          <p:nvPr/>
+        </p:nvSpPr>
+        <p:spPr>
+          <a:xfrm>
+            <a:off x="5029200" y="2359152"/>
+            <a:ext cx="6537960" cy="1417320"/>
+          </a:xfrm>
+          <a:prstGeom prst="roundRect">
+            <a:avLst/>
+          </a:prstGeom>
+          <a:solidFill>
+            <a:srgbClr val="F4F7FB"/>
+          </a:solidFill>
+          <a:ln>
+            <a:solidFill>
+              <a:srgbClr val="225B9B"/>
+            </a:solidFill>
+          </a:ln>
+        </p:spPr>
+        <p:style>
+          <a:lnRef idx="1">
+            <a:schemeClr val="accent1"/>
+          </a:lnRef>
+          <a:fillRef idx="3">
+            <a:schemeClr val="accent1"/>
+          </a:fillRef>
+          <a:effectRef idx="2">
+            <a:schemeClr val="accent1"/>
+          </a:effectRef>
+          <a:fontRef idx="minor">
+            <a:schemeClr val="lt1"/>
+          </a:fontRef>
+        </p:style>
+        <p:txBody>
+          <a:bodyPr rtlCol="0" anchor="ctr"/>
+          <a:lstStyle/>
+          <a:p>
+            <a:pPr algn="ctr"/>
           </a:p>
         </p:txBody>
       </p:sp>
@@ -5814,8 +6085,8 @@
         </p:nvSpPr>
         <p:spPr>
           <a:xfrm>
-            <a:off x="768096" y="5468112"/>
-            <a:ext cx="1143000" cy="256032"/>
+            <a:off x="5239512" y="2468880"/>
+            <a:ext cx="594360" cy="219456"/>
           </a:xfrm>
           <a:prstGeom prst="rect">
             <a:avLst/>
@@ -5832,15 +6103,15 @@
               <a:spcAft>
                 <a:spcPts val="0"/>
               </a:spcAft>
-              <a:defRPr sz="1800" b="1">
-                <a:solidFill>
-                  <a:srgbClr val="2A8B5A"/>
-                </a:solidFill>
-                <a:latin typeface="Noto Sans CJK KR"/>
-              </a:defRPr>
-            </a:pPr>
-            <a:r>
-              <a:t>확인</a:t>
+              <a:defRPr sz="1400" b="1">
+                <a:solidFill>
+                  <a:srgbClr val="225B9B"/>
+                </a:solidFill>
+                <a:latin typeface="Noto Sans CJK KR"/>
+              </a:defRPr>
+            </a:pPr>
+            <a:r>
+              <a:t>1.</a:t>
             </a:r>
           </a:p>
         </p:txBody>
@@ -5853,8 +6124,8 @@
         </p:nvSpPr>
         <p:spPr>
           <a:xfrm>
-            <a:off x="768096" y="5742432"/>
-            <a:ext cx="10561320" cy="347472"/>
+            <a:off x="5596128" y="2450592"/>
+            <a:ext cx="5696712" cy="493776"/>
           </a:xfrm>
           <a:prstGeom prst="rect">
             <a:avLst/>
@@ -5871,7 +6142,7 @@
               <a:spcAft>
                 <a:spcPts val="0"/>
               </a:spcAft>
-              <a:defRPr sz="1800" b="0">
+              <a:defRPr sz="1300" b="0">
                 <a:solidFill>
                   <a:srgbClr val="122C4E"/>
                 </a:solidFill>
@@ -5879,7 +6150,305 @@
               </a:defRPr>
             </a:pPr>
             <a:r>
-              <a:t>출력에서 topic·frame·파일 이름 또는 성공 메시지를 찾고, 맞지 않으면 다음 파일로 가지 않습니다.</a:t>
+              <a:t>뜻: 이 명령은 지금 모듈의 기능을 실행하거나 관찰하는 한 단계입니다.</a:t>
+            </a:r>
+          </a:p>
+        </p:txBody>
+      </p:sp>
+      <p:sp>
+        <p:nvSpPr>
+          <p:cNvPr id="12" name="TextBox 11"/>
+          <p:cNvSpPr txBox="1"/>
+          <p:nvPr/>
+        </p:nvSpPr>
+        <p:spPr>
+          <a:xfrm>
+            <a:off x="5596128" y="3108960"/>
+            <a:ext cx="5696712" cy="457200"/>
+          </a:xfrm>
+          <a:prstGeom prst="rect">
+            <a:avLst/>
+          </a:prstGeom>
+          <a:noFill/>
+        </p:spPr>
+        <p:txBody>
+          <a:bodyPr wrap="square" lIns="73152" rIns="73152" tIns="36576" bIns="36576">
+            <a:spAutoFit/>
+          </a:bodyPr>
+          <a:lstStyle/>
+          <a:p>
+            <a:pPr algn="l">
+              <a:spcAft>
+                <a:spcPts val="0"/>
+              </a:spcAft>
+              <a:defRPr sz="1200" b="0">
+                <a:solidFill>
+                  <a:srgbClr val="2A8B5A"/>
+                </a:solidFill>
+                <a:latin typeface="Noto Sans CJK KR"/>
+              </a:defRPr>
+            </a:pPr>
+            <a:r>
+              <a:t>실행에서: 명령 뒤 terminal 또는 GUI에서 완료 조건이 충족됐는지 확인합니다.</a:t>
+            </a:r>
+          </a:p>
+        </p:txBody>
+      </p:sp>
+      <p:sp>
+        <p:nvSpPr>
+          <p:cNvPr id="13" name="Rounded Rectangle 12"/>
+          <p:cNvSpPr/>
+          <p:nvPr/>
+        </p:nvSpPr>
+        <p:spPr>
+          <a:xfrm>
+            <a:off x="658368" y="4078224"/>
+            <a:ext cx="4160520" cy="1417320"/>
+          </a:xfrm>
+          <a:prstGeom prst="roundRect">
+            <a:avLst/>
+          </a:prstGeom>
+          <a:solidFill>
+            <a:srgbClr val="1D232D"/>
+          </a:solidFill>
+          <a:ln>
+            <a:solidFill>
+              <a:srgbClr val="1D232D"/>
+            </a:solidFill>
+          </a:ln>
+        </p:spPr>
+        <p:style>
+          <a:lnRef idx="1">
+            <a:schemeClr val="accent1"/>
+          </a:lnRef>
+          <a:fillRef idx="3">
+            <a:schemeClr val="accent1"/>
+          </a:fillRef>
+          <a:effectRef idx="2">
+            <a:schemeClr val="accent1"/>
+          </a:effectRef>
+          <a:fontRef idx="minor">
+            <a:schemeClr val="lt1"/>
+          </a:fontRef>
+        </p:style>
+        <p:txBody>
+          <a:bodyPr rtlCol="0" anchor="ctr" wrap="square" lIns="73152" rIns="73152" tIns="36576" bIns="36576"/>
+          <a:lstStyle/>
+          <a:p>
+            <a:pPr algn="l">
+              <a:spcAft>
+                <a:spcPts val="0"/>
+              </a:spcAft>
+              <a:defRPr sz="1300" b="0">
+                <a:solidFill>
+                  <a:srgbClr val="FFFFFF"/>
+                </a:solidFill>
+                <a:latin typeface="DejaVu Sans Mono"/>
+              </a:defRPr>
+            </a:pPr>
+            <a:r>
+              <a:t>Add → RobotModel → Description Topic: /robot_description</a:t>
+            </a:r>
+          </a:p>
+        </p:txBody>
+      </p:sp>
+      <p:sp>
+        <p:nvSpPr>
+          <p:cNvPr id="14" name="Rounded Rectangle 13"/>
+          <p:cNvSpPr/>
+          <p:nvPr/>
+        </p:nvSpPr>
+        <p:spPr>
+          <a:xfrm>
+            <a:off x="5029200" y="4078224"/>
+            <a:ext cx="6537960" cy="1417320"/>
+          </a:xfrm>
+          <a:prstGeom prst="roundRect">
+            <a:avLst/>
+          </a:prstGeom>
+          <a:solidFill>
+            <a:srgbClr val="F4F7FB"/>
+          </a:solidFill>
+          <a:ln>
+            <a:solidFill>
+              <a:srgbClr val="225B9B"/>
+            </a:solidFill>
+          </a:ln>
+        </p:spPr>
+        <p:style>
+          <a:lnRef idx="1">
+            <a:schemeClr val="accent1"/>
+          </a:lnRef>
+          <a:fillRef idx="3">
+            <a:schemeClr val="accent1"/>
+          </a:fillRef>
+          <a:effectRef idx="2">
+            <a:schemeClr val="accent1"/>
+          </a:effectRef>
+          <a:fontRef idx="minor">
+            <a:schemeClr val="lt1"/>
+          </a:fontRef>
+        </p:style>
+        <p:txBody>
+          <a:bodyPr rtlCol="0" anchor="ctr"/>
+          <a:lstStyle/>
+          <a:p>
+            <a:pPr algn="ctr"/>
+          </a:p>
+        </p:txBody>
+      </p:sp>
+      <p:sp>
+        <p:nvSpPr>
+          <p:cNvPr id="15" name="TextBox 14"/>
+          <p:cNvSpPr txBox="1"/>
+          <p:nvPr/>
+        </p:nvSpPr>
+        <p:spPr>
+          <a:xfrm>
+            <a:off x="5239512" y="4187952"/>
+            <a:ext cx="594360" cy="219456"/>
+          </a:xfrm>
+          <a:prstGeom prst="rect">
+            <a:avLst/>
+          </a:prstGeom>
+          <a:noFill/>
+        </p:spPr>
+        <p:txBody>
+          <a:bodyPr wrap="square" lIns="73152" rIns="73152" tIns="36576" bIns="36576">
+            <a:spAutoFit/>
+          </a:bodyPr>
+          <a:lstStyle/>
+          <a:p>
+            <a:pPr algn="l">
+              <a:spcAft>
+                <a:spcPts val="0"/>
+              </a:spcAft>
+              <a:defRPr sz="1400" b="1">
+                <a:solidFill>
+                  <a:srgbClr val="225B9B"/>
+                </a:solidFill>
+                <a:latin typeface="Noto Sans CJK KR"/>
+              </a:defRPr>
+            </a:pPr>
+            <a:r>
+              <a:t>2.</a:t>
+            </a:r>
+          </a:p>
+        </p:txBody>
+      </p:sp>
+      <p:sp>
+        <p:nvSpPr>
+          <p:cNvPr id="16" name="TextBox 15"/>
+          <p:cNvSpPr txBox="1"/>
+          <p:nvPr/>
+        </p:nvSpPr>
+        <p:spPr>
+          <a:xfrm>
+            <a:off x="5596128" y="4169663"/>
+            <a:ext cx="5696712" cy="493776"/>
+          </a:xfrm>
+          <a:prstGeom prst="rect">
+            <a:avLst/>
+          </a:prstGeom>
+          <a:noFill/>
+        </p:spPr>
+        <p:txBody>
+          <a:bodyPr wrap="square" lIns="73152" rIns="73152" tIns="36576" bIns="36576">
+            <a:spAutoFit/>
+          </a:bodyPr>
+          <a:lstStyle/>
+          <a:p>
+            <a:pPr algn="l">
+              <a:spcAft>
+                <a:spcPts val="0"/>
+              </a:spcAft>
+              <a:defRPr sz="1300" b="0">
+                <a:solidFill>
+                  <a:srgbClr val="122C4E"/>
+                </a:solidFill>
+                <a:latin typeface="Noto Sans CJK KR"/>
+              </a:defRPr>
+            </a:pPr>
+            <a:r>
+              <a:t>뜻: 이 명령은 지금 모듈의 기능을 실행하거나 관찰하는 한 단계입니다.</a:t>
+            </a:r>
+          </a:p>
+        </p:txBody>
+      </p:sp>
+      <p:sp>
+        <p:nvSpPr>
+          <p:cNvPr id="17" name="TextBox 16"/>
+          <p:cNvSpPr txBox="1"/>
+          <p:nvPr/>
+        </p:nvSpPr>
+        <p:spPr>
+          <a:xfrm>
+            <a:off x="5596128" y="4828032"/>
+            <a:ext cx="5696712" cy="457200"/>
+          </a:xfrm>
+          <a:prstGeom prst="rect">
+            <a:avLst/>
+          </a:prstGeom>
+          <a:noFill/>
+        </p:spPr>
+        <p:txBody>
+          <a:bodyPr wrap="square" lIns="73152" rIns="73152" tIns="36576" bIns="36576">
+            <a:spAutoFit/>
+          </a:bodyPr>
+          <a:lstStyle/>
+          <a:p>
+            <a:pPr algn="l">
+              <a:spcAft>
+                <a:spcPts val="0"/>
+              </a:spcAft>
+              <a:defRPr sz="1200" b="0">
+                <a:solidFill>
+                  <a:srgbClr val="2A8B5A"/>
+                </a:solidFill>
+                <a:latin typeface="Noto Sans CJK KR"/>
+              </a:defRPr>
+            </a:pPr>
+            <a:r>
+              <a:t>실행에서: 명령 뒤 terminal 또는 GUI에서 완료 조건이 충족됐는지 확인합니다.</a:t>
+            </a:r>
+          </a:p>
+        </p:txBody>
+      </p:sp>
+      <p:sp>
+        <p:nvSpPr>
+          <p:cNvPr id="18" name="TextBox 17"/>
+          <p:cNvSpPr txBox="1"/>
+          <p:nvPr/>
+        </p:nvSpPr>
+        <p:spPr>
+          <a:xfrm>
+            <a:off x="749808" y="6199632"/>
+            <a:ext cx="10698480" cy="182880"/>
+          </a:xfrm>
+          <a:prstGeom prst="rect">
+            <a:avLst/>
+          </a:prstGeom>
+          <a:noFill/>
+        </p:spPr>
+        <p:txBody>
+          <a:bodyPr wrap="square" lIns="73152" rIns="73152" tIns="36576" bIns="36576">
+            <a:spAutoFit/>
+          </a:bodyPr>
+          <a:lstStyle/>
+          <a:p>
+            <a:pPr algn="ctr">
+              <a:spcAft>
+                <a:spcPts val="0"/>
+              </a:spcAft>
+              <a:defRPr sz="1100" b="0">
+                <a:solidFill>
+                  <a:srgbClr val="5C6672"/>
+                </a:solidFill>
+                <a:latin typeface="Noto Sans CJK KR"/>
+              </a:defRPr>
+            </a:pPr>
+            <a:r>
+              <a:t>다음 실행 슬라이드에서는 이 명령을 직접 입력하고, 방금 말한 확인 결과가 보일 때까지 진행하지 않습니다.</a:t>
             </a:r>
           </a:p>
         </p:txBody>
@@ -5936,7 +6505,7 @@
               </a:defRPr>
             </a:pPr>
             <a:r>
-              <a:t>구현 뒤 실행 3/3: 센서 display를 추가한다</a:t>
+              <a:t>명령어를 코드처럼 읽기 (3/3)</a:t>
             </a:r>
           </a:p>
         </p:txBody>
@@ -5975,7 +6544,7 @@
               </a:defRPr>
             </a:pPr>
             <a:r>
-              <a:t>방금 직접 만든 파일을 실행·검사하며 다음 파일로 넘어갈 기준을 만듭니다.</a:t>
+              <a:t>새 파일을 만들지 않는 모듈도 한 줄씩 뜻과 화면에서 확인할 결과를 먼저 읽습니다.</a:t>
             </a:r>
           </a:p>
         </p:txBody>
@@ -6111,7 +6680,7 @@
               </a:defRPr>
             </a:pPr>
             <a:r>
-              <a:t>현재 단계 실행 3/3    |    현재 폴더 ~/ros2_curri/my_agv_ws    |    현재 터미널</a:t>
+              <a:t>현재 단계 명령 해설    |    현재 폴더 ~/ros2_curri/my_agv_ws    |    현재 터미널</a:t>
             </a:r>
           </a:p>
         </p:txBody>
@@ -6124,8 +6693,8 @@
         </p:nvSpPr>
         <p:spPr>
           <a:xfrm>
-            <a:off x="676656" y="1764792"/>
-            <a:ext cx="1828800" cy="347472"/>
+            <a:off x="694944" y="1664208"/>
+            <a:ext cx="10789920" cy="274320"/>
           </a:xfrm>
           <a:prstGeom prst="rect">
             <a:avLst/>
@@ -6138,72 +6707,33 @@
           </a:bodyPr>
           <a:lstStyle/>
           <a:p>
-            <a:pPr algn="l">
-              <a:spcAft>
-                <a:spcPts val="0"/>
-              </a:spcAft>
-              <a:defRPr sz="1800" b="1">
-                <a:solidFill>
-                  <a:srgbClr val="225B9B"/>
-                </a:solidFill>
-                <a:latin typeface="Noto Sans CJK KR"/>
-              </a:defRPr>
-            </a:pPr>
-            <a:r>
-              <a:t>왜 하는가</a:t>
-            </a:r>
-          </a:p>
-        </p:txBody>
-      </p:sp>
-      <p:sp>
-        <p:nvSpPr>
-          <p:cNvPr id="8" name="TextBox 7"/>
-          <p:cNvSpPr txBox="1"/>
-          <p:nvPr/>
-        </p:nvSpPr>
-        <p:spPr>
-          <a:xfrm>
-            <a:off x="676656" y="2103120"/>
-            <a:ext cx="10789920" cy="512064"/>
-          </a:xfrm>
-          <a:prstGeom prst="rect">
-            <a:avLst/>
-          </a:prstGeom>
-          <a:noFill/>
-        </p:spPr>
-        <p:txBody>
-          <a:bodyPr wrap="square" lIns="73152" rIns="73152" tIns="36576" bIns="36576">
-            <a:spAutoFit/>
-          </a:bodyPr>
-          <a:lstStyle/>
-          <a:p>
-            <a:pPr algn="l">
-              <a:spcAft>
-                <a:spcPts val="0"/>
-              </a:spcAft>
-              <a:defRPr sz="2000" b="0">
-                <a:solidFill>
-                  <a:srgbClr val="122C4E"/>
-                </a:solidFill>
-                <a:latin typeface="Noto Sans CJK KR"/>
-              </a:defRPr>
-            </a:pPr>
-            <a:r>
-              <a:t>각 display는 topic과 message frame_id를 TF로 변환한다.</a:t>
-            </a:r>
-          </a:p>
-        </p:txBody>
-      </p:sp>
-      <p:sp>
-        <p:nvSpPr>
-          <p:cNvPr id="9" name="Rounded Rectangle 8"/>
+            <a:pPr algn="ctr">
+              <a:spcAft>
+                <a:spcPts val="0"/>
+              </a:spcAft>
+              <a:defRPr sz="1500" b="1">
+                <a:solidFill>
+                  <a:srgbClr val="DB7E22"/>
+                </a:solidFill>
+                <a:latin typeface="Noto Sans CJK KR"/>
+              </a:defRPr>
+            </a:pPr>
+            <a:r>
+              <a:t>말로 먼저 답해 보세요: 이 명령은 무엇을 시작하고, 성공하면 어디에 무엇이 보일까요?</a:t>
+            </a:r>
+          </a:p>
+        </p:txBody>
+      </p:sp>
+      <p:sp>
+        <p:nvSpPr>
+          <p:cNvPr id="8" name="Rounded Rectangle 7"/>
           <p:cNvSpPr/>
           <p:nvPr/>
         </p:nvSpPr>
         <p:spPr>
           <a:xfrm>
-            <a:off x="676656" y="2871216"/>
-            <a:ext cx="10835640" cy="2331720"/>
+            <a:off x="658368" y="2359152"/>
+            <a:ext cx="4160520" cy="1417320"/>
           </a:xfrm>
           <a:prstGeom prst="roundRect">
             <a:avLst/>
@@ -6239,7 +6769,7 @@
               <a:spcAft>
                 <a:spcPts val="0"/>
               </a:spcAft>
-              <a:defRPr sz="1600" b="0">
+              <a:defRPr sz="1300" b="0">
                 <a:solidFill>
                   <a:srgbClr val="FFFFFF"/>
                 </a:solidFill>
@@ -6247,16 +6777,53 @@
               </a:defRPr>
             </a:pPr>
             <a:r>
-              <a:t>Add → LaserScan → Topic: /scan</a:t>
-            </a:r>
-            <a:br/>
-            <a:r>
-              <a:t>Add → Odometry → Topic: /odom</a:t>
-            </a:r>
-            <a:br/>
-            <a:r>
-              <a:t>File → Save Config As → agv.rviz</a:t>
-            </a:r>
+              <a:t>Add → TF</a:t>
+            </a:r>
+          </a:p>
+        </p:txBody>
+      </p:sp>
+      <p:sp>
+        <p:nvSpPr>
+          <p:cNvPr id="9" name="Rounded Rectangle 8"/>
+          <p:cNvSpPr/>
+          <p:nvPr/>
+        </p:nvSpPr>
+        <p:spPr>
+          <a:xfrm>
+            <a:off x="5029200" y="2359152"/>
+            <a:ext cx="6537960" cy="1417320"/>
+          </a:xfrm>
+          <a:prstGeom prst="roundRect">
+            <a:avLst/>
+          </a:prstGeom>
+          <a:solidFill>
+            <a:srgbClr val="F4F7FB"/>
+          </a:solidFill>
+          <a:ln>
+            <a:solidFill>
+              <a:srgbClr val="225B9B"/>
+            </a:solidFill>
+          </a:ln>
+        </p:spPr>
+        <p:style>
+          <a:lnRef idx="1">
+            <a:schemeClr val="accent1"/>
+          </a:lnRef>
+          <a:fillRef idx="3">
+            <a:schemeClr val="accent1"/>
+          </a:fillRef>
+          <a:effectRef idx="2">
+            <a:schemeClr val="accent1"/>
+          </a:effectRef>
+          <a:fontRef idx="minor">
+            <a:schemeClr val="lt1"/>
+          </a:fontRef>
+        </p:style>
+        <p:txBody>
+          <a:bodyPr rtlCol="0" anchor="ctr"/>
+          <a:lstStyle/>
+          <a:p>
+            <a:pPr algn="ctr"/>
           </a:p>
         </p:txBody>
       </p:sp>
@@ -6268,8 +6835,8 @@
         </p:nvSpPr>
         <p:spPr>
           <a:xfrm>
-            <a:off x="768096" y="5468112"/>
-            <a:ext cx="1143000" cy="256032"/>
+            <a:off x="5239512" y="2468880"/>
+            <a:ext cx="594360" cy="219456"/>
           </a:xfrm>
           <a:prstGeom prst="rect">
             <a:avLst/>
@@ -6286,15 +6853,15 @@
               <a:spcAft>
                 <a:spcPts val="0"/>
               </a:spcAft>
-              <a:defRPr sz="1800" b="1">
-                <a:solidFill>
-                  <a:srgbClr val="2A8B5A"/>
-                </a:solidFill>
-                <a:latin typeface="Noto Sans CJK KR"/>
-              </a:defRPr>
-            </a:pPr>
-            <a:r>
-              <a:t>확인</a:t>
+              <a:defRPr sz="1400" b="1">
+                <a:solidFill>
+                  <a:srgbClr val="225B9B"/>
+                </a:solidFill>
+                <a:latin typeface="Noto Sans CJK KR"/>
+              </a:defRPr>
+            </a:pPr>
+            <a:r>
+              <a:t>1.</a:t>
             </a:r>
           </a:p>
         </p:txBody>
@@ -6307,8 +6874,8 @@
         </p:nvSpPr>
         <p:spPr>
           <a:xfrm>
-            <a:off x="768096" y="5742432"/>
-            <a:ext cx="10561320" cy="347472"/>
+            <a:off x="5596128" y="2450592"/>
+            <a:ext cx="5696712" cy="493776"/>
           </a:xfrm>
           <a:prstGeom prst="rect">
             <a:avLst/>
@@ -6325,7 +6892,7 @@
               <a:spcAft>
                 <a:spcPts val="0"/>
               </a:spcAft>
-              <a:defRPr sz="1800" b="0">
+              <a:defRPr sz="1300" b="0">
                 <a:solidFill>
                   <a:srgbClr val="122C4E"/>
                 </a:solidFill>
@@ -6333,7 +6900,305 @@
               </a:defRPr>
             </a:pPr>
             <a:r>
-              <a:t>출력에서 topic·frame·파일 이름 또는 성공 메시지를 찾고, 맞지 않으면 다음 파일로 가지 않습니다.</a:t>
+              <a:t>뜻: 이 명령은 지금 모듈의 기능을 실행하거나 관찰하는 한 단계입니다.</a:t>
+            </a:r>
+          </a:p>
+        </p:txBody>
+      </p:sp>
+      <p:sp>
+        <p:nvSpPr>
+          <p:cNvPr id="12" name="TextBox 11"/>
+          <p:cNvSpPr txBox="1"/>
+          <p:nvPr/>
+        </p:nvSpPr>
+        <p:spPr>
+          <a:xfrm>
+            <a:off x="5596128" y="3108960"/>
+            <a:ext cx="5696712" cy="457200"/>
+          </a:xfrm>
+          <a:prstGeom prst="rect">
+            <a:avLst/>
+          </a:prstGeom>
+          <a:noFill/>
+        </p:spPr>
+        <p:txBody>
+          <a:bodyPr wrap="square" lIns="73152" rIns="73152" tIns="36576" bIns="36576">
+            <a:spAutoFit/>
+          </a:bodyPr>
+          <a:lstStyle/>
+          <a:p>
+            <a:pPr algn="l">
+              <a:spcAft>
+                <a:spcPts val="0"/>
+              </a:spcAft>
+              <a:defRPr sz="1200" b="0">
+                <a:solidFill>
+                  <a:srgbClr val="2A8B5A"/>
+                </a:solidFill>
+                <a:latin typeface="Noto Sans CJK KR"/>
+              </a:defRPr>
+            </a:pPr>
+            <a:r>
+              <a:t>실행에서: 명령 뒤 terminal 또는 GUI에서 완료 조건이 충족됐는지 확인합니다.</a:t>
+            </a:r>
+          </a:p>
+        </p:txBody>
+      </p:sp>
+      <p:sp>
+        <p:nvSpPr>
+          <p:cNvPr id="13" name="Rounded Rectangle 12"/>
+          <p:cNvSpPr/>
+          <p:nvPr/>
+        </p:nvSpPr>
+        <p:spPr>
+          <a:xfrm>
+            <a:off x="658368" y="4078224"/>
+            <a:ext cx="4160520" cy="1417320"/>
+          </a:xfrm>
+          <a:prstGeom prst="roundRect">
+            <a:avLst/>
+          </a:prstGeom>
+          <a:solidFill>
+            <a:srgbClr val="1D232D"/>
+          </a:solidFill>
+          <a:ln>
+            <a:solidFill>
+              <a:srgbClr val="1D232D"/>
+            </a:solidFill>
+          </a:ln>
+        </p:spPr>
+        <p:style>
+          <a:lnRef idx="1">
+            <a:schemeClr val="accent1"/>
+          </a:lnRef>
+          <a:fillRef idx="3">
+            <a:schemeClr val="accent1"/>
+          </a:fillRef>
+          <a:effectRef idx="2">
+            <a:schemeClr val="accent1"/>
+          </a:effectRef>
+          <a:fontRef idx="minor">
+            <a:schemeClr val="lt1"/>
+          </a:fontRef>
+        </p:style>
+        <p:txBody>
+          <a:bodyPr rtlCol="0" anchor="ctr" wrap="square" lIns="73152" rIns="73152" tIns="36576" bIns="36576"/>
+          <a:lstStyle/>
+          <a:p>
+            <a:pPr algn="l">
+              <a:spcAft>
+                <a:spcPts val="0"/>
+              </a:spcAft>
+              <a:defRPr sz="1300" b="0">
+                <a:solidFill>
+                  <a:srgbClr val="FFFFFF"/>
+                </a:solidFill>
+                <a:latin typeface="DejaVu Sans Mono"/>
+              </a:defRPr>
+            </a:pPr>
+            <a:r>
+              <a:t>Add → LaserScan → Topic: /scan</a:t>
+            </a:r>
+          </a:p>
+        </p:txBody>
+      </p:sp>
+      <p:sp>
+        <p:nvSpPr>
+          <p:cNvPr id="14" name="Rounded Rectangle 13"/>
+          <p:cNvSpPr/>
+          <p:nvPr/>
+        </p:nvSpPr>
+        <p:spPr>
+          <a:xfrm>
+            <a:off x="5029200" y="4078224"/>
+            <a:ext cx="6537960" cy="1417320"/>
+          </a:xfrm>
+          <a:prstGeom prst="roundRect">
+            <a:avLst/>
+          </a:prstGeom>
+          <a:solidFill>
+            <a:srgbClr val="F4F7FB"/>
+          </a:solidFill>
+          <a:ln>
+            <a:solidFill>
+              <a:srgbClr val="225B9B"/>
+            </a:solidFill>
+          </a:ln>
+        </p:spPr>
+        <p:style>
+          <a:lnRef idx="1">
+            <a:schemeClr val="accent1"/>
+          </a:lnRef>
+          <a:fillRef idx="3">
+            <a:schemeClr val="accent1"/>
+          </a:fillRef>
+          <a:effectRef idx="2">
+            <a:schemeClr val="accent1"/>
+          </a:effectRef>
+          <a:fontRef idx="minor">
+            <a:schemeClr val="lt1"/>
+          </a:fontRef>
+        </p:style>
+        <p:txBody>
+          <a:bodyPr rtlCol="0" anchor="ctr"/>
+          <a:lstStyle/>
+          <a:p>
+            <a:pPr algn="ctr"/>
+          </a:p>
+        </p:txBody>
+      </p:sp>
+      <p:sp>
+        <p:nvSpPr>
+          <p:cNvPr id="15" name="TextBox 14"/>
+          <p:cNvSpPr txBox="1"/>
+          <p:nvPr/>
+        </p:nvSpPr>
+        <p:spPr>
+          <a:xfrm>
+            <a:off x="5239512" y="4187952"/>
+            <a:ext cx="594360" cy="219456"/>
+          </a:xfrm>
+          <a:prstGeom prst="rect">
+            <a:avLst/>
+          </a:prstGeom>
+          <a:noFill/>
+        </p:spPr>
+        <p:txBody>
+          <a:bodyPr wrap="square" lIns="73152" rIns="73152" tIns="36576" bIns="36576">
+            <a:spAutoFit/>
+          </a:bodyPr>
+          <a:lstStyle/>
+          <a:p>
+            <a:pPr algn="l">
+              <a:spcAft>
+                <a:spcPts val="0"/>
+              </a:spcAft>
+              <a:defRPr sz="1400" b="1">
+                <a:solidFill>
+                  <a:srgbClr val="225B9B"/>
+                </a:solidFill>
+                <a:latin typeface="Noto Sans CJK KR"/>
+              </a:defRPr>
+            </a:pPr>
+            <a:r>
+              <a:t>2.</a:t>
+            </a:r>
+          </a:p>
+        </p:txBody>
+      </p:sp>
+      <p:sp>
+        <p:nvSpPr>
+          <p:cNvPr id="16" name="TextBox 15"/>
+          <p:cNvSpPr txBox="1"/>
+          <p:nvPr/>
+        </p:nvSpPr>
+        <p:spPr>
+          <a:xfrm>
+            <a:off x="5596128" y="4169663"/>
+            <a:ext cx="5696712" cy="493776"/>
+          </a:xfrm>
+          <a:prstGeom prst="rect">
+            <a:avLst/>
+          </a:prstGeom>
+          <a:noFill/>
+        </p:spPr>
+        <p:txBody>
+          <a:bodyPr wrap="square" lIns="73152" rIns="73152" tIns="36576" bIns="36576">
+            <a:spAutoFit/>
+          </a:bodyPr>
+          <a:lstStyle/>
+          <a:p>
+            <a:pPr algn="l">
+              <a:spcAft>
+                <a:spcPts val="0"/>
+              </a:spcAft>
+              <a:defRPr sz="1300" b="0">
+                <a:solidFill>
+                  <a:srgbClr val="122C4E"/>
+                </a:solidFill>
+                <a:latin typeface="Noto Sans CJK KR"/>
+              </a:defRPr>
+            </a:pPr>
+            <a:r>
+              <a:t>뜻: 이 명령은 지금 모듈의 기능을 실행하거나 관찰하는 한 단계입니다.</a:t>
+            </a:r>
+          </a:p>
+        </p:txBody>
+      </p:sp>
+      <p:sp>
+        <p:nvSpPr>
+          <p:cNvPr id="17" name="TextBox 16"/>
+          <p:cNvSpPr txBox="1"/>
+          <p:nvPr/>
+        </p:nvSpPr>
+        <p:spPr>
+          <a:xfrm>
+            <a:off x="5596128" y="4828032"/>
+            <a:ext cx="5696712" cy="457200"/>
+          </a:xfrm>
+          <a:prstGeom prst="rect">
+            <a:avLst/>
+          </a:prstGeom>
+          <a:noFill/>
+        </p:spPr>
+        <p:txBody>
+          <a:bodyPr wrap="square" lIns="73152" rIns="73152" tIns="36576" bIns="36576">
+            <a:spAutoFit/>
+          </a:bodyPr>
+          <a:lstStyle/>
+          <a:p>
+            <a:pPr algn="l">
+              <a:spcAft>
+                <a:spcPts val="0"/>
+              </a:spcAft>
+              <a:defRPr sz="1200" b="0">
+                <a:solidFill>
+                  <a:srgbClr val="2A8B5A"/>
+                </a:solidFill>
+                <a:latin typeface="Noto Sans CJK KR"/>
+              </a:defRPr>
+            </a:pPr>
+            <a:r>
+              <a:t>실행에서: 명령 뒤 terminal 또는 GUI에서 완료 조건이 충족됐는지 확인합니다.</a:t>
+            </a:r>
+          </a:p>
+        </p:txBody>
+      </p:sp>
+      <p:sp>
+        <p:nvSpPr>
+          <p:cNvPr id="18" name="TextBox 17"/>
+          <p:cNvSpPr txBox="1"/>
+          <p:nvPr/>
+        </p:nvSpPr>
+        <p:spPr>
+          <a:xfrm>
+            <a:off x="749808" y="6199632"/>
+            <a:ext cx="10698480" cy="182880"/>
+          </a:xfrm>
+          <a:prstGeom prst="rect">
+            <a:avLst/>
+          </a:prstGeom>
+          <a:noFill/>
+        </p:spPr>
+        <p:txBody>
+          <a:bodyPr wrap="square" lIns="73152" rIns="73152" tIns="36576" bIns="36576">
+            <a:spAutoFit/>
+          </a:bodyPr>
+          <a:lstStyle/>
+          <a:p>
+            <a:pPr algn="ctr">
+              <a:spcAft>
+                <a:spcPts val="0"/>
+              </a:spcAft>
+              <a:defRPr sz="1100" b="0">
+                <a:solidFill>
+                  <a:srgbClr val="5C6672"/>
+                </a:solidFill>
+                <a:latin typeface="Noto Sans CJK KR"/>
+              </a:defRPr>
+            </a:pPr>
+            <a:r>
+              <a:t>다음 실행 슬라이드에서는 이 명령을 직접 입력하고, 방금 말한 확인 결과가 보일 때까지 진행하지 않습니다.</a:t>
             </a:r>
           </a:p>
         </p:txBody>
@@ -6390,7 +7255,7 @@
               </a:defRPr>
             </a:pPr>
             <a:r>
-              <a:t>build → source → run 순서로 실행한다</a:t>
+              <a:t>구현 뒤 실행 1/3: RViz를 설정 파일로 연다</a:t>
             </a:r>
           </a:p>
         </p:txBody>
@@ -6429,7 +7294,7 @@
               </a:defRPr>
             </a:pPr>
             <a:r>
-              <a:t>새 파일 또는 수정 파일은 build와 source 뒤에만 실행 이름·설정에 반영됩니다.</a:t>
+              <a:t>방금 직접 만든 파일을 실행·검사하며 다음 파일로 넘어갈 기준을 만듭니다.</a:t>
             </a:r>
           </a:p>
         </p:txBody>
@@ -6565,21 +7430,99 @@
               </a:defRPr>
             </a:pPr>
             <a:r>
-              <a:t>현재 단계 실행    |    현재 폴더 ~/ros2_curri/my_agv_ws    |    현재 터미널</a:t>
-            </a:r>
-          </a:p>
-        </p:txBody>
-      </p:sp>
-      <p:sp>
-        <p:nvSpPr>
-          <p:cNvPr id="7" name="Rounded Rectangle 6"/>
+              <a:t>현재 단계 실행 1/3    |    현재 폴더 ~/ros2_curri/my_agv_ws    |    현재 터미널</a:t>
+            </a:r>
+          </a:p>
+        </p:txBody>
+      </p:sp>
+      <p:sp>
+        <p:nvSpPr>
+          <p:cNvPr id="7" name="TextBox 6"/>
+          <p:cNvSpPr txBox="1"/>
+          <p:nvPr/>
+        </p:nvSpPr>
+        <p:spPr>
+          <a:xfrm>
+            <a:off x="676656" y="1764792"/>
+            <a:ext cx="1828800" cy="347472"/>
+          </a:xfrm>
+          <a:prstGeom prst="rect">
+            <a:avLst/>
+          </a:prstGeom>
+          <a:noFill/>
+        </p:spPr>
+        <p:txBody>
+          <a:bodyPr wrap="square" lIns="73152" rIns="73152" tIns="36576" bIns="36576">
+            <a:spAutoFit/>
+          </a:bodyPr>
+          <a:lstStyle/>
+          <a:p>
+            <a:pPr algn="l">
+              <a:spcAft>
+                <a:spcPts val="0"/>
+              </a:spcAft>
+              <a:defRPr sz="1800" b="1">
+                <a:solidFill>
+                  <a:srgbClr val="225B9B"/>
+                </a:solidFill>
+                <a:latin typeface="Noto Sans CJK KR"/>
+              </a:defRPr>
+            </a:pPr>
+            <a:r>
+              <a:t>왜 하는가</a:t>
+            </a:r>
+          </a:p>
+        </p:txBody>
+      </p:sp>
+      <p:sp>
+        <p:nvSpPr>
+          <p:cNvPr id="8" name="TextBox 7"/>
+          <p:cNvSpPr txBox="1"/>
+          <p:nvPr/>
+        </p:nvSpPr>
+        <p:spPr>
+          <a:xfrm>
+            <a:off x="676656" y="2103120"/>
+            <a:ext cx="10789920" cy="512064"/>
+          </a:xfrm>
+          <a:prstGeom prst="rect">
+            <a:avLst/>
+          </a:prstGeom>
+          <a:noFill/>
+        </p:spPr>
+        <p:txBody>
+          <a:bodyPr wrap="square" lIns="73152" rIns="73152" tIns="36576" bIns="36576">
+            <a:spAutoFit/>
+          </a:bodyPr>
+          <a:lstStyle/>
+          <a:p>
+            <a:pPr algn="l">
+              <a:spcAft>
+                <a:spcPts val="0"/>
+              </a:spcAft>
+              <a:defRPr sz="2000" b="0">
+                <a:solidFill>
+                  <a:srgbClr val="122C4E"/>
+                </a:solidFill>
+                <a:latin typeface="Noto Sans CJK KR"/>
+              </a:defRPr>
+            </a:pPr>
+            <a:r>
+              <a:t>같은 display 설정을 다음 센서 모듈에서도 재사용한다.</a:t>
+            </a:r>
+          </a:p>
+        </p:txBody>
+      </p:sp>
+      <p:sp>
+        <p:nvSpPr>
+          <p:cNvPr id="9" name="Rounded Rectangle 8"/>
           <p:cNvSpPr/>
           <p:nvPr/>
         </p:nvSpPr>
         <p:spPr>
           <a:xfrm>
-            <a:off x="658368" y="1700784"/>
-            <a:ext cx="10972800" cy="3182112"/>
+            <a:off x="676656" y="2871216"/>
+            <a:ext cx="10835640" cy="2331720"/>
           </a:xfrm>
           <a:prstGeom prst="roundRect">
             <a:avLst/>
@@ -6627,21 +7570,21 @@
             </a:r>
             <a:br/>
             <a:r>
-              <a:t>ros2 launch agv_bringup agv_sim.launch.py</a:t>
-            </a:r>
-          </a:p>
-        </p:txBody>
-      </p:sp>
-      <p:sp>
-        <p:nvSpPr>
-          <p:cNvPr id="8" name="TextBox 7"/>
+              <a:t>rviz2 -d ~/ros2_curri/my_agv_ws/src/agv_description/rviz/agv.rviz</a:t>
+            </a:r>
+          </a:p>
+        </p:txBody>
+      </p:sp>
+      <p:sp>
+        <p:nvSpPr>
+          <p:cNvPr id="10" name="TextBox 9"/>
           <p:cNvSpPr txBox="1"/>
           <p:nvPr/>
         </p:nvSpPr>
         <p:spPr>
           <a:xfrm>
-            <a:off x="786384" y="5239512"/>
-            <a:ext cx="1261872" cy="237744"/>
+            <a:off x="768096" y="5468112"/>
+            <a:ext cx="1143000" cy="256032"/>
           </a:xfrm>
           <a:prstGeom prst="rect">
             <a:avLst/>
@@ -6666,21 +7609,21 @@
               </a:defRPr>
             </a:pPr>
             <a:r>
-              <a:t>확인 기준</a:t>
-            </a:r>
-          </a:p>
-        </p:txBody>
-      </p:sp>
-      <p:sp>
-        <p:nvSpPr>
-          <p:cNvPr id="9" name="TextBox 8"/>
+              <a:t>확인</a:t>
+            </a:r>
+          </a:p>
+        </p:txBody>
+      </p:sp>
+      <p:sp>
+        <p:nvSpPr>
+          <p:cNvPr id="11" name="TextBox 10"/>
           <p:cNvSpPr txBox="1"/>
           <p:nvPr/>
         </p:nvSpPr>
         <p:spPr>
           <a:xfrm>
-            <a:off x="786384" y="5532120"/>
-            <a:ext cx="10469880" cy="420624"/>
+            <a:off x="768096" y="5742432"/>
+            <a:ext cx="10561320" cy="347472"/>
           </a:xfrm>
           <a:prstGeom prst="rect">
             <a:avLst/>
@@ -6705,7 +7648,7 @@
               </a:defRPr>
             </a:pPr>
             <a:r>
-              <a:t>agv.rviz에 RobotModel·TF·LaserScan·Odometry 설정을 저장하고 실제 화면을 확인한다.</a:t>
+              <a:t>출력에서 topic·frame·파일 이름 또는 성공 메시지를 찾고, 맞지 않으면 다음 파일로 가지 않습니다.</a:t>
             </a:r>
           </a:p>
         </p:txBody>
@@ -6762,7 +7705,7 @@
               </a:defRPr>
             </a:pPr>
             <a:r>
-              <a:t>정상 결과: 실제 환경에서 확인한 출력</a:t>
+              <a:t>구현 뒤 실행 2/3: RobotModel과 TF를 먼저 확인한다</a:t>
             </a:r>
           </a:p>
         </p:txBody>
@@ -6801,7 +7744,7 @@
               </a:defRPr>
             </a:pPr>
             <a:r>
-              <a:t>실제 ROS 2 환경의 파일·패키지·구성 검증 로그</a:t>
+              <a:t>방금 직접 만든 파일을 실행·검사하며 다음 파일로 넘어갈 기준을 만듭니다.</a:t>
             </a:r>
           </a:p>
         </p:txBody>
@@ -6884,30 +7827,64 @@
           </a:p>
         </p:txBody>
       </p:sp>
-      <p:pic>
-        <p:nvPicPr>
-          <p:cNvPr id="6" name="Picture 5" descr="validation_terminal.png"/>
-          <p:cNvPicPr>
-            <a:picLocks noChangeAspect="1"/>
-          </p:cNvPicPr>
-          <p:nvPr/>
-        </p:nvPicPr>
-        <p:blipFill>
-          <a:blip r:embed="rId2"/>
-          <a:stretch>
-            <a:fillRect/>
-          </a:stretch>
-        </p:blipFill>
-        <p:spPr>
-          <a:xfrm>
-            <a:off x="790956" y="1884338"/>
-            <a:ext cx="10607040" cy="3738546"/>
-          </a:xfrm>
-          <a:prstGeom prst="rect">
-            <a:avLst/>
-          </a:prstGeom>
-        </p:spPr>
-      </p:pic>
+      <p:sp>
+        <p:nvSpPr>
+          <p:cNvPr id="6" name="Rectangle 5"/>
+          <p:cNvSpPr/>
+          <p:nvPr/>
+        </p:nvSpPr>
+        <p:spPr>
+          <a:xfrm>
+            <a:off x="566928" y="1188720"/>
+            <a:ext cx="11064240" cy="347472"/>
+          </a:xfrm>
+          <a:prstGeom prst="rect">
+            <a:avLst/>
+          </a:prstGeom>
+          <a:solidFill>
+            <a:srgbClr val="F4F7FB"/>
+          </a:solidFill>
+          <a:ln>
+            <a:solidFill>
+              <a:srgbClr val="F4F7FB"/>
+            </a:solidFill>
+          </a:ln>
+        </p:spPr>
+        <p:style>
+          <a:lnRef idx="1">
+            <a:schemeClr val="accent1"/>
+          </a:lnRef>
+          <a:fillRef idx="3">
+            <a:schemeClr val="accent1"/>
+          </a:fillRef>
+          <a:effectRef idx="2">
+            <a:schemeClr val="accent1"/>
+          </a:effectRef>
+          <a:fontRef idx="minor">
+            <a:schemeClr val="lt1"/>
+          </a:fontRef>
+        </p:style>
+        <p:txBody>
+          <a:bodyPr rtlCol="0" anchor="ctr" wrap="square" lIns="73152" rIns="73152" tIns="36576" bIns="36576"/>
+          <a:lstStyle/>
+          <a:p>
+            <a:pPr algn="l">
+              <a:spcAft>
+                <a:spcPts val="0"/>
+              </a:spcAft>
+              <a:defRPr sz="1300" b="1">
+                <a:solidFill>
+                  <a:srgbClr val="122C4E"/>
+                </a:solidFill>
+                <a:latin typeface="Noto Sans CJK KR"/>
+              </a:defRPr>
+            </a:pPr>
+            <a:r>
+              <a:t>현재 단계 실행 2/3    |    현재 폴더 ~/ros2_curri/my_agv_ws    |    현재 터미널</a:t>
+            </a:r>
+          </a:p>
+        </p:txBody>
+      </p:sp>
       <p:sp>
         <p:nvSpPr>
           <p:cNvPr id="7" name="TextBox 6"/>
@@ -6916,8 +7893,8 @@
         </p:nvSpPr>
         <p:spPr>
           <a:xfrm>
-            <a:off x="777240" y="6144768"/>
-            <a:ext cx="10607040" cy="310896"/>
+            <a:off x="676656" y="1764792"/>
+            <a:ext cx="1828800" cy="347472"/>
           </a:xfrm>
           <a:prstGeom prst="rect">
             <a:avLst/>
@@ -6930,11 +7907,155 @@
           </a:bodyPr>
           <a:lstStyle/>
           <a:p>
-            <a:pPr algn="ctr">
-              <a:spcAft>
-                <a:spcPts val="0"/>
-              </a:spcAft>
-              <a:defRPr sz="1100" b="1">
+            <a:pPr algn="l">
+              <a:spcAft>
+                <a:spcPts val="0"/>
+              </a:spcAft>
+              <a:defRPr sz="1800" b="1">
+                <a:solidFill>
+                  <a:srgbClr val="225B9B"/>
+                </a:solidFill>
+                <a:latin typeface="Noto Sans CJK KR"/>
+              </a:defRPr>
+            </a:pPr>
+            <a:r>
+              <a:t>왜 하는가</a:t>
+            </a:r>
+          </a:p>
+        </p:txBody>
+      </p:sp>
+      <p:sp>
+        <p:nvSpPr>
+          <p:cNvPr id="8" name="TextBox 7"/>
+          <p:cNvSpPr txBox="1"/>
+          <p:nvPr/>
+        </p:nvSpPr>
+        <p:spPr>
+          <a:xfrm>
+            <a:off x="676656" y="2103120"/>
+            <a:ext cx="10789920" cy="512064"/>
+          </a:xfrm>
+          <a:prstGeom prst="rect">
+            <a:avLst/>
+          </a:prstGeom>
+          <a:noFill/>
+        </p:spPr>
+        <p:txBody>
+          <a:bodyPr wrap="square" lIns="73152" rIns="73152" tIns="36576" bIns="36576">
+            <a:spAutoFit/>
+          </a:bodyPr>
+          <a:lstStyle/>
+          <a:p>
+            <a:pPr algn="l">
+              <a:spcAft>
+                <a:spcPts val="0"/>
+              </a:spcAft>
+              <a:defRPr sz="2000" b="0">
+                <a:solidFill>
+                  <a:srgbClr val="122C4E"/>
+                </a:solidFill>
+                <a:latin typeface="Noto Sans CJK KR"/>
+              </a:defRPr>
+            </a:pPr>
+            <a:r>
+              <a:t>모델과 frame이 맞아야 scan·image 위치도 맞는다.</a:t>
+            </a:r>
+          </a:p>
+        </p:txBody>
+      </p:sp>
+      <p:sp>
+        <p:nvSpPr>
+          <p:cNvPr id="9" name="Rounded Rectangle 8"/>
+          <p:cNvSpPr/>
+          <p:nvPr/>
+        </p:nvSpPr>
+        <p:spPr>
+          <a:xfrm>
+            <a:off x="676656" y="2871216"/>
+            <a:ext cx="10835640" cy="2331720"/>
+          </a:xfrm>
+          <a:prstGeom prst="roundRect">
+            <a:avLst/>
+          </a:prstGeom>
+          <a:solidFill>
+            <a:srgbClr val="1D232D"/>
+          </a:solidFill>
+          <a:ln>
+            <a:solidFill>
+              <a:srgbClr val="1D232D"/>
+            </a:solidFill>
+          </a:ln>
+        </p:spPr>
+        <p:style>
+          <a:lnRef idx="1">
+            <a:schemeClr val="accent1"/>
+          </a:lnRef>
+          <a:fillRef idx="3">
+            <a:schemeClr val="accent1"/>
+          </a:fillRef>
+          <a:effectRef idx="2">
+            <a:schemeClr val="accent1"/>
+          </a:effectRef>
+          <a:fontRef idx="minor">
+            <a:schemeClr val="lt1"/>
+          </a:fontRef>
+        </p:style>
+        <p:txBody>
+          <a:bodyPr rtlCol="0" anchor="ctr" wrap="square" lIns="73152" rIns="73152" tIns="36576" bIns="36576"/>
+          <a:lstStyle/>
+          <a:p>
+            <a:pPr algn="l">
+              <a:spcAft>
+                <a:spcPts val="0"/>
+              </a:spcAft>
+              <a:defRPr sz="1600" b="0">
+                <a:solidFill>
+                  <a:srgbClr val="FFFFFF"/>
+                </a:solidFill>
+                <a:latin typeface="DejaVu Sans Mono"/>
+              </a:defRPr>
+            </a:pPr>
+            <a:r>
+              <a:t>Fixed Frame: odom 또는 base_link</a:t>
+            </a:r>
+            <a:br/>
+            <a:r>
+              <a:t>Add → RobotModel → Description Topic: /robot_description</a:t>
+            </a:r>
+            <a:br/>
+            <a:r>
+              <a:t>Add → TF</a:t>
+            </a:r>
+          </a:p>
+        </p:txBody>
+      </p:sp>
+      <p:sp>
+        <p:nvSpPr>
+          <p:cNvPr id="10" name="TextBox 9"/>
+          <p:cNvSpPr txBox="1"/>
+          <p:nvPr/>
+        </p:nvSpPr>
+        <p:spPr>
+          <a:xfrm>
+            <a:off x="768096" y="5468112"/>
+            <a:ext cx="1143000" cy="256032"/>
+          </a:xfrm>
+          <a:prstGeom prst="rect">
+            <a:avLst/>
+          </a:prstGeom>
+          <a:noFill/>
+        </p:spPr>
+        <p:txBody>
+          <a:bodyPr wrap="square" lIns="73152" rIns="73152" tIns="36576" bIns="36576">
+            <a:spAutoFit/>
+          </a:bodyPr>
+          <a:lstStyle/>
+          <a:p>
+            <a:pPr algn="l">
+              <a:spcAft>
+                <a:spcPts val="0"/>
+              </a:spcAft>
+              <a:defRPr sz="1800" b="1">
                 <a:solidFill>
                   <a:srgbClr val="2A8B5A"/>
                 </a:solidFill>
@@ -6942,7 +8063,46 @@
               </a:defRPr>
             </a:pPr>
             <a:r>
-              <a:t>화면에서 확인: ① 명령/설정  ② 정상 출력 또는 화면  ③ 다음 검증 명령으로 재확인</a:t>
+              <a:t>확인</a:t>
+            </a:r>
+          </a:p>
+        </p:txBody>
+      </p:sp>
+      <p:sp>
+        <p:nvSpPr>
+          <p:cNvPr id="11" name="TextBox 10"/>
+          <p:cNvSpPr txBox="1"/>
+          <p:nvPr/>
+        </p:nvSpPr>
+        <p:spPr>
+          <a:xfrm>
+            <a:off x="768096" y="5742432"/>
+            <a:ext cx="10561320" cy="347472"/>
+          </a:xfrm>
+          <a:prstGeom prst="rect">
+            <a:avLst/>
+          </a:prstGeom>
+          <a:noFill/>
+        </p:spPr>
+        <p:txBody>
+          <a:bodyPr wrap="square" lIns="73152" rIns="73152" tIns="36576" bIns="36576">
+            <a:spAutoFit/>
+          </a:bodyPr>
+          <a:lstStyle/>
+          <a:p>
+            <a:pPr algn="l">
+              <a:spcAft>
+                <a:spcPts val="0"/>
+              </a:spcAft>
+              <a:defRPr sz="1800" b="0">
+                <a:solidFill>
+                  <a:srgbClr val="122C4E"/>
+                </a:solidFill>
+                <a:latin typeface="Noto Sans CJK KR"/>
+              </a:defRPr>
+            </a:pPr>
+            <a:r>
+              <a:t>출력에서 topic·frame·파일 이름 또는 성공 메시지를 찾고, 맞지 않으면 다음 파일로 가지 않습니다.</a:t>
             </a:r>
           </a:p>
         </p:txBody>
@@ -6999,7 +8159,7 @@
               </a:defRPr>
             </a:pPr>
             <a:r>
-              <a:t>객관적 검증 명령으로 완료를 확인한다</a:t>
+              <a:t>구현 뒤 실행 3/3: 센서 display를 추가한다</a:t>
             </a:r>
           </a:p>
         </p:txBody>
@@ -7038,7 +8198,7 @@
               </a:defRPr>
             </a:pPr>
             <a:r>
-              <a:t>화면만 보지 말고 topic·frame·파일·parameter를 다시 확인합니다.</a:t>
+              <a:t>방금 직접 만든 파일을 실행·검사하며 다음 파일로 넘어갈 기준을 만듭니다.</a:t>
             </a:r>
           </a:p>
         </p:txBody>
@@ -7174,21 +8334,99 @@
               </a:defRPr>
             </a:pPr>
             <a:r>
-              <a:t>현재 단계 검증    |    현재 폴더 ~/ros2_curri/my_agv_ws    |    현재 터미널</a:t>
-            </a:r>
-          </a:p>
-        </p:txBody>
-      </p:sp>
-      <p:sp>
-        <p:nvSpPr>
-          <p:cNvPr id="7" name="Rounded Rectangle 6"/>
+              <a:t>현재 단계 실행 3/3    |    현재 폴더 ~/ros2_curri/my_agv_ws    |    현재 터미널</a:t>
+            </a:r>
+          </a:p>
+        </p:txBody>
+      </p:sp>
+      <p:sp>
+        <p:nvSpPr>
+          <p:cNvPr id="7" name="TextBox 6"/>
+          <p:cNvSpPr txBox="1"/>
+          <p:nvPr/>
+        </p:nvSpPr>
+        <p:spPr>
+          <a:xfrm>
+            <a:off x="676656" y="1764792"/>
+            <a:ext cx="1828800" cy="347472"/>
+          </a:xfrm>
+          <a:prstGeom prst="rect">
+            <a:avLst/>
+          </a:prstGeom>
+          <a:noFill/>
+        </p:spPr>
+        <p:txBody>
+          <a:bodyPr wrap="square" lIns="73152" rIns="73152" tIns="36576" bIns="36576">
+            <a:spAutoFit/>
+          </a:bodyPr>
+          <a:lstStyle/>
+          <a:p>
+            <a:pPr algn="l">
+              <a:spcAft>
+                <a:spcPts val="0"/>
+              </a:spcAft>
+              <a:defRPr sz="1800" b="1">
+                <a:solidFill>
+                  <a:srgbClr val="225B9B"/>
+                </a:solidFill>
+                <a:latin typeface="Noto Sans CJK KR"/>
+              </a:defRPr>
+            </a:pPr>
+            <a:r>
+              <a:t>왜 하는가</a:t>
+            </a:r>
+          </a:p>
+        </p:txBody>
+      </p:sp>
+      <p:sp>
+        <p:nvSpPr>
+          <p:cNvPr id="8" name="TextBox 7"/>
+          <p:cNvSpPr txBox="1"/>
+          <p:nvPr/>
+        </p:nvSpPr>
+        <p:spPr>
+          <a:xfrm>
+            <a:off x="676656" y="2103120"/>
+            <a:ext cx="10789920" cy="512064"/>
+          </a:xfrm>
+          <a:prstGeom prst="rect">
+            <a:avLst/>
+          </a:prstGeom>
+          <a:noFill/>
+        </p:spPr>
+        <p:txBody>
+          <a:bodyPr wrap="square" lIns="73152" rIns="73152" tIns="36576" bIns="36576">
+            <a:spAutoFit/>
+          </a:bodyPr>
+          <a:lstStyle/>
+          <a:p>
+            <a:pPr algn="l">
+              <a:spcAft>
+                <a:spcPts val="0"/>
+              </a:spcAft>
+              <a:defRPr sz="2000" b="0">
+                <a:solidFill>
+                  <a:srgbClr val="122C4E"/>
+                </a:solidFill>
+                <a:latin typeface="Noto Sans CJK KR"/>
+              </a:defRPr>
+            </a:pPr>
+            <a:r>
+              <a:t>각 display는 topic과 message frame_id를 TF로 변환한다.</a:t>
+            </a:r>
+          </a:p>
+        </p:txBody>
+      </p:sp>
+      <p:sp>
+        <p:nvSpPr>
+          <p:cNvPr id="9" name="Rounded Rectangle 8"/>
           <p:cNvSpPr/>
           <p:nvPr/>
         </p:nvSpPr>
         <p:spPr>
           <a:xfrm>
-            <a:off x="658368" y="1755648"/>
-            <a:ext cx="10972800" cy="2148840"/>
+            <a:off x="676656" y="2871216"/>
+            <a:ext cx="10835640" cy="2331720"/>
           </a:xfrm>
           <a:prstGeom prst="roundRect">
             <a:avLst/>
@@ -7232,99 +8470,29 @@
               </a:defRPr>
             </a:pPr>
             <a:r>
-              <a:t>ros2 topic info /robot_description</a:t>
+              <a:t>Add → LaserScan → Topic: /scan</a:t>
             </a:r>
             <a:br/>
             <a:r>
-              <a:t>ros2 topic echo /scan --once</a:t>
+              <a:t>Add → Odometry → Topic: /odom</a:t>
             </a:r>
             <a:br/>
             <a:r>
-              <a:t>ros2 topic echo /odom --once</a:t>
-            </a:r>
-          </a:p>
-        </p:txBody>
-      </p:sp>
-      <p:sp>
-        <p:nvSpPr>
-          <p:cNvPr id="8" name="Rounded Rectangle 7"/>
-          <p:cNvSpPr/>
-          <p:nvPr/>
-        </p:nvSpPr>
-        <p:spPr>
-          <a:xfrm>
-            <a:off x="658368" y="4206240"/>
-            <a:ext cx="10972800" cy="1554480"/>
-          </a:xfrm>
-          <a:prstGeom prst="roundRect">
-            <a:avLst/>
-          </a:prstGeom>
-          <a:solidFill>
-            <a:srgbClr val="F4F7FB"/>
-          </a:solidFill>
-          <a:ln>
-            <a:solidFill>
-              <a:srgbClr val="D1DFD5"/>
-            </a:solidFill>
-          </a:ln>
-        </p:spPr>
-        <p:style>
-          <a:lnRef idx="1">
-            <a:schemeClr val="accent1"/>
-          </a:lnRef>
-          <a:fillRef idx="3">
-            <a:schemeClr val="accent1"/>
-          </a:fillRef>
-          <a:effectRef idx="2">
-            <a:schemeClr val="accent1"/>
-          </a:effectRef>
-          <a:fontRef idx="minor">
-            <a:schemeClr val="lt1"/>
-          </a:fontRef>
-        </p:style>
-        <p:txBody>
-          <a:bodyPr rtlCol="0" anchor="ctr" wrap="square" lIns="73152" rIns="73152" tIns="36576" bIns="36576"/>
-          <a:lstStyle/>
-          <a:p>
-            <a:pPr algn="l">
-              <a:spcAft>
-                <a:spcPts val="0"/>
-              </a:spcAft>
-              <a:defRPr sz="1800" b="1">
-                <a:solidFill>
-                  <a:srgbClr val="2A8B5A"/>
-                </a:solidFill>
-                <a:latin typeface="Noto Sans CJK KR"/>
-              </a:defRPr>
-            </a:pPr>
-            <a:r>
-              <a:t>완료 체크</a:t>
-            </a:r>
-            <a:br/>
-            <a:r>
-              <a:t>□ 명령이 오류 없이 실행된다.</a:t>
-            </a:r>
-            <a:br/>
-            <a:r>
-              <a:t>□ 기대한 파일·topic·frame·parameter 이름이 보인다.</a:t>
-            </a:r>
-            <a:br/>
-            <a:r>
-              <a:t>□ 값의 단위와 방향을 한 문장으로 설명할 수 있다.</a:t>
-            </a:r>
-          </a:p>
-        </p:txBody>
-      </p:sp>
-      <p:sp>
-        <p:nvSpPr>
-          <p:cNvPr id="9" name="TextBox 8"/>
+              <a:t>File → Save Config As → agv.rviz</a:t>
+            </a:r>
+          </a:p>
+        </p:txBody>
+      </p:sp>
+      <p:sp>
+        <p:nvSpPr>
+          <p:cNvPr id="10" name="TextBox 9"/>
           <p:cNvSpPr txBox="1"/>
           <p:nvPr/>
         </p:nvSpPr>
         <p:spPr>
           <a:xfrm>
-            <a:off x="731520" y="5989320"/>
-            <a:ext cx="10789920" cy="237744"/>
+            <a:off x="768096" y="5468112"/>
+            <a:ext cx="1143000" cy="256032"/>
           </a:xfrm>
           <a:prstGeom prst="rect">
             <a:avLst/>
@@ -7341,7 +8509,46 @@
               <a:spcAft>
                 <a:spcPts val="0"/>
               </a:spcAft>
-              <a:defRPr sz="1500" b="1">
+              <a:defRPr sz="1800" b="1">
+                <a:solidFill>
+                  <a:srgbClr val="2A8B5A"/>
+                </a:solidFill>
+                <a:latin typeface="Noto Sans CJK KR"/>
+              </a:defRPr>
+            </a:pPr>
+            <a:r>
+              <a:t>확인</a:t>
+            </a:r>
+          </a:p>
+        </p:txBody>
+      </p:sp>
+      <p:sp>
+        <p:nvSpPr>
+          <p:cNvPr id="11" name="TextBox 10"/>
+          <p:cNvSpPr txBox="1"/>
+          <p:nvPr/>
+        </p:nvSpPr>
+        <p:spPr>
+          <a:xfrm>
+            <a:off x="768096" y="5742432"/>
+            <a:ext cx="10561320" cy="347472"/>
+          </a:xfrm>
+          <a:prstGeom prst="rect">
+            <a:avLst/>
+          </a:prstGeom>
+          <a:noFill/>
+        </p:spPr>
+        <p:txBody>
+          <a:bodyPr wrap="square" lIns="73152" rIns="73152" tIns="36576" bIns="36576">
+            <a:spAutoFit/>
+          </a:bodyPr>
+          <a:lstStyle/>
+          <a:p>
+            <a:pPr algn="l">
+              <a:spcAft>
+                <a:spcPts val="0"/>
+              </a:spcAft>
+              <a:defRPr sz="1800" b="0">
                 <a:solidFill>
                   <a:srgbClr val="122C4E"/>
                 </a:solidFill>
@@ -7349,7 +8556,7 @@
               </a:defRPr>
             </a:pPr>
             <a:r>
-              <a:t>완료 조건: agv.rviz에 RobotModel·TF·LaserScan·Odometry 설정을 저장하고 실제 화면을 확인한다.</a:t>
+              <a:t>출력에서 topic·frame·파일 이름 또는 성공 메시지를 찾고, 맞지 않으면 다음 파일로 가지 않습니다.</a:t>
             </a:r>
           </a:p>
         </p:txBody>
@@ -7406,7 +8613,7 @@
               </a:defRPr>
             </a:pPr>
             <a:r>
-              <a:t>막히면: 증상 → 우선 확인 → 재검증</a:t>
+              <a:t>build → source → run 순서로 실행한다</a:t>
             </a:r>
           </a:p>
         </p:txBody>
@@ -7445,7 +8652,7 @@
               </a:defRPr>
             </a:pPr>
             <a:r>
-              <a:t>오류 메시지를 숨기지 않고 같은 순서로 점검합니다.</a:t>
+              <a:t>새 파일 또는 수정 파일은 build와 source 뒤에만 실행 이름·설정에 반영됩니다.</a:t>
             </a:r>
           </a:p>
         </p:txBody>
@@ -7581,7 +8788,7 @@
               </a:defRPr>
             </a:pPr>
             <a:r>
-              <a:t>현재 단계 오류 대응    |    현재 폴더 ~/ros2_curri/my_agv_ws    |    현재 터미널</a:t>
+              <a:t>현재 단계 실행    |    현재 폴더 ~/ros2_curri/my_agv_ws    |    현재 터미널</a:t>
             </a:r>
           </a:p>
         </p:txBody>
@@ -7594,18 +8801,18 @@
         </p:nvSpPr>
         <p:spPr>
           <a:xfrm>
-            <a:off x="694944" y="1755648"/>
-            <a:ext cx="10972800" cy="1115568"/>
+            <a:off x="658368" y="1700784"/>
+            <a:ext cx="10972800" cy="3182112"/>
           </a:xfrm>
           <a:prstGeom prst="roundRect">
             <a:avLst/>
           </a:prstGeom>
           <a:solidFill>
-            <a:srgbClr val="FFF7F4"/>
+            <a:srgbClr val="1D232D"/>
           </a:solidFill>
           <a:ln>
             <a:solidFill>
-              <a:srgbClr val="EDBEB4"/>
+              <a:srgbClr val="1D232D"/>
             </a:solidFill>
           </a:ln>
         </p:spPr>
@@ -7624,10 +8831,27 @@
           </a:fontRef>
         </p:style>
         <p:txBody>
-          <a:bodyPr rtlCol="0" anchor="ctr"/>
-          <a:lstStyle/>
-          <a:p>
-            <a:pPr algn="ctr"/>
+          <a:bodyPr rtlCol="0" anchor="ctr" wrap="square" lIns="73152" rIns="73152" tIns="36576" bIns="36576"/>
+          <a:lstStyle/>
+          <a:p>
+            <a:pPr algn="l">
+              <a:spcAft>
+                <a:spcPts val="0"/>
+              </a:spcAft>
+              <a:defRPr sz="1600" b="0">
+                <a:solidFill>
+                  <a:srgbClr val="FFFFFF"/>
+                </a:solidFill>
+                <a:latin typeface="DejaVu Sans Mono"/>
+              </a:defRPr>
+            </a:pPr>
+            <a:r>
+              <a:t>source ~/ros2_curri/my_agv_ws/install/setup.bash</a:t>
+            </a:r>
+            <a:br/>
+            <a:r>
+              <a:t>ros2 launch agv_bringup agv_sim.launch.py</a:t>
+            </a:r>
           </a:p>
         </p:txBody>
       </p:sp>
@@ -7639,8 +8863,8 @@
         </p:nvSpPr>
         <p:spPr>
           <a:xfrm>
-            <a:off x="896112" y="1901952"/>
-            <a:ext cx="2926080" cy="274320"/>
+            <a:off x="786384" y="5239512"/>
+            <a:ext cx="1261872" cy="237744"/>
           </a:xfrm>
           <a:prstGeom prst="rect">
             <a:avLst/>
@@ -7659,13 +8883,13 @@
               </a:spcAft>
               <a:defRPr sz="1800" b="1">
                 <a:solidFill>
-                  <a:srgbClr val="BE3B3B"/>
-                </a:solidFill>
-                <a:latin typeface="Noto Sans CJK KR"/>
-              </a:defRPr>
-            </a:pPr>
-            <a:r>
-              <a:t>증상 1: RobotModel이 안 보임</a:t>
+                  <a:srgbClr val="2A8B5A"/>
+                </a:solidFill>
+                <a:latin typeface="Noto Sans CJK KR"/>
+              </a:defRPr>
+            </a:pPr>
+            <a:r>
+              <a:t>확인 기준</a:t>
             </a:r>
           </a:p>
         </p:txBody>
@@ -7678,8 +8902,8 @@
         </p:nvSpPr>
         <p:spPr>
           <a:xfrm>
-            <a:off x="3794760" y="1883664"/>
-            <a:ext cx="7543800" cy="621792"/>
+            <a:off x="786384" y="5532120"/>
+            <a:ext cx="10469880" cy="420624"/>
           </a:xfrm>
           <a:prstGeom prst="rect">
             <a:avLst/>
@@ -7696,7 +8920,7 @@
               <a:spcAft>
                 <a:spcPts val="0"/>
               </a:spcAft>
-              <a:defRPr sz="1600" b="0">
+              <a:defRPr sz="1800" b="0">
                 <a:solidFill>
                   <a:srgbClr val="122C4E"/>
                 </a:solidFill>
@@ -7704,177 +8928,7 @@
               </a:defRPr>
             </a:pPr>
             <a:r>
-              <a:t>우선 확인: robot_description·Fixed Frame·TF를 순서대로 확인한다.</a:t>
-            </a:r>
-            <a:br/>
-            <a:r>
-              <a:t>수정 후: ros2 topic info /robot_description</a:t>
-            </a:r>
-          </a:p>
-        </p:txBody>
-      </p:sp>
-      <p:sp>
-        <p:nvSpPr>
-          <p:cNvPr id="10" name="Rounded Rectangle 9"/>
-          <p:cNvSpPr/>
-          <p:nvPr/>
-        </p:nvSpPr>
-        <p:spPr>
-          <a:xfrm>
-            <a:off x="694944" y="3172968"/>
-            <a:ext cx="10972800" cy="1115568"/>
-          </a:xfrm>
-          <a:prstGeom prst="roundRect">
-            <a:avLst/>
-          </a:prstGeom>
-          <a:solidFill>
-            <a:srgbClr val="FFF7F4"/>
-          </a:solidFill>
-          <a:ln>
-            <a:solidFill>
-              <a:srgbClr val="EDBEB4"/>
-            </a:solidFill>
-          </a:ln>
-        </p:spPr>
-        <p:style>
-          <a:lnRef idx="1">
-            <a:schemeClr val="accent1"/>
-          </a:lnRef>
-          <a:fillRef idx="3">
-            <a:schemeClr val="accent1"/>
-          </a:fillRef>
-          <a:effectRef idx="2">
-            <a:schemeClr val="accent1"/>
-          </a:effectRef>
-          <a:fontRef idx="minor">
-            <a:schemeClr val="lt1"/>
-          </a:fontRef>
-        </p:style>
-        <p:txBody>
-          <a:bodyPr rtlCol="0" anchor="ctr"/>
-          <a:lstStyle/>
-          <a:p>
-            <a:pPr algn="ctr"/>
-          </a:p>
-        </p:txBody>
-      </p:sp>
-      <p:sp>
-        <p:nvSpPr>
-          <p:cNvPr id="11" name="TextBox 10"/>
-          <p:cNvSpPr txBox="1"/>
-          <p:nvPr/>
-        </p:nvSpPr>
-        <p:spPr>
-          <a:xfrm>
-            <a:off x="896112" y="3319272"/>
-            <a:ext cx="2926080" cy="274320"/>
-          </a:xfrm>
-          <a:prstGeom prst="rect">
-            <a:avLst/>
-          </a:prstGeom>
-          <a:noFill/>
-        </p:spPr>
-        <p:txBody>
-          <a:bodyPr wrap="square" lIns="73152" rIns="73152" tIns="36576" bIns="36576">
-            <a:spAutoFit/>
-          </a:bodyPr>
-          <a:lstStyle/>
-          <a:p>
-            <a:pPr algn="l">
-              <a:spcAft>
-                <a:spcPts val="0"/>
-              </a:spcAft>
-              <a:defRPr sz="1800" b="1">
-                <a:solidFill>
-                  <a:srgbClr val="BE3B3B"/>
-                </a:solidFill>
-                <a:latin typeface="Noto Sans CJK KR"/>
-              </a:defRPr>
-            </a:pPr>
-            <a:r>
-              <a:t>증상 2: LaserScan 위치가 이상함</a:t>
-            </a:r>
-          </a:p>
-        </p:txBody>
-      </p:sp>
-      <p:sp>
-        <p:nvSpPr>
-          <p:cNvPr id="12" name="TextBox 11"/>
-          <p:cNvSpPr txBox="1"/>
-          <p:nvPr/>
-        </p:nvSpPr>
-        <p:spPr>
-          <a:xfrm>
-            <a:off x="3794760" y="3300984"/>
-            <a:ext cx="7543800" cy="621792"/>
-          </a:xfrm>
-          <a:prstGeom prst="rect">
-            <a:avLst/>
-          </a:prstGeom>
-          <a:noFill/>
-        </p:spPr>
-        <p:txBody>
-          <a:bodyPr wrap="square" lIns="73152" rIns="73152" tIns="36576" bIns="36576">
-            <a:spAutoFit/>
-          </a:bodyPr>
-          <a:lstStyle/>
-          <a:p>
-            <a:pPr algn="l">
-              <a:spcAft>
-                <a:spcPts val="0"/>
-              </a:spcAft>
-              <a:defRPr sz="1600" b="0">
-                <a:solidFill>
-                  <a:srgbClr val="122C4E"/>
-                </a:solidFill>
-                <a:latin typeface="Noto Sans CJK KR"/>
-              </a:defRPr>
-            </a:pPr>
-            <a:r>
-              <a:t>우선 확인: scan header.frame_id와 lidar TF를 확인한다.</a:t>
-            </a:r>
-            <a:br/>
-            <a:r>
-              <a:t>수정 후: ros2 topic info /robot_description</a:t>
-            </a:r>
-          </a:p>
-        </p:txBody>
-      </p:sp>
-      <p:sp>
-        <p:nvSpPr>
-          <p:cNvPr id="13" name="TextBox 12"/>
-          <p:cNvSpPr txBox="1"/>
-          <p:nvPr/>
-        </p:nvSpPr>
-        <p:spPr>
-          <a:xfrm>
-            <a:off x="822960" y="5102352"/>
-            <a:ext cx="10607040" cy="402336"/>
-          </a:xfrm>
-          <a:prstGeom prst="rect">
-            <a:avLst/>
-          </a:prstGeom>
-          <a:noFill/>
-        </p:spPr>
-        <p:txBody>
-          <a:bodyPr wrap="square" lIns="73152" rIns="73152" tIns="36576" bIns="36576">
-            <a:spAutoFit/>
-          </a:bodyPr>
-          <a:lstStyle/>
-          <a:p>
-            <a:pPr algn="ctr">
-              <a:spcAft>
-                <a:spcPts val="0"/>
-              </a:spcAft>
-              <a:defRPr sz="1800" b="1">
-                <a:solidFill>
-                  <a:srgbClr val="DB7E22"/>
-                </a:solidFill>
-                <a:latin typeface="Noto Sans CJK KR"/>
-              </a:defRPr>
-            </a:pPr>
-            <a:r>
-              <a:t>공통 순서: ① 현재 폴더 ② source ③ 파일 경로 ④ 이름/타입/단위 ⑤ build·source 후 재실행</a:t>
+              <a:t>agv.rviz에 RobotModel·TF·LaserScan·Odometry 설정을 저장하고 실제 화면을 확인한다.</a:t>
             </a:r>
           </a:p>
         </p:txBody>
@@ -7931,7 +8985,7 @@
               </a:defRPr>
             </a:pPr>
             <a:r>
-              <a:t>미니 실습: 값 하나를 바꾸고 결과를 비교한다</a:t>
+              <a:t>정상 결과: 실제 환경에서 확인한 출력</a:t>
             </a:r>
           </a:p>
         </p:txBody>
@@ -7970,7 +9024,7 @@
               </a:defRPr>
             </a:pPr>
             <a:r>
-              <a:t>정상 결과를 만든 뒤에는 한 번에 하나의 값만 바꿉니다.</a:t>
+              <a:t>실제 ROS 2 환경의 파일·패키지·구성 검증 로그</a:t>
             </a:r>
           </a:p>
         </p:txBody>
@@ -8053,132 +9107,40 @@
           </a:p>
         </p:txBody>
       </p:sp>
-      <p:sp>
-        <p:nvSpPr>
-          <p:cNvPr id="6" name="Rectangle 5"/>
-          <p:cNvSpPr/>
-          <p:nvPr/>
-        </p:nvSpPr>
-        <p:spPr>
-          <a:xfrm>
-            <a:off x="566928" y="1188720"/>
-            <a:ext cx="11064240" cy="347472"/>
-          </a:xfrm>
-          <a:prstGeom prst="rect">
-            <a:avLst/>
-          </a:prstGeom>
-          <a:solidFill>
-            <a:srgbClr val="F4F7FB"/>
-          </a:solidFill>
-          <a:ln>
-            <a:solidFill>
-              <a:srgbClr val="F4F7FB"/>
-            </a:solidFill>
-          </a:ln>
-        </p:spPr>
-        <p:style>
-          <a:lnRef idx="1">
-            <a:schemeClr val="accent1"/>
-          </a:lnRef>
-          <a:fillRef idx="3">
-            <a:schemeClr val="accent1"/>
-          </a:fillRef>
-          <a:effectRef idx="2">
-            <a:schemeClr val="accent1"/>
-          </a:effectRef>
-          <a:fontRef idx="minor">
-            <a:schemeClr val="lt1"/>
-          </a:fontRef>
-        </p:style>
-        <p:txBody>
-          <a:bodyPr rtlCol="0" anchor="ctr" wrap="square" lIns="73152" rIns="73152" tIns="36576" bIns="36576"/>
-          <a:lstStyle/>
-          <a:p>
-            <a:pPr algn="l">
-              <a:spcAft>
-                <a:spcPts val="0"/>
-              </a:spcAft>
-              <a:defRPr sz="1300" b="1">
-                <a:solidFill>
-                  <a:srgbClr val="122C4E"/>
-                </a:solidFill>
-                <a:latin typeface="Noto Sans CJK KR"/>
-              </a:defRPr>
-            </a:pPr>
-            <a:r>
-              <a:t>현재 단계 미니 실습    |    현재 폴더 ~/ros2_curri/my_agv_ws    |    현재 터미널</a:t>
-            </a:r>
-          </a:p>
-        </p:txBody>
-      </p:sp>
-      <p:sp>
-        <p:nvSpPr>
-          <p:cNvPr id="7" name="Rounded Rectangle 6"/>
-          <p:cNvSpPr/>
-          <p:nvPr/>
-        </p:nvSpPr>
-        <p:spPr>
-          <a:xfrm>
-            <a:off x="749808" y="1874519"/>
-            <a:ext cx="10652760" cy="1993392"/>
-          </a:xfrm>
-          <a:prstGeom prst="roundRect">
-            <a:avLst/>
-          </a:prstGeom>
-          <a:solidFill>
-            <a:srgbClr val="FFF8EB"/>
-          </a:solidFill>
-          <a:ln>
-            <a:solidFill>
-              <a:srgbClr val="ECC680"/>
-            </a:solidFill>
-          </a:ln>
-        </p:spPr>
-        <p:style>
-          <a:lnRef idx="1">
-            <a:schemeClr val="accent1"/>
-          </a:lnRef>
-          <a:fillRef idx="3">
-            <a:schemeClr val="accent1"/>
-          </a:fillRef>
-          <a:effectRef idx="2">
-            <a:schemeClr val="accent1"/>
-          </a:effectRef>
-          <a:fontRef idx="minor">
-            <a:schemeClr val="lt1"/>
-          </a:fontRef>
-        </p:style>
-        <p:txBody>
-          <a:bodyPr rtlCol="0" anchor="ctr" wrap="square" lIns="73152" rIns="73152" tIns="36576" bIns="36576"/>
-          <a:lstStyle/>
-          <a:p>
-            <a:pPr algn="ctr">
-              <a:spcAft>
-                <a:spcPts val="0"/>
-              </a:spcAft>
-              <a:defRPr sz="2300" b="1">
-                <a:solidFill>
-                  <a:srgbClr val="122C4E"/>
-                </a:solidFill>
-                <a:latin typeface="Noto Sans CJK KR"/>
-              </a:defRPr>
-            </a:pPr>
-            <a:r>
-              <a:t>Fixed Frame을 의도적으로 없는 이름으로 바꾼 뒤 Global Status 오류를 읽고 odom으로 되돌린다.</a:t>
-            </a:r>
-          </a:p>
-        </p:txBody>
-      </p:sp>
-      <p:sp>
-        <p:nvSpPr>
-          <p:cNvPr id="8" name="TextBox 7"/>
+      <p:pic>
+        <p:nvPicPr>
+          <p:cNvPr id="6" name="Picture 5" descr="validation_terminal.png"/>
+          <p:cNvPicPr>
+            <a:picLocks noChangeAspect="1"/>
+          </p:cNvPicPr>
+          <p:nvPr/>
+        </p:nvPicPr>
+        <p:blipFill>
+          <a:blip r:embed="rId2"/>
+          <a:stretch>
+            <a:fillRect/>
+          </a:stretch>
+        </p:blipFill>
+        <p:spPr>
+          <a:xfrm>
+            <a:off x="790956" y="1884338"/>
+            <a:ext cx="10607040" cy="3738546"/>
+          </a:xfrm>
+          <a:prstGeom prst="rect">
+            <a:avLst/>
+          </a:prstGeom>
+        </p:spPr>
+      </p:pic>
+      <p:sp>
+        <p:nvSpPr>
+          <p:cNvPr id="7" name="TextBox 6"/>
           <p:cNvSpPr txBox="1"/>
           <p:nvPr/>
         </p:nvSpPr>
         <p:spPr>
           <a:xfrm>
-            <a:off x="877824" y="4590288"/>
-            <a:ext cx="10241280" cy="594360"/>
+            <a:off x="777240" y="6144768"/>
+            <a:ext cx="10607040" cy="310896"/>
           </a:xfrm>
           <a:prstGeom prst="rect">
             <a:avLst/>
@@ -8195,15 +9157,15 @@
               <a:spcAft>
                 <a:spcPts val="0"/>
               </a:spcAft>
-              <a:defRPr sz="1900" b="1">
-                <a:solidFill>
-                  <a:srgbClr val="DB7E22"/>
-                </a:solidFill>
-                <a:latin typeface="Noto Sans CJK KR"/>
-              </a:defRPr>
-            </a:pPr>
-            <a:r>
-              <a:t>기록할 것: 바꾼 값(단위) · 기대한 변화 · 실제 출력/화면 · 원래 값으로 되돌린 결과</a:t>
+              <a:defRPr sz="1100" b="1">
+                <a:solidFill>
+                  <a:srgbClr val="2A8B5A"/>
+                </a:solidFill>
+                <a:latin typeface="Noto Sans CJK KR"/>
+              </a:defRPr>
+            </a:pPr>
+            <a:r>
+              <a:t>화면에서 확인: ① 명령/설정  ② 정상 출력 또는 화면  ③ 다음 검증 명령으로 재확인</a:t>
             </a:r>
           </a:p>
         </p:txBody>
@@ -8260,7 +9222,7 @@
               </a:defRPr>
             </a:pPr>
             <a:r>
-              <a:t>내 프로젝트 체크포인트를 저장하고 다음 모듈로 넘긴다</a:t>
+              <a:t>객관적 검증 명령으로 완료를 확인한다</a:t>
             </a:r>
           </a:p>
         </p:txBody>
@@ -8299,7 +9261,7 @@
               </a:defRPr>
             </a:pPr>
             <a:r>
-              <a:t>Complete는 복구용 비교 기준이고, 다음 단계는 내가 직접 만든 workspace에서 계속합니다.</a:t>
+              <a:t>화면만 보지 말고 topic·frame·파일·parameter를 다시 확인합니다.</a:t>
             </a:r>
           </a:p>
         </p:txBody>
@@ -8435,7 +9397,7 @@
               </a:defRPr>
             </a:pPr>
             <a:r>
-              <a:t>현재 단계 체크포인트    |    현재 폴더 ~/ros2_curri/my_agv_ws    |    현재 터미널</a:t>
+              <a:t>현재 단계 검증    |    현재 폴더 ~/ros2_curri/my_agv_ws    |    현재 터미널</a:t>
             </a:r>
           </a:p>
         </p:txBody>
@@ -8448,8 +9410,74 @@
         </p:nvSpPr>
         <p:spPr>
           <a:xfrm>
-            <a:off x="685800" y="1737360"/>
-            <a:ext cx="10972800" cy="3611880"/>
+            <a:off x="658368" y="1755648"/>
+            <a:ext cx="10972800" cy="2148840"/>
+          </a:xfrm>
+          <a:prstGeom prst="roundRect">
+            <a:avLst/>
+          </a:prstGeom>
+          <a:solidFill>
+            <a:srgbClr val="1D232D"/>
+          </a:solidFill>
+          <a:ln>
+            <a:solidFill>
+              <a:srgbClr val="1D232D"/>
+            </a:solidFill>
+          </a:ln>
+        </p:spPr>
+        <p:style>
+          <a:lnRef idx="1">
+            <a:schemeClr val="accent1"/>
+          </a:lnRef>
+          <a:fillRef idx="3">
+            <a:schemeClr val="accent1"/>
+          </a:fillRef>
+          <a:effectRef idx="2">
+            <a:schemeClr val="accent1"/>
+          </a:effectRef>
+          <a:fontRef idx="minor">
+            <a:schemeClr val="lt1"/>
+          </a:fontRef>
+        </p:style>
+        <p:txBody>
+          <a:bodyPr rtlCol="0" anchor="ctr" wrap="square" lIns="73152" rIns="73152" tIns="36576" bIns="36576"/>
+          <a:lstStyle/>
+          <a:p>
+            <a:pPr algn="l">
+              <a:spcAft>
+                <a:spcPts val="0"/>
+              </a:spcAft>
+              <a:defRPr sz="1600" b="0">
+                <a:solidFill>
+                  <a:srgbClr val="FFFFFF"/>
+                </a:solidFill>
+                <a:latin typeface="DejaVu Sans Mono"/>
+              </a:defRPr>
+            </a:pPr>
+            <a:r>
+              <a:t>ros2 topic info /robot_description</a:t>
+            </a:r>
+            <a:br/>
+            <a:r>
+              <a:t>ros2 topic echo /scan --once</a:t>
+            </a:r>
+            <a:br/>
+            <a:r>
+              <a:t>ros2 topic echo /odom --once</a:t>
+            </a:r>
+          </a:p>
+        </p:txBody>
+      </p:sp>
+      <p:sp>
+        <p:nvSpPr>
+          <p:cNvPr id="8" name="Rounded Rectangle 7"/>
+          <p:cNvSpPr/>
+          <p:nvPr/>
+        </p:nvSpPr>
+        <p:spPr>
+          <a:xfrm>
+            <a:off x="658368" y="4206240"/>
+            <a:ext cx="10972800" cy="1554480"/>
           </a:xfrm>
           <a:prstGeom prst="roundRect">
             <a:avLst/>
@@ -8459,7 +9487,7 @@
           </a:solidFill>
           <a:ln>
             <a:solidFill>
-              <a:srgbClr val="D2DCE8"/>
+              <a:srgbClr val="D1DFD5"/>
             </a:solidFill>
           </a:ln>
         </p:spPr>
@@ -8478,112 +9506,34 @@
           </a:fontRef>
         </p:style>
         <p:txBody>
-          <a:bodyPr rtlCol="0" anchor="ctr"/>
-          <a:lstStyle/>
-          <a:p>
-            <a:pPr algn="ctr"/>
-          </a:p>
-        </p:txBody>
-      </p:sp>
-      <p:sp>
-        <p:nvSpPr>
-          <p:cNvPr id="8" name="TextBox 7"/>
-          <p:cNvSpPr txBox="1"/>
-          <p:nvPr/>
-        </p:nvSpPr>
-        <p:spPr>
-          <a:xfrm>
-            <a:off x="896112" y="1993392"/>
-            <a:ext cx="10332720" cy="2971800"/>
-          </a:xfrm>
-          <a:prstGeom prst="rect">
-            <a:avLst/>
-          </a:prstGeom>
-          <a:noFill/>
-        </p:spPr>
-        <p:txBody>
-          <a:bodyPr wrap="square" lIns="109728" rIns="109728">
-            <a:spAutoFit/>
-          </a:bodyPr>
-          <a:lstStyle/>
-          <a:p>
-            <a:pPr>
-              <a:spcAft>
-                <a:spcPts val="800"/>
-              </a:spcAft>
-              <a:defRPr sz="1800">
-                <a:solidFill>
-                  <a:srgbClr val="122C4E"/>
-                </a:solidFill>
-                <a:latin typeface="Noto Sans CJK KR"/>
-              </a:defRPr>
-            </a:pPr>
-            <a:r>
-              <a:t>• □ 완료 화면: agv.rviz에 RobotModel·TF·LaserScan·Odometry 설정을 저장하고 실제 화면을 확인한다.</a:t>
-            </a:r>
-          </a:p>
-          <a:p>
-            <a:pPr>
-              <a:spcAft>
-                <a:spcPts val="800"/>
-              </a:spcAft>
-              <a:defRPr sz="1800">
-                <a:solidFill>
-                  <a:srgbClr val="122C4E"/>
-                </a:solidFill>
-                <a:latin typeface="Noto Sans CJK KR"/>
-              </a:defRPr>
-            </a:pPr>
-            <a:r>
-              <a:t>• □ 막혔을 때 비교할 Complete: blocks/C_drive_visualization/M11_rviz_integration/complete/</a:t>
-            </a:r>
-          </a:p>
-          <a:p>
-            <a:pPr>
-              <a:spcAft>
-                <a:spcPts val="800"/>
-              </a:spcAft>
-              <a:defRPr sz="1800">
-                <a:solidFill>
-                  <a:srgbClr val="122C4E"/>
-                </a:solidFill>
-                <a:latin typeface="Noto Sans CJK KR"/>
-              </a:defRPr>
-            </a:pPr>
-            <a:r>
-              <a:t>• □ 정상 로그·캡처: logs/validation.log, screenshots/validation_terminal.png</a:t>
-            </a:r>
-          </a:p>
-          <a:p>
-            <a:pPr>
-              <a:spcAft>
-                <a:spcPts val="800"/>
-              </a:spcAft>
-              <a:defRPr sz="1800">
-                <a:solidFill>
-                  <a:srgbClr val="122C4E"/>
-                </a:solidFill>
-                <a:latin typeface="Noto Sans CJK KR"/>
-              </a:defRPr>
-            </a:pPr>
-            <a:r>
-              <a:t>• □ 버전 식별: CHECKSUM_or_TAG.txt의 SHA-256 manifest</a:t>
-            </a:r>
-          </a:p>
-          <a:p>
-            <a:pPr>
-              <a:spcAft>
-                <a:spcPts val="800"/>
-              </a:spcAft>
-              <a:defRPr sz="1800">
-                <a:solidFill>
-                  <a:srgbClr val="122C4E"/>
-                </a:solidFill>
-                <a:latin typeface="Noto Sans CJK KR"/>
-              </a:defRPr>
-            </a:pPr>
-            <a:r>
-              <a:t>• □ 다음 시작 조건: M12~M15 센서 display</a:t>
+          <a:bodyPr rtlCol="0" anchor="ctr" wrap="square" lIns="73152" rIns="73152" tIns="36576" bIns="36576"/>
+          <a:lstStyle/>
+          <a:p>
+            <a:pPr algn="l">
+              <a:spcAft>
+                <a:spcPts val="0"/>
+              </a:spcAft>
+              <a:defRPr sz="1800" b="1">
+                <a:solidFill>
+                  <a:srgbClr val="2A8B5A"/>
+                </a:solidFill>
+                <a:latin typeface="Noto Sans CJK KR"/>
+              </a:defRPr>
+            </a:pPr>
+            <a:r>
+              <a:t>완료 체크</a:t>
+            </a:r>
+            <a:br/>
+            <a:r>
+              <a:t>□ 명령이 오류 없이 실행된다.</a:t>
+            </a:r>
+            <a:br/>
+            <a:r>
+              <a:t>□ 기대한 파일·topic·frame·parameter 이름이 보인다.</a:t>
+            </a:r>
+            <a:br/>
+            <a:r>
+              <a:t>□ 값의 단위와 방향을 한 문장으로 설명할 수 있다.</a:t>
             </a:r>
           </a:p>
         </p:txBody>
@@ -8596,8 +9546,8 @@
         </p:nvSpPr>
         <p:spPr>
           <a:xfrm>
-            <a:off x="868680" y="5596128"/>
-            <a:ext cx="10515600" cy="338328"/>
+            <a:off x="731520" y="5989320"/>
+            <a:ext cx="10789920" cy="237744"/>
           </a:xfrm>
           <a:prstGeom prst="rect">
             <a:avLst/>
@@ -8610,19 +9560,19 @@
           </a:bodyPr>
           <a:lstStyle/>
           <a:p>
-            <a:pPr algn="ctr">
-              <a:spcAft>
-                <a:spcPts val="0"/>
-              </a:spcAft>
-              <a:defRPr sz="1700" b="1">
-                <a:solidFill>
-                  <a:srgbClr val="2A8B5A"/>
-                </a:solidFill>
-                <a:latin typeface="Noto Sans CJK KR"/>
-              </a:defRPr>
-            </a:pPr>
-            <a:r>
-              <a:t>다음 모듈을 시작하기 전, 내 src의 변경사항을 저장하고 현재 완료 조건을 다시 확인합니다.</a:t>
+            <a:pPr algn="l">
+              <a:spcAft>
+                <a:spcPts val="0"/>
+              </a:spcAft>
+              <a:defRPr sz="1500" b="1">
+                <a:solidFill>
+                  <a:srgbClr val="122C4E"/>
+                </a:solidFill>
+                <a:latin typeface="Noto Sans CJK KR"/>
+              </a:defRPr>
+            </a:pPr>
+            <a:r>
+              <a:t>완료 조건: agv.rviz에 RobotModel·TF·LaserScan·Odometry 설정을 저장하고 실제 화면을 확인한다.</a:t>
             </a:r>
           </a:p>
         </p:txBody>
@@ -8679,7 +9629,7 @@
               </a:defRPr>
             </a:pPr>
             <a:r>
-              <a:t>공식 참고 자료</a:t>
+              <a:t>막히면: 증상 → 우선 확인 → 재검증</a:t>
             </a:r>
           </a:p>
         </p:txBody>
@@ -8718,7 +9668,7 @@
               </a:defRPr>
             </a:pPr>
             <a:r>
-              <a:t>본문 단계는 링크를 열지 않아도 완료할 수 있으며, 링크는 개념을 더 확인할 때만 사용합니다.</a:t>
+              <a:t>오류 메시지를 숨기지 않고 같은 순서로 점검합니다.</a:t>
             </a:r>
           </a:p>
         </p:txBody>
@@ -8803,16 +9753,16 @@
       </p:sp>
       <p:sp>
         <p:nvSpPr>
-          <p:cNvPr id="6" name="Rounded Rectangle 5"/>
+          <p:cNvPr id="6" name="Rectangle 5"/>
           <p:cNvSpPr/>
           <p:nvPr/>
         </p:nvSpPr>
         <p:spPr>
           <a:xfrm>
-            <a:off x="658368" y="1554480"/>
-            <a:ext cx="10972800" cy="4526280"/>
-          </a:xfrm>
-          <a:prstGeom prst="roundRect">
+            <a:off x="566928" y="1188720"/>
+            <a:ext cx="11064240" cy="347472"/>
+          </a:xfrm>
+          <a:prstGeom prst="rect">
             <a:avLst/>
           </a:prstGeom>
           <a:solidFill>
@@ -8820,7 +9770,7 @@
           </a:solidFill>
           <a:ln>
             <a:solidFill>
-              <a:srgbClr val="D7DFE9"/>
+              <a:srgbClr val="F4F7FB"/>
             </a:solidFill>
           </a:ln>
         </p:spPr>
@@ -8839,6 +9789,64 @@
           </a:fontRef>
         </p:style>
         <p:txBody>
+          <a:bodyPr rtlCol="0" anchor="ctr" wrap="square" lIns="73152" rIns="73152" tIns="36576" bIns="36576"/>
+          <a:lstStyle/>
+          <a:p>
+            <a:pPr algn="l">
+              <a:spcAft>
+                <a:spcPts val="0"/>
+              </a:spcAft>
+              <a:defRPr sz="1300" b="1">
+                <a:solidFill>
+                  <a:srgbClr val="122C4E"/>
+                </a:solidFill>
+                <a:latin typeface="Noto Sans CJK KR"/>
+              </a:defRPr>
+            </a:pPr>
+            <a:r>
+              <a:t>현재 단계 오류 대응    |    현재 폴더 ~/ros2_curri/my_agv_ws    |    현재 터미널</a:t>
+            </a:r>
+          </a:p>
+        </p:txBody>
+      </p:sp>
+      <p:sp>
+        <p:nvSpPr>
+          <p:cNvPr id="7" name="Rounded Rectangle 6"/>
+          <p:cNvSpPr/>
+          <p:nvPr/>
+        </p:nvSpPr>
+        <p:spPr>
+          <a:xfrm>
+            <a:off x="694944" y="1755648"/>
+            <a:ext cx="10972800" cy="1115568"/>
+          </a:xfrm>
+          <a:prstGeom prst="roundRect">
+            <a:avLst/>
+          </a:prstGeom>
+          <a:solidFill>
+            <a:srgbClr val="FFF7F4"/>
+          </a:solidFill>
+          <a:ln>
+            <a:solidFill>
+              <a:srgbClr val="EDBEB4"/>
+            </a:solidFill>
+          </a:ln>
+        </p:spPr>
+        <p:style>
+          <a:lnRef idx="1">
+            <a:schemeClr val="accent1"/>
+          </a:lnRef>
+          <a:fillRef idx="3">
+            <a:schemeClr val="accent1"/>
+          </a:fillRef>
+          <a:effectRef idx="2">
+            <a:schemeClr val="accent1"/>
+          </a:effectRef>
+          <a:fontRef idx="minor">
+            <a:schemeClr val="lt1"/>
+          </a:fontRef>
+        </p:style>
+        <p:txBody>
           <a:bodyPr rtlCol="0" anchor="ctr"/>
           <a:lstStyle/>
           <a:p>
@@ -8848,14 +9856,14 @@
       </p:sp>
       <p:sp>
         <p:nvSpPr>
-          <p:cNvPr id="7" name="TextBox 6"/>
+          <p:cNvPr id="8" name="TextBox 7"/>
           <p:cNvSpPr txBox="1"/>
           <p:nvPr/>
         </p:nvSpPr>
         <p:spPr>
           <a:xfrm>
-            <a:off x="914400" y="1773936"/>
-            <a:ext cx="3840480" cy="256032"/>
+            <a:off x="896112" y="1901952"/>
+            <a:ext cx="2926080" cy="274320"/>
           </a:xfrm>
           <a:prstGeom prst="rect">
             <a:avLst/>
@@ -8872,29 +9880,29 @@
               <a:spcAft>
                 <a:spcPts val="0"/>
               </a:spcAft>
-              <a:defRPr sz="1700" b="1">
-                <a:solidFill>
-                  <a:srgbClr val="122C4E"/>
-                </a:solidFill>
-                <a:latin typeface="Noto Sans CJK KR"/>
-              </a:defRPr>
-            </a:pPr>
-            <a:r>
-              <a:t>ROS 2 Jazzy — Gazebo Simulation</a:t>
-            </a:r>
-          </a:p>
-        </p:txBody>
-      </p:sp>
-      <p:sp>
-        <p:nvSpPr>
-          <p:cNvPr id="8" name="TextBox 7"/>
+              <a:defRPr sz="1800" b="1">
+                <a:solidFill>
+                  <a:srgbClr val="BE3B3B"/>
+                </a:solidFill>
+                <a:latin typeface="Noto Sans CJK KR"/>
+              </a:defRPr>
+            </a:pPr>
+            <a:r>
+              <a:t>증상 1: RobotModel이 안 보임</a:t>
+            </a:r>
+          </a:p>
+        </p:txBody>
+      </p:sp>
+      <p:sp>
+        <p:nvSpPr>
+          <p:cNvPr id="9" name="TextBox 8"/>
           <p:cNvSpPr txBox="1"/>
           <p:nvPr/>
         </p:nvSpPr>
         <p:spPr>
           <a:xfrm>
-            <a:off x="914400" y="2048255"/>
-            <a:ext cx="9966960" cy="475488"/>
+            <a:off x="3794760" y="1883664"/>
+            <a:ext cx="7543800" cy="621792"/>
           </a:xfrm>
           <a:prstGeom prst="rect">
             <a:avLst/>
@@ -8911,29 +9919,78 @@
               <a:spcAft>
                 <a:spcPts val="0"/>
               </a:spcAft>
-              <a:defRPr sz="1000" b="0">
-                <a:solidFill>
-                  <a:srgbClr val="225B9B"/>
-                </a:solidFill>
-                <a:latin typeface="DejaVu Sans Mono"/>
-              </a:defRPr>
-            </a:pPr>
-            <a:r>
-              <a:t>https://docs.ros.org/en/jazzy/Tutorials/Advanced/Simulators/Gazebo/Simulation-Gazebo.html</a:t>
-            </a:r>
-          </a:p>
-        </p:txBody>
-      </p:sp>
-      <p:sp>
-        <p:nvSpPr>
-          <p:cNvPr id="9" name="TextBox 8"/>
+              <a:defRPr sz="1600" b="0">
+                <a:solidFill>
+                  <a:srgbClr val="122C4E"/>
+                </a:solidFill>
+                <a:latin typeface="Noto Sans CJK KR"/>
+              </a:defRPr>
+            </a:pPr>
+            <a:r>
+              <a:t>우선 확인: robot_description·Fixed Frame·TF를 순서대로 확인한다.</a:t>
+            </a:r>
+            <a:br/>
+            <a:r>
+              <a:t>수정 후: ros2 topic info /robot_description</a:t>
+            </a:r>
+          </a:p>
+        </p:txBody>
+      </p:sp>
+      <p:sp>
+        <p:nvSpPr>
+          <p:cNvPr id="10" name="Rounded Rectangle 9"/>
+          <p:cNvSpPr/>
+          <p:nvPr/>
+        </p:nvSpPr>
+        <p:spPr>
+          <a:xfrm>
+            <a:off x="694944" y="3172968"/>
+            <a:ext cx="10972800" cy="1115568"/>
+          </a:xfrm>
+          <a:prstGeom prst="roundRect">
+            <a:avLst/>
+          </a:prstGeom>
+          <a:solidFill>
+            <a:srgbClr val="FFF7F4"/>
+          </a:solidFill>
+          <a:ln>
+            <a:solidFill>
+              <a:srgbClr val="EDBEB4"/>
+            </a:solidFill>
+          </a:ln>
+        </p:spPr>
+        <p:style>
+          <a:lnRef idx="1">
+            <a:schemeClr val="accent1"/>
+          </a:lnRef>
+          <a:fillRef idx="3">
+            <a:schemeClr val="accent1"/>
+          </a:fillRef>
+          <a:effectRef idx="2">
+            <a:schemeClr val="accent1"/>
+          </a:effectRef>
+          <a:fontRef idx="minor">
+            <a:schemeClr val="lt1"/>
+          </a:fontRef>
+        </p:style>
+        <p:txBody>
+          <a:bodyPr rtlCol="0" anchor="ctr"/>
+          <a:lstStyle/>
+          <a:p>
+            <a:pPr algn="ctr"/>
+          </a:p>
+        </p:txBody>
+      </p:sp>
+      <p:sp>
+        <p:nvSpPr>
+          <p:cNvPr id="11" name="TextBox 10"/>
           <p:cNvSpPr txBox="1"/>
           <p:nvPr/>
         </p:nvSpPr>
         <p:spPr>
           <a:xfrm>
-            <a:off x="914400" y="2852928"/>
-            <a:ext cx="3840480" cy="256032"/>
+            <a:off x="896112" y="3319272"/>
+            <a:ext cx="2926080" cy="274320"/>
           </a:xfrm>
           <a:prstGeom prst="rect">
             <a:avLst/>
@@ -8950,29 +10007,29 @@
               <a:spcAft>
                 <a:spcPts val="0"/>
               </a:spcAft>
-              <a:defRPr sz="1700" b="1">
-                <a:solidFill>
-                  <a:srgbClr val="122C4E"/>
-                </a:solidFill>
-                <a:latin typeface="Noto Sans CJK KR"/>
-              </a:defRPr>
-            </a:pPr>
-            <a:r>
-              <a:t>ROS 2 Jazzy — URDF / robot_state_publisher</a:t>
-            </a:r>
-          </a:p>
-        </p:txBody>
-      </p:sp>
-      <p:sp>
-        <p:nvSpPr>
-          <p:cNvPr id="10" name="TextBox 9"/>
+              <a:defRPr sz="1800" b="1">
+                <a:solidFill>
+                  <a:srgbClr val="BE3B3B"/>
+                </a:solidFill>
+                <a:latin typeface="Noto Sans CJK KR"/>
+              </a:defRPr>
+            </a:pPr>
+            <a:r>
+              <a:t>증상 2: LaserScan 위치가 이상함</a:t>
+            </a:r>
+          </a:p>
+        </p:txBody>
+      </p:sp>
+      <p:sp>
+        <p:nvSpPr>
+          <p:cNvPr id="12" name="TextBox 11"/>
           <p:cNvSpPr txBox="1"/>
           <p:nvPr/>
         </p:nvSpPr>
         <p:spPr>
           <a:xfrm>
-            <a:off x="914400" y="3127248"/>
-            <a:ext cx="9966960" cy="475488"/>
+            <a:off x="3794760" y="3300984"/>
+            <a:ext cx="7543800" cy="621792"/>
           </a:xfrm>
           <a:prstGeom prst="rect">
             <a:avLst/>
@@ -8989,29 +10046,33 @@
               <a:spcAft>
                 <a:spcPts val="0"/>
               </a:spcAft>
-              <a:defRPr sz="1000" b="0">
-                <a:solidFill>
-                  <a:srgbClr val="225B9B"/>
-                </a:solidFill>
-                <a:latin typeface="DejaVu Sans Mono"/>
-              </a:defRPr>
-            </a:pPr>
-            <a:r>
-              <a:t>https://docs.ros.org/en/jazzy/Tutorials/Intermediate/URDF/Using-URDF-with-Robot-State-Publisher-py.html</a:t>
-            </a:r>
-          </a:p>
-        </p:txBody>
-      </p:sp>
-      <p:sp>
-        <p:nvSpPr>
-          <p:cNvPr id="11" name="TextBox 10"/>
+              <a:defRPr sz="1600" b="0">
+                <a:solidFill>
+                  <a:srgbClr val="122C4E"/>
+                </a:solidFill>
+                <a:latin typeface="Noto Sans CJK KR"/>
+              </a:defRPr>
+            </a:pPr>
+            <a:r>
+              <a:t>우선 확인: scan header.frame_id와 lidar TF를 확인한다.</a:t>
+            </a:r>
+            <a:br/>
+            <a:r>
+              <a:t>수정 후: ros2 topic info /robot_description</a:t>
+            </a:r>
+          </a:p>
+        </p:txBody>
+      </p:sp>
+      <p:sp>
+        <p:nvSpPr>
+          <p:cNvPr id="13" name="TextBox 12"/>
           <p:cNvSpPr txBox="1"/>
           <p:nvPr/>
         </p:nvSpPr>
         <p:spPr>
           <a:xfrm>
-            <a:off x="914400" y="3931920"/>
-            <a:ext cx="3840480" cy="256032"/>
+            <a:off x="822960" y="5102352"/>
+            <a:ext cx="10607040" cy="402336"/>
           </a:xfrm>
           <a:prstGeom prst="rect">
             <a:avLst/>
@@ -9024,33 +10085,51 @@
           </a:bodyPr>
           <a:lstStyle/>
           <a:p>
-            <a:pPr algn="l">
-              <a:spcAft>
-                <a:spcPts val="0"/>
-              </a:spcAft>
-              <a:defRPr sz="1700" b="1">
-                <a:solidFill>
-                  <a:srgbClr val="122C4E"/>
-                </a:solidFill>
-                <a:latin typeface="Noto Sans CJK KR"/>
-              </a:defRPr>
-            </a:pPr>
-            <a:r>
-              <a:t>Gazebo — ROS 2 Integration / ros_gz_bridge</a:t>
-            </a:r>
-          </a:p>
-        </p:txBody>
-      </p:sp>
-      <p:sp>
-        <p:nvSpPr>
-          <p:cNvPr id="12" name="TextBox 11"/>
+            <a:pPr algn="ctr">
+              <a:spcAft>
+                <a:spcPts val="0"/>
+              </a:spcAft>
+              <a:defRPr sz="1800" b="1">
+                <a:solidFill>
+                  <a:srgbClr val="DB7E22"/>
+                </a:solidFill>
+                <a:latin typeface="Noto Sans CJK KR"/>
+              </a:defRPr>
+            </a:pPr>
+            <a:r>
+              <a:t>공통 순서: ① 현재 폴더 ② source ③ 파일 경로 ④ 이름/타입/단위 ⑤ build·source 후 재실행</a:t>
+            </a:r>
+          </a:p>
+        </p:txBody>
+      </p:sp>
+    </p:spTree>
+  </p:cSld>
+  <p:clrMapOvr>
+    <a:masterClrMapping/>
+  </p:clrMapOvr>
+</p:sld>
+</file>
+
+<file path=ppt/slides/slide19.xml><?xml version="1.0" encoding="utf-8"?>
+<p:sld xmlns:a="http://schemas.openxmlformats.org/drawingml/2006/main" xmlns:p="http://schemas.openxmlformats.org/presentationml/2006/main" xmlns:r="http://schemas.openxmlformats.org/officeDocument/2006/relationships">
+  <p:cSld>
+    <p:spTree>
+      <p:nvGrpSpPr>
+        <p:cNvPr id="1" name=""/>
+        <p:cNvGrpSpPr/>
+        <p:nvPr/>
+      </p:nvGrpSpPr>
+      <p:grpSpPr/>
+      <p:sp>
+        <p:nvSpPr>
+          <p:cNvPr id="2" name="TextBox 1"/>
           <p:cNvSpPr txBox="1"/>
           <p:nvPr/>
         </p:nvSpPr>
         <p:spPr>
           <a:xfrm>
-            <a:off x="914400" y="4206240"/>
-            <a:ext cx="9966960" cy="475488"/>
+            <a:off x="566928" y="347472"/>
+            <a:ext cx="10881360" cy="438912"/>
           </a:xfrm>
           <a:prstGeom prst="rect">
             <a:avLst/>
@@ -9067,29 +10146,29 @@
               <a:spcAft>
                 <a:spcPts val="0"/>
               </a:spcAft>
-              <a:defRPr sz="1000" b="0">
-                <a:solidFill>
-                  <a:srgbClr val="225B9B"/>
-                </a:solidFill>
-                <a:latin typeface="DejaVu Sans Mono"/>
-              </a:defRPr>
-            </a:pPr>
-            <a:r>
-              <a:t>https://gazebosim.org/docs/latest/ros2_integration/</a:t>
-            </a:r>
-          </a:p>
-        </p:txBody>
-      </p:sp>
-      <p:sp>
-        <p:nvSpPr>
-          <p:cNvPr id="13" name="TextBox 12"/>
+              <a:defRPr sz="3200" b="1">
+                <a:solidFill>
+                  <a:srgbClr val="122C4E"/>
+                </a:solidFill>
+                <a:latin typeface="Noto Sans CJK KR"/>
+              </a:defRPr>
+            </a:pPr>
+            <a:r>
+              <a:t>미니 실습: 값 하나를 바꾸고 결과를 비교한다</a:t>
+            </a:r>
+          </a:p>
+        </p:txBody>
+      </p:sp>
+      <p:sp>
+        <p:nvSpPr>
+          <p:cNvPr id="3" name="TextBox 2"/>
           <p:cNvSpPr txBox="1"/>
           <p:nvPr/>
         </p:nvSpPr>
         <p:spPr>
           <a:xfrm>
-            <a:off x="914400" y="5010912"/>
-            <a:ext cx="3840480" cy="256032"/>
+            <a:off x="603504" y="859536"/>
+            <a:ext cx="10698480" cy="292608"/>
           </a:xfrm>
           <a:prstGeom prst="rect">
             <a:avLst/>
@@ -9106,29 +10185,29 @@
               <a:spcAft>
                 <a:spcPts val="0"/>
               </a:spcAft>
-              <a:defRPr sz="1700" b="1">
-                <a:solidFill>
-                  <a:srgbClr val="122C4E"/>
-                </a:solidFill>
-                <a:latin typeface="Noto Sans CJK KR"/>
-              </a:defRPr>
-            </a:pPr>
-            <a:r>
-              <a:t>ROS 2 Jazzy — rosbag2 Recording and Playback</a:t>
-            </a:r>
-          </a:p>
-        </p:txBody>
-      </p:sp>
-      <p:sp>
-        <p:nvSpPr>
-          <p:cNvPr id="14" name="TextBox 13"/>
+              <a:defRPr sz="1700" b="0">
+                <a:solidFill>
+                  <a:srgbClr val="5C6672"/>
+                </a:solidFill>
+                <a:latin typeface="Noto Sans CJK KR"/>
+              </a:defRPr>
+            </a:pPr>
+            <a:r>
+              <a:t>정상 결과를 만든 뒤에는 한 번에 하나의 값만 바꿉니다.</a:t>
+            </a:r>
+          </a:p>
+        </p:txBody>
+      </p:sp>
+      <p:sp>
+        <p:nvSpPr>
+          <p:cNvPr id="4" name="TextBox 3"/>
           <p:cNvSpPr txBox="1"/>
           <p:nvPr/>
         </p:nvSpPr>
         <p:spPr>
           <a:xfrm>
-            <a:off x="914400" y="5285232"/>
-            <a:ext cx="9966960" cy="475488"/>
+            <a:off x="530352" y="6510528"/>
+            <a:ext cx="7772400" cy="201168"/>
           </a:xfrm>
           <a:prstGeom prst="rect">
             <a:avLst/>
@@ -9147,13 +10226,207 @@
               </a:spcAft>
               <a:defRPr sz="1000" b="0">
                 <a:solidFill>
-                  <a:srgbClr val="225B9B"/>
-                </a:solidFill>
-                <a:latin typeface="DejaVu Sans Mono"/>
-              </a:defRPr>
-            </a:pPr>
-            <a:r>
-              <a:t>https://docs.ros.org/en/jazzy/Tutorials/Beginner-CLI-Tools/Recording-And-Playing-Back-Data/Recording-And-Playing-Back-Data.html</a:t>
+                  <a:srgbClr val="5C6672"/>
+                </a:solidFill>
+                <a:latin typeface="Noto Sans CJK KR"/>
+              </a:defRPr>
+            </a:pPr>
+            <a:r>
+              <a:t>ROS 2 Jazzy · Gazebo Harmonic · M11 · 따라 하기형 AGV 실습</a:t>
+            </a:r>
+          </a:p>
+        </p:txBody>
+      </p:sp>
+      <p:sp>
+        <p:nvSpPr>
+          <p:cNvPr id="5" name="TextBox 4"/>
+          <p:cNvSpPr txBox="1"/>
+          <p:nvPr/>
+        </p:nvSpPr>
+        <p:spPr>
+          <a:xfrm>
+            <a:off x="9144000" y="6510528"/>
+            <a:ext cx="2468880" cy="201168"/>
+          </a:xfrm>
+          <a:prstGeom prst="rect">
+            <a:avLst/>
+          </a:prstGeom>
+          <a:noFill/>
+        </p:spPr>
+        <p:txBody>
+          <a:bodyPr wrap="square" lIns="73152" rIns="73152" tIns="36576" bIns="36576">
+            <a:spAutoFit/>
+          </a:bodyPr>
+          <a:lstStyle/>
+          <a:p>
+            <a:pPr algn="r">
+              <a:spcAft>
+                <a:spcPts val="0"/>
+              </a:spcAft>
+              <a:defRPr sz="1000" b="0">
+                <a:solidFill>
+                  <a:srgbClr val="5C6672"/>
+                </a:solidFill>
+                <a:latin typeface="Noto Sans CJK KR"/>
+              </a:defRPr>
+            </a:pPr>
+            <a:r>
+              <a:t>명령·파일 경로는 슬라이드에서 복사 가능</a:t>
+            </a:r>
+          </a:p>
+        </p:txBody>
+      </p:sp>
+      <p:sp>
+        <p:nvSpPr>
+          <p:cNvPr id="6" name="Rectangle 5"/>
+          <p:cNvSpPr/>
+          <p:nvPr/>
+        </p:nvSpPr>
+        <p:spPr>
+          <a:xfrm>
+            <a:off x="566928" y="1188720"/>
+            <a:ext cx="11064240" cy="347472"/>
+          </a:xfrm>
+          <a:prstGeom prst="rect">
+            <a:avLst/>
+          </a:prstGeom>
+          <a:solidFill>
+            <a:srgbClr val="F4F7FB"/>
+          </a:solidFill>
+          <a:ln>
+            <a:solidFill>
+              <a:srgbClr val="F4F7FB"/>
+            </a:solidFill>
+          </a:ln>
+        </p:spPr>
+        <p:style>
+          <a:lnRef idx="1">
+            <a:schemeClr val="accent1"/>
+          </a:lnRef>
+          <a:fillRef idx="3">
+            <a:schemeClr val="accent1"/>
+          </a:fillRef>
+          <a:effectRef idx="2">
+            <a:schemeClr val="accent1"/>
+          </a:effectRef>
+          <a:fontRef idx="minor">
+            <a:schemeClr val="lt1"/>
+          </a:fontRef>
+        </p:style>
+        <p:txBody>
+          <a:bodyPr rtlCol="0" anchor="ctr" wrap="square" lIns="73152" rIns="73152" tIns="36576" bIns="36576"/>
+          <a:lstStyle/>
+          <a:p>
+            <a:pPr algn="l">
+              <a:spcAft>
+                <a:spcPts val="0"/>
+              </a:spcAft>
+              <a:defRPr sz="1300" b="1">
+                <a:solidFill>
+                  <a:srgbClr val="122C4E"/>
+                </a:solidFill>
+                <a:latin typeface="Noto Sans CJK KR"/>
+              </a:defRPr>
+            </a:pPr>
+            <a:r>
+              <a:t>현재 단계 미니 실습    |    현재 폴더 ~/ros2_curri/my_agv_ws    |    현재 터미널</a:t>
+            </a:r>
+          </a:p>
+        </p:txBody>
+      </p:sp>
+      <p:sp>
+        <p:nvSpPr>
+          <p:cNvPr id="7" name="Rounded Rectangle 6"/>
+          <p:cNvSpPr/>
+          <p:nvPr/>
+        </p:nvSpPr>
+        <p:spPr>
+          <a:xfrm>
+            <a:off x="749808" y="1874519"/>
+            <a:ext cx="10652760" cy="1993392"/>
+          </a:xfrm>
+          <a:prstGeom prst="roundRect">
+            <a:avLst/>
+          </a:prstGeom>
+          <a:solidFill>
+            <a:srgbClr val="FFF8EB"/>
+          </a:solidFill>
+          <a:ln>
+            <a:solidFill>
+              <a:srgbClr val="ECC680"/>
+            </a:solidFill>
+          </a:ln>
+        </p:spPr>
+        <p:style>
+          <a:lnRef idx="1">
+            <a:schemeClr val="accent1"/>
+          </a:lnRef>
+          <a:fillRef idx="3">
+            <a:schemeClr val="accent1"/>
+          </a:fillRef>
+          <a:effectRef idx="2">
+            <a:schemeClr val="accent1"/>
+          </a:effectRef>
+          <a:fontRef idx="minor">
+            <a:schemeClr val="lt1"/>
+          </a:fontRef>
+        </p:style>
+        <p:txBody>
+          <a:bodyPr rtlCol="0" anchor="ctr" wrap="square" lIns="73152" rIns="73152" tIns="36576" bIns="36576"/>
+          <a:lstStyle/>
+          <a:p>
+            <a:pPr algn="ctr">
+              <a:spcAft>
+                <a:spcPts val="0"/>
+              </a:spcAft>
+              <a:defRPr sz="2300" b="1">
+                <a:solidFill>
+                  <a:srgbClr val="122C4E"/>
+                </a:solidFill>
+                <a:latin typeface="Noto Sans CJK KR"/>
+              </a:defRPr>
+            </a:pPr>
+            <a:r>
+              <a:t>Fixed Frame을 의도적으로 없는 이름으로 바꾼 뒤 Global Status 오류를 읽고 odom으로 되돌린다.</a:t>
+            </a:r>
+          </a:p>
+        </p:txBody>
+      </p:sp>
+      <p:sp>
+        <p:nvSpPr>
+          <p:cNvPr id="8" name="TextBox 7"/>
+          <p:cNvSpPr txBox="1"/>
+          <p:nvPr/>
+        </p:nvSpPr>
+        <p:spPr>
+          <a:xfrm>
+            <a:off x="877824" y="4590288"/>
+            <a:ext cx="10241280" cy="594360"/>
+          </a:xfrm>
+          <a:prstGeom prst="rect">
+            <a:avLst/>
+          </a:prstGeom>
+          <a:noFill/>
+        </p:spPr>
+        <p:txBody>
+          <a:bodyPr wrap="square" lIns="73152" rIns="73152" tIns="36576" bIns="36576">
+            <a:spAutoFit/>
+          </a:bodyPr>
+          <a:lstStyle/>
+          <a:p>
+            <a:pPr algn="ctr">
+              <a:spcAft>
+                <a:spcPts val="0"/>
+              </a:spcAft>
+              <a:defRPr sz="1900" b="1">
+                <a:solidFill>
+                  <a:srgbClr val="DB7E22"/>
+                </a:solidFill>
+                <a:latin typeface="Noto Sans CJK KR"/>
+              </a:defRPr>
+            </a:pPr>
+            <a:r>
+              <a:t>기록할 것: 바꾼 값(단위) · 기대한 변화 · 실제 출력/화면 · 원래 값으로 되돌린 결과</a:t>
             </a:r>
           </a:p>
         </p:txBody>
@@ -9627,6 +10900,956 @@
 </p:sld>
 </file>
 
+<file path=ppt/slides/slide20.xml><?xml version="1.0" encoding="utf-8"?>
+<p:sld xmlns:a="http://schemas.openxmlformats.org/drawingml/2006/main" xmlns:p="http://schemas.openxmlformats.org/presentationml/2006/main" xmlns:r="http://schemas.openxmlformats.org/officeDocument/2006/relationships">
+  <p:cSld>
+    <p:spTree>
+      <p:nvGrpSpPr>
+        <p:cNvPr id="1" name=""/>
+        <p:cNvGrpSpPr/>
+        <p:nvPr/>
+      </p:nvGrpSpPr>
+      <p:grpSpPr/>
+      <p:sp>
+        <p:nvSpPr>
+          <p:cNvPr id="2" name="TextBox 1"/>
+          <p:cNvSpPr txBox="1"/>
+          <p:nvPr/>
+        </p:nvSpPr>
+        <p:spPr>
+          <a:xfrm>
+            <a:off x="566928" y="347472"/>
+            <a:ext cx="10881360" cy="438912"/>
+          </a:xfrm>
+          <a:prstGeom prst="rect">
+            <a:avLst/>
+          </a:prstGeom>
+          <a:noFill/>
+        </p:spPr>
+        <p:txBody>
+          <a:bodyPr wrap="square" lIns="73152" rIns="73152" tIns="36576" bIns="36576">
+            <a:spAutoFit/>
+          </a:bodyPr>
+          <a:lstStyle/>
+          <a:p>
+            <a:pPr algn="l">
+              <a:spcAft>
+                <a:spcPts val="0"/>
+              </a:spcAft>
+              <a:defRPr sz="3200" b="1">
+                <a:solidFill>
+                  <a:srgbClr val="122C4E"/>
+                </a:solidFill>
+                <a:latin typeface="Noto Sans CJK KR"/>
+              </a:defRPr>
+            </a:pPr>
+            <a:r>
+              <a:t>내 프로젝트 체크포인트를 저장하고 다음 모듈로 넘긴다</a:t>
+            </a:r>
+          </a:p>
+        </p:txBody>
+      </p:sp>
+      <p:sp>
+        <p:nvSpPr>
+          <p:cNvPr id="3" name="TextBox 2"/>
+          <p:cNvSpPr txBox="1"/>
+          <p:nvPr/>
+        </p:nvSpPr>
+        <p:spPr>
+          <a:xfrm>
+            <a:off x="603504" y="859536"/>
+            <a:ext cx="10698480" cy="292608"/>
+          </a:xfrm>
+          <a:prstGeom prst="rect">
+            <a:avLst/>
+          </a:prstGeom>
+          <a:noFill/>
+        </p:spPr>
+        <p:txBody>
+          <a:bodyPr wrap="square" lIns="73152" rIns="73152" tIns="36576" bIns="36576">
+            <a:spAutoFit/>
+          </a:bodyPr>
+          <a:lstStyle/>
+          <a:p>
+            <a:pPr algn="l">
+              <a:spcAft>
+                <a:spcPts val="0"/>
+              </a:spcAft>
+              <a:defRPr sz="1700" b="0">
+                <a:solidFill>
+                  <a:srgbClr val="5C6672"/>
+                </a:solidFill>
+                <a:latin typeface="Noto Sans CJK KR"/>
+              </a:defRPr>
+            </a:pPr>
+            <a:r>
+              <a:t>Complete는 복구용 비교 기준이고, 다음 단계는 내가 직접 만든 workspace에서 계속합니다.</a:t>
+            </a:r>
+          </a:p>
+        </p:txBody>
+      </p:sp>
+      <p:sp>
+        <p:nvSpPr>
+          <p:cNvPr id="4" name="TextBox 3"/>
+          <p:cNvSpPr txBox="1"/>
+          <p:nvPr/>
+        </p:nvSpPr>
+        <p:spPr>
+          <a:xfrm>
+            <a:off x="530352" y="6510528"/>
+            <a:ext cx="7772400" cy="201168"/>
+          </a:xfrm>
+          <a:prstGeom prst="rect">
+            <a:avLst/>
+          </a:prstGeom>
+          <a:noFill/>
+        </p:spPr>
+        <p:txBody>
+          <a:bodyPr wrap="square" lIns="73152" rIns="73152" tIns="36576" bIns="36576">
+            <a:spAutoFit/>
+          </a:bodyPr>
+          <a:lstStyle/>
+          <a:p>
+            <a:pPr algn="l">
+              <a:spcAft>
+                <a:spcPts val="0"/>
+              </a:spcAft>
+              <a:defRPr sz="1000" b="0">
+                <a:solidFill>
+                  <a:srgbClr val="5C6672"/>
+                </a:solidFill>
+                <a:latin typeface="Noto Sans CJK KR"/>
+              </a:defRPr>
+            </a:pPr>
+            <a:r>
+              <a:t>ROS 2 Jazzy · Gazebo Harmonic · M11 · 따라 하기형 AGV 실습</a:t>
+            </a:r>
+          </a:p>
+        </p:txBody>
+      </p:sp>
+      <p:sp>
+        <p:nvSpPr>
+          <p:cNvPr id="5" name="TextBox 4"/>
+          <p:cNvSpPr txBox="1"/>
+          <p:nvPr/>
+        </p:nvSpPr>
+        <p:spPr>
+          <a:xfrm>
+            <a:off x="9144000" y="6510528"/>
+            <a:ext cx="2468880" cy="201168"/>
+          </a:xfrm>
+          <a:prstGeom prst="rect">
+            <a:avLst/>
+          </a:prstGeom>
+          <a:noFill/>
+        </p:spPr>
+        <p:txBody>
+          <a:bodyPr wrap="square" lIns="73152" rIns="73152" tIns="36576" bIns="36576">
+            <a:spAutoFit/>
+          </a:bodyPr>
+          <a:lstStyle/>
+          <a:p>
+            <a:pPr algn="r">
+              <a:spcAft>
+                <a:spcPts val="0"/>
+              </a:spcAft>
+              <a:defRPr sz="1000" b="0">
+                <a:solidFill>
+                  <a:srgbClr val="5C6672"/>
+                </a:solidFill>
+                <a:latin typeface="Noto Sans CJK KR"/>
+              </a:defRPr>
+            </a:pPr>
+            <a:r>
+              <a:t>명령·파일 경로는 슬라이드에서 복사 가능</a:t>
+            </a:r>
+          </a:p>
+        </p:txBody>
+      </p:sp>
+      <p:sp>
+        <p:nvSpPr>
+          <p:cNvPr id="6" name="Rectangle 5"/>
+          <p:cNvSpPr/>
+          <p:nvPr/>
+        </p:nvSpPr>
+        <p:spPr>
+          <a:xfrm>
+            <a:off x="566928" y="1188720"/>
+            <a:ext cx="11064240" cy="347472"/>
+          </a:xfrm>
+          <a:prstGeom prst="rect">
+            <a:avLst/>
+          </a:prstGeom>
+          <a:solidFill>
+            <a:srgbClr val="F4F7FB"/>
+          </a:solidFill>
+          <a:ln>
+            <a:solidFill>
+              <a:srgbClr val="F4F7FB"/>
+            </a:solidFill>
+          </a:ln>
+        </p:spPr>
+        <p:style>
+          <a:lnRef idx="1">
+            <a:schemeClr val="accent1"/>
+          </a:lnRef>
+          <a:fillRef idx="3">
+            <a:schemeClr val="accent1"/>
+          </a:fillRef>
+          <a:effectRef idx="2">
+            <a:schemeClr val="accent1"/>
+          </a:effectRef>
+          <a:fontRef idx="minor">
+            <a:schemeClr val="lt1"/>
+          </a:fontRef>
+        </p:style>
+        <p:txBody>
+          <a:bodyPr rtlCol="0" anchor="ctr" wrap="square" lIns="73152" rIns="73152" tIns="36576" bIns="36576"/>
+          <a:lstStyle/>
+          <a:p>
+            <a:pPr algn="l">
+              <a:spcAft>
+                <a:spcPts val="0"/>
+              </a:spcAft>
+              <a:defRPr sz="1300" b="1">
+                <a:solidFill>
+                  <a:srgbClr val="122C4E"/>
+                </a:solidFill>
+                <a:latin typeface="Noto Sans CJK KR"/>
+              </a:defRPr>
+            </a:pPr>
+            <a:r>
+              <a:t>현재 단계 체크포인트    |    현재 폴더 ~/ros2_curri/my_agv_ws    |    현재 터미널</a:t>
+            </a:r>
+          </a:p>
+        </p:txBody>
+      </p:sp>
+      <p:sp>
+        <p:nvSpPr>
+          <p:cNvPr id="7" name="Rounded Rectangle 6"/>
+          <p:cNvSpPr/>
+          <p:nvPr/>
+        </p:nvSpPr>
+        <p:spPr>
+          <a:xfrm>
+            <a:off x="685800" y="1737360"/>
+            <a:ext cx="10972800" cy="3611880"/>
+          </a:xfrm>
+          <a:prstGeom prst="roundRect">
+            <a:avLst/>
+          </a:prstGeom>
+          <a:solidFill>
+            <a:srgbClr val="F4F7FB"/>
+          </a:solidFill>
+          <a:ln>
+            <a:solidFill>
+              <a:srgbClr val="D2DCE8"/>
+            </a:solidFill>
+          </a:ln>
+        </p:spPr>
+        <p:style>
+          <a:lnRef idx="1">
+            <a:schemeClr val="accent1"/>
+          </a:lnRef>
+          <a:fillRef idx="3">
+            <a:schemeClr val="accent1"/>
+          </a:fillRef>
+          <a:effectRef idx="2">
+            <a:schemeClr val="accent1"/>
+          </a:effectRef>
+          <a:fontRef idx="minor">
+            <a:schemeClr val="lt1"/>
+          </a:fontRef>
+        </p:style>
+        <p:txBody>
+          <a:bodyPr rtlCol="0" anchor="ctr"/>
+          <a:lstStyle/>
+          <a:p>
+            <a:pPr algn="ctr"/>
+          </a:p>
+        </p:txBody>
+      </p:sp>
+      <p:sp>
+        <p:nvSpPr>
+          <p:cNvPr id="8" name="TextBox 7"/>
+          <p:cNvSpPr txBox="1"/>
+          <p:nvPr/>
+        </p:nvSpPr>
+        <p:spPr>
+          <a:xfrm>
+            <a:off x="896112" y="1993392"/>
+            <a:ext cx="10332720" cy="2971800"/>
+          </a:xfrm>
+          <a:prstGeom prst="rect">
+            <a:avLst/>
+          </a:prstGeom>
+          <a:noFill/>
+        </p:spPr>
+        <p:txBody>
+          <a:bodyPr wrap="square" lIns="109728" rIns="109728">
+            <a:spAutoFit/>
+          </a:bodyPr>
+          <a:lstStyle/>
+          <a:p>
+            <a:pPr>
+              <a:spcAft>
+                <a:spcPts val="800"/>
+              </a:spcAft>
+              <a:defRPr sz="1800">
+                <a:solidFill>
+                  <a:srgbClr val="122C4E"/>
+                </a:solidFill>
+                <a:latin typeface="Noto Sans CJK KR"/>
+              </a:defRPr>
+            </a:pPr>
+            <a:r>
+              <a:t>• □ 완료 화면: agv.rviz에 RobotModel·TF·LaserScan·Odometry 설정을 저장하고 실제 화면을 확인한다.</a:t>
+            </a:r>
+          </a:p>
+          <a:p>
+            <a:pPr>
+              <a:spcAft>
+                <a:spcPts val="800"/>
+              </a:spcAft>
+              <a:defRPr sz="1800">
+                <a:solidFill>
+                  <a:srgbClr val="122C4E"/>
+                </a:solidFill>
+                <a:latin typeface="Noto Sans CJK KR"/>
+              </a:defRPr>
+            </a:pPr>
+            <a:r>
+              <a:t>• □ 막혔을 때 비교할 Complete: blocks/C_drive_visualization/M11_rviz_integration/complete/</a:t>
+            </a:r>
+          </a:p>
+          <a:p>
+            <a:pPr>
+              <a:spcAft>
+                <a:spcPts val="800"/>
+              </a:spcAft>
+              <a:defRPr sz="1800">
+                <a:solidFill>
+                  <a:srgbClr val="122C4E"/>
+                </a:solidFill>
+                <a:latin typeface="Noto Sans CJK KR"/>
+              </a:defRPr>
+            </a:pPr>
+            <a:r>
+              <a:t>• □ 정상 로그·캡처: logs/validation.log, screenshots/validation_terminal.png</a:t>
+            </a:r>
+          </a:p>
+          <a:p>
+            <a:pPr>
+              <a:spcAft>
+                <a:spcPts val="800"/>
+              </a:spcAft>
+              <a:defRPr sz="1800">
+                <a:solidFill>
+                  <a:srgbClr val="122C4E"/>
+                </a:solidFill>
+                <a:latin typeface="Noto Sans CJK KR"/>
+              </a:defRPr>
+            </a:pPr>
+            <a:r>
+              <a:t>• □ 버전 식별: CHECKSUM_or_TAG.txt의 SHA-256 manifest</a:t>
+            </a:r>
+          </a:p>
+          <a:p>
+            <a:pPr>
+              <a:spcAft>
+                <a:spcPts val="800"/>
+              </a:spcAft>
+              <a:defRPr sz="1800">
+                <a:solidFill>
+                  <a:srgbClr val="122C4E"/>
+                </a:solidFill>
+                <a:latin typeface="Noto Sans CJK KR"/>
+              </a:defRPr>
+            </a:pPr>
+            <a:r>
+              <a:t>• □ 다음 시작 조건: M12~M15 센서 display</a:t>
+            </a:r>
+          </a:p>
+        </p:txBody>
+      </p:sp>
+      <p:sp>
+        <p:nvSpPr>
+          <p:cNvPr id="9" name="TextBox 8"/>
+          <p:cNvSpPr txBox="1"/>
+          <p:nvPr/>
+        </p:nvSpPr>
+        <p:spPr>
+          <a:xfrm>
+            <a:off x="868680" y="5596128"/>
+            <a:ext cx="10515600" cy="338328"/>
+          </a:xfrm>
+          <a:prstGeom prst="rect">
+            <a:avLst/>
+          </a:prstGeom>
+          <a:noFill/>
+        </p:spPr>
+        <p:txBody>
+          <a:bodyPr wrap="square" lIns="73152" rIns="73152" tIns="36576" bIns="36576">
+            <a:spAutoFit/>
+          </a:bodyPr>
+          <a:lstStyle/>
+          <a:p>
+            <a:pPr algn="ctr">
+              <a:spcAft>
+                <a:spcPts val="0"/>
+              </a:spcAft>
+              <a:defRPr sz="1700" b="1">
+                <a:solidFill>
+                  <a:srgbClr val="2A8B5A"/>
+                </a:solidFill>
+                <a:latin typeface="Noto Sans CJK KR"/>
+              </a:defRPr>
+            </a:pPr>
+            <a:r>
+              <a:t>다음 모듈을 시작하기 전, 내 src의 변경사항을 저장하고 현재 완료 조건을 다시 확인합니다.</a:t>
+            </a:r>
+          </a:p>
+        </p:txBody>
+      </p:sp>
+    </p:spTree>
+  </p:cSld>
+  <p:clrMapOvr>
+    <a:masterClrMapping/>
+  </p:clrMapOvr>
+</p:sld>
+</file>
+
+<file path=ppt/slides/slide21.xml><?xml version="1.0" encoding="utf-8"?>
+<p:sld xmlns:a="http://schemas.openxmlformats.org/drawingml/2006/main" xmlns:p="http://schemas.openxmlformats.org/presentationml/2006/main" xmlns:r="http://schemas.openxmlformats.org/officeDocument/2006/relationships">
+  <p:cSld>
+    <p:spTree>
+      <p:nvGrpSpPr>
+        <p:cNvPr id="1" name=""/>
+        <p:cNvGrpSpPr/>
+        <p:nvPr/>
+      </p:nvGrpSpPr>
+      <p:grpSpPr/>
+      <p:sp>
+        <p:nvSpPr>
+          <p:cNvPr id="2" name="TextBox 1"/>
+          <p:cNvSpPr txBox="1"/>
+          <p:nvPr/>
+        </p:nvSpPr>
+        <p:spPr>
+          <a:xfrm>
+            <a:off x="566928" y="347472"/>
+            <a:ext cx="10881360" cy="438912"/>
+          </a:xfrm>
+          <a:prstGeom prst="rect">
+            <a:avLst/>
+          </a:prstGeom>
+          <a:noFill/>
+        </p:spPr>
+        <p:txBody>
+          <a:bodyPr wrap="square" lIns="73152" rIns="73152" tIns="36576" bIns="36576">
+            <a:spAutoFit/>
+          </a:bodyPr>
+          <a:lstStyle/>
+          <a:p>
+            <a:pPr algn="l">
+              <a:spcAft>
+                <a:spcPts val="0"/>
+              </a:spcAft>
+              <a:defRPr sz="3200" b="1">
+                <a:solidFill>
+                  <a:srgbClr val="122C4E"/>
+                </a:solidFill>
+                <a:latin typeface="Noto Sans CJK KR"/>
+              </a:defRPr>
+            </a:pPr>
+            <a:r>
+              <a:t>공식 참고 자료</a:t>
+            </a:r>
+          </a:p>
+        </p:txBody>
+      </p:sp>
+      <p:sp>
+        <p:nvSpPr>
+          <p:cNvPr id="3" name="TextBox 2"/>
+          <p:cNvSpPr txBox="1"/>
+          <p:nvPr/>
+        </p:nvSpPr>
+        <p:spPr>
+          <a:xfrm>
+            <a:off x="603504" y="859536"/>
+            <a:ext cx="10698480" cy="292608"/>
+          </a:xfrm>
+          <a:prstGeom prst="rect">
+            <a:avLst/>
+          </a:prstGeom>
+          <a:noFill/>
+        </p:spPr>
+        <p:txBody>
+          <a:bodyPr wrap="square" lIns="73152" rIns="73152" tIns="36576" bIns="36576">
+            <a:spAutoFit/>
+          </a:bodyPr>
+          <a:lstStyle/>
+          <a:p>
+            <a:pPr algn="l">
+              <a:spcAft>
+                <a:spcPts val="0"/>
+              </a:spcAft>
+              <a:defRPr sz="1700" b="0">
+                <a:solidFill>
+                  <a:srgbClr val="5C6672"/>
+                </a:solidFill>
+                <a:latin typeface="Noto Sans CJK KR"/>
+              </a:defRPr>
+            </a:pPr>
+            <a:r>
+              <a:t>본문 단계는 링크를 열지 않아도 완료할 수 있으며, 링크는 개념을 더 확인할 때만 사용합니다.</a:t>
+            </a:r>
+          </a:p>
+        </p:txBody>
+      </p:sp>
+      <p:sp>
+        <p:nvSpPr>
+          <p:cNvPr id="4" name="TextBox 3"/>
+          <p:cNvSpPr txBox="1"/>
+          <p:nvPr/>
+        </p:nvSpPr>
+        <p:spPr>
+          <a:xfrm>
+            <a:off x="530352" y="6510528"/>
+            <a:ext cx="7772400" cy="201168"/>
+          </a:xfrm>
+          <a:prstGeom prst="rect">
+            <a:avLst/>
+          </a:prstGeom>
+          <a:noFill/>
+        </p:spPr>
+        <p:txBody>
+          <a:bodyPr wrap="square" lIns="73152" rIns="73152" tIns="36576" bIns="36576">
+            <a:spAutoFit/>
+          </a:bodyPr>
+          <a:lstStyle/>
+          <a:p>
+            <a:pPr algn="l">
+              <a:spcAft>
+                <a:spcPts val="0"/>
+              </a:spcAft>
+              <a:defRPr sz="1000" b="0">
+                <a:solidFill>
+                  <a:srgbClr val="5C6672"/>
+                </a:solidFill>
+                <a:latin typeface="Noto Sans CJK KR"/>
+              </a:defRPr>
+            </a:pPr>
+            <a:r>
+              <a:t>ROS 2 Jazzy · Gazebo Harmonic · M11 · 따라 하기형 AGV 실습</a:t>
+            </a:r>
+          </a:p>
+        </p:txBody>
+      </p:sp>
+      <p:sp>
+        <p:nvSpPr>
+          <p:cNvPr id="5" name="TextBox 4"/>
+          <p:cNvSpPr txBox="1"/>
+          <p:nvPr/>
+        </p:nvSpPr>
+        <p:spPr>
+          <a:xfrm>
+            <a:off x="9144000" y="6510528"/>
+            <a:ext cx="2468880" cy="201168"/>
+          </a:xfrm>
+          <a:prstGeom prst="rect">
+            <a:avLst/>
+          </a:prstGeom>
+          <a:noFill/>
+        </p:spPr>
+        <p:txBody>
+          <a:bodyPr wrap="square" lIns="73152" rIns="73152" tIns="36576" bIns="36576">
+            <a:spAutoFit/>
+          </a:bodyPr>
+          <a:lstStyle/>
+          <a:p>
+            <a:pPr algn="r">
+              <a:spcAft>
+                <a:spcPts val="0"/>
+              </a:spcAft>
+              <a:defRPr sz="1000" b="0">
+                <a:solidFill>
+                  <a:srgbClr val="5C6672"/>
+                </a:solidFill>
+                <a:latin typeface="Noto Sans CJK KR"/>
+              </a:defRPr>
+            </a:pPr>
+            <a:r>
+              <a:t>명령·파일 경로는 슬라이드에서 복사 가능</a:t>
+            </a:r>
+          </a:p>
+        </p:txBody>
+      </p:sp>
+      <p:sp>
+        <p:nvSpPr>
+          <p:cNvPr id="6" name="Rounded Rectangle 5"/>
+          <p:cNvSpPr/>
+          <p:nvPr/>
+        </p:nvSpPr>
+        <p:spPr>
+          <a:xfrm>
+            <a:off x="658368" y="1554480"/>
+            <a:ext cx="10972800" cy="4526280"/>
+          </a:xfrm>
+          <a:prstGeom prst="roundRect">
+            <a:avLst/>
+          </a:prstGeom>
+          <a:solidFill>
+            <a:srgbClr val="F4F7FB"/>
+          </a:solidFill>
+          <a:ln>
+            <a:solidFill>
+              <a:srgbClr val="D7DFE9"/>
+            </a:solidFill>
+          </a:ln>
+        </p:spPr>
+        <p:style>
+          <a:lnRef idx="1">
+            <a:schemeClr val="accent1"/>
+          </a:lnRef>
+          <a:fillRef idx="3">
+            <a:schemeClr val="accent1"/>
+          </a:fillRef>
+          <a:effectRef idx="2">
+            <a:schemeClr val="accent1"/>
+          </a:effectRef>
+          <a:fontRef idx="minor">
+            <a:schemeClr val="lt1"/>
+          </a:fontRef>
+        </p:style>
+        <p:txBody>
+          <a:bodyPr rtlCol="0" anchor="ctr"/>
+          <a:lstStyle/>
+          <a:p>
+            <a:pPr algn="ctr"/>
+          </a:p>
+        </p:txBody>
+      </p:sp>
+      <p:sp>
+        <p:nvSpPr>
+          <p:cNvPr id="7" name="TextBox 6"/>
+          <p:cNvSpPr txBox="1"/>
+          <p:nvPr/>
+        </p:nvSpPr>
+        <p:spPr>
+          <a:xfrm>
+            <a:off x="914400" y="1773936"/>
+            <a:ext cx="3840480" cy="256032"/>
+          </a:xfrm>
+          <a:prstGeom prst="rect">
+            <a:avLst/>
+          </a:prstGeom>
+          <a:noFill/>
+        </p:spPr>
+        <p:txBody>
+          <a:bodyPr wrap="square" lIns="73152" rIns="73152" tIns="36576" bIns="36576">
+            <a:spAutoFit/>
+          </a:bodyPr>
+          <a:lstStyle/>
+          <a:p>
+            <a:pPr algn="l">
+              <a:spcAft>
+                <a:spcPts val="0"/>
+              </a:spcAft>
+              <a:defRPr sz="1700" b="1">
+                <a:solidFill>
+                  <a:srgbClr val="122C4E"/>
+                </a:solidFill>
+                <a:latin typeface="Noto Sans CJK KR"/>
+              </a:defRPr>
+            </a:pPr>
+            <a:r>
+              <a:t>ROS 2 Jazzy — Gazebo Simulation</a:t>
+            </a:r>
+          </a:p>
+        </p:txBody>
+      </p:sp>
+      <p:sp>
+        <p:nvSpPr>
+          <p:cNvPr id="8" name="TextBox 7"/>
+          <p:cNvSpPr txBox="1"/>
+          <p:nvPr/>
+        </p:nvSpPr>
+        <p:spPr>
+          <a:xfrm>
+            <a:off x="914400" y="2048255"/>
+            <a:ext cx="9966960" cy="475488"/>
+          </a:xfrm>
+          <a:prstGeom prst="rect">
+            <a:avLst/>
+          </a:prstGeom>
+          <a:noFill/>
+        </p:spPr>
+        <p:txBody>
+          <a:bodyPr wrap="square" lIns="73152" rIns="73152" tIns="36576" bIns="36576">
+            <a:spAutoFit/>
+          </a:bodyPr>
+          <a:lstStyle/>
+          <a:p>
+            <a:pPr algn="l">
+              <a:spcAft>
+                <a:spcPts val="0"/>
+              </a:spcAft>
+              <a:defRPr sz="1000" b="0">
+                <a:solidFill>
+                  <a:srgbClr val="225B9B"/>
+                </a:solidFill>
+                <a:latin typeface="DejaVu Sans Mono"/>
+              </a:defRPr>
+            </a:pPr>
+            <a:r>
+              <a:t>https://docs.ros.org/en/jazzy/Tutorials/Advanced/Simulators/Gazebo/Simulation-Gazebo.html</a:t>
+            </a:r>
+          </a:p>
+        </p:txBody>
+      </p:sp>
+      <p:sp>
+        <p:nvSpPr>
+          <p:cNvPr id="9" name="TextBox 8"/>
+          <p:cNvSpPr txBox="1"/>
+          <p:nvPr/>
+        </p:nvSpPr>
+        <p:spPr>
+          <a:xfrm>
+            <a:off x="914400" y="2852928"/>
+            <a:ext cx="3840480" cy="256032"/>
+          </a:xfrm>
+          <a:prstGeom prst="rect">
+            <a:avLst/>
+          </a:prstGeom>
+          <a:noFill/>
+        </p:spPr>
+        <p:txBody>
+          <a:bodyPr wrap="square" lIns="73152" rIns="73152" tIns="36576" bIns="36576">
+            <a:spAutoFit/>
+          </a:bodyPr>
+          <a:lstStyle/>
+          <a:p>
+            <a:pPr algn="l">
+              <a:spcAft>
+                <a:spcPts val="0"/>
+              </a:spcAft>
+              <a:defRPr sz="1700" b="1">
+                <a:solidFill>
+                  <a:srgbClr val="122C4E"/>
+                </a:solidFill>
+                <a:latin typeface="Noto Sans CJK KR"/>
+              </a:defRPr>
+            </a:pPr>
+            <a:r>
+              <a:t>ROS 2 Jazzy — URDF / robot_state_publisher</a:t>
+            </a:r>
+          </a:p>
+        </p:txBody>
+      </p:sp>
+      <p:sp>
+        <p:nvSpPr>
+          <p:cNvPr id="10" name="TextBox 9"/>
+          <p:cNvSpPr txBox="1"/>
+          <p:nvPr/>
+        </p:nvSpPr>
+        <p:spPr>
+          <a:xfrm>
+            <a:off x="914400" y="3127248"/>
+            <a:ext cx="9966960" cy="475488"/>
+          </a:xfrm>
+          <a:prstGeom prst="rect">
+            <a:avLst/>
+          </a:prstGeom>
+          <a:noFill/>
+        </p:spPr>
+        <p:txBody>
+          <a:bodyPr wrap="square" lIns="73152" rIns="73152" tIns="36576" bIns="36576">
+            <a:spAutoFit/>
+          </a:bodyPr>
+          <a:lstStyle/>
+          <a:p>
+            <a:pPr algn="l">
+              <a:spcAft>
+                <a:spcPts val="0"/>
+              </a:spcAft>
+              <a:defRPr sz="1000" b="0">
+                <a:solidFill>
+                  <a:srgbClr val="225B9B"/>
+                </a:solidFill>
+                <a:latin typeface="DejaVu Sans Mono"/>
+              </a:defRPr>
+            </a:pPr>
+            <a:r>
+              <a:t>https://docs.ros.org/en/jazzy/Tutorials/Intermediate/URDF/Using-URDF-with-Robot-State-Publisher-py.html</a:t>
+            </a:r>
+          </a:p>
+        </p:txBody>
+      </p:sp>
+      <p:sp>
+        <p:nvSpPr>
+          <p:cNvPr id="11" name="TextBox 10"/>
+          <p:cNvSpPr txBox="1"/>
+          <p:nvPr/>
+        </p:nvSpPr>
+        <p:spPr>
+          <a:xfrm>
+            <a:off x="914400" y="3931920"/>
+            <a:ext cx="3840480" cy="256032"/>
+          </a:xfrm>
+          <a:prstGeom prst="rect">
+            <a:avLst/>
+          </a:prstGeom>
+          <a:noFill/>
+        </p:spPr>
+        <p:txBody>
+          <a:bodyPr wrap="square" lIns="73152" rIns="73152" tIns="36576" bIns="36576">
+            <a:spAutoFit/>
+          </a:bodyPr>
+          <a:lstStyle/>
+          <a:p>
+            <a:pPr algn="l">
+              <a:spcAft>
+                <a:spcPts val="0"/>
+              </a:spcAft>
+              <a:defRPr sz="1700" b="1">
+                <a:solidFill>
+                  <a:srgbClr val="122C4E"/>
+                </a:solidFill>
+                <a:latin typeface="Noto Sans CJK KR"/>
+              </a:defRPr>
+            </a:pPr>
+            <a:r>
+              <a:t>Gazebo — ROS 2 Integration / ros_gz_bridge</a:t>
+            </a:r>
+          </a:p>
+        </p:txBody>
+      </p:sp>
+      <p:sp>
+        <p:nvSpPr>
+          <p:cNvPr id="12" name="TextBox 11"/>
+          <p:cNvSpPr txBox="1"/>
+          <p:nvPr/>
+        </p:nvSpPr>
+        <p:spPr>
+          <a:xfrm>
+            <a:off x="914400" y="4206240"/>
+            <a:ext cx="9966960" cy="475488"/>
+          </a:xfrm>
+          <a:prstGeom prst="rect">
+            <a:avLst/>
+          </a:prstGeom>
+          <a:noFill/>
+        </p:spPr>
+        <p:txBody>
+          <a:bodyPr wrap="square" lIns="73152" rIns="73152" tIns="36576" bIns="36576">
+            <a:spAutoFit/>
+          </a:bodyPr>
+          <a:lstStyle/>
+          <a:p>
+            <a:pPr algn="l">
+              <a:spcAft>
+                <a:spcPts val="0"/>
+              </a:spcAft>
+              <a:defRPr sz="1000" b="0">
+                <a:solidFill>
+                  <a:srgbClr val="225B9B"/>
+                </a:solidFill>
+                <a:latin typeface="DejaVu Sans Mono"/>
+              </a:defRPr>
+            </a:pPr>
+            <a:r>
+              <a:t>https://gazebosim.org/docs/latest/ros2_integration/</a:t>
+            </a:r>
+          </a:p>
+        </p:txBody>
+      </p:sp>
+      <p:sp>
+        <p:nvSpPr>
+          <p:cNvPr id="13" name="TextBox 12"/>
+          <p:cNvSpPr txBox="1"/>
+          <p:nvPr/>
+        </p:nvSpPr>
+        <p:spPr>
+          <a:xfrm>
+            <a:off x="914400" y="5010912"/>
+            <a:ext cx="3840480" cy="256032"/>
+          </a:xfrm>
+          <a:prstGeom prst="rect">
+            <a:avLst/>
+          </a:prstGeom>
+          <a:noFill/>
+        </p:spPr>
+        <p:txBody>
+          <a:bodyPr wrap="square" lIns="73152" rIns="73152" tIns="36576" bIns="36576">
+            <a:spAutoFit/>
+          </a:bodyPr>
+          <a:lstStyle/>
+          <a:p>
+            <a:pPr algn="l">
+              <a:spcAft>
+                <a:spcPts val="0"/>
+              </a:spcAft>
+              <a:defRPr sz="1700" b="1">
+                <a:solidFill>
+                  <a:srgbClr val="122C4E"/>
+                </a:solidFill>
+                <a:latin typeface="Noto Sans CJK KR"/>
+              </a:defRPr>
+            </a:pPr>
+            <a:r>
+              <a:t>ROS 2 Jazzy — rosbag2 Recording and Playback</a:t>
+            </a:r>
+          </a:p>
+        </p:txBody>
+      </p:sp>
+      <p:sp>
+        <p:nvSpPr>
+          <p:cNvPr id="14" name="TextBox 13"/>
+          <p:cNvSpPr txBox="1"/>
+          <p:nvPr/>
+        </p:nvSpPr>
+        <p:spPr>
+          <a:xfrm>
+            <a:off x="914400" y="5285232"/>
+            <a:ext cx="9966960" cy="475488"/>
+          </a:xfrm>
+          <a:prstGeom prst="rect">
+            <a:avLst/>
+          </a:prstGeom>
+          <a:noFill/>
+        </p:spPr>
+        <p:txBody>
+          <a:bodyPr wrap="square" lIns="73152" rIns="73152" tIns="36576" bIns="36576">
+            <a:spAutoFit/>
+          </a:bodyPr>
+          <a:lstStyle/>
+          <a:p>
+            <a:pPr algn="l">
+              <a:spcAft>
+                <a:spcPts val="0"/>
+              </a:spcAft>
+              <a:defRPr sz="1000" b="0">
+                <a:solidFill>
+                  <a:srgbClr val="225B9B"/>
+                </a:solidFill>
+                <a:latin typeface="DejaVu Sans Mono"/>
+              </a:defRPr>
+            </a:pPr>
+            <a:r>
+              <a:t>https://docs.ros.org/en/jazzy/Tutorials/Beginner-CLI-Tools/Recording-And-Playing-Back-Data/Recording-And-Playing-Back-Data.html</a:t>
+            </a:r>
+          </a:p>
+        </p:txBody>
+      </p:sp>
+    </p:spTree>
+  </p:cSld>
+  <p:clrMapOvr>
+    <a:masterClrMapping/>
+  </p:clrMapOvr>
+</p:sld>
+</file>
+
 <file path=ppt/slides/slide3.xml><?xml version="1.0" encoding="utf-8"?>
 <p:sld xmlns:a="http://schemas.openxmlformats.org/drawingml/2006/main" xmlns:p="http://schemas.openxmlformats.org/presentationml/2006/main" xmlns:r="http://schemas.openxmlformats.org/officeDocument/2006/relationships">
   <p:cSld>
@@ -12032,7 +14255,7 @@
               </a:defRPr>
             </a:pPr>
             <a:r>
-              <a:t>구현 뒤 실행 1/3: RViz를 설정 파일로 연다</a:t>
+              <a:t>명령어를 코드처럼 읽기 (1/3)</a:t>
             </a:r>
           </a:p>
         </p:txBody>
@@ -12071,7 +14294,7 @@
               </a:defRPr>
             </a:pPr>
             <a:r>
-              <a:t>방금 직접 만든 파일을 실행·검사하며 다음 파일로 넘어갈 기준을 만듭니다.</a:t>
+              <a:t>새 파일을 만들지 않는 모듈도 한 줄씩 뜻과 화면에서 확인할 결과를 먼저 읽습니다.</a:t>
             </a:r>
           </a:p>
         </p:txBody>
@@ -12207,7 +14430,7 @@
               </a:defRPr>
             </a:pPr>
             <a:r>
-              <a:t>현재 단계 실행 1/3    |    현재 폴더 ~/ros2_curri/my_agv_ws    |    현재 터미널</a:t>
+              <a:t>현재 단계 명령 해설    |    현재 폴더 ~/ros2_curri/my_agv_ws    |    현재 터미널</a:t>
             </a:r>
           </a:p>
         </p:txBody>
@@ -12220,8 +14443,8 @@
         </p:nvSpPr>
         <p:spPr>
           <a:xfrm>
-            <a:off x="676656" y="1764792"/>
-            <a:ext cx="1828800" cy="347472"/>
+            <a:off x="694944" y="1664208"/>
+            <a:ext cx="10789920" cy="274320"/>
           </a:xfrm>
           <a:prstGeom prst="rect">
             <a:avLst/>
@@ -12234,72 +14457,33 @@
           </a:bodyPr>
           <a:lstStyle/>
           <a:p>
-            <a:pPr algn="l">
-              <a:spcAft>
-                <a:spcPts val="0"/>
-              </a:spcAft>
-              <a:defRPr sz="1800" b="1">
-                <a:solidFill>
-                  <a:srgbClr val="225B9B"/>
-                </a:solidFill>
-                <a:latin typeface="Noto Sans CJK KR"/>
-              </a:defRPr>
-            </a:pPr>
-            <a:r>
-              <a:t>왜 하는가</a:t>
-            </a:r>
-          </a:p>
-        </p:txBody>
-      </p:sp>
-      <p:sp>
-        <p:nvSpPr>
-          <p:cNvPr id="8" name="TextBox 7"/>
-          <p:cNvSpPr txBox="1"/>
-          <p:nvPr/>
-        </p:nvSpPr>
-        <p:spPr>
-          <a:xfrm>
-            <a:off x="676656" y="2103120"/>
-            <a:ext cx="10789920" cy="512064"/>
-          </a:xfrm>
-          <a:prstGeom prst="rect">
-            <a:avLst/>
-          </a:prstGeom>
-          <a:noFill/>
-        </p:spPr>
-        <p:txBody>
-          <a:bodyPr wrap="square" lIns="73152" rIns="73152" tIns="36576" bIns="36576">
-            <a:spAutoFit/>
-          </a:bodyPr>
-          <a:lstStyle/>
-          <a:p>
-            <a:pPr algn="l">
-              <a:spcAft>
-                <a:spcPts val="0"/>
-              </a:spcAft>
-              <a:defRPr sz="2000" b="0">
-                <a:solidFill>
-                  <a:srgbClr val="122C4E"/>
-                </a:solidFill>
-                <a:latin typeface="Noto Sans CJK KR"/>
-              </a:defRPr>
-            </a:pPr>
-            <a:r>
-              <a:t>같은 display 설정을 다음 센서 모듈에서도 재사용한다.</a:t>
-            </a:r>
-          </a:p>
-        </p:txBody>
-      </p:sp>
-      <p:sp>
-        <p:nvSpPr>
-          <p:cNvPr id="9" name="Rounded Rectangle 8"/>
+            <a:pPr algn="ctr">
+              <a:spcAft>
+                <a:spcPts val="0"/>
+              </a:spcAft>
+              <a:defRPr sz="1500" b="1">
+                <a:solidFill>
+                  <a:srgbClr val="DB7E22"/>
+                </a:solidFill>
+                <a:latin typeface="Noto Sans CJK KR"/>
+              </a:defRPr>
+            </a:pPr>
+            <a:r>
+              <a:t>말로 먼저 답해 보세요: 이 명령은 무엇을 시작하고, 성공하면 어디에 무엇이 보일까요?</a:t>
+            </a:r>
+          </a:p>
+        </p:txBody>
+      </p:sp>
+      <p:sp>
+        <p:nvSpPr>
+          <p:cNvPr id="8" name="Rounded Rectangle 7"/>
           <p:cNvSpPr/>
           <p:nvPr/>
         </p:nvSpPr>
         <p:spPr>
           <a:xfrm>
-            <a:off x="676656" y="2871216"/>
-            <a:ext cx="10835640" cy="2331720"/>
+            <a:off x="658368" y="2359152"/>
+            <a:ext cx="4160520" cy="1417320"/>
           </a:xfrm>
           <a:prstGeom prst="roundRect">
             <a:avLst/>
@@ -12335,7 +14519,7 @@
               <a:spcAft>
                 <a:spcPts val="0"/>
               </a:spcAft>
-              <a:defRPr sz="1600" b="0">
+              <a:defRPr sz="1300" b="0">
                 <a:solidFill>
                   <a:srgbClr val="FFFFFF"/>
                 </a:solidFill>
@@ -12345,10 +14529,51 @@
             <a:r>
               <a:t>source ~/ros2_curri/my_agv_ws/install/setup.bash</a:t>
             </a:r>
-            <a:br/>
-            <a:r>
-              <a:t>rviz2 -d ~/ros2_curri/my_agv_ws/src/agv_description/rviz/agv.rviz</a:t>
-            </a:r>
+          </a:p>
+        </p:txBody>
+      </p:sp>
+      <p:sp>
+        <p:nvSpPr>
+          <p:cNvPr id="9" name="Rounded Rectangle 8"/>
+          <p:cNvSpPr/>
+          <p:nvPr/>
+        </p:nvSpPr>
+        <p:spPr>
+          <a:xfrm>
+            <a:off x="5029200" y="2359152"/>
+            <a:ext cx="6537960" cy="1417320"/>
+          </a:xfrm>
+          <a:prstGeom prst="roundRect">
+            <a:avLst/>
+          </a:prstGeom>
+          <a:solidFill>
+            <a:srgbClr val="F4F7FB"/>
+          </a:solidFill>
+          <a:ln>
+            <a:solidFill>
+              <a:srgbClr val="225B9B"/>
+            </a:solidFill>
+          </a:ln>
+        </p:spPr>
+        <p:style>
+          <a:lnRef idx="1">
+            <a:schemeClr val="accent1"/>
+          </a:lnRef>
+          <a:fillRef idx="3">
+            <a:schemeClr val="accent1"/>
+          </a:fillRef>
+          <a:effectRef idx="2">
+            <a:schemeClr val="accent1"/>
+          </a:effectRef>
+          <a:fontRef idx="minor">
+            <a:schemeClr val="lt1"/>
+          </a:fontRef>
+        </p:style>
+        <p:txBody>
+          <a:bodyPr rtlCol="0" anchor="ctr"/>
+          <a:lstStyle/>
+          <a:p>
+            <a:pPr algn="ctr"/>
           </a:p>
         </p:txBody>
       </p:sp>
@@ -12360,8 +14585,8 @@
         </p:nvSpPr>
         <p:spPr>
           <a:xfrm>
-            <a:off x="768096" y="5468112"/>
-            <a:ext cx="1143000" cy="256032"/>
+            <a:off x="5239512" y="2468880"/>
+            <a:ext cx="594360" cy="219456"/>
           </a:xfrm>
           <a:prstGeom prst="rect">
             <a:avLst/>
@@ -12378,15 +14603,15 @@
               <a:spcAft>
                 <a:spcPts val="0"/>
               </a:spcAft>
-              <a:defRPr sz="1800" b="1">
-                <a:solidFill>
-                  <a:srgbClr val="2A8B5A"/>
-                </a:solidFill>
-                <a:latin typeface="Noto Sans CJK KR"/>
-              </a:defRPr>
-            </a:pPr>
-            <a:r>
-              <a:t>확인</a:t>
+              <a:defRPr sz="1400" b="1">
+                <a:solidFill>
+                  <a:srgbClr val="225B9B"/>
+                </a:solidFill>
+                <a:latin typeface="Noto Sans CJK KR"/>
+              </a:defRPr>
+            </a:pPr>
+            <a:r>
+              <a:t>1.</a:t>
             </a:r>
           </a:p>
         </p:txBody>
@@ -12399,8 +14624,8 @@
         </p:nvSpPr>
         <p:spPr>
           <a:xfrm>
-            <a:off x="768096" y="5742432"/>
-            <a:ext cx="10561320" cy="347472"/>
+            <a:off x="5596128" y="2450592"/>
+            <a:ext cx="5696712" cy="493776"/>
           </a:xfrm>
           <a:prstGeom prst="rect">
             <a:avLst/>
@@ -12417,7 +14642,7 @@
               <a:spcAft>
                 <a:spcPts val="0"/>
               </a:spcAft>
-              <a:defRPr sz="1800" b="0">
+              <a:defRPr sz="1300" b="0">
                 <a:solidFill>
                   <a:srgbClr val="122C4E"/>
                 </a:solidFill>
@@ -12425,7 +14650,309 @@
               </a:defRPr>
             </a:pPr>
             <a:r>
-              <a:t>출력에서 topic·frame·파일 이름 또는 성공 메시지를 찾고, 맞지 않으면 다음 파일로 가지 않습니다.</a:t>
+              <a:t>뜻: 내 workspace에서 build한 package를 현재 terminal에 겹쳐 등록합니다.</a:t>
+            </a:r>
+          </a:p>
+        </p:txBody>
+      </p:sp>
+      <p:sp>
+        <p:nvSpPr>
+          <p:cNvPr id="12" name="TextBox 11"/>
+          <p:cNvSpPr txBox="1"/>
+          <p:nvPr/>
+        </p:nvSpPr>
+        <p:spPr>
+          <a:xfrm>
+            <a:off x="5596128" y="3108960"/>
+            <a:ext cx="5696712" cy="457200"/>
+          </a:xfrm>
+          <a:prstGeom prst="rect">
+            <a:avLst/>
+          </a:prstGeom>
+          <a:noFill/>
+        </p:spPr>
+        <p:txBody>
+          <a:bodyPr wrap="square" lIns="73152" rIns="73152" tIns="36576" bIns="36576">
+            <a:spAutoFit/>
+          </a:bodyPr>
+          <a:lstStyle/>
+          <a:p>
+            <a:pPr algn="l">
+              <a:spcAft>
+                <a:spcPts val="0"/>
+              </a:spcAft>
+              <a:defRPr sz="1200" b="0">
+                <a:solidFill>
+                  <a:srgbClr val="2A8B5A"/>
+                </a:solidFill>
+                <a:latin typeface="Noto Sans CJK KR"/>
+              </a:defRPr>
+            </a:pPr>
+            <a:r>
+              <a:t>실행에서: 이 줄 뒤 `ros2 run`이 내가 만든 package와 executable을 찾습니다.</a:t>
+            </a:r>
+          </a:p>
+        </p:txBody>
+      </p:sp>
+      <p:sp>
+        <p:nvSpPr>
+          <p:cNvPr id="13" name="Rounded Rectangle 12"/>
+          <p:cNvSpPr/>
+          <p:nvPr/>
+        </p:nvSpPr>
+        <p:spPr>
+          <a:xfrm>
+            <a:off x="658368" y="4078224"/>
+            <a:ext cx="4160520" cy="1417320"/>
+          </a:xfrm>
+          <a:prstGeom prst="roundRect">
+            <a:avLst/>
+          </a:prstGeom>
+          <a:solidFill>
+            <a:srgbClr val="1D232D"/>
+          </a:solidFill>
+          <a:ln>
+            <a:solidFill>
+              <a:srgbClr val="1D232D"/>
+            </a:solidFill>
+          </a:ln>
+        </p:spPr>
+        <p:style>
+          <a:lnRef idx="1">
+            <a:schemeClr val="accent1"/>
+          </a:lnRef>
+          <a:fillRef idx="3">
+            <a:schemeClr val="accent1"/>
+          </a:fillRef>
+          <a:effectRef idx="2">
+            <a:schemeClr val="accent1"/>
+          </a:effectRef>
+          <a:fontRef idx="minor">
+            <a:schemeClr val="lt1"/>
+          </a:fontRef>
+        </p:style>
+        <p:txBody>
+          <a:bodyPr rtlCol="0" anchor="ctr" wrap="square" lIns="73152" rIns="73152" tIns="36576" bIns="36576"/>
+          <a:lstStyle/>
+          <a:p>
+            <a:pPr algn="l">
+              <a:spcAft>
+                <a:spcPts val="0"/>
+              </a:spcAft>
+              <a:defRPr sz="1300" b="0">
+                <a:solidFill>
+                  <a:srgbClr val="FFFFFF"/>
+                </a:solidFill>
+                <a:latin typeface="DejaVu Sans Mono"/>
+              </a:defRPr>
+            </a:pPr>
+            <a:r>
+              <a:t>rviz2 -d</a:t>
+            </a:r>
+            <a:br/>
+            <a:r>
+              <a:t>~/ros2_curri/my_agv_ws/src/agv_description/rviz/agv.rviz</a:t>
+            </a:r>
+          </a:p>
+        </p:txBody>
+      </p:sp>
+      <p:sp>
+        <p:nvSpPr>
+          <p:cNvPr id="14" name="Rounded Rectangle 13"/>
+          <p:cNvSpPr/>
+          <p:nvPr/>
+        </p:nvSpPr>
+        <p:spPr>
+          <a:xfrm>
+            <a:off x="5029200" y="4078224"/>
+            <a:ext cx="6537960" cy="1417320"/>
+          </a:xfrm>
+          <a:prstGeom prst="roundRect">
+            <a:avLst/>
+          </a:prstGeom>
+          <a:solidFill>
+            <a:srgbClr val="F4F7FB"/>
+          </a:solidFill>
+          <a:ln>
+            <a:solidFill>
+              <a:srgbClr val="225B9B"/>
+            </a:solidFill>
+          </a:ln>
+        </p:spPr>
+        <p:style>
+          <a:lnRef idx="1">
+            <a:schemeClr val="accent1"/>
+          </a:lnRef>
+          <a:fillRef idx="3">
+            <a:schemeClr val="accent1"/>
+          </a:fillRef>
+          <a:effectRef idx="2">
+            <a:schemeClr val="accent1"/>
+          </a:effectRef>
+          <a:fontRef idx="minor">
+            <a:schemeClr val="lt1"/>
+          </a:fontRef>
+        </p:style>
+        <p:txBody>
+          <a:bodyPr rtlCol="0" anchor="ctr"/>
+          <a:lstStyle/>
+          <a:p>
+            <a:pPr algn="ctr"/>
+          </a:p>
+        </p:txBody>
+      </p:sp>
+      <p:sp>
+        <p:nvSpPr>
+          <p:cNvPr id="15" name="TextBox 14"/>
+          <p:cNvSpPr txBox="1"/>
+          <p:nvPr/>
+        </p:nvSpPr>
+        <p:spPr>
+          <a:xfrm>
+            <a:off x="5239512" y="4187952"/>
+            <a:ext cx="594360" cy="219456"/>
+          </a:xfrm>
+          <a:prstGeom prst="rect">
+            <a:avLst/>
+          </a:prstGeom>
+          <a:noFill/>
+        </p:spPr>
+        <p:txBody>
+          <a:bodyPr wrap="square" lIns="73152" rIns="73152" tIns="36576" bIns="36576">
+            <a:spAutoFit/>
+          </a:bodyPr>
+          <a:lstStyle/>
+          <a:p>
+            <a:pPr algn="l">
+              <a:spcAft>
+                <a:spcPts val="0"/>
+              </a:spcAft>
+              <a:defRPr sz="1400" b="1">
+                <a:solidFill>
+                  <a:srgbClr val="225B9B"/>
+                </a:solidFill>
+                <a:latin typeface="Noto Sans CJK KR"/>
+              </a:defRPr>
+            </a:pPr>
+            <a:r>
+              <a:t>2.</a:t>
+            </a:r>
+          </a:p>
+        </p:txBody>
+      </p:sp>
+      <p:sp>
+        <p:nvSpPr>
+          <p:cNvPr id="16" name="TextBox 15"/>
+          <p:cNvSpPr txBox="1"/>
+          <p:nvPr/>
+        </p:nvSpPr>
+        <p:spPr>
+          <a:xfrm>
+            <a:off x="5596128" y="4169663"/>
+            <a:ext cx="5696712" cy="493776"/>
+          </a:xfrm>
+          <a:prstGeom prst="rect">
+            <a:avLst/>
+          </a:prstGeom>
+          <a:noFill/>
+        </p:spPr>
+        <p:txBody>
+          <a:bodyPr wrap="square" lIns="73152" rIns="73152" tIns="36576" bIns="36576">
+            <a:spAutoFit/>
+          </a:bodyPr>
+          <a:lstStyle/>
+          <a:p>
+            <a:pPr algn="l">
+              <a:spcAft>
+                <a:spcPts val="0"/>
+              </a:spcAft>
+              <a:defRPr sz="1300" b="0">
+                <a:solidFill>
+                  <a:srgbClr val="122C4E"/>
+                </a:solidFill>
+                <a:latin typeface="Noto Sans CJK KR"/>
+              </a:defRPr>
+            </a:pPr>
+            <a:r>
+              <a:t>뜻: 저장해 둔 RViz 설정 파일을 열어 동일한 display 구성을 재현합니다.</a:t>
+            </a:r>
+          </a:p>
+        </p:txBody>
+      </p:sp>
+      <p:sp>
+        <p:nvSpPr>
+          <p:cNvPr id="17" name="TextBox 16"/>
+          <p:cNvSpPr txBox="1"/>
+          <p:nvPr/>
+        </p:nvSpPr>
+        <p:spPr>
+          <a:xfrm>
+            <a:off x="5596128" y="4828032"/>
+            <a:ext cx="5696712" cy="457200"/>
+          </a:xfrm>
+          <a:prstGeom prst="rect">
+            <a:avLst/>
+          </a:prstGeom>
+          <a:noFill/>
+        </p:spPr>
+        <p:txBody>
+          <a:bodyPr wrap="square" lIns="73152" rIns="73152" tIns="36576" bIns="36576">
+            <a:spAutoFit/>
+          </a:bodyPr>
+          <a:lstStyle/>
+          <a:p>
+            <a:pPr algn="l">
+              <a:spcAft>
+                <a:spcPts val="0"/>
+              </a:spcAft>
+              <a:defRPr sz="1200" b="0">
+                <a:solidFill>
+                  <a:srgbClr val="2A8B5A"/>
+                </a:solidFill>
+                <a:latin typeface="Noto Sans CJK KR"/>
+              </a:defRPr>
+            </a:pPr>
+            <a:r>
+              <a:t>실행에서: RobotModel·TF·LaserScan display가 설정 파일대로 보입니다.</a:t>
+            </a:r>
+          </a:p>
+        </p:txBody>
+      </p:sp>
+      <p:sp>
+        <p:nvSpPr>
+          <p:cNvPr id="18" name="TextBox 17"/>
+          <p:cNvSpPr txBox="1"/>
+          <p:nvPr/>
+        </p:nvSpPr>
+        <p:spPr>
+          <a:xfrm>
+            <a:off x="749808" y="6199632"/>
+            <a:ext cx="10698480" cy="182880"/>
+          </a:xfrm>
+          <a:prstGeom prst="rect">
+            <a:avLst/>
+          </a:prstGeom>
+          <a:noFill/>
+        </p:spPr>
+        <p:txBody>
+          <a:bodyPr wrap="square" lIns="73152" rIns="73152" tIns="36576" bIns="36576">
+            <a:spAutoFit/>
+          </a:bodyPr>
+          <a:lstStyle/>
+          <a:p>
+            <a:pPr algn="ctr">
+              <a:spcAft>
+                <a:spcPts val="0"/>
+              </a:spcAft>
+              <a:defRPr sz="1100" b="0">
+                <a:solidFill>
+                  <a:srgbClr val="5C6672"/>
+                </a:solidFill>
+                <a:latin typeface="Noto Sans CJK KR"/>
+              </a:defRPr>
+            </a:pPr>
+            <a:r>
+              <a:t>다음 실행 슬라이드에서는 이 명령을 직접 입력하고, 방금 말한 확인 결과가 보일 때까지 진행하지 않습니다.</a:t>
             </a:r>
           </a:p>
         </p:txBody>

--- a/blocks/C_drive_visualization/M11_rviz_integration/M11_RViz2_구동_상태_검증.pptx
+++ b/blocks/C_drive_visualization/M11_rviz_integration/M11_RViz2_구동_상태_검증.pptx
@@ -5433,7 +5433,7 @@
               <a:spcAft>
                 <a:spcPts val="0"/>
               </a:spcAft>
-              <a:defRPr sz="1800" b="1">
+              <a:defRPr sz="1400" b="1">
                 <a:solidFill>
                   <a:srgbClr val="FFFFFF"/>
                 </a:solidFill>
@@ -5441,7 +5441,7 @@
               </a:defRPr>
             </a:pPr>
             <a:r>
-              <a:t>M11 · Block C · ROS 2 + Gazebo Sim AGV</a:t>
+              <a:t>ROS 2 기반 AGV End-to-End 개발 커리큘럼 · M11 · Block C</a:t>
             </a:r>
           </a:p>
         </p:txBody>
@@ -5651,7 +5651,7 @@
               <a:spcAft>
                 <a:spcPts val="0"/>
               </a:spcAft>
-              <a:defRPr sz="1000" b="0">
+              <a:defRPr sz="900" b="0">
                 <a:solidFill>
                   <a:srgbClr val="5C6672"/>
                 </a:solidFill>
@@ -5659,7 +5659,7 @@
               </a:defRPr>
             </a:pPr>
             <a:r>
-              <a:t>ROS 2 Jazzy · Gazebo Harmonic · M11 · 따라 하기형 AGV 실습</a:t>
+              <a:t>ROS 2 기반 AGV End-to-End 개발 커리큘럼 · M11 · Block C</a:t>
             </a:r>
           </a:p>
         </p:txBody>
@@ -5825,7 +5825,7 @@
               <a:spcAft>
                 <a:spcPts val="0"/>
               </a:spcAft>
-              <a:defRPr sz="1000" b="0">
+              <a:defRPr sz="900" b="0">
                 <a:solidFill>
                   <a:srgbClr val="5C6672"/>
                 </a:solidFill>
@@ -5833,7 +5833,7 @@
               </a:defRPr>
             </a:pPr>
             <a:r>
-              <a:t>ROS 2 Jazzy · Gazebo Harmonic · M11 · 따라 하기형 AGV 실습</a:t>
+              <a:t>ROS 2 기반 AGV End-to-End 개발 커리큘럼 · M11 · Block C</a:t>
             </a:r>
           </a:p>
         </p:txBody>
@@ -6575,7 +6575,7 @@
               <a:spcAft>
                 <a:spcPts val="0"/>
               </a:spcAft>
-              <a:defRPr sz="1000" b="0">
+              <a:defRPr sz="900" b="0">
                 <a:solidFill>
                   <a:srgbClr val="5C6672"/>
                 </a:solidFill>
@@ -6583,7 +6583,7 @@
               </a:defRPr>
             </a:pPr>
             <a:r>
-              <a:t>ROS 2 Jazzy · Gazebo Harmonic · M11 · 따라 하기형 AGV 실습</a:t>
+              <a:t>ROS 2 기반 AGV End-to-End 개발 커리큘럼 · M11 · Block C</a:t>
             </a:r>
           </a:p>
         </p:txBody>
@@ -7325,7 +7325,7 @@
               <a:spcAft>
                 <a:spcPts val="0"/>
               </a:spcAft>
-              <a:defRPr sz="1000" b="0">
+              <a:defRPr sz="900" b="0">
                 <a:solidFill>
                   <a:srgbClr val="5C6672"/>
                 </a:solidFill>
@@ -7333,7 +7333,7 @@
               </a:defRPr>
             </a:pPr>
             <a:r>
-              <a:t>ROS 2 Jazzy · Gazebo Harmonic · M11 · 따라 하기형 AGV 실습</a:t>
+              <a:t>ROS 2 기반 AGV End-to-End 개발 커리큘럼 · M11 · Block C</a:t>
             </a:r>
           </a:p>
         </p:txBody>
@@ -7775,7 +7775,7 @@
               <a:spcAft>
                 <a:spcPts val="0"/>
               </a:spcAft>
-              <a:defRPr sz="1000" b="0">
+              <a:defRPr sz="900" b="0">
                 <a:solidFill>
                   <a:srgbClr val="5C6672"/>
                 </a:solidFill>
@@ -7783,7 +7783,7 @@
               </a:defRPr>
             </a:pPr>
             <a:r>
-              <a:t>ROS 2 Jazzy · Gazebo Harmonic · M11 · 따라 하기형 AGV 실습</a:t>
+              <a:t>ROS 2 기반 AGV End-to-End 개발 커리큘럼 · M11 · Block C</a:t>
             </a:r>
           </a:p>
         </p:txBody>
@@ -8229,7 +8229,7 @@
               <a:spcAft>
                 <a:spcPts val="0"/>
               </a:spcAft>
-              <a:defRPr sz="1000" b="0">
+              <a:defRPr sz="900" b="0">
                 <a:solidFill>
                   <a:srgbClr val="5C6672"/>
                 </a:solidFill>
@@ -8237,7 +8237,7 @@
               </a:defRPr>
             </a:pPr>
             <a:r>
-              <a:t>ROS 2 Jazzy · Gazebo Harmonic · M11 · 따라 하기형 AGV 실습</a:t>
+              <a:t>ROS 2 기반 AGV End-to-End 개발 커리큘럼 · M11 · Block C</a:t>
             </a:r>
           </a:p>
         </p:txBody>
@@ -8683,7 +8683,7 @@
               <a:spcAft>
                 <a:spcPts val="0"/>
               </a:spcAft>
-              <a:defRPr sz="1000" b="0">
+              <a:defRPr sz="900" b="0">
                 <a:solidFill>
                   <a:srgbClr val="5C6672"/>
                 </a:solidFill>
@@ -8691,7 +8691,7 @@
               </a:defRPr>
             </a:pPr>
             <a:r>
-              <a:t>ROS 2 Jazzy · Gazebo Harmonic · M11 · 따라 하기형 AGV 실습</a:t>
+              <a:t>ROS 2 기반 AGV End-to-End 개발 커리큘럼 · M11 · Block C</a:t>
             </a:r>
           </a:p>
         </p:txBody>
@@ -9055,7 +9055,7 @@
               <a:spcAft>
                 <a:spcPts val="0"/>
               </a:spcAft>
-              <a:defRPr sz="1000" b="0">
+              <a:defRPr sz="900" b="0">
                 <a:solidFill>
                   <a:srgbClr val="5C6672"/>
                 </a:solidFill>
@@ -9063,7 +9063,7 @@
               </a:defRPr>
             </a:pPr>
             <a:r>
-              <a:t>ROS 2 Jazzy · Gazebo Harmonic · M11 · 따라 하기형 AGV 실습</a:t>
+              <a:t>ROS 2 기반 AGV End-to-End 개발 커리큘럼 · M11 · Block C</a:t>
             </a:r>
           </a:p>
         </p:txBody>
@@ -9292,7 +9292,7 @@
               <a:spcAft>
                 <a:spcPts val="0"/>
               </a:spcAft>
-              <a:defRPr sz="1000" b="0">
+              <a:defRPr sz="900" b="0">
                 <a:solidFill>
                   <a:srgbClr val="5C6672"/>
                 </a:solidFill>
@@ -9300,7 +9300,7 @@
               </a:defRPr>
             </a:pPr>
             <a:r>
-              <a:t>ROS 2 Jazzy · Gazebo Harmonic · M11 · 따라 하기형 AGV 실습</a:t>
+              <a:t>ROS 2 기반 AGV End-to-End 개발 커리큘럼 · M11 · Block C</a:t>
             </a:r>
           </a:p>
         </p:txBody>
@@ -9699,7 +9699,7 @@
               <a:spcAft>
                 <a:spcPts val="0"/>
               </a:spcAft>
-              <a:defRPr sz="1000" b="0">
+              <a:defRPr sz="900" b="0">
                 <a:solidFill>
                   <a:srgbClr val="5C6672"/>
                 </a:solidFill>
@@ -9707,7 +9707,7 @@
               </a:defRPr>
             </a:pPr>
             <a:r>
-              <a:t>ROS 2 Jazzy · Gazebo Harmonic · M11 · 따라 하기형 AGV 실습</a:t>
+              <a:t>ROS 2 기반 AGV End-to-End 개발 커리큘럼 · M11 · Block C</a:t>
             </a:r>
           </a:p>
         </p:txBody>
@@ -10224,7 +10224,7 @@
               <a:spcAft>
                 <a:spcPts val="0"/>
               </a:spcAft>
-              <a:defRPr sz="1000" b="0">
+              <a:defRPr sz="900" b="0">
                 <a:solidFill>
                   <a:srgbClr val="5C6672"/>
                 </a:solidFill>
@@ -10232,7 +10232,7 @@
               </a:defRPr>
             </a:pPr>
             <a:r>
-              <a:t>ROS 2 Jazzy · Gazebo Harmonic · M11 · 따라 하기형 AGV 실습</a:t>
+              <a:t>ROS 2 기반 AGV End-to-End 개발 커리큘럼 · M11 · Block C</a:t>
             </a:r>
           </a:p>
         </p:txBody>
@@ -10553,7 +10553,7 @@
               <a:spcAft>
                 <a:spcPts val="0"/>
               </a:spcAft>
-              <a:defRPr sz="1000" b="0">
+              <a:defRPr sz="900" b="0">
                 <a:solidFill>
                   <a:srgbClr val="5C6672"/>
                 </a:solidFill>
@@ -10561,7 +10561,7 @@
               </a:defRPr>
             </a:pPr>
             <a:r>
-              <a:t>ROS 2 Jazzy · Gazebo Harmonic · M11 · 따라 하기형 AGV 실습</a:t>
+              <a:t>ROS 2 기반 AGV End-to-End 개발 커리큘럼 · M11 · Block C</a:t>
             </a:r>
           </a:p>
         </p:txBody>
@@ -11014,7 +11014,7 @@
               <a:spcAft>
                 <a:spcPts val="0"/>
               </a:spcAft>
-              <a:defRPr sz="1000" b="0">
+              <a:defRPr sz="900" b="0">
                 <a:solidFill>
                   <a:srgbClr val="5C6672"/>
                 </a:solidFill>
@@ -11022,7 +11022,7 @@
               </a:defRPr>
             </a:pPr>
             <a:r>
-              <a:t>ROS 2 Jazzy · Gazebo Harmonic · M11 · 따라 하기형 AGV 실습</a:t>
+              <a:t>ROS 2 기반 AGV End-to-End 개발 커리큘럼 · M11 · Block C</a:t>
             </a:r>
           </a:p>
         </p:txBody>
@@ -11433,7 +11433,7 @@
               <a:spcAft>
                 <a:spcPts val="0"/>
               </a:spcAft>
-              <a:defRPr sz="1000" b="0">
+              <a:defRPr sz="900" b="0">
                 <a:solidFill>
                   <a:srgbClr val="5C6672"/>
                 </a:solidFill>
@@ -11441,7 +11441,7 @@
               </a:defRPr>
             </a:pPr>
             <a:r>
-              <a:t>ROS 2 Jazzy · Gazebo Harmonic · M11 · 따라 하기형 AGV 실습</a:t>
+              <a:t>ROS 2 기반 AGV End-to-End 개발 커리큘럼 · M11 · Block C</a:t>
             </a:r>
           </a:p>
         </p:txBody>
@@ -11964,7 +11964,7 @@
               <a:spcAft>
                 <a:spcPts val="0"/>
               </a:spcAft>
-              <a:defRPr sz="1000" b="0">
+              <a:defRPr sz="900" b="0">
                 <a:solidFill>
                   <a:srgbClr val="5C6672"/>
                 </a:solidFill>
@@ -11972,7 +11972,7 @@
               </a:defRPr>
             </a:pPr>
             <a:r>
-              <a:t>ROS 2 Jazzy · Gazebo Harmonic · M11 · 따라 하기형 AGV 실습</a:t>
+              <a:t>ROS 2 기반 AGV End-to-End 개발 커리큘럼 · M11 · Block C</a:t>
             </a:r>
           </a:p>
         </p:txBody>
@@ -12383,7 +12383,7 @@
               <a:spcAft>
                 <a:spcPts val="0"/>
               </a:spcAft>
-              <a:defRPr sz="1000" b="0">
+              <a:defRPr sz="900" b="0">
                 <a:solidFill>
                   <a:srgbClr val="5C6672"/>
                 </a:solidFill>
@@ -12391,7 +12391,7 @@
               </a:defRPr>
             </a:pPr>
             <a:r>
-              <a:t>ROS 2 Jazzy · Gazebo Harmonic · M11 · 따라 하기형 AGV 실습</a:t>
+              <a:t>ROS 2 기반 AGV End-to-End 개발 커리큘럼 · M11 · Block C</a:t>
             </a:r>
           </a:p>
         </p:txBody>
@@ -12716,7 +12716,7 @@
               <a:spcAft>
                 <a:spcPts val="0"/>
               </a:spcAft>
-              <a:defRPr sz="1000" b="0">
+              <a:defRPr sz="900" b="0">
                 <a:solidFill>
                   <a:srgbClr val="5C6672"/>
                 </a:solidFill>
@@ -12724,7 +12724,7 @@
               </a:defRPr>
             </a:pPr>
             <a:r>
-              <a:t>ROS 2 Jazzy · Gazebo Harmonic · M11 · 따라 하기형 AGV 실습</a:t>
+              <a:t>ROS 2 기반 AGV End-to-End 개발 커리큘럼 · M11 · Block C</a:t>
             </a:r>
           </a:p>
         </p:txBody>
@@ -13356,7 +13356,7 @@
               <a:spcAft>
                 <a:spcPts val="0"/>
               </a:spcAft>
-              <a:defRPr sz="1000" b="0">
+              <a:defRPr sz="900" b="0">
                 <a:solidFill>
                   <a:srgbClr val="5C6672"/>
                 </a:solidFill>
@@ -13364,7 +13364,7 @@
               </a:defRPr>
             </a:pPr>
             <a:r>
-              <a:t>ROS 2 Jazzy · Gazebo Harmonic · M11 · 따라 하기형 AGV 실습</a:t>
+              <a:t>ROS 2 기반 AGV End-to-End 개발 커리큘럼 · M11 · Block C</a:t>
             </a:r>
           </a:p>
         </p:txBody>
@@ -13593,7 +13593,7 @@
               <a:spcAft>
                 <a:spcPts val="0"/>
               </a:spcAft>
-              <a:defRPr sz="1000" b="0">
+              <a:defRPr sz="900" b="0">
                 <a:solidFill>
                   <a:srgbClr val="5C6672"/>
                 </a:solidFill>
@@ -13601,7 +13601,7 @@
               </a:defRPr>
             </a:pPr>
             <a:r>
-              <a:t>ROS 2 Jazzy · Gazebo Harmonic · M11 · 따라 하기형 AGV 실습</a:t>
+              <a:t>ROS 2 기반 AGV End-to-End 개발 커리큘럼 · M11 · Block C</a:t>
             </a:r>
           </a:p>
         </p:txBody>
@@ -14050,7 +14050,7 @@
               <a:spcAft>
                 <a:spcPts val="0"/>
               </a:spcAft>
-              <a:defRPr sz="1000" b="0">
+              <a:defRPr sz="900" b="0">
                 <a:solidFill>
                   <a:srgbClr val="5C6672"/>
                 </a:solidFill>
@@ -14058,7 +14058,7 @@
               </a:defRPr>
             </a:pPr>
             <a:r>
-              <a:t>ROS 2 Jazzy · Gazebo Harmonic · M11 · 따라 하기형 AGV 실습</a:t>
+              <a:t>ROS 2 기반 AGV End-to-End 개발 커리큘럼 · M11 · Block C</a:t>
             </a:r>
           </a:p>
         </p:txBody>
@@ -14325,7 +14325,7 @@
               <a:spcAft>
                 <a:spcPts val="0"/>
               </a:spcAft>
-              <a:defRPr sz="1000" b="0">
+              <a:defRPr sz="900" b="0">
                 <a:solidFill>
                   <a:srgbClr val="5C6672"/>
                 </a:solidFill>
@@ -14333,7 +14333,7 @@
               </a:defRPr>
             </a:pPr>
             <a:r>
-              <a:t>ROS 2 Jazzy · Gazebo Harmonic · M11 · 따라 하기형 AGV 실습</a:t>
+              <a:t>ROS 2 기반 AGV End-to-End 개발 커리큘럼 · M11 · Block C</a:t>
             </a:r>
           </a:p>
         </p:txBody>

--- a/blocks/C_drive_visualization/M11_rviz_integration/M11_RViz2_구동_상태_검증.pptx
+++ b/blocks/C_drive_visualization/M11_rviz_integration/M11_RViz2_구동_상태_검증.pptx
@@ -26,6 +26,9 @@
     <p:sldId id="274" r:id="rId26"/>
     <p:sldId id="275" r:id="rId27"/>
     <p:sldId id="276" r:id="rId28"/>
+    <p:sldId id="277" r:id="rId29"/>
+    <p:sldId id="278" r:id="rId30"/>
+    <p:sldId id="279" r:id="rId31"/>
   </p:sldIdLst>
   <p:sldSz cx="12191999" cy="6858000" type="screen4x3"/>
   <p:notesSz cx="6858000" cy="9144000"/>
@@ -792,22 +795,17 @@
           <a:lstStyle/>
           <a:p>
             <a:r>
-              <a:t>[설명] 같은 display 설정을 다음 센서 모듈에서도 재사용한다.</a:t>
-            </a:r>
-          </a:p>
-          <a:p>
-            <a:r>
-              <a:t>[실행] source ~/ros2_curri/my_agv_ws/install/setup.bash</a:t>
-            </a:r>
-          </a:p>
-          <a:p>
-            <a:r>
-              <a:t>rviz2 -d ~/ros2_curri/my_agv_ws/src/agv_description/rviz/agv.rviz</a:t>
-            </a:r>
-          </a:p>
-          <a:p>
-            <a:r>
-              <a:t>[확인] 명령 출력에서 슬라이드의 확인 항목을 찾는다.</a:t>
+              <a:t>[설명] 파일 구현이 없는 모듈에서도 명령의 역할과 관찰 결과를 코드 설명처럼 연결한다.</a:t>
+            </a:r>
+          </a:p>
+          <a:p>
+            <a:r>
+              <a:t>[실행] 슬라이드의 명령 또는 파일 작성 단계를 진행한다.</a:t>
+            </a:r>
+          </a:p>
+          <a:p>
+            <a:r>
+              <a:t>[확인] agv.rviz에 RobotModel·TF·LaserScan·Odometry 설정을 저장하고 실제 화면을 확인한다.</a:t>
             </a:r>
           </a:p>
           <a:p>
@@ -887,22 +885,17 @@
           <a:lstStyle/>
           <a:p>
             <a:r>
-              <a:t>[설명] 모델과 frame이 맞아야 scan·image 위치도 맞는다.</a:t>
-            </a:r>
-          </a:p>
-          <a:p>
-            <a:r>
-              <a:t>[실행] Fixed Frame: odom 또는 base_link</a:t>
-            </a:r>
-          </a:p>
-          <a:p>
-            <a:r>
-              <a:t>Add → RobotModel → Description Topic: /robot_description</a:t>
-            </a:r>
-          </a:p>
-          <a:p>
-            <a:r>
-              <a:t>Add → TF</a:t>
+              <a:t>[설명] 같은 display 설정을 다음 센서 모듈에서도 재사용한다.</a:t>
+            </a:r>
+          </a:p>
+          <a:p>
+            <a:r>
+              <a:t>[실행] source ~/ros2_curri/my_agv_ws/install/setup.bash</a:t>
+            </a:r>
+          </a:p>
+          <a:p>
+            <a:r>
+              <a:t>rviz2 -d ~/ros2_curri/my_agv_ws/src/agv_description/rviz/agv.rviz</a:t>
             </a:r>
           </a:p>
           <a:p>
@@ -987,22 +980,22 @@
           <a:lstStyle/>
           <a:p>
             <a:r>
-              <a:t>[설명] 각 display는 topic과 message frame_id를 TF로 변환한다.</a:t>
-            </a:r>
-          </a:p>
-          <a:p>
-            <a:r>
-              <a:t>[실행] Add → LaserScan → Topic: /scan</a:t>
-            </a:r>
-          </a:p>
-          <a:p>
-            <a:r>
-              <a:t>Add → Odometry → Topic: /odom</a:t>
-            </a:r>
-          </a:p>
-          <a:p>
-            <a:r>
-              <a:t>File → Save Config As → agv.rviz</a:t>
+              <a:t>[설명] 모델과 frame이 맞아야 scan·image 위치도 맞는다.</a:t>
+            </a:r>
+          </a:p>
+          <a:p>
+            <a:r>
+              <a:t>[실행] Fixed Frame: odom 또는 base_link</a:t>
+            </a:r>
+          </a:p>
+          <a:p>
+            <a:r>
+              <a:t>Add → RobotModel → Description Topic: /robot_description</a:t>
+            </a:r>
+          </a:p>
+          <a:p>
+            <a:r>
+              <a:t>Add → TF</a:t>
             </a:r>
           </a:p>
           <a:p>
@@ -1087,22 +1080,27 @@
           <a:lstStyle/>
           <a:p>
             <a:r>
-              <a:t>[설명] build/source/run을 생략 없이 실행한다.</a:t>
-            </a:r>
-          </a:p>
-          <a:p>
-            <a:r>
-              <a:t>[실행] source ~/ros2_curri/my_agv_ws/install/setup.bash</a:t>
-            </a:r>
-          </a:p>
-          <a:p>
-            <a:r>
-              <a:t>ros2 launch agv_bringup agv_sim.launch.py</a:t>
-            </a:r>
-          </a:p>
-          <a:p>
-            <a:r>
-              <a:t>[확인] agv.rviz에 RobotModel·TF·LaserScan·Odometry 설정을 저장하고 실제 화면을 확인한다.</a:t>
+              <a:t>[설명] 각 display는 topic과 message frame_id를 TF로 변환한다.</a:t>
+            </a:r>
+          </a:p>
+          <a:p>
+            <a:r>
+              <a:t>[실행] Add → LaserScan → Topic: /scan</a:t>
+            </a:r>
+          </a:p>
+          <a:p>
+            <a:r>
+              <a:t>Add → Odometry → Topic: /odom</a:t>
+            </a:r>
+          </a:p>
+          <a:p>
+            <a:r>
+              <a:t>File → Save Config As → agv.rviz</a:t>
+            </a:r>
+          </a:p>
+          <a:p>
+            <a:r>
+              <a:t>[확인] 명령 출력에서 슬라이드의 확인 항목을 찾는다.</a:t>
             </a:r>
           </a:p>
           <a:p>
@@ -1182,17 +1180,22 @@
           <a:lstStyle/>
           <a:p>
             <a:r>
-              <a:t>[설명] 실제 Ubuntu/ROS 2 환경에서 생성한 검증 화면이다.</a:t>
-            </a:r>
-          </a:p>
-          <a:p>
-            <a:r>
-              <a:t>[실행] 슬라이드의 명령 또는 파일 작성 단계를 진행한다.</a:t>
-            </a:r>
-          </a:p>
-          <a:p>
-            <a:r>
-              <a:t>[확인] ① 명령/설정  ② 정상 출력 또는 화면  ③ 다음 검증 명령으로 재확인</a:t>
+              <a:t>[설명] build/source/run을 생략 없이 실행한다.</a:t>
+            </a:r>
+          </a:p>
+          <a:p>
+            <a:r>
+              <a:t>[실행] source ~/ros2_curri/my_agv_ws/install/setup.bash</a:t>
+            </a:r>
+          </a:p>
+          <a:p>
+            <a:r>
+              <a:t>ros2 launch agv_bringup agv_sim.launch.py</a:t>
+            </a:r>
+          </a:p>
+          <a:p>
+            <a:r>
+              <a:t>[확인] agv.rviz에 RobotModel·TF·LaserScan·Odometry 설정을 저장하고 실제 화면을 확인한다.</a:t>
             </a:r>
           </a:p>
           <a:p>
@@ -1272,27 +1275,17 @@
           <a:lstStyle/>
           <a:p>
             <a:r>
-              <a:t>[설명] 검증 명령은 GUI 결과와 별도로 실행해 재현 가능한 완료 기준을 만든다.</a:t>
-            </a:r>
-          </a:p>
-          <a:p>
-            <a:r>
-              <a:t>[실행] ros2 topic info /robot_description</a:t>
-            </a:r>
-          </a:p>
-          <a:p>
-            <a:r>
-              <a:t>ros2 topic echo /scan --once</a:t>
-            </a:r>
-          </a:p>
-          <a:p>
-            <a:r>
-              <a:t>ros2 topic echo /odom --once</a:t>
-            </a:r>
-          </a:p>
-          <a:p>
-            <a:r>
-              <a:t>[확인] agv.rviz에 RobotModel·TF·LaserScan·Odometry 설정을 저장하고 실제 화면을 확인한다.</a:t>
+              <a:t>[설명] 실제 Ubuntu/ROS 2 환경에서 생성한 검증 화면이다.</a:t>
+            </a:r>
+          </a:p>
+          <a:p>
+            <a:r>
+              <a:t>[실행] 슬라이드의 명령 또는 파일 작성 단계를 진행한다.</a:t>
+            </a:r>
+          </a:p>
+          <a:p>
+            <a:r>
+              <a:t>[확인] 왼쪽 Displays의 RobotModel·TF가 켜져 있고, 오른쪽에 차체·바퀴·sensor frame 축이 함께 보이는지 확인합니다.</a:t>
             </a:r>
           </a:p>
           <a:p>
@@ -1372,7 +1365,7 @@
           <a:lstStyle/>
           <a:p>
             <a:r>
-              <a:t>[설명] 오류를 대신 해결하지 말고 증상부터 우선 확인 순서대로 교육생이 실행하게 한다.</a:t>
+              <a:t>[설명] 실제 Ubuntu/ROS 2 환경에서 생성한 검증 화면이다.</a:t>
             </a:r>
           </a:p>
           <a:p>
@@ -1382,7 +1375,7 @@
           </a:p>
           <a:p>
             <a:r>
-              <a:t>[확인] 수정 뒤 첫 검증 명령을 다시 실행한다.</a:t>
+              <a:t>[확인] Displays에서 LaserScan·Odometry가 활성화되어 있는지와 scan point가 TF 좌표계에 붙는지를 확인합니다.</a:t>
             </a:r>
           </a:p>
           <a:p>
@@ -1392,7 +1385,7 @@
           </a:p>
           <a:p>
             <a:r>
-              <a:t>[오류] 슬라이드의 두 대표 오류를 먼저 사용한다.</a:t>
+              <a:t>[오류] 오류가 나면 현재 폴더, source, 파일 경로를 먼저 확인한다.</a:t>
             </a:r>
           </a:p>
         </p:txBody>
@@ -1462,7 +1455,7 @@
           <a:lstStyle/>
           <a:p>
             <a:r>
-              <a:t>[설명] 교육생이 직접 한 값만 바꿔 원인과 결과를 연결하게 한다.</a:t>
+              <a:t>[설명] 실제 Ubuntu/ROS 2 환경에서 생성한 검증 화면이다.</a:t>
             </a:r>
           </a:p>
           <a:p>
@@ -1472,7 +1465,7 @@
           </a:p>
           <a:p>
             <a:r>
-              <a:t>[확인] 원래 값과 변경 값을 모두 기록한다.</a:t>
+              <a:t>[확인] ① 명령/설정  ② 정상 출력 또는 화면  ③ 다음 검증 명령으로 재확인</a:t>
             </a:r>
           </a:p>
           <a:p>
@@ -1642,17 +1635,27 @@
           <a:lstStyle/>
           <a:p>
             <a:r>
-              <a:t>[설명] 교육생이 자신의 workspace·캡처·로그를 저장했는지 확인하고 다음 모듈의 시작 상태를 읽는다.</a:t>
-            </a:r>
-          </a:p>
-          <a:p>
-            <a:r>
-              <a:t>[실행] 슬라이드의 명령 또는 파일 작성 단계를 진행한다.</a:t>
-            </a:r>
-          </a:p>
-          <a:p>
-            <a:r>
-              <a:t>[확인] M12~M15 센서 display 시작 조건을 말할 수 있다.</a:t>
+              <a:t>[설명] 검증 명령은 GUI 결과와 별도로 실행해 재현 가능한 완료 기준을 만든다.</a:t>
+            </a:r>
+          </a:p>
+          <a:p>
+            <a:r>
+              <a:t>[실행] ros2 topic info /robot_description</a:t>
+            </a:r>
+          </a:p>
+          <a:p>
+            <a:r>
+              <a:t>ros2 topic echo /scan --once</a:t>
+            </a:r>
+          </a:p>
+          <a:p>
+            <a:r>
+              <a:t>ros2 topic echo /odom --once</a:t>
+            </a:r>
+          </a:p>
+          <a:p>
+            <a:r>
+              <a:t>[확인] agv.rviz에 RobotModel·TF·LaserScan·Odometry 설정을 저장하고 실제 화면을 확인한다.</a:t>
             </a:r>
           </a:p>
           <a:p>
@@ -1732,6 +1735,276 @@
           <a:lstStyle/>
           <a:p>
             <a:r>
+              <a:t>[설명] 오류를 대신 해결하지 말고 증상부터 우선 확인 순서대로 교육생이 실행하게 한다.</a:t>
+            </a:r>
+          </a:p>
+          <a:p>
+            <a:r>
+              <a:t>[실행] 슬라이드의 명령 또는 파일 작성 단계를 진행한다.</a:t>
+            </a:r>
+          </a:p>
+          <a:p>
+            <a:r>
+              <a:t>[확인] 수정 뒤 첫 검증 명령을 다시 실행한다.</a:t>
+            </a:r>
+          </a:p>
+          <a:p>
+            <a:r>
+              <a:t>[멈춤] 교육생이 현재 체크포인트를 통과할 때까지 기다린다.</a:t>
+            </a:r>
+          </a:p>
+          <a:p>
+            <a:r>
+              <a:t>[오류] 슬라이드의 두 대표 오류를 먼저 사용한다.</a:t>
+            </a:r>
+          </a:p>
+        </p:txBody>
+      </p:sp>
+      <p:sp>
+        <p:nvSpPr>
+          <p:cNvPr id="4" name="Slide Number Placeholder 3"/>
+          <p:cNvSpPr>
+            <a:spLocks noGrp="1"/>
+          </p:cNvSpPr>
+          <p:nvPr>
+            <p:ph type="sldNum" idx="5" sz="quarter"/>
+          </p:nvPr>
+        </p:nvSpPr>
+        <p:spPr/>
+      </p:sp>
+    </p:spTree>
+  </p:cSld>
+  <p:clrMapOvr>
+    <a:masterClrMapping/>
+  </p:clrMapOvr>
+</p:notes>
+</file>
+
+<file path=ppt/notesSlides/notesSlide22.xml><?xml version="1.0" encoding="utf-8"?>
+<p:notes xmlns:a="http://schemas.openxmlformats.org/drawingml/2006/main" xmlns:p="http://schemas.openxmlformats.org/presentationml/2006/main" xmlns:r="http://schemas.openxmlformats.org/officeDocument/2006/relationships">
+  <p:cSld>
+    <p:spTree>
+      <p:nvGrpSpPr>
+        <p:cNvPr id="1" name=""/>
+        <p:cNvGrpSpPr/>
+        <p:nvPr/>
+      </p:nvGrpSpPr>
+      <p:grpSpPr>
+        <a:xfrm>
+          <a:off x="0" y="0"/>
+          <a:ext cx="0" cy="0"/>
+          <a:chOff x="0" y="0"/>
+          <a:chExt cx="0" cy="0"/>
+        </a:xfrm>
+      </p:grpSpPr>
+      <p:sp>
+        <p:nvSpPr>
+          <p:cNvPr id="2" name="Slide Image Placeholder 1"/>
+          <p:cNvSpPr>
+            <a:spLocks noGrp="1"/>
+          </p:cNvSpPr>
+          <p:nvPr>
+            <p:ph type="sldImg" idx="2"/>
+          </p:nvPr>
+        </p:nvSpPr>
+        <p:spPr/>
+      </p:sp>
+      <p:sp>
+        <p:nvSpPr>
+          <p:cNvPr id="3" name="Notes Placeholder 2"/>
+          <p:cNvSpPr>
+            <a:spLocks noGrp="1"/>
+          </p:cNvSpPr>
+          <p:nvPr>
+            <p:ph type="body" idx="3" sz="quarter"/>
+          </p:nvPr>
+        </p:nvSpPr>
+        <p:spPr/>
+        <p:txBody>
+          <a:bodyPr/>
+          <a:lstStyle/>
+          <a:p>
+            <a:r>
+              <a:t>[설명] 교육생이 직접 한 값만 바꿔 원인과 결과를 연결하게 한다.</a:t>
+            </a:r>
+          </a:p>
+          <a:p>
+            <a:r>
+              <a:t>[실행] 슬라이드의 명령 또는 파일 작성 단계를 진행한다.</a:t>
+            </a:r>
+          </a:p>
+          <a:p>
+            <a:r>
+              <a:t>[확인] 원래 값과 변경 값을 모두 기록한다.</a:t>
+            </a:r>
+          </a:p>
+          <a:p>
+            <a:r>
+              <a:t>[멈춤] 교육생이 현재 체크포인트를 통과할 때까지 기다린다.</a:t>
+            </a:r>
+          </a:p>
+          <a:p>
+            <a:r>
+              <a:t>[오류] 오류가 나면 현재 폴더, source, 파일 경로를 먼저 확인한다.</a:t>
+            </a:r>
+          </a:p>
+        </p:txBody>
+      </p:sp>
+      <p:sp>
+        <p:nvSpPr>
+          <p:cNvPr id="4" name="Slide Number Placeholder 3"/>
+          <p:cNvSpPr>
+            <a:spLocks noGrp="1"/>
+          </p:cNvSpPr>
+          <p:nvPr>
+            <p:ph type="sldNum" idx="5" sz="quarter"/>
+          </p:nvPr>
+        </p:nvSpPr>
+        <p:spPr/>
+      </p:sp>
+    </p:spTree>
+  </p:cSld>
+  <p:clrMapOvr>
+    <a:masterClrMapping/>
+  </p:clrMapOvr>
+</p:notes>
+</file>
+
+<file path=ppt/notesSlides/notesSlide23.xml><?xml version="1.0" encoding="utf-8"?>
+<p:notes xmlns:a="http://schemas.openxmlformats.org/drawingml/2006/main" xmlns:p="http://schemas.openxmlformats.org/presentationml/2006/main" xmlns:r="http://schemas.openxmlformats.org/officeDocument/2006/relationships">
+  <p:cSld>
+    <p:spTree>
+      <p:nvGrpSpPr>
+        <p:cNvPr id="1" name=""/>
+        <p:cNvGrpSpPr/>
+        <p:nvPr/>
+      </p:nvGrpSpPr>
+      <p:grpSpPr>
+        <a:xfrm>
+          <a:off x="0" y="0"/>
+          <a:ext cx="0" cy="0"/>
+          <a:chOff x="0" y="0"/>
+          <a:chExt cx="0" cy="0"/>
+        </a:xfrm>
+      </p:grpSpPr>
+      <p:sp>
+        <p:nvSpPr>
+          <p:cNvPr id="2" name="Slide Image Placeholder 1"/>
+          <p:cNvSpPr>
+            <a:spLocks noGrp="1"/>
+          </p:cNvSpPr>
+          <p:nvPr>
+            <p:ph type="sldImg" idx="2"/>
+          </p:nvPr>
+        </p:nvSpPr>
+        <p:spPr/>
+      </p:sp>
+      <p:sp>
+        <p:nvSpPr>
+          <p:cNvPr id="3" name="Notes Placeholder 2"/>
+          <p:cNvSpPr>
+            <a:spLocks noGrp="1"/>
+          </p:cNvSpPr>
+          <p:nvPr>
+            <p:ph type="body" idx="3" sz="quarter"/>
+          </p:nvPr>
+        </p:nvSpPr>
+        <p:spPr/>
+        <p:txBody>
+          <a:bodyPr/>
+          <a:lstStyle/>
+          <a:p>
+            <a:r>
+              <a:t>[설명] 교육생이 자신의 workspace·캡처·로그를 저장했는지 확인하고 다음 모듈의 시작 상태를 읽는다.</a:t>
+            </a:r>
+          </a:p>
+          <a:p>
+            <a:r>
+              <a:t>[실행] 슬라이드의 명령 또는 파일 작성 단계를 진행한다.</a:t>
+            </a:r>
+          </a:p>
+          <a:p>
+            <a:r>
+              <a:t>[확인] M12~M15 센서 display 시작 조건을 말할 수 있다.</a:t>
+            </a:r>
+          </a:p>
+          <a:p>
+            <a:r>
+              <a:t>[멈춤] 교육생이 현재 체크포인트를 통과할 때까지 기다린다.</a:t>
+            </a:r>
+          </a:p>
+          <a:p>
+            <a:r>
+              <a:t>[오류] 오류가 나면 현재 폴더, source, 파일 경로를 먼저 확인한다.</a:t>
+            </a:r>
+          </a:p>
+        </p:txBody>
+      </p:sp>
+      <p:sp>
+        <p:nvSpPr>
+          <p:cNvPr id="4" name="Slide Number Placeholder 3"/>
+          <p:cNvSpPr>
+            <a:spLocks noGrp="1"/>
+          </p:cNvSpPr>
+          <p:nvPr>
+            <p:ph type="sldNum" idx="5" sz="quarter"/>
+          </p:nvPr>
+        </p:nvSpPr>
+        <p:spPr/>
+      </p:sp>
+    </p:spTree>
+  </p:cSld>
+  <p:clrMapOvr>
+    <a:masterClrMapping/>
+  </p:clrMapOvr>
+</p:notes>
+</file>
+
+<file path=ppt/notesSlides/notesSlide24.xml><?xml version="1.0" encoding="utf-8"?>
+<p:notes xmlns:a="http://schemas.openxmlformats.org/drawingml/2006/main" xmlns:p="http://schemas.openxmlformats.org/presentationml/2006/main" xmlns:r="http://schemas.openxmlformats.org/officeDocument/2006/relationships">
+  <p:cSld>
+    <p:spTree>
+      <p:nvGrpSpPr>
+        <p:cNvPr id="1" name=""/>
+        <p:cNvGrpSpPr/>
+        <p:nvPr/>
+      </p:nvGrpSpPr>
+      <p:grpSpPr>
+        <a:xfrm>
+          <a:off x="0" y="0"/>
+          <a:ext cx="0" cy="0"/>
+          <a:chOff x="0" y="0"/>
+          <a:chExt cx="0" cy="0"/>
+        </a:xfrm>
+      </p:grpSpPr>
+      <p:sp>
+        <p:nvSpPr>
+          <p:cNvPr id="2" name="Slide Image Placeholder 1"/>
+          <p:cNvSpPr>
+            <a:spLocks noGrp="1"/>
+          </p:cNvSpPr>
+          <p:nvPr>
+            <p:ph type="sldImg" idx="2"/>
+          </p:nvPr>
+        </p:nvSpPr>
+        <p:spPr/>
+      </p:sp>
+      <p:sp>
+        <p:nvSpPr>
+          <p:cNvPr id="3" name="Notes Placeholder 2"/>
+          <p:cNvSpPr>
+            <a:spLocks noGrp="1"/>
+          </p:cNvSpPr>
+          <p:nvPr>
+            <p:ph type="body" idx="3" sz="quarter"/>
+          </p:nvPr>
+        </p:nvSpPr>
+        <p:spPr/>
+        <p:txBody>
+          <a:bodyPr/>
+          <a:lstStyle/>
+          <a:p>
+            <a:r>
               <a:t>[설명] 공식 문서는 버전 차이와 확장 학습을 확인할 때 사용한다.</a:t>
             </a:r>
           </a:p>
@@ -2102,7 +2375,7 @@
           </a:p>
           <a:p>
             <a:r>
-              <a:t>[확인] 명령·설정과 화면의 topic·frame·결과 이름을 대조합니다.</a:t>
+              <a:t>[확인] 왼쪽 Displays의 RobotModel·TF가 켜져 있고, 오른쪽에 차체·바퀴·sensor frame 축이 함께 보이는지 확인합니다.</a:t>
             </a:r>
           </a:p>
           <a:p>
@@ -2182,7 +2455,7 @@
           <a:lstStyle/>
           <a:p>
             <a:r>
-              <a:t>[설명] 도식의 각 상자가 무엇을 만들고 화살표가 어떤 방향으로 데이터를 보내는지 설명한다.</a:t>
+              <a:t>[설명] 코드를 입력하기 전에 완성 결과와 관찰 기준을 보여 준다.</a:t>
             </a:r>
           </a:p>
           <a:p>
@@ -2192,7 +2465,7 @@
           </a:p>
           <a:p>
             <a:r>
-              <a:t>[확인] 교육생이 왼쪽에서 오른쪽(또는 제어 방향)으로 흐름을 말할 수 있다.</a:t>
+              <a:t>[확인] Displays에서 LaserScan·Odometry가 활성화되어 있는지와 scan point가 TF 좌표계에 붙는지를 확인합니다.</a:t>
             </a:r>
           </a:p>
           <a:p>
@@ -2272,7 +2545,7 @@
           <a:lstStyle/>
           <a:p>
             <a:r>
-              <a:t>[설명] 실제 파일 경로를 보여 주고 어떤 package의 책임인지 설명한다.</a:t>
+              <a:t>[설명] 도식의 각 상자가 무엇을 만들고 화살표가 어떤 방향으로 데이터를 보내는지 설명한다.</a:t>
             </a:r>
           </a:p>
           <a:p>
@@ -2282,7 +2555,7 @@
           </a:p>
           <a:p>
             <a:r>
-              <a:t>[확인] 교육생이 파일의 부모 package를 찾을 수 있다.</a:t>
+              <a:t>[확인] 교육생이 왼쪽에서 오른쪽(또는 제어 방향)으로 흐름을 말할 수 있다.</a:t>
             </a:r>
           </a:p>
           <a:p>
@@ -2362,7 +2635,7 @@
           <a:lstStyle/>
           <a:p>
             <a:r>
-              <a:t>[설명] 파일 구현이 없는 모듈에서도 명령의 역할과 관찰 결과를 코드 설명처럼 연결한다.</a:t>
+              <a:t>[설명] 실제 파일 경로를 보여 주고 어떤 package의 책임인지 설명한다.</a:t>
             </a:r>
           </a:p>
           <a:p>
@@ -2372,7 +2645,7 @@
           </a:p>
           <a:p>
             <a:r>
-              <a:t>[확인] agv.rviz에 RobotModel·TF·LaserScan·Odometry 설정을 저장하고 실제 화면을 확인한다.</a:t>
+              <a:t>[확인] 교육생이 파일의 부모 package를 찾을 수 있다.</a:t>
             </a:r>
           </a:p>
           <a:p>
@@ -5755,7 +6028,7 @@
               </a:defRPr>
             </a:pPr>
             <a:r>
-              <a:t>명령어를 코드처럼 읽기 (2/3)</a:t>
+              <a:t>명령어를 코드처럼 읽기 (1/3)</a:t>
             </a:r>
           </a:p>
         </p:txBody>
@@ -6027,7 +6300,7 @@
               </a:defRPr>
             </a:pPr>
             <a:r>
-              <a:t>Fixed Frame: odom 또는 base_link</a:t>
+              <a:t>source ~/ros2_curri/my_agv_ws/install/setup.bash</a:t>
             </a:r>
           </a:p>
         </p:txBody>
@@ -6150,7 +6423,7 @@
               </a:defRPr>
             </a:pPr>
             <a:r>
-              <a:t>뜻: 이 명령은 지금 모듈의 기능을 실행하거나 관찰하는 한 단계입니다.</a:t>
+              <a:t>뜻: 내 workspace에서 build한 package를 현재 terminal에 겹쳐 등록합니다.</a:t>
             </a:r>
           </a:p>
         </p:txBody>
@@ -6189,7 +6462,7 @@
               </a:defRPr>
             </a:pPr>
             <a:r>
-              <a:t>실행에서: 명령 뒤 terminal 또는 GUI에서 완료 조건이 충족됐는지 확인합니다.</a:t>
+              <a:t>실행에서: 이 줄 뒤 `ros2 run`이 내가 만든 package와 executable을 찾습니다.</a:t>
             </a:r>
           </a:p>
         </p:txBody>
@@ -6247,7 +6520,11 @@
               </a:defRPr>
             </a:pPr>
             <a:r>
-              <a:t>Add → RobotModel → Description Topic: /robot_description</a:t>
+              <a:t>rviz2 -d</a:t>
+            </a:r>
+            <a:br/>
+            <a:r>
+              <a:t>~/ros2_curri/my_agv_ws/src/agv_description/rviz/agv.rviz</a:t>
             </a:r>
           </a:p>
         </p:txBody>
@@ -6370,7 +6647,7 @@
               </a:defRPr>
             </a:pPr>
             <a:r>
-              <a:t>뜻: 이 명령은 지금 모듈의 기능을 실행하거나 관찰하는 한 단계입니다.</a:t>
+              <a:t>뜻: 저장해 둔 RViz 설정 파일을 열어 동일한 display 구성을 재현합니다.</a:t>
             </a:r>
           </a:p>
         </p:txBody>
@@ -6409,7 +6686,7 @@
               </a:defRPr>
             </a:pPr>
             <a:r>
-              <a:t>실행에서: 명령 뒤 terminal 또는 GUI에서 완료 조건이 충족됐는지 확인합니다.</a:t>
+              <a:t>실행에서: RobotModel·TF·LaserScan display가 설정 파일대로 보입니다.</a:t>
             </a:r>
           </a:p>
         </p:txBody>
@@ -6505,7 +6782,7 @@
               </a:defRPr>
             </a:pPr>
             <a:r>
-              <a:t>명령어를 코드처럼 읽기 (3/3)</a:t>
+              <a:t>명령어를 코드처럼 읽기 (2/3)</a:t>
             </a:r>
           </a:p>
         </p:txBody>
@@ -6777,7 +7054,7 @@
               </a:defRPr>
             </a:pPr>
             <a:r>
-              <a:t>Add → TF</a:t>
+              <a:t>Fixed Frame: odom 또는 base_link</a:t>
             </a:r>
           </a:p>
         </p:txBody>
@@ -6997,7 +7274,7 @@
               </a:defRPr>
             </a:pPr>
             <a:r>
-              <a:t>Add → LaserScan → Topic: /scan</a:t>
+              <a:t>Add → RobotModel → Description Topic: /robot_description</a:t>
             </a:r>
           </a:p>
         </p:txBody>
@@ -7255,7 +7532,7 @@
               </a:defRPr>
             </a:pPr>
             <a:r>
-              <a:t>구현 뒤 실행 1/3: RViz를 설정 파일로 연다</a:t>
+              <a:t>명령어를 코드처럼 읽기 (3/3)</a:t>
             </a:r>
           </a:p>
         </p:txBody>
@@ -7294,7 +7571,7 @@
               </a:defRPr>
             </a:pPr>
             <a:r>
-              <a:t>방금 직접 만든 파일을 실행·검사하며 다음 파일로 넘어갈 기준을 만듭니다.</a:t>
+              <a:t>새 파일을 만들지 않는 모듈도 한 줄씩 뜻과 화면에서 확인할 결과를 먼저 읽습니다.</a:t>
             </a:r>
           </a:p>
         </p:txBody>
@@ -7430,7 +7707,7 @@
               </a:defRPr>
             </a:pPr>
             <a:r>
-              <a:t>현재 단계 실행 1/3    |    현재 폴더 ~/ros2_curri/my_agv_ws    |    현재 터미널</a:t>
+              <a:t>현재 단계 명령 해설    |    현재 폴더 ~/ros2_curri/my_agv_ws    |    현재 터미널</a:t>
             </a:r>
           </a:p>
         </p:txBody>
@@ -7443,86 +7720,47 @@
         </p:nvSpPr>
         <p:spPr>
           <a:xfrm>
-            <a:off x="676656" y="1764792"/>
-            <a:ext cx="1828800" cy="347472"/>
-          </a:xfrm>
-          <a:prstGeom prst="rect">
-            <a:avLst/>
-          </a:prstGeom>
-          <a:noFill/>
-        </p:spPr>
-        <p:txBody>
-          <a:bodyPr wrap="square" lIns="73152" rIns="73152" tIns="36576" bIns="36576">
-            <a:spAutoFit/>
-          </a:bodyPr>
-          <a:lstStyle/>
-          <a:p>
-            <a:pPr algn="l">
-              <a:spcAft>
-                <a:spcPts val="0"/>
-              </a:spcAft>
-              <a:defRPr sz="1800" b="1">
-                <a:solidFill>
-                  <a:srgbClr val="225B9B"/>
-                </a:solidFill>
-                <a:latin typeface="Noto Sans CJK KR"/>
-              </a:defRPr>
-            </a:pPr>
-            <a:r>
-              <a:t>왜 하는가</a:t>
-            </a:r>
-          </a:p>
-        </p:txBody>
-      </p:sp>
-      <p:sp>
-        <p:nvSpPr>
-          <p:cNvPr id="8" name="TextBox 7"/>
-          <p:cNvSpPr txBox="1"/>
-          <p:nvPr/>
-        </p:nvSpPr>
-        <p:spPr>
-          <a:xfrm>
-            <a:off x="676656" y="2103120"/>
-            <a:ext cx="10789920" cy="512064"/>
-          </a:xfrm>
-          <a:prstGeom prst="rect">
-            <a:avLst/>
-          </a:prstGeom>
-          <a:noFill/>
-        </p:spPr>
-        <p:txBody>
-          <a:bodyPr wrap="square" lIns="73152" rIns="73152" tIns="36576" bIns="36576">
-            <a:spAutoFit/>
-          </a:bodyPr>
-          <a:lstStyle/>
-          <a:p>
-            <a:pPr algn="l">
-              <a:spcAft>
-                <a:spcPts val="0"/>
-              </a:spcAft>
-              <a:defRPr sz="2000" b="0">
-                <a:solidFill>
-                  <a:srgbClr val="122C4E"/>
-                </a:solidFill>
-                <a:latin typeface="Noto Sans CJK KR"/>
-              </a:defRPr>
-            </a:pPr>
-            <a:r>
-              <a:t>같은 display 설정을 다음 센서 모듈에서도 재사용한다.</a:t>
-            </a:r>
-          </a:p>
-        </p:txBody>
-      </p:sp>
-      <p:sp>
-        <p:nvSpPr>
-          <p:cNvPr id="9" name="Rounded Rectangle 8"/>
+            <a:off x="694944" y="1664208"/>
+            <a:ext cx="10789920" cy="274320"/>
+          </a:xfrm>
+          <a:prstGeom prst="rect">
+            <a:avLst/>
+          </a:prstGeom>
+          <a:noFill/>
+        </p:spPr>
+        <p:txBody>
+          <a:bodyPr wrap="square" lIns="73152" rIns="73152" tIns="36576" bIns="36576">
+            <a:spAutoFit/>
+          </a:bodyPr>
+          <a:lstStyle/>
+          <a:p>
+            <a:pPr algn="ctr">
+              <a:spcAft>
+                <a:spcPts val="0"/>
+              </a:spcAft>
+              <a:defRPr sz="1500" b="1">
+                <a:solidFill>
+                  <a:srgbClr val="DB7E22"/>
+                </a:solidFill>
+                <a:latin typeface="Noto Sans CJK KR"/>
+              </a:defRPr>
+            </a:pPr>
+            <a:r>
+              <a:t>말로 먼저 답해 보세요: 이 명령은 무엇을 시작하고, 성공하면 어디에 무엇이 보일까요?</a:t>
+            </a:r>
+          </a:p>
+        </p:txBody>
+      </p:sp>
+      <p:sp>
+        <p:nvSpPr>
+          <p:cNvPr id="8" name="Rounded Rectangle 7"/>
           <p:cNvSpPr/>
           <p:nvPr/>
         </p:nvSpPr>
         <p:spPr>
           <a:xfrm>
-            <a:off x="676656" y="2871216"/>
-            <a:ext cx="10835640" cy="2331720"/>
+            <a:off x="658368" y="2359152"/>
+            <a:ext cx="4160520" cy="1417320"/>
           </a:xfrm>
           <a:prstGeom prst="roundRect">
             <a:avLst/>
@@ -7558,7 +7796,7 @@
               <a:spcAft>
                 <a:spcPts val="0"/>
               </a:spcAft>
-              <a:defRPr sz="1600" b="0">
+              <a:defRPr sz="1300" b="0">
                 <a:solidFill>
                   <a:srgbClr val="FFFFFF"/>
                 </a:solidFill>
@@ -7566,12 +7804,53 @@
               </a:defRPr>
             </a:pPr>
             <a:r>
-              <a:t>source ~/ros2_curri/my_agv_ws/install/setup.bash</a:t>
-            </a:r>
-            <a:br/>
-            <a:r>
-              <a:t>rviz2 -d ~/ros2_curri/my_agv_ws/src/agv_description/rviz/agv.rviz</a:t>
-            </a:r>
+              <a:t>Add → TF</a:t>
+            </a:r>
+          </a:p>
+        </p:txBody>
+      </p:sp>
+      <p:sp>
+        <p:nvSpPr>
+          <p:cNvPr id="9" name="Rounded Rectangle 8"/>
+          <p:cNvSpPr/>
+          <p:nvPr/>
+        </p:nvSpPr>
+        <p:spPr>
+          <a:xfrm>
+            <a:off x="5029200" y="2359152"/>
+            <a:ext cx="6537960" cy="1417320"/>
+          </a:xfrm>
+          <a:prstGeom prst="roundRect">
+            <a:avLst/>
+          </a:prstGeom>
+          <a:solidFill>
+            <a:srgbClr val="F4F7FB"/>
+          </a:solidFill>
+          <a:ln>
+            <a:solidFill>
+              <a:srgbClr val="225B9B"/>
+            </a:solidFill>
+          </a:ln>
+        </p:spPr>
+        <p:style>
+          <a:lnRef idx="1">
+            <a:schemeClr val="accent1"/>
+          </a:lnRef>
+          <a:fillRef idx="3">
+            <a:schemeClr val="accent1"/>
+          </a:fillRef>
+          <a:effectRef idx="2">
+            <a:schemeClr val="accent1"/>
+          </a:effectRef>
+          <a:fontRef idx="minor">
+            <a:schemeClr val="lt1"/>
+          </a:fontRef>
+        </p:style>
+        <p:txBody>
+          <a:bodyPr rtlCol="0" anchor="ctr"/>
+          <a:lstStyle/>
+          <a:p>
+            <a:pPr algn="ctr"/>
           </a:p>
         </p:txBody>
       </p:sp>
@@ -7583,8 +7862,8 @@
         </p:nvSpPr>
         <p:spPr>
           <a:xfrm>
-            <a:off x="768096" y="5468112"/>
-            <a:ext cx="1143000" cy="256032"/>
+            <a:off x="5239512" y="2468880"/>
+            <a:ext cx="594360" cy="219456"/>
           </a:xfrm>
           <a:prstGeom prst="rect">
             <a:avLst/>
@@ -7601,7 +7880,85 @@
               <a:spcAft>
                 <a:spcPts val="0"/>
               </a:spcAft>
-              <a:defRPr sz="1800" b="1">
+              <a:defRPr sz="1400" b="1">
+                <a:solidFill>
+                  <a:srgbClr val="225B9B"/>
+                </a:solidFill>
+                <a:latin typeface="Noto Sans CJK KR"/>
+              </a:defRPr>
+            </a:pPr>
+            <a:r>
+              <a:t>1.</a:t>
+            </a:r>
+          </a:p>
+        </p:txBody>
+      </p:sp>
+      <p:sp>
+        <p:nvSpPr>
+          <p:cNvPr id="11" name="TextBox 10"/>
+          <p:cNvSpPr txBox="1"/>
+          <p:nvPr/>
+        </p:nvSpPr>
+        <p:spPr>
+          <a:xfrm>
+            <a:off x="5596128" y="2450592"/>
+            <a:ext cx="5696712" cy="493776"/>
+          </a:xfrm>
+          <a:prstGeom prst="rect">
+            <a:avLst/>
+          </a:prstGeom>
+          <a:noFill/>
+        </p:spPr>
+        <p:txBody>
+          <a:bodyPr wrap="square" lIns="73152" rIns="73152" tIns="36576" bIns="36576">
+            <a:spAutoFit/>
+          </a:bodyPr>
+          <a:lstStyle/>
+          <a:p>
+            <a:pPr algn="l">
+              <a:spcAft>
+                <a:spcPts val="0"/>
+              </a:spcAft>
+              <a:defRPr sz="1300" b="0">
+                <a:solidFill>
+                  <a:srgbClr val="122C4E"/>
+                </a:solidFill>
+                <a:latin typeface="Noto Sans CJK KR"/>
+              </a:defRPr>
+            </a:pPr>
+            <a:r>
+              <a:t>뜻: 이 명령은 지금 모듈의 기능을 실행하거나 관찰하는 한 단계입니다.</a:t>
+            </a:r>
+          </a:p>
+        </p:txBody>
+      </p:sp>
+      <p:sp>
+        <p:nvSpPr>
+          <p:cNvPr id="12" name="TextBox 11"/>
+          <p:cNvSpPr txBox="1"/>
+          <p:nvPr/>
+        </p:nvSpPr>
+        <p:spPr>
+          <a:xfrm>
+            <a:off x="5596128" y="3108960"/>
+            <a:ext cx="5696712" cy="457200"/>
+          </a:xfrm>
+          <a:prstGeom prst="rect">
+            <a:avLst/>
+          </a:prstGeom>
+          <a:noFill/>
+        </p:spPr>
+        <p:txBody>
+          <a:bodyPr wrap="square" lIns="73152" rIns="73152" tIns="36576" bIns="36576">
+            <a:spAutoFit/>
+          </a:bodyPr>
+          <a:lstStyle/>
+          <a:p>
+            <a:pPr algn="l">
+              <a:spcAft>
+                <a:spcPts val="0"/>
+              </a:spcAft>
+              <a:defRPr sz="1200" b="0">
                 <a:solidFill>
                   <a:srgbClr val="2A8B5A"/>
                 </a:solidFill>
@@ -7609,38 +7966,180 @@
               </a:defRPr>
             </a:pPr>
             <a:r>
-              <a:t>확인</a:t>
-            </a:r>
-          </a:p>
-        </p:txBody>
-      </p:sp>
-      <p:sp>
-        <p:nvSpPr>
-          <p:cNvPr id="11" name="TextBox 10"/>
-          <p:cNvSpPr txBox="1"/>
-          <p:nvPr/>
-        </p:nvSpPr>
-        <p:spPr>
-          <a:xfrm>
-            <a:off x="768096" y="5742432"/>
-            <a:ext cx="10561320" cy="347472"/>
-          </a:xfrm>
-          <a:prstGeom prst="rect">
-            <a:avLst/>
-          </a:prstGeom>
-          <a:noFill/>
-        </p:spPr>
-        <p:txBody>
-          <a:bodyPr wrap="square" lIns="73152" rIns="73152" tIns="36576" bIns="36576">
-            <a:spAutoFit/>
-          </a:bodyPr>
+              <a:t>실행에서: 명령 뒤 terminal 또는 GUI에서 완료 조건이 충족됐는지 확인합니다.</a:t>
+            </a:r>
+          </a:p>
+        </p:txBody>
+      </p:sp>
+      <p:sp>
+        <p:nvSpPr>
+          <p:cNvPr id="13" name="Rounded Rectangle 12"/>
+          <p:cNvSpPr/>
+          <p:nvPr/>
+        </p:nvSpPr>
+        <p:spPr>
+          <a:xfrm>
+            <a:off x="658368" y="4078224"/>
+            <a:ext cx="4160520" cy="1417320"/>
+          </a:xfrm>
+          <a:prstGeom prst="roundRect">
+            <a:avLst/>
+          </a:prstGeom>
+          <a:solidFill>
+            <a:srgbClr val="1D232D"/>
+          </a:solidFill>
+          <a:ln>
+            <a:solidFill>
+              <a:srgbClr val="1D232D"/>
+            </a:solidFill>
+          </a:ln>
+        </p:spPr>
+        <p:style>
+          <a:lnRef idx="1">
+            <a:schemeClr val="accent1"/>
+          </a:lnRef>
+          <a:fillRef idx="3">
+            <a:schemeClr val="accent1"/>
+          </a:fillRef>
+          <a:effectRef idx="2">
+            <a:schemeClr val="accent1"/>
+          </a:effectRef>
+          <a:fontRef idx="minor">
+            <a:schemeClr val="lt1"/>
+          </a:fontRef>
+        </p:style>
+        <p:txBody>
+          <a:bodyPr rtlCol="0" anchor="ctr" wrap="square" lIns="73152" rIns="73152" tIns="36576" bIns="36576"/>
           <a:lstStyle/>
           <a:p>
             <a:pPr algn="l">
               <a:spcAft>
                 <a:spcPts val="0"/>
               </a:spcAft>
-              <a:defRPr sz="1800" b="0">
+              <a:defRPr sz="1300" b="0">
+                <a:solidFill>
+                  <a:srgbClr val="FFFFFF"/>
+                </a:solidFill>
+                <a:latin typeface="DejaVu Sans Mono"/>
+              </a:defRPr>
+            </a:pPr>
+            <a:r>
+              <a:t>Add → LaserScan → Topic: /scan</a:t>
+            </a:r>
+          </a:p>
+        </p:txBody>
+      </p:sp>
+      <p:sp>
+        <p:nvSpPr>
+          <p:cNvPr id="14" name="Rounded Rectangle 13"/>
+          <p:cNvSpPr/>
+          <p:nvPr/>
+        </p:nvSpPr>
+        <p:spPr>
+          <a:xfrm>
+            <a:off x="5029200" y="4078224"/>
+            <a:ext cx="6537960" cy="1417320"/>
+          </a:xfrm>
+          <a:prstGeom prst="roundRect">
+            <a:avLst/>
+          </a:prstGeom>
+          <a:solidFill>
+            <a:srgbClr val="F4F7FB"/>
+          </a:solidFill>
+          <a:ln>
+            <a:solidFill>
+              <a:srgbClr val="225B9B"/>
+            </a:solidFill>
+          </a:ln>
+        </p:spPr>
+        <p:style>
+          <a:lnRef idx="1">
+            <a:schemeClr val="accent1"/>
+          </a:lnRef>
+          <a:fillRef idx="3">
+            <a:schemeClr val="accent1"/>
+          </a:fillRef>
+          <a:effectRef idx="2">
+            <a:schemeClr val="accent1"/>
+          </a:effectRef>
+          <a:fontRef idx="minor">
+            <a:schemeClr val="lt1"/>
+          </a:fontRef>
+        </p:style>
+        <p:txBody>
+          <a:bodyPr rtlCol="0" anchor="ctr"/>
+          <a:lstStyle/>
+          <a:p>
+            <a:pPr algn="ctr"/>
+          </a:p>
+        </p:txBody>
+      </p:sp>
+      <p:sp>
+        <p:nvSpPr>
+          <p:cNvPr id="15" name="TextBox 14"/>
+          <p:cNvSpPr txBox="1"/>
+          <p:nvPr/>
+        </p:nvSpPr>
+        <p:spPr>
+          <a:xfrm>
+            <a:off x="5239512" y="4187952"/>
+            <a:ext cx="594360" cy="219456"/>
+          </a:xfrm>
+          <a:prstGeom prst="rect">
+            <a:avLst/>
+          </a:prstGeom>
+          <a:noFill/>
+        </p:spPr>
+        <p:txBody>
+          <a:bodyPr wrap="square" lIns="73152" rIns="73152" tIns="36576" bIns="36576">
+            <a:spAutoFit/>
+          </a:bodyPr>
+          <a:lstStyle/>
+          <a:p>
+            <a:pPr algn="l">
+              <a:spcAft>
+                <a:spcPts val="0"/>
+              </a:spcAft>
+              <a:defRPr sz="1400" b="1">
+                <a:solidFill>
+                  <a:srgbClr val="225B9B"/>
+                </a:solidFill>
+                <a:latin typeface="Noto Sans CJK KR"/>
+              </a:defRPr>
+            </a:pPr>
+            <a:r>
+              <a:t>2.</a:t>
+            </a:r>
+          </a:p>
+        </p:txBody>
+      </p:sp>
+      <p:sp>
+        <p:nvSpPr>
+          <p:cNvPr id="16" name="TextBox 15"/>
+          <p:cNvSpPr txBox="1"/>
+          <p:nvPr/>
+        </p:nvSpPr>
+        <p:spPr>
+          <a:xfrm>
+            <a:off x="5596128" y="4169663"/>
+            <a:ext cx="5696712" cy="493776"/>
+          </a:xfrm>
+          <a:prstGeom prst="rect">
+            <a:avLst/>
+          </a:prstGeom>
+          <a:noFill/>
+        </p:spPr>
+        <p:txBody>
+          <a:bodyPr wrap="square" lIns="73152" rIns="73152" tIns="36576" bIns="36576">
+            <a:spAutoFit/>
+          </a:bodyPr>
+          <a:lstStyle/>
+          <a:p>
+            <a:pPr algn="l">
+              <a:spcAft>
+                <a:spcPts val="0"/>
+              </a:spcAft>
+              <a:defRPr sz="1300" b="0">
                 <a:solidFill>
                   <a:srgbClr val="122C4E"/>
                 </a:solidFill>
@@ -7648,7 +8147,85 @@
               </a:defRPr>
             </a:pPr>
             <a:r>
-              <a:t>출력에서 topic·frame·파일 이름 또는 성공 메시지를 찾고, 맞지 않으면 다음 파일로 가지 않습니다.</a:t>
+              <a:t>뜻: 이 명령은 지금 모듈의 기능을 실행하거나 관찰하는 한 단계입니다.</a:t>
+            </a:r>
+          </a:p>
+        </p:txBody>
+      </p:sp>
+      <p:sp>
+        <p:nvSpPr>
+          <p:cNvPr id="17" name="TextBox 16"/>
+          <p:cNvSpPr txBox="1"/>
+          <p:nvPr/>
+        </p:nvSpPr>
+        <p:spPr>
+          <a:xfrm>
+            <a:off x="5596128" y="4828032"/>
+            <a:ext cx="5696712" cy="457200"/>
+          </a:xfrm>
+          <a:prstGeom prst="rect">
+            <a:avLst/>
+          </a:prstGeom>
+          <a:noFill/>
+        </p:spPr>
+        <p:txBody>
+          <a:bodyPr wrap="square" lIns="73152" rIns="73152" tIns="36576" bIns="36576">
+            <a:spAutoFit/>
+          </a:bodyPr>
+          <a:lstStyle/>
+          <a:p>
+            <a:pPr algn="l">
+              <a:spcAft>
+                <a:spcPts val="0"/>
+              </a:spcAft>
+              <a:defRPr sz="1200" b="0">
+                <a:solidFill>
+                  <a:srgbClr val="2A8B5A"/>
+                </a:solidFill>
+                <a:latin typeface="Noto Sans CJK KR"/>
+              </a:defRPr>
+            </a:pPr>
+            <a:r>
+              <a:t>실행에서: 명령 뒤 terminal 또는 GUI에서 완료 조건이 충족됐는지 확인합니다.</a:t>
+            </a:r>
+          </a:p>
+        </p:txBody>
+      </p:sp>
+      <p:sp>
+        <p:nvSpPr>
+          <p:cNvPr id="18" name="TextBox 17"/>
+          <p:cNvSpPr txBox="1"/>
+          <p:nvPr/>
+        </p:nvSpPr>
+        <p:spPr>
+          <a:xfrm>
+            <a:off x="749808" y="6199632"/>
+            <a:ext cx="10698480" cy="182880"/>
+          </a:xfrm>
+          <a:prstGeom prst="rect">
+            <a:avLst/>
+          </a:prstGeom>
+          <a:noFill/>
+        </p:spPr>
+        <p:txBody>
+          <a:bodyPr wrap="square" lIns="73152" rIns="73152" tIns="36576" bIns="36576">
+            <a:spAutoFit/>
+          </a:bodyPr>
+          <a:lstStyle/>
+          <a:p>
+            <a:pPr algn="ctr">
+              <a:spcAft>
+                <a:spcPts val="0"/>
+              </a:spcAft>
+              <a:defRPr sz="1100" b="0">
+                <a:solidFill>
+                  <a:srgbClr val="5C6672"/>
+                </a:solidFill>
+                <a:latin typeface="Noto Sans CJK KR"/>
+              </a:defRPr>
+            </a:pPr>
+            <a:r>
+              <a:t>다음 실행 슬라이드에서는 이 명령을 직접 입력하고, 방금 말한 확인 결과가 보일 때까지 진행하지 않습니다.</a:t>
             </a:r>
           </a:p>
         </p:txBody>
@@ -7705,7 +8282,7 @@
               </a:defRPr>
             </a:pPr>
             <a:r>
-              <a:t>구현 뒤 실행 2/3: RobotModel과 TF를 먼저 확인한다</a:t>
+              <a:t>구현 뒤 실행 1/3: RViz를 설정 파일로 연다</a:t>
             </a:r>
           </a:p>
         </p:txBody>
@@ -7880,7 +8457,7 @@
               </a:defRPr>
             </a:pPr>
             <a:r>
-              <a:t>현재 단계 실행 2/3    |    현재 폴더 ~/ros2_curri/my_agv_ws    |    현재 터미널</a:t>
+              <a:t>현재 단계 실행 1/3    |    현재 폴더 ~/ros2_curri/my_agv_ws    |    터미널 1</a:t>
             </a:r>
           </a:p>
         </p:txBody>
@@ -7893,8 +8470,8 @@
         </p:nvSpPr>
         <p:spPr>
           <a:xfrm>
-            <a:off x="676656" y="1764792"/>
-            <a:ext cx="1828800" cy="347472"/>
+            <a:off x="676656" y="1719072"/>
+            <a:ext cx="1691640" cy="274320"/>
           </a:xfrm>
           <a:prstGeom prst="rect">
             <a:avLst/>
@@ -7911,7 +8488,7 @@
               <a:spcAft>
                 <a:spcPts val="0"/>
               </a:spcAft>
-              <a:defRPr sz="1800" b="1">
+              <a:defRPr sz="1700" b="1">
                 <a:solidFill>
                   <a:srgbClr val="225B9B"/>
                 </a:solidFill>
@@ -7919,7 +8496,7 @@
               </a:defRPr>
             </a:pPr>
             <a:r>
-              <a:t>왜 하는가</a:t>
+              <a:t>명령의 목적</a:t>
             </a:r>
           </a:p>
         </p:txBody>
@@ -7932,7 +8509,7 @@
         </p:nvSpPr>
         <p:spPr>
           <a:xfrm>
-            <a:off x="676656" y="2103120"/>
+            <a:off x="676656" y="2002536"/>
             <a:ext cx="10789920" cy="512064"/>
           </a:xfrm>
           <a:prstGeom prst="rect">
@@ -7950,7 +8527,7 @@
               <a:spcAft>
                 <a:spcPts val="0"/>
               </a:spcAft>
-              <a:defRPr sz="2000" b="0">
+              <a:defRPr sz="1800" b="0">
                 <a:solidFill>
                   <a:srgbClr val="122C4E"/>
                 </a:solidFill>
@@ -7958,21 +8535,60 @@
               </a:defRPr>
             </a:pPr>
             <a:r>
-              <a:t>모델과 frame이 맞아야 scan·image 위치도 맞는다.</a:t>
-            </a:r>
-          </a:p>
-        </p:txBody>
-      </p:sp>
-      <p:sp>
-        <p:nvSpPr>
-          <p:cNvPr id="9" name="Rounded Rectangle 8"/>
+              <a:t>같은 display 설정을 다음 센서 모듈에서도 재사용한다.</a:t>
+            </a:r>
+          </a:p>
+        </p:txBody>
+      </p:sp>
+      <p:sp>
+        <p:nvSpPr>
+          <p:cNvPr id="9" name="TextBox 8"/>
+          <p:cNvSpPr txBox="1"/>
+          <p:nvPr/>
+        </p:nvSpPr>
+        <p:spPr>
+          <a:xfrm>
+            <a:off x="676656" y="2816352"/>
+            <a:ext cx="10835640" cy="256032"/>
+          </a:xfrm>
+          <a:prstGeom prst="rect">
+            <a:avLst/>
+          </a:prstGeom>
+          <a:noFill/>
+        </p:spPr>
+        <p:txBody>
+          <a:bodyPr wrap="square" lIns="73152" rIns="73152" tIns="36576" bIns="36576">
+            <a:spAutoFit/>
+          </a:bodyPr>
+          <a:lstStyle/>
+          <a:p>
+            <a:pPr algn="ctr">
+              <a:spcAft>
+                <a:spcPts val="0"/>
+              </a:spcAft>
+              <a:defRPr sz="1600" b="1">
+                <a:solidFill>
+                  <a:srgbClr val="225B9B"/>
+                </a:solidFill>
+                <a:latin typeface="Noto Sans CJK KR"/>
+              </a:defRPr>
+            </a:pPr>
+            <a:r>
+              <a:t>터미널 1 — 아래 검은 블록은 명령만 복사합니다.</a:t>
+            </a:r>
+          </a:p>
+        </p:txBody>
+      </p:sp>
+      <p:sp>
+        <p:nvSpPr>
+          <p:cNvPr id="10" name="Rounded Rectangle 9"/>
           <p:cNvSpPr/>
           <p:nvPr/>
         </p:nvSpPr>
         <p:spPr>
           <a:xfrm>
-            <a:off x="676656" y="2871216"/>
-            <a:ext cx="10835640" cy="2331720"/>
+            <a:off x="676656" y="3154680"/>
+            <a:ext cx="10835640" cy="1938528"/>
           </a:xfrm>
           <a:prstGeom prst="roundRect">
             <a:avLst/>
@@ -8001,7 +8617,7 @@
           </a:fontRef>
         </p:style>
         <p:txBody>
-          <a:bodyPr rtlCol="0" anchor="ctr" wrap="square" lIns="73152" rIns="73152" tIns="36576" bIns="36576"/>
+          <a:bodyPr rtlCol="0" anchor="ctr" wrap="square" lIns="109728" rIns="109728" tIns="73152" bIns="73152"/>
           <a:lstStyle/>
           <a:p>
             <a:pPr algn="l">
@@ -8016,46 +8632,54 @@
               </a:defRPr>
             </a:pPr>
             <a:r>
-              <a:t>Fixed Frame: odom 또는 base_link</a:t>
-            </a:r>
-            <a:br/>
-            <a:r>
-              <a:t>Add → RobotModel → Description Topic: /robot_description</a:t>
-            </a:r>
-            <a:br/>
-            <a:r>
-              <a:t>Add → TF</a:t>
-            </a:r>
-          </a:p>
-        </p:txBody>
-      </p:sp>
-      <p:sp>
-        <p:nvSpPr>
-          <p:cNvPr id="10" name="TextBox 9"/>
-          <p:cNvSpPr txBox="1"/>
-          <p:nvPr/>
-        </p:nvSpPr>
-        <p:spPr>
-          <a:xfrm>
-            <a:off x="768096" y="5468112"/>
-            <a:ext cx="1143000" cy="256032"/>
-          </a:xfrm>
-          <a:prstGeom prst="rect">
-            <a:avLst/>
-          </a:prstGeom>
-          <a:noFill/>
-        </p:spPr>
-        <p:txBody>
-          <a:bodyPr wrap="square" lIns="73152" rIns="73152" tIns="36576" bIns="36576">
-            <a:spAutoFit/>
-          </a:bodyPr>
-          <a:lstStyle/>
+              <a:t>source ~/ros2_curri/my_agv_ws/install/setup.bash</a:t>
+            </a:r>
+          </a:p>
           <a:p>
             <a:pPr algn="l">
               <a:spcAft>
                 <a:spcPts val="0"/>
               </a:spcAft>
-              <a:defRPr sz="1800" b="1">
+              <a:defRPr sz="1600" b="0">
+                <a:solidFill>
+                  <a:srgbClr val="FFFFFF"/>
+                </a:solidFill>
+                <a:latin typeface="DejaVu Sans Mono"/>
+              </a:defRPr>
+            </a:pPr>
+            <a:r>
+              <a:t>rviz2 -d ~/ros2_curri/my_agv_ws/src/agv_description/rviz/agv.rviz</a:t>
+            </a:r>
+          </a:p>
+        </p:txBody>
+      </p:sp>
+      <p:sp>
+        <p:nvSpPr>
+          <p:cNvPr id="11" name="TextBox 10"/>
+          <p:cNvSpPr txBox="1"/>
+          <p:nvPr/>
+        </p:nvSpPr>
+        <p:spPr>
+          <a:xfrm>
+            <a:off x="768096" y="5276088"/>
+            <a:ext cx="10561320" cy="384048"/>
+          </a:xfrm>
+          <a:prstGeom prst="rect">
+            <a:avLst/>
+          </a:prstGeom>
+          <a:noFill/>
+        </p:spPr>
+        <p:txBody>
+          <a:bodyPr wrap="square" lIns="73152" rIns="73152" tIns="36576" bIns="36576">
+            <a:spAutoFit/>
+          </a:bodyPr>
+          <a:lstStyle/>
+          <a:p>
+            <a:pPr algn="ctr">
+              <a:spcAft>
+                <a:spcPts val="0"/>
+              </a:spcAft>
+              <a:defRPr sz="1500" b="1">
                 <a:solidFill>
                   <a:srgbClr val="2A8B5A"/>
                 </a:solidFill>
@@ -8063,38 +8687,38 @@
               </a:defRPr>
             </a:pPr>
             <a:r>
-              <a:t>확인</a:t>
-            </a:r>
-          </a:p>
-        </p:txBody>
-      </p:sp>
-      <p:sp>
-        <p:nvSpPr>
-          <p:cNvPr id="11" name="TextBox 10"/>
-          <p:cNvSpPr txBox="1"/>
-          <p:nvPr/>
-        </p:nvSpPr>
-        <p:spPr>
-          <a:xfrm>
-            <a:off x="768096" y="5742432"/>
-            <a:ext cx="10561320" cy="347472"/>
-          </a:xfrm>
-          <a:prstGeom prst="rect">
-            <a:avLst/>
-          </a:prstGeom>
-          <a:noFill/>
-        </p:spPr>
-        <p:txBody>
-          <a:bodyPr wrap="square" lIns="73152" rIns="73152" tIns="36576" bIns="36576">
-            <a:spAutoFit/>
-          </a:bodyPr>
-          <a:lstStyle/>
-          <a:p>
-            <a:pPr algn="l">
-              <a:spcAft>
-                <a:spcPts val="0"/>
-              </a:spcAft>
-              <a:defRPr sz="1800" b="0">
+              <a:t>터미널 1 역할: 터미널 1에서 이 명령만 그대로 복사해 실행합니다.</a:t>
+            </a:r>
+          </a:p>
+        </p:txBody>
+      </p:sp>
+      <p:sp>
+        <p:nvSpPr>
+          <p:cNvPr id="12" name="TextBox 11"/>
+          <p:cNvSpPr txBox="1"/>
+          <p:nvPr/>
+        </p:nvSpPr>
+        <p:spPr>
+          <a:xfrm>
+            <a:off x="768096" y="5916168"/>
+            <a:ext cx="10561320" cy="292608"/>
+          </a:xfrm>
+          <a:prstGeom prst="rect">
+            <a:avLst/>
+          </a:prstGeom>
+          <a:noFill/>
+        </p:spPr>
+        <p:txBody>
+          <a:bodyPr wrap="square" lIns="73152" rIns="73152" tIns="36576" bIns="36576">
+            <a:spAutoFit/>
+          </a:bodyPr>
+          <a:lstStyle/>
+          <a:p>
+            <a:pPr algn="ctr">
+              <a:spcAft>
+                <a:spcPts val="0"/>
+              </a:spcAft>
+              <a:defRPr sz="1500" b="1">
                 <a:solidFill>
                   <a:srgbClr val="122C4E"/>
                 </a:solidFill>
@@ -8102,7 +8726,7 @@
               </a:defRPr>
             </a:pPr>
             <a:r>
-              <a:t>출력에서 topic·frame·파일 이름 또는 성공 메시지를 찾고, 맞지 않으면 다음 파일로 가지 않습니다.</a:t>
+              <a:t>확인: 출력에서 topic·frame·파일 이름 또는 성공 메시지를 찾고, 맞지 않으면 다음 파일로 가지 않습니다.</a:t>
             </a:r>
           </a:p>
         </p:txBody>
@@ -8159,7 +8783,7 @@
               </a:defRPr>
             </a:pPr>
             <a:r>
-              <a:t>구현 뒤 실행 3/3: 센서 display를 추가한다</a:t>
+              <a:t>구현 뒤 실행 2/3: RobotModel과 TF를 먼저 확인한다</a:t>
             </a:r>
           </a:p>
         </p:txBody>
@@ -8334,7 +8958,7 @@
               </a:defRPr>
             </a:pPr>
             <a:r>
-              <a:t>현재 단계 실행 3/3    |    현재 폴더 ~/ros2_curri/my_agv_ws    |    현재 터미널</a:t>
+              <a:t>현재 단계 실행 2/3    |    현재 폴더 RViz2 화면    |    GUI 조작</a:t>
             </a:r>
           </a:p>
         </p:txBody>
@@ -8347,8 +8971,8 @@
         </p:nvSpPr>
         <p:spPr>
           <a:xfrm>
-            <a:off x="676656" y="1764792"/>
-            <a:ext cx="1828800" cy="347472"/>
+            <a:off x="676656" y="1719072"/>
+            <a:ext cx="1691640" cy="274320"/>
           </a:xfrm>
           <a:prstGeom prst="rect">
             <a:avLst/>
@@ -8365,7 +8989,7 @@
               <a:spcAft>
                 <a:spcPts val="0"/>
               </a:spcAft>
-              <a:defRPr sz="1800" b="1">
+              <a:defRPr sz="1700" b="1">
                 <a:solidFill>
                   <a:srgbClr val="225B9B"/>
                 </a:solidFill>
@@ -8373,7 +8997,7 @@
               </a:defRPr>
             </a:pPr>
             <a:r>
-              <a:t>왜 하는가</a:t>
+              <a:t>이 화면에서 하는 일</a:t>
             </a:r>
           </a:p>
         </p:txBody>
@@ -8386,7 +9010,7 @@
         </p:nvSpPr>
         <p:spPr>
           <a:xfrm>
-            <a:off x="676656" y="2103120"/>
+            <a:off x="676656" y="2002536"/>
             <a:ext cx="10789920" cy="512064"/>
           </a:xfrm>
           <a:prstGeom prst="rect">
@@ -8404,7 +9028,7 @@
               <a:spcAft>
                 <a:spcPts val="0"/>
               </a:spcAft>
-              <a:defRPr sz="2000" b="0">
+              <a:defRPr sz="1800" b="0">
                 <a:solidFill>
                   <a:srgbClr val="122C4E"/>
                 </a:solidFill>
@@ -8412,31 +9036,70 @@
               </a:defRPr>
             </a:pPr>
             <a:r>
-              <a:t>각 display는 topic과 message frame_id를 TF로 변환한다.</a:t>
-            </a:r>
-          </a:p>
-        </p:txBody>
-      </p:sp>
-      <p:sp>
-        <p:nvSpPr>
-          <p:cNvPr id="9" name="Rounded Rectangle 8"/>
+              <a:t>모델과 frame이 맞아야 scan·image 위치도 맞는다.</a:t>
+            </a:r>
+          </a:p>
+        </p:txBody>
+      </p:sp>
+      <p:sp>
+        <p:nvSpPr>
+          <p:cNvPr id="9" name="TextBox 8"/>
+          <p:cNvSpPr txBox="1"/>
+          <p:nvPr/>
+        </p:nvSpPr>
+        <p:spPr>
+          <a:xfrm>
+            <a:off x="676656" y="2816352"/>
+            <a:ext cx="10835640" cy="256032"/>
+          </a:xfrm>
+          <a:prstGeom prst="rect">
+            <a:avLst/>
+          </a:prstGeom>
+          <a:noFill/>
+        </p:spPr>
+        <p:txBody>
+          <a:bodyPr wrap="square" lIns="73152" rIns="73152" tIns="36576" bIns="36576">
+            <a:spAutoFit/>
+          </a:bodyPr>
+          <a:lstStyle/>
+          <a:p>
+            <a:pPr algn="ctr">
+              <a:spcAft>
+                <a:spcPts val="0"/>
+              </a:spcAft>
+              <a:defRPr sz="1600" b="1">
+                <a:solidFill>
+                  <a:srgbClr val="225B9B"/>
+                </a:solidFill>
+                <a:latin typeface="Noto Sans CJK KR"/>
+              </a:defRPr>
+            </a:pPr>
+            <a:r>
+              <a:t>RViz 클릭 순서 — 아래 내용은 터미널 명령이 아니라 화면 조작 안내입니다.</a:t>
+            </a:r>
+          </a:p>
+        </p:txBody>
+      </p:sp>
+      <p:sp>
+        <p:nvSpPr>
+          <p:cNvPr id="10" name="Rounded Rectangle 9"/>
           <p:cNvSpPr/>
           <p:nvPr/>
         </p:nvSpPr>
         <p:spPr>
           <a:xfrm>
-            <a:off x="676656" y="2871216"/>
-            <a:ext cx="10835640" cy="2331720"/>
+            <a:off x="676656" y="3163824"/>
+            <a:ext cx="10835640" cy="1572768"/>
           </a:xfrm>
           <a:prstGeom prst="roundRect">
             <a:avLst/>
           </a:prstGeom>
           <a:solidFill>
-            <a:srgbClr val="1D232D"/>
+            <a:srgbClr val="F4F7FB"/>
           </a:solidFill>
           <a:ln>
             <a:solidFill>
-              <a:srgbClr val="1D232D"/>
+              <a:srgbClr val="225B9B"/>
             </a:solidFill>
           </a:ln>
         </p:spPr>
@@ -8455,61 +9118,85 @@
           </a:fontRef>
         </p:style>
         <p:txBody>
-          <a:bodyPr rtlCol="0" anchor="ctr" wrap="square" lIns="73152" rIns="73152" tIns="36576" bIns="36576"/>
+          <a:bodyPr rtlCol="0" anchor="ctr" wrap="square" lIns="109728" rIns="109728" tIns="73152" bIns="73152"/>
           <a:lstStyle/>
           <a:p>
             <a:pPr algn="l">
               <a:spcAft>
                 <a:spcPts val="0"/>
               </a:spcAft>
-              <a:defRPr sz="1600" b="0">
-                <a:solidFill>
-                  <a:srgbClr val="FFFFFF"/>
-                </a:solidFill>
-                <a:latin typeface="DejaVu Sans Mono"/>
-              </a:defRPr>
-            </a:pPr>
-            <a:r>
-              <a:t>Add → LaserScan → Topic: /scan</a:t>
-            </a:r>
-            <a:br/>
-            <a:r>
-              <a:t>Add → Odometry → Topic: /odom</a:t>
-            </a:r>
-            <a:br/>
-            <a:r>
-              <a:t>File → Save Config As → agv.rviz</a:t>
-            </a:r>
-          </a:p>
-        </p:txBody>
-      </p:sp>
-      <p:sp>
-        <p:nvSpPr>
-          <p:cNvPr id="10" name="TextBox 9"/>
-          <p:cNvSpPr txBox="1"/>
-          <p:nvPr/>
-        </p:nvSpPr>
-        <p:spPr>
-          <a:xfrm>
-            <a:off x="768096" y="5468112"/>
-            <a:ext cx="1143000" cy="256032"/>
-          </a:xfrm>
-          <a:prstGeom prst="rect">
-            <a:avLst/>
-          </a:prstGeom>
-          <a:noFill/>
-        </p:spPr>
-        <p:txBody>
-          <a:bodyPr wrap="square" lIns="73152" rIns="73152" tIns="36576" bIns="36576">
-            <a:spAutoFit/>
-          </a:bodyPr>
-          <a:lstStyle/>
+              <a:defRPr sz="1800" b="0">
+                <a:solidFill>
+                  <a:srgbClr val="122C4E"/>
+                </a:solidFill>
+                <a:latin typeface="Aptos"/>
+              </a:defRPr>
+            </a:pPr>
+            <a:r>
+              <a:t>Fixed Frame: odom 또는 base_link</a:t>
+            </a:r>
+          </a:p>
           <a:p>
             <a:pPr algn="l">
               <a:spcAft>
                 <a:spcPts val="0"/>
               </a:spcAft>
-              <a:defRPr sz="1800" b="1">
+              <a:defRPr sz="1800" b="0">
+                <a:solidFill>
+                  <a:srgbClr val="122C4E"/>
+                </a:solidFill>
+                <a:latin typeface="Aptos"/>
+              </a:defRPr>
+            </a:pPr>
+            <a:r>
+              <a:t>Add → RobotModel → Description Topic: /robot_description</a:t>
+            </a:r>
+          </a:p>
+          <a:p>
+            <a:pPr algn="l">
+              <a:spcAft>
+                <a:spcPts val="0"/>
+              </a:spcAft>
+              <a:defRPr sz="1800" b="0">
+                <a:solidFill>
+                  <a:srgbClr val="122C4E"/>
+                </a:solidFill>
+                <a:latin typeface="Aptos"/>
+              </a:defRPr>
+            </a:pPr>
+            <a:r>
+              <a:t>Add → TF</a:t>
+            </a:r>
+          </a:p>
+        </p:txBody>
+      </p:sp>
+      <p:sp>
+        <p:nvSpPr>
+          <p:cNvPr id="11" name="TextBox 10"/>
+          <p:cNvSpPr txBox="1"/>
+          <p:nvPr/>
+        </p:nvSpPr>
+        <p:spPr>
+          <a:xfrm>
+            <a:off x="768096" y="5065776"/>
+            <a:ext cx="10561320" cy="384048"/>
+          </a:xfrm>
+          <a:prstGeom prst="rect">
+            <a:avLst/>
+          </a:prstGeom>
+          <a:noFill/>
+        </p:spPr>
+        <p:txBody>
+          <a:bodyPr wrap="square" lIns="73152" rIns="73152" tIns="36576" bIns="36576">
+            <a:spAutoFit/>
+          </a:bodyPr>
+          <a:lstStyle/>
+          <a:p>
+            <a:pPr algn="ctr">
+              <a:spcAft>
+                <a:spcPts val="0"/>
+              </a:spcAft>
+              <a:defRPr sz="1500" b="1">
                 <a:solidFill>
                   <a:srgbClr val="2A8B5A"/>
                 </a:solidFill>
@@ -8517,38 +9204,38 @@
               </a:defRPr>
             </a:pPr>
             <a:r>
-              <a:t>확인</a:t>
-            </a:r>
-          </a:p>
-        </p:txBody>
-      </p:sp>
-      <p:sp>
-        <p:nvSpPr>
-          <p:cNvPr id="11" name="TextBox 10"/>
-          <p:cNvSpPr txBox="1"/>
-          <p:nvPr/>
-        </p:nvSpPr>
-        <p:spPr>
-          <a:xfrm>
-            <a:off x="768096" y="5742432"/>
-            <a:ext cx="10561320" cy="347472"/>
-          </a:xfrm>
-          <a:prstGeom prst="rect">
-            <a:avLst/>
-          </a:prstGeom>
-          <a:noFill/>
-        </p:spPr>
-        <p:txBody>
-          <a:bodyPr wrap="square" lIns="73152" rIns="73152" tIns="36576" bIns="36576">
-            <a:spAutoFit/>
-          </a:bodyPr>
-          <a:lstStyle/>
-          <a:p>
-            <a:pPr algn="l">
-              <a:spcAft>
-                <a:spcPts val="0"/>
-              </a:spcAft>
-              <a:defRPr sz="1800" b="0">
+              <a:t>각 줄을 위에서 아래로 클릭한 뒤, 왼쪽 Displays 목록에 항목이 추가됐는지 확인합니다.</a:t>
+            </a:r>
+          </a:p>
+        </p:txBody>
+      </p:sp>
+      <p:sp>
+        <p:nvSpPr>
+          <p:cNvPr id="12" name="TextBox 11"/>
+          <p:cNvSpPr txBox="1"/>
+          <p:nvPr/>
+        </p:nvSpPr>
+        <p:spPr>
+          <a:xfrm>
+            <a:off x="768096" y="5916168"/>
+            <a:ext cx="10561320" cy="292608"/>
+          </a:xfrm>
+          <a:prstGeom prst="rect">
+            <a:avLst/>
+          </a:prstGeom>
+          <a:noFill/>
+        </p:spPr>
+        <p:txBody>
+          <a:bodyPr wrap="square" lIns="73152" rIns="73152" tIns="36576" bIns="36576">
+            <a:spAutoFit/>
+          </a:bodyPr>
+          <a:lstStyle/>
+          <a:p>
+            <a:pPr algn="ctr">
+              <a:spcAft>
+                <a:spcPts val="0"/>
+              </a:spcAft>
+              <a:defRPr sz="1500" b="1">
                 <a:solidFill>
                   <a:srgbClr val="122C4E"/>
                 </a:solidFill>
@@ -8556,7 +9243,7 @@
               </a:defRPr>
             </a:pPr>
             <a:r>
-              <a:t>출력에서 topic·frame·파일 이름 또는 성공 메시지를 찾고, 맞지 않으면 다음 파일로 가지 않습니다.</a:t>
+              <a:t>확인: 출력에서 topic·frame·파일 이름 또는 성공 메시지를 찾고, 맞지 않으면 다음 파일로 가지 않습니다.</a:t>
             </a:r>
           </a:p>
         </p:txBody>
@@ -8613,7 +9300,7 @@
               </a:defRPr>
             </a:pPr>
             <a:r>
-              <a:t>build → source → run 순서로 실행한다</a:t>
+              <a:t>구현 뒤 실행 3/3: 센서 display를 추가한다</a:t>
             </a:r>
           </a:p>
         </p:txBody>
@@ -8652,7 +9339,7 @@
               </a:defRPr>
             </a:pPr>
             <a:r>
-              <a:t>새 파일 또는 수정 파일은 build와 source 뒤에만 실행 이름·설정에 반영됩니다.</a:t>
+              <a:t>방금 직접 만든 파일을 실행·검사하며 다음 파일로 넘어갈 기준을 만듭니다.</a:t>
             </a:r>
           </a:p>
         </p:txBody>
@@ -8788,31 +9475,148 @@
               </a:defRPr>
             </a:pPr>
             <a:r>
-              <a:t>현재 단계 실행    |    현재 폴더 ~/ros2_curri/my_agv_ws    |    현재 터미널</a:t>
-            </a:r>
-          </a:p>
-        </p:txBody>
-      </p:sp>
-      <p:sp>
-        <p:nvSpPr>
-          <p:cNvPr id="7" name="Rounded Rectangle 6"/>
+              <a:t>현재 단계 실행 3/3    |    현재 폴더 RViz2 화면    |    GUI 조작</a:t>
+            </a:r>
+          </a:p>
+        </p:txBody>
+      </p:sp>
+      <p:sp>
+        <p:nvSpPr>
+          <p:cNvPr id="7" name="TextBox 6"/>
+          <p:cNvSpPr txBox="1"/>
+          <p:nvPr/>
+        </p:nvSpPr>
+        <p:spPr>
+          <a:xfrm>
+            <a:off x="676656" y="1719072"/>
+            <a:ext cx="1691640" cy="274320"/>
+          </a:xfrm>
+          <a:prstGeom prst="rect">
+            <a:avLst/>
+          </a:prstGeom>
+          <a:noFill/>
+        </p:spPr>
+        <p:txBody>
+          <a:bodyPr wrap="square" lIns="73152" rIns="73152" tIns="36576" bIns="36576">
+            <a:spAutoFit/>
+          </a:bodyPr>
+          <a:lstStyle/>
+          <a:p>
+            <a:pPr algn="l">
+              <a:spcAft>
+                <a:spcPts val="0"/>
+              </a:spcAft>
+              <a:defRPr sz="1700" b="1">
+                <a:solidFill>
+                  <a:srgbClr val="225B9B"/>
+                </a:solidFill>
+                <a:latin typeface="Noto Sans CJK KR"/>
+              </a:defRPr>
+            </a:pPr>
+            <a:r>
+              <a:t>이 화면에서 하는 일</a:t>
+            </a:r>
+          </a:p>
+        </p:txBody>
+      </p:sp>
+      <p:sp>
+        <p:nvSpPr>
+          <p:cNvPr id="8" name="TextBox 7"/>
+          <p:cNvSpPr txBox="1"/>
+          <p:nvPr/>
+        </p:nvSpPr>
+        <p:spPr>
+          <a:xfrm>
+            <a:off x="676656" y="2002536"/>
+            <a:ext cx="10789920" cy="512064"/>
+          </a:xfrm>
+          <a:prstGeom prst="rect">
+            <a:avLst/>
+          </a:prstGeom>
+          <a:noFill/>
+        </p:spPr>
+        <p:txBody>
+          <a:bodyPr wrap="square" lIns="73152" rIns="73152" tIns="36576" bIns="36576">
+            <a:spAutoFit/>
+          </a:bodyPr>
+          <a:lstStyle/>
+          <a:p>
+            <a:pPr algn="l">
+              <a:spcAft>
+                <a:spcPts val="0"/>
+              </a:spcAft>
+              <a:defRPr sz="1800" b="0">
+                <a:solidFill>
+                  <a:srgbClr val="122C4E"/>
+                </a:solidFill>
+                <a:latin typeface="Noto Sans CJK KR"/>
+              </a:defRPr>
+            </a:pPr>
+            <a:r>
+              <a:t>각 display는 topic과 message frame_id를 TF로 변환한다.</a:t>
+            </a:r>
+          </a:p>
+        </p:txBody>
+      </p:sp>
+      <p:sp>
+        <p:nvSpPr>
+          <p:cNvPr id="9" name="TextBox 8"/>
+          <p:cNvSpPr txBox="1"/>
+          <p:nvPr/>
+        </p:nvSpPr>
+        <p:spPr>
+          <a:xfrm>
+            <a:off x="676656" y="2816352"/>
+            <a:ext cx="10835640" cy="256032"/>
+          </a:xfrm>
+          <a:prstGeom prst="rect">
+            <a:avLst/>
+          </a:prstGeom>
+          <a:noFill/>
+        </p:spPr>
+        <p:txBody>
+          <a:bodyPr wrap="square" lIns="73152" rIns="73152" tIns="36576" bIns="36576">
+            <a:spAutoFit/>
+          </a:bodyPr>
+          <a:lstStyle/>
+          <a:p>
+            <a:pPr algn="ctr">
+              <a:spcAft>
+                <a:spcPts val="0"/>
+              </a:spcAft>
+              <a:defRPr sz="1600" b="1">
+                <a:solidFill>
+                  <a:srgbClr val="225B9B"/>
+                </a:solidFill>
+                <a:latin typeface="Noto Sans CJK KR"/>
+              </a:defRPr>
+            </a:pPr>
+            <a:r>
+              <a:t>RViz 클릭 순서 — 아래 내용은 터미널 명령이 아니라 화면 조작 안내입니다.</a:t>
+            </a:r>
+          </a:p>
+        </p:txBody>
+      </p:sp>
+      <p:sp>
+        <p:nvSpPr>
+          <p:cNvPr id="10" name="Rounded Rectangle 9"/>
           <p:cNvSpPr/>
           <p:nvPr/>
         </p:nvSpPr>
         <p:spPr>
           <a:xfrm>
-            <a:off x="658368" y="1700784"/>
-            <a:ext cx="10972800" cy="3182112"/>
+            <a:off x="676656" y="3163824"/>
+            <a:ext cx="10835640" cy="1572768"/>
           </a:xfrm>
           <a:prstGeom prst="roundRect">
             <a:avLst/>
           </a:prstGeom>
           <a:solidFill>
-            <a:srgbClr val="1D232D"/>
+            <a:srgbClr val="F4F7FB"/>
           </a:solidFill>
           <a:ln>
             <a:solidFill>
-              <a:srgbClr val="1D232D"/>
+              <a:srgbClr val="225B9B"/>
             </a:solidFill>
           </a:ln>
         </p:spPr>
@@ -8831,57 +9635,85 @@
           </a:fontRef>
         </p:style>
         <p:txBody>
-          <a:bodyPr rtlCol="0" anchor="ctr" wrap="square" lIns="73152" rIns="73152" tIns="36576" bIns="36576"/>
+          <a:bodyPr rtlCol="0" anchor="ctr" wrap="square" lIns="109728" rIns="109728" tIns="73152" bIns="73152"/>
           <a:lstStyle/>
           <a:p>
             <a:pPr algn="l">
               <a:spcAft>
                 <a:spcPts val="0"/>
               </a:spcAft>
-              <a:defRPr sz="1600" b="0">
-                <a:solidFill>
-                  <a:srgbClr val="FFFFFF"/>
-                </a:solidFill>
-                <a:latin typeface="DejaVu Sans Mono"/>
-              </a:defRPr>
-            </a:pPr>
-            <a:r>
-              <a:t>source ~/ros2_curri/my_agv_ws/install/setup.bash</a:t>
-            </a:r>
-            <a:br/>
-            <a:r>
-              <a:t>ros2 launch agv_bringup agv_sim.launch.py</a:t>
-            </a:r>
-          </a:p>
-        </p:txBody>
-      </p:sp>
-      <p:sp>
-        <p:nvSpPr>
-          <p:cNvPr id="8" name="TextBox 7"/>
-          <p:cNvSpPr txBox="1"/>
-          <p:nvPr/>
-        </p:nvSpPr>
-        <p:spPr>
-          <a:xfrm>
-            <a:off x="786384" y="5239512"/>
-            <a:ext cx="1261872" cy="237744"/>
-          </a:xfrm>
-          <a:prstGeom prst="rect">
-            <a:avLst/>
-          </a:prstGeom>
-          <a:noFill/>
-        </p:spPr>
-        <p:txBody>
-          <a:bodyPr wrap="square" lIns="73152" rIns="73152" tIns="36576" bIns="36576">
-            <a:spAutoFit/>
-          </a:bodyPr>
-          <a:lstStyle/>
+              <a:defRPr sz="1800" b="0">
+                <a:solidFill>
+                  <a:srgbClr val="122C4E"/>
+                </a:solidFill>
+                <a:latin typeface="Aptos"/>
+              </a:defRPr>
+            </a:pPr>
+            <a:r>
+              <a:t>Add → LaserScan → Topic: /scan</a:t>
+            </a:r>
+          </a:p>
           <a:p>
             <a:pPr algn="l">
               <a:spcAft>
                 <a:spcPts val="0"/>
               </a:spcAft>
-              <a:defRPr sz="1800" b="1">
+              <a:defRPr sz="1800" b="0">
+                <a:solidFill>
+                  <a:srgbClr val="122C4E"/>
+                </a:solidFill>
+                <a:latin typeface="Aptos"/>
+              </a:defRPr>
+            </a:pPr>
+            <a:r>
+              <a:t>Add → Odometry → Topic: /odom</a:t>
+            </a:r>
+          </a:p>
+          <a:p>
+            <a:pPr algn="l">
+              <a:spcAft>
+                <a:spcPts val="0"/>
+              </a:spcAft>
+              <a:defRPr sz="1800" b="0">
+                <a:solidFill>
+                  <a:srgbClr val="122C4E"/>
+                </a:solidFill>
+                <a:latin typeface="Aptos"/>
+              </a:defRPr>
+            </a:pPr>
+            <a:r>
+              <a:t>File → Save Config As → agv.rviz</a:t>
+            </a:r>
+          </a:p>
+        </p:txBody>
+      </p:sp>
+      <p:sp>
+        <p:nvSpPr>
+          <p:cNvPr id="11" name="TextBox 10"/>
+          <p:cNvSpPr txBox="1"/>
+          <p:nvPr/>
+        </p:nvSpPr>
+        <p:spPr>
+          <a:xfrm>
+            <a:off x="768096" y="5065776"/>
+            <a:ext cx="10561320" cy="384048"/>
+          </a:xfrm>
+          <a:prstGeom prst="rect">
+            <a:avLst/>
+          </a:prstGeom>
+          <a:noFill/>
+        </p:spPr>
+        <p:txBody>
+          <a:bodyPr wrap="square" lIns="73152" rIns="73152" tIns="36576" bIns="36576">
+            <a:spAutoFit/>
+          </a:bodyPr>
+          <a:lstStyle/>
+          <a:p>
+            <a:pPr algn="ctr">
+              <a:spcAft>
+                <a:spcPts val="0"/>
+              </a:spcAft>
+              <a:defRPr sz="1500" b="1">
                 <a:solidFill>
                   <a:srgbClr val="2A8B5A"/>
                 </a:solidFill>
@@ -8889,38 +9721,38 @@
               </a:defRPr>
             </a:pPr>
             <a:r>
-              <a:t>확인 기준</a:t>
-            </a:r>
-          </a:p>
-        </p:txBody>
-      </p:sp>
-      <p:sp>
-        <p:nvSpPr>
-          <p:cNvPr id="9" name="TextBox 8"/>
-          <p:cNvSpPr txBox="1"/>
-          <p:nvPr/>
-        </p:nvSpPr>
-        <p:spPr>
-          <a:xfrm>
-            <a:off x="786384" y="5532120"/>
-            <a:ext cx="10469880" cy="420624"/>
-          </a:xfrm>
-          <a:prstGeom prst="rect">
-            <a:avLst/>
-          </a:prstGeom>
-          <a:noFill/>
-        </p:spPr>
-        <p:txBody>
-          <a:bodyPr wrap="square" lIns="73152" rIns="73152" tIns="36576" bIns="36576">
-            <a:spAutoFit/>
-          </a:bodyPr>
-          <a:lstStyle/>
-          <a:p>
-            <a:pPr algn="l">
-              <a:spcAft>
-                <a:spcPts val="0"/>
-              </a:spcAft>
-              <a:defRPr sz="1800" b="0">
+              <a:t>각 줄을 위에서 아래로 클릭한 뒤, 왼쪽 Displays 목록에 항목이 추가됐는지 확인합니다.</a:t>
+            </a:r>
+          </a:p>
+        </p:txBody>
+      </p:sp>
+      <p:sp>
+        <p:nvSpPr>
+          <p:cNvPr id="12" name="TextBox 11"/>
+          <p:cNvSpPr txBox="1"/>
+          <p:nvPr/>
+        </p:nvSpPr>
+        <p:spPr>
+          <a:xfrm>
+            <a:off x="768096" y="5916168"/>
+            <a:ext cx="10561320" cy="292608"/>
+          </a:xfrm>
+          <a:prstGeom prst="rect">
+            <a:avLst/>
+          </a:prstGeom>
+          <a:noFill/>
+        </p:spPr>
+        <p:txBody>
+          <a:bodyPr wrap="square" lIns="73152" rIns="73152" tIns="36576" bIns="36576">
+            <a:spAutoFit/>
+          </a:bodyPr>
+          <a:lstStyle/>
+          <a:p>
+            <a:pPr algn="ctr">
+              <a:spcAft>
+                <a:spcPts val="0"/>
+              </a:spcAft>
+              <a:defRPr sz="1500" b="1">
                 <a:solidFill>
                   <a:srgbClr val="122C4E"/>
                 </a:solidFill>
@@ -8928,7 +9760,7 @@
               </a:defRPr>
             </a:pPr>
             <a:r>
-              <a:t>agv.rviz에 RobotModel·TF·LaserScan·Odometry 설정을 저장하고 실제 화면을 확인한다.</a:t>
+              <a:t>확인: 출력에서 topic·frame·파일 이름 또는 성공 메시지를 찾고, 맞지 않으면 다음 파일로 가지 않습니다.</a:t>
             </a:r>
           </a:p>
         </p:txBody>
@@ -8985,7 +9817,7 @@
               </a:defRPr>
             </a:pPr>
             <a:r>
-              <a:t>정상 결과: 실제 환경에서 확인한 출력</a:t>
+              <a:t>build → source → run 순서로 실행한다</a:t>
             </a:r>
           </a:p>
         </p:txBody>
@@ -9024,7 +9856,7 @@
               </a:defRPr>
             </a:pPr>
             <a:r>
-              <a:t>실제 ROS 2 환경의 파일·패키지·구성 검증 로그</a:t>
+              <a:t>새 파일 또는 수정 파일은 build와 source 뒤에만 실행 이름·설정에 반영됩니다.</a:t>
             </a:r>
           </a:p>
         </p:txBody>
@@ -9107,30 +9939,64 @@
           </a:p>
         </p:txBody>
       </p:sp>
-      <p:pic>
-        <p:nvPicPr>
-          <p:cNvPr id="6" name="Picture 5" descr="validation_terminal.png"/>
-          <p:cNvPicPr>
-            <a:picLocks noChangeAspect="1"/>
-          </p:cNvPicPr>
-          <p:nvPr/>
-        </p:nvPicPr>
-        <p:blipFill>
-          <a:blip r:embed="rId2"/>
-          <a:stretch>
-            <a:fillRect/>
-          </a:stretch>
-        </p:blipFill>
-        <p:spPr>
-          <a:xfrm>
-            <a:off x="790956" y="1884338"/>
-            <a:ext cx="10607040" cy="3738546"/>
-          </a:xfrm>
-          <a:prstGeom prst="rect">
-            <a:avLst/>
-          </a:prstGeom>
-        </p:spPr>
-      </p:pic>
+      <p:sp>
+        <p:nvSpPr>
+          <p:cNvPr id="6" name="Rectangle 5"/>
+          <p:cNvSpPr/>
+          <p:nvPr/>
+        </p:nvSpPr>
+        <p:spPr>
+          <a:xfrm>
+            <a:off x="566928" y="1188720"/>
+            <a:ext cx="11064240" cy="347472"/>
+          </a:xfrm>
+          <a:prstGeom prst="rect">
+            <a:avLst/>
+          </a:prstGeom>
+          <a:solidFill>
+            <a:srgbClr val="F4F7FB"/>
+          </a:solidFill>
+          <a:ln>
+            <a:solidFill>
+              <a:srgbClr val="F4F7FB"/>
+            </a:solidFill>
+          </a:ln>
+        </p:spPr>
+        <p:style>
+          <a:lnRef idx="1">
+            <a:schemeClr val="accent1"/>
+          </a:lnRef>
+          <a:fillRef idx="3">
+            <a:schemeClr val="accent1"/>
+          </a:fillRef>
+          <a:effectRef idx="2">
+            <a:schemeClr val="accent1"/>
+          </a:effectRef>
+          <a:fontRef idx="minor">
+            <a:schemeClr val="lt1"/>
+          </a:fontRef>
+        </p:style>
+        <p:txBody>
+          <a:bodyPr rtlCol="0" anchor="ctr" wrap="square" lIns="73152" rIns="73152" tIns="36576" bIns="36576"/>
+          <a:lstStyle/>
+          <a:p>
+            <a:pPr algn="l">
+              <a:spcAft>
+                <a:spcPts val="0"/>
+              </a:spcAft>
+              <a:defRPr sz="1300" b="1">
+                <a:solidFill>
+                  <a:srgbClr val="122C4E"/>
+                </a:solidFill>
+                <a:latin typeface="Noto Sans CJK KR"/>
+              </a:defRPr>
+            </a:pPr>
+            <a:r>
+              <a:t>현재 단계 실행    |    현재 폴더 ~/ros2_curri/my_agv_ws    |    터미널 1</a:t>
+            </a:r>
+          </a:p>
+        </p:txBody>
+      </p:sp>
       <p:sp>
         <p:nvSpPr>
           <p:cNvPr id="7" name="TextBox 6"/>
@@ -9139,8 +10005,86 @@
         </p:nvSpPr>
         <p:spPr>
           <a:xfrm>
-            <a:off x="777240" y="6144768"/>
-            <a:ext cx="10607040" cy="310896"/>
+            <a:off x="676656" y="1719072"/>
+            <a:ext cx="1691640" cy="274320"/>
+          </a:xfrm>
+          <a:prstGeom prst="rect">
+            <a:avLst/>
+          </a:prstGeom>
+          <a:noFill/>
+        </p:spPr>
+        <p:txBody>
+          <a:bodyPr wrap="square" lIns="73152" rIns="73152" tIns="36576" bIns="36576">
+            <a:spAutoFit/>
+          </a:bodyPr>
+          <a:lstStyle/>
+          <a:p>
+            <a:pPr algn="l">
+              <a:spcAft>
+                <a:spcPts val="0"/>
+              </a:spcAft>
+              <a:defRPr sz="1700" b="1">
+                <a:solidFill>
+                  <a:srgbClr val="225B9B"/>
+                </a:solidFill>
+                <a:latin typeface="Noto Sans CJK KR"/>
+              </a:defRPr>
+            </a:pPr>
+            <a:r>
+              <a:t>명령의 목적</a:t>
+            </a:r>
+          </a:p>
+        </p:txBody>
+      </p:sp>
+      <p:sp>
+        <p:nvSpPr>
+          <p:cNvPr id="8" name="TextBox 7"/>
+          <p:cNvSpPr txBox="1"/>
+          <p:nvPr/>
+        </p:nvSpPr>
+        <p:spPr>
+          <a:xfrm>
+            <a:off x="676656" y="2002536"/>
+            <a:ext cx="10789920" cy="512064"/>
+          </a:xfrm>
+          <a:prstGeom prst="rect">
+            <a:avLst/>
+          </a:prstGeom>
+          <a:noFill/>
+        </p:spPr>
+        <p:txBody>
+          <a:bodyPr wrap="square" lIns="73152" rIns="73152" tIns="36576" bIns="36576">
+            <a:spAutoFit/>
+          </a:bodyPr>
+          <a:lstStyle/>
+          <a:p>
+            <a:pPr algn="l">
+              <a:spcAft>
+                <a:spcPts val="0"/>
+              </a:spcAft>
+              <a:defRPr sz="1800" b="0">
+                <a:solidFill>
+                  <a:srgbClr val="122C4E"/>
+                </a:solidFill>
+                <a:latin typeface="Noto Sans CJK KR"/>
+              </a:defRPr>
+            </a:pPr>
+            <a:r>
+              <a:t>명령 순서를 바꾸지 않습니다. build가 끝난 뒤 source하고, 마지막 명령으로 node·Gazebo·RViz를 실행합니다.</a:t>
+            </a:r>
+          </a:p>
+        </p:txBody>
+      </p:sp>
+      <p:sp>
+        <p:nvSpPr>
+          <p:cNvPr id="9" name="TextBox 8"/>
+          <p:cNvSpPr txBox="1"/>
+          <p:nvPr/>
+        </p:nvSpPr>
+        <p:spPr>
+          <a:xfrm>
+            <a:off x="676656" y="2816352"/>
+            <a:ext cx="10835640" cy="256032"/>
           </a:xfrm>
           <a:prstGeom prst="rect">
             <a:avLst/>
@@ -9157,7 +10101,120 @@
               <a:spcAft>
                 <a:spcPts val="0"/>
               </a:spcAft>
-              <a:defRPr sz="1100" b="1">
+              <a:defRPr sz="1600" b="1">
+                <a:solidFill>
+                  <a:srgbClr val="225B9B"/>
+                </a:solidFill>
+                <a:latin typeface="Noto Sans CJK KR"/>
+              </a:defRPr>
+            </a:pPr>
+            <a:r>
+              <a:t>터미널 1 — 아래 검은 블록은 명령만 복사합니다.</a:t>
+            </a:r>
+          </a:p>
+        </p:txBody>
+      </p:sp>
+      <p:sp>
+        <p:nvSpPr>
+          <p:cNvPr id="10" name="Rounded Rectangle 9"/>
+          <p:cNvSpPr/>
+          <p:nvPr/>
+        </p:nvSpPr>
+        <p:spPr>
+          <a:xfrm>
+            <a:off x="676656" y="3154680"/>
+            <a:ext cx="10835640" cy="1938528"/>
+          </a:xfrm>
+          <a:prstGeom prst="roundRect">
+            <a:avLst/>
+          </a:prstGeom>
+          <a:solidFill>
+            <a:srgbClr val="1D232D"/>
+          </a:solidFill>
+          <a:ln>
+            <a:solidFill>
+              <a:srgbClr val="1D232D"/>
+            </a:solidFill>
+          </a:ln>
+        </p:spPr>
+        <p:style>
+          <a:lnRef idx="1">
+            <a:schemeClr val="accent1"/>
+          </a:lnRef>
+          <a:fillRef idx="3">
+            <a:schemeClr val="accent1"/>
+          </a:fillRef>
+          <a:effectRef idx="2">
+            <a:schemeClr val="accent1"/>
+          </a:effectRef>
+          <a:fontRef idx="minor">
+            <a:schemeClr val="lt1"/>
+          </a:fontRef>
+        </p:style>
+        <p:txBody>
+          <a:bodyPr rtlCol="0" anchor="ctr" wrap="square" lIns="109728" rIns="109728" tIns="73152" bIns="73152"/>
+          <a:lstStyle/>
+          <a:p>
+            <a:pPr algn="l">
+              <a:spcAft>
+                <a:spcPts val="0"/>
+              </a:spcAft>
+              <a:defRPr sz="1600" b="0">
+                <a:solidFill>
+                  <a:srgbClr val="FFFFFF"/>
+                </a:solidFill>
+                <a:latin typeface="DejaVu Sans Mono"/>
+              </a:defRPr>
+            </a:pPr>
+            <a:r>
+              <a:t>source ~/ros2_curri/my_agv_ws/install/setup.bash</a:t>
+            </a:r>
+          </a:p>
+          <a:p>
+            <a:pPr algn="l">
+              <a:spcAft>
+                <a:spcPts val="0"/>
+              </a:spcAft>
+              <a:defRPr sz="1600" b="0">
+                <a:solidFill>
+                  <a:srgbClr val="FFFFFF"/>
+                </a:solidFill>
+                <a:latin typeface="DejaVu Sans Mono"/>
+              </a:defRPr>
+            </a:pPr>
+            <a:r>
+              <a:t>ros2 launch agv_bringup agv_sim.launch.py</a:t>
+            </a:r>
+          </a:p>
+        </p:txBody>
+      </p:sp>
+      <p:sp>
+        <p:nvSpPr>
+          <p:cNvPr id="11" name="TextBox 10"/>
+          <p:cNvSpPr txBox="1"/>
+          <p:nvPr/>
+        </p:nvSpPr>
+        <p:spPr>
+          <a:xfrm>
+            <a:off x="768096" y="5276088"/>
+            <a:ext cx="10561320" cy="384048"/>
+          </a:xfrm>
+          <a:prstGeom prst="rect">
+            <a:avLst/>
+          </a:prstGeom>
+          <a:noFill/>
+        </p:spPr>
+        <p:txBody>
+          <a:bodyPr wrap="square" lIns="73152" rIns="73152" tIns="36576" bIns="36576">
+            <a:spAutoFit/>
+          </a:bodyPr>
+          <a:lstStyle/>
+          <a:p>
+            <a:pPr algn="ctr">
+              <a:spcAft>
+                <a:spcPts val="0"/>
+              </a:spcAft>
+              <a:defRPr sz="1500" b="1">
                 <a:solidFill>
                   <a:srgbClr val="2A8B5A"/>
                 </a:solidFill>
@@ -9165,7 +10222,46 @@
               </a:defRPr>
             </a:pPr>
             <a:r>
-              <a:t>화면에서 확인: ① 명령/설정  ② 정상 출력 또는 화면  ③ 다음 검증 명령으로 재확인</a:t>
+              <a:t>터미널 1 역할: 시뮬레이터·bridge·node를 먼저 시작한 뒤 이 창은 종료하지 않고 둡니다.</a:t>
+            </a:r>
+          </a:p>
+        </p:txBody>
+      </p:sp>
+      <p:sp>
+        <p:nvSpPr>
+          <p:cNvPr id="12" name="TextBox 11"/>
+          <p:cNvSpPr txBox="1"/>
+          <p:nvPr/>
+        </p:nvSpPr>
+        <p:spPr>
+          <a:xfrm>
+            <a:off x="768096" y="5916168"/>
+            <a:ext cx="10561320" cy="292608"/>
+          </a:xfrm>
+          <a:prstGeom prst="rect">
+            <a:avLst/>
+          </a:prstGeom>
+          <a:noFill/>
+        </p:spPr>
+        <p:txBody>
+          <a:bodyPr wrap="square" lIns="73152" rIns="73152" tIns="36576" bIns="36576">
+            <a:spAutoFit/>
+          </a:bodyPr>
+          <a:lstStyle/>
+          <a:p>
+            <a:pPr algn="ctr">
+              <a:spcAft>
+                <a:spcPts val="0"/>
+              </a:spcAft>
+              <a:defRPr sz="1500" b="1">
+                <a:solidFill>
+                  <a:srgbClr val="122C4E"/>
+                </a:solidFill>
+                <a:latin typeface="Noto Sans CJK KR"/>
+              </a:defRPr>
+            </a:pPr>
+            <a:r>
+              <a:t>확인: agv.rviz에 RobotModel·TF·LaserScan·Odometry 설정을 저장하고 실제 화면을 확인한다.</a:t>
             </a:r>
           </a:p>
         </p:txBody>
@@ -9222,7 +10318,7 @@
               </a:defRPr>
             </a:pPr>
             <a:r>
-              <a:t>객관적 검증 명령으로 완료를 확인한다</a:t>
+              <a:t>정상 결과: 실제 환경에서 확인한 출력</a:t>
             </a:r>
           </a:p>
         </p:txBody>
@@ -9261,7 +10357,7 @@
               </a:defRPr>
             </a:pPr>
             <a:r>
-              <a:t>화면만 보지 말고 topic·frame·파일·parameter를 다시 확인합니다.</a:t>
+              <a:t>실제 RViz2: RobotModel과 TF를 같은 Fixed Frame에서 확인한 화면</a:t>
             </a:r>
           </a:p>
         </p:txBody>
@@ -9344,176 +10440,57 @@
           </a:p>
         </p:txBody>
       </p:sp>
-      <p:sp>
-        <p:nvSpPr>
-          <p:cNvPr id="6" name="Rectangle 5"/>
-          <p:cNvSpPr/>
-          <p:nvPr/>
-        </p:nvSpPr>
-        <p:spPr>
-          <a:xfrm>
-            <a:off x="566928" y="1188720"/>
-            <a:ext cx="11064240" cy="347472"/>
-          </a:xfrm>
-          <a:prstGeom prst="rect">
-            <a:avLst/>
-          </a:prstGeom>
-          <a:solidFill>
-            <a:srgbClr val="F4F7FB"/>
-          </a:solidFill>
-          <a:ln>
-            <a:solidFill>
-              <a:srgbClr val="F4F7FB"/>
-            </a:solidFill>
-          </a:ln>
-        </p:spPr>
-        <p:style>
-          <a:lnRef idx="1">
-            <a:schemeClr val="accent1"/>
-          </a:lnRef>
-          <a:fillRef idx="3">
-            <a:schemeClr val="accent1"/>
-          </a:fillRef>
-          <a:effectRef idx="2">
-            <a:schemeClr val="accent1"/>
-          </a:effectRef>
-          <a:fontRef idx="minor">
-            <a:schemeClr val="lt1"/>
-          </a:fontRef>
-        </p:style>
-        <p:txBody>
-          <a:bodyPr rtlCol="0" anchor="ctr" wrap="square" lIns="73152" rIns="73152" tIns="36576" bIns="36576"/>
-          <a:lstStyle/>
-          <a:p>
-            <a:pPr algn="l">
-              <a:spcAft>
-                <a:spcPts val="0"/>
-              </a:spcAft>
-              <a:defRPr sz="1300" b="1">
-                <a:solidFill>
-                  <a:srgbClr val="122C4E"/>
-                </a:solidFill>
-                <a:latin typeface="Noto Sans CJK KR"/>
-              </a:defRPr>
-            </a:pPr>
-            <a:r>
-              <a:t>현재 단계 검증    |    현재 폴더 ~/ros2_curri/my_agv_ws    |    현재 터미널</a:t>
-            </a:r>
-          </a:p>
-        </p:txBody>
-      </p:sp>
-      <p:sp>
-        <p:nvSpPr>
-          <p:cNvPr id="7" name="Rounded Rectangle 6"/>
-          <p:cNvSpPr/>
-          <p:nvPr/>
-        </p:nvSpPr>
-        <p:spPr>
-          <a:xfrm>
-            <a:off x="658368" y="1755648"/>
-            <a:ext cx="10972800" cy="2148840"/>
-          </a:xfrm>
-          <a:prstGeom prst="roundRect">
-            <a:avLst/>
-          </a:prstGeom>
-          <a:solidFill>
-            <a:srgbClr val="1D232D"/>
-          </a:solidFill>
-          <a:ln>
-            <a:solidFill>
-              <a:srgbClr val="1D232D"/>
-            </a:solidFill>
-          </a:ln>
-        </p:spPr>
-        <p:style>
-          <a:lnRef idx="1">
-            <a:schemeClr val="accent1"/>
-          </a:lnRef>
-          <a:fillRef idx="3">
-            <a:schemeClr val="accent1"/>
-          </a:fillRef>
-          <a:effectRef idx="2">
-            <a:schemeClr val="accent1"/>
-          </a:effectRef>
-          <a:fontRef idx="minor">
-            <a:schemeClr val="lt1"/>
-          </a:fontRef>
-        </p:style>
-        <p:txBody>
-          <a:bodyPr rtlCol="0" anchor="ctr" wrap="square" lIns="73152" rIns="73152" tIns="36576" bIns="36576"/>
-          <a:lstStyle/>
-          <a:p>
-            <a:pPr algn="l">
-              <a:spcAft>
-                <a:spcPts val="0"/>
-              </a:spcAft>
-              <a:defRPr sz="1600" b="0">
-                <a:solidFill>
-                  <a:srgbClr val="FFFFFF"/>
-                </a:solidFill>
-                <a:latin typeface="DejaVu Sans Mono"/>
-              </a:defRPr>
-            </a:pPr>
-            <a:r>
-              <a:t>ros2 topic info /robot_description</a:t>
-            </a:r>
-            <a:br/>
-            <a:r>
-              <a:t>ros2 topic echo /scan --once</a:t>
-            </a:r>
-            <a:br/>
-            <a:r>
-              <a:t>ros2 topic echo /odom --once</a:t>
-            </a:r>
-          </a:p>
-        </p:txBody>
-      </p:sp>
-      <p:sp>
-        <p:nvSpPr>
-          <p:cNvPr id="8" name="Rounded Rectangle 7"/>
-          <p:cNvSpPr/>
-          <p:nvPr/>
-        </p:nvSpPr>
-        <p:spPr>
-          <a:xfrm>
-            <a:off x="658368" y="4206240"/>
-            <a:ext cx="10972800" cy="1554480"/>
-          </a:xfrm>
-          <a:prstGeom prst="roundRect">
-            <a:avLst/>
-          </a:prstGeom>
-          <a:solidFill>
-            <a:srgbClr val="F4F7FB"/>
-          </a:solidFill>
-          <a:ln>
-            <a:solidFill>
-              <a:srgbClr val="D1DFD5"/>
-            </a:solidFill>
-          </a:ln>
-        </p:spPr>
-        <p:style>
-          <a:lnRef idx="1">
-            <a:schemeClr val="accent1"/>
-          </a:lnRef>
-          <a:fillRef idx="3">
-            <a:schemeClr val="accent1"/>
-          </a:fillRef>
-          <a:effectRef idx="2">
-            <a:schemeClr val="accent1"/>
-          </a:effectRef>
-          <a:fontRef idx="minor">
-            <a:schemeClr val="lt1"/>
-          </a:fontRef>
-        </p:style>
-        <p:txBody>
-          <a:bodyPr rtlCol="0" anchor="ctr" wrap="square" lIns="73152" rIns="73152" tIns="36576" bIns="36576"/>
-          <a:lstStyle/>
-          <a:p>
-            <a:pPr algn="l">
-              <a:spcAft>
-                <a:spcPts val="0"/>
-              </a:spcAft>
-              <a:defRPr sz="1800" b="1">
+      <p:pic>
+        <p:nvPicPr>
+          <p:cNvPr id="6" name="Picture 5" descr="rviz_agv_sensors_actual.png"/>
+          <p:cNvPicPr>
+            <a:picLocks noChangeAspect="1"/>
+          </p:cNvPicPr>
+          <p:nvPr/>
+        </p:nvPicPr>
+        <p:blipFill>
+          <a:blip r:embed="rId2"/>
+          <a:stretch>
+            <a:fillRect/>
+          </a:stretch>
+        </p:blipFill>
+        <p:spPr>
+          <a:xfrm>
+            <a:off x="3201399" y="1353312"/>
+            <a:ext cx="5786153" cy="4800600"/>
+          </a:xfrm>
+          <a:prstGeom prst="rect">
+            <a:avLst/>
+          </a:prstGeom>
+        </p:spPr>
+      </p:pic>
+      <p:sp>
+        <p:nvSpPr>
+          <p:cNvPr id="7" name="TextBox 6"/>
+          <p:cNvSpPr txBox="1"/>
+          <p:nvPr/>
+        </p:nvSpPr>
+        <p:spPr>
+          <a:xfrm>
+            <a:off x="777240" y="6144768"/>
+            <a:ext cx="10607040" cy="310896"/>
+          </a:xfrm>
+          <a:prstGeom prst="rect">
+            <a:avLst/>
+          </a:prstGeom>
+          <a:noFill/>
+        </p:spPr>
+        <p:txBody>
+          <a:bodyPr wrap="square" lIns="73152" rIns="73152" tIns="36576" bIns="36576">
+            <a:spAutoFit/>
+          </a:bodyPr>
+          <a:lstStyle/>
+          <a:p>
+            <a:pPr algn="ctr">
+              <a:spcAft>
+                <a:spcPts val="0"/>
+              </a:spcAft>
+              <a:defRPr sz="1100" b="1">
                 <a:solidFill>
                   <a:srgbClr val="2A8B5A"/>
                 </a:solidFill>
@@ -9521,58 +10498,7 @@
               </a:defRPr>
             </a:pPr>
             <a:r>
-              <a:t>완료 체크</a:t>
-            </a:r>
-            <a:br/>
-            <a:r>
-              <a:t>□ 명령이 오류 없이 실행된다.</a:t>
-            </a:r>
-            <a:br/>
-            <a:r>
-              <a:t>□ 기대한 파일·topic·frame·parameter 이름이 보인다.</a:t>
-            </a:r>
-            <a:br/>
-            <a:r>
-              <a:t>□ 값의 단위와 방향을 한 문장으로 설명할 수 있다.</a:t>
-            </a:r>
-          </a:p>
-        </p:txBody>
-      </p:sp>
-      <p:sp>
-        <p:nvSpPr>
-          <p:cNvPr id="9" name="TextBox 8"/>
-          <p:cNvSpPr txBox="1"/>
-          <p:nvPr/>
-        </p:nvSpPr>
-        <p:spPr>
-          <a:xfrm>
-            <a:off x="731520" y="5989320"/>
-            <a:ext cx="10789920" cy="237744"/>
-          </a:xfrm>
-          <a:prstGeom prst="rect">
-            <a:avLst/>
-          </a:prstGeom>
-          <a:noFill/>
-        </p:spPr>
-        <p:txBody>
-          <a:bodyPr wrap="square" lIns="73152" rIns="73152" tIns="36576" bIns="36576">
-            <a:spAutoFit/>
-          </a:bodyPr>
-          <a:lstStyle/>
-          <a:p>
-            <a:pPr algn="l">
-              <a:spcAft>
-                <a:spcPts val="0"/>
-              </a:spcAft>
-              <a:defRPr sz="1500" b="1">
-                <a:solidFill>
-                  <a:srgbClr val="122C4E"/>
-                </a:solidFill>
-                <a:latin typeface="Noto Sans CJK KR"/>
-              </a:defRPr>
-            </a:pPr>
-            <a:r>
-              <a:t>완료 조건: agv.rviz에 RobotModel·TF·LaserScan·Odometry 설정을 저장하고 실제 화면을 확인한다.</a:t>
+              <a:t>화면에서 확인: 왼쪽 Displays의 RobotModel·TF가 켜져 있고, 오른쪽에 차체·바퀴·sensor frame 축이 함께 보이는지 확인합니다.</a:t>
             </a:r>
           </a:p>
         </p:txBody>
@@ -9629,7 +10555,7 @@
               </a:defRPr>
             </a:pPr>
             <a:r>
-              <a:t>막히면: 증상 → 우선 확인 → 재검증</a:t>
+              <a:t>정상 결과: 실제 환경에서 확인한 출력</a:t>
             </a:r>
           </a:p>
         </p:txBody>
@@ -9668,7 +10594,7 @@
               </a:defRPr>
             </a:pPr>
             <a:r>
-              <a:t>오류 메시지를 숨기지 않고 같은 순서로 점검합니다.</a:t>
+              <a:t>실제 RViz2: LaserScan·Odometry display를 RobotModel과 함께 켠 화면</a:t>
             </a:r>
           </a:p>
         </p:txBody>
@@ -9751,328 +10677,40 @@
           </a:p>
         </p:txBody>
       </p:sp>
-      <p:sp>
-        <p:nvSpPr>
-          <p:cNvPr id="6" name="Rectangle 5"/>
-          <p:cNvSpPr/>
-          <p:nvPr/>
-        </p:nvSpPr>
-        <p:spPr>
-          <a:xfrm>
-            <a:off x="566928" y="1188720"/>
-            <a:ext cx="11064240" cy="347472"/>
-          </a:xfrm>
-          <a:prstGeom prst="rect">
-            <a:avLst/>
-          </a:prstGeom>
-          <a:solidFill>
-            <a:srgbClr val="F4F7FB"/>
-          </a:solidFill>
-          <a:ln>
-            <a:solidFill>
-              <a:srgbClr val="F4F7FB"/>
-            </a:solidFill>
-          </a:ln>
-        </p:spPr>
-        <p:style>
-          <a:lnRef idx="1">
-            <a:schemeClr val="accent1"/>
-          </a:lnRef>
-          <a:fillRef idx="3">
-            <a:schemeClr val="accent1"/>
-          </a:fillRef>
-          <a:effectRef idx="2">
-            <a:schemeClr val="accent1"/>
-          </a:effectRef>
-          <a:fontRef idx="minor">
-            <a:schemeClr val="lt1"/>
-          </a:fontRef>
-        </p:style>
-        <p:txBody>
-          <a:bodyPr rtlCol="0" anchor="ctr" wrap="square" lIns="73152" rIns="73152" tIns="36576" bIns="36576"/>
-          <a:lstStyle/>
-          <a:p>
-            <a:pPr algn="l">
-              <a:spcAft>
-                <a:spcPts val="0"/>
-              </a:spcAft>
-              <a:defRPr sz="1300" b="1">
-                <a:solidFill>
-                  <a:srgbClr val="122C4E"/>
-                </a:solidFill>
-                <a:latin typeface="Noto Sans CJK KR"/>
-              </a:defRPr>
-            </a:pPr>
-            <a:r>
-              <a:t>현재 단계 오류 대응    |    현재 폴더 ~/ros2_curri/my_agv_ws    |    현재 터미널</a:t>
-            </a:r>
-          </a:p>
-        </p:txBody>
-      </p:sp>
-      <p:sp>
-        <p:nvSpPr>
-          <p:cNvPr id="7" name="Rounded Rectangle 6"/>
-          <p:cNvSpPr/>
-          <p:nvPr/>
-        </p:nvSpPr>
-        <p:spPr>
-          <a:xfrm>
-            <a:off x="694944" y="1755648"/>
-            <a:ext cx="10972800" cy="1115568"/>
-          </a:xfrm>
-          <a:prstGeom prst="roundRect">
-            <a:avLst/>
-          </a:prstGeom>
-          <a:solidFill>
-            <a:srgbClr val="FFF7F4"/>
-          </a:solidFill>
-          <a:ln>
-            <a:solidFill>
-              <a:srgbClr val="EDBEB4"/>
-            </a:solidFill>
-          </a:ln>
-        </p:spPr>
-        <p:style>
-          <a:lnRef idx="1">
-            <a:schemeClr val="accent1"/>
-          </a:lnRef>
-          <a:fillRef idx="3">
-            <a:schemeClr val="accent1"/>
-          </a:fillRef>
-          <a:effectRef idx="2">
-            <a:schemeClr val="accent1"/>
-          </a:effectRef>
-          <a:fontRef idx="minor">
-            <a:schemeClr val="lt1"/>
-          </a:fontRef>
-        </p:style>
-        <p:txBody>
-          <a:bodyPr rtlCol="0" anchor="ctr"/>
-          <a:lstStyle/>
-          <a:p>
-            <a:pPr algn="ctr"/>
-          </a:p>
-        </p:txBody>
-      </p:sp>
-      <p:sp>
-        <p:nvSpPr>
-          <p:cNvPr id="8" name="TextBox 7"/>
-          <p:cNvSpPr txBox="1"/>
-          <p:nvPr/>
-        </p:nvSpPr>
-        <p:spPr>
-          <a:xfrm>
-            <a:off x="896112" y="1901952"/>
-            <a:ext cx="2926080" cy="274320"/>
-          </a:xfrm>
-          <a:prstGeom prst="rect">
-            <a:avLst/>
-          </a:prstGeom>
-          <a:noFill/>
-        </p:spPr>
-        <p:txBody>
-          <a:bodyPr wrap="square" lIns="73152" rIns="73152" tIns="36576" bIns="36576">
-            <a:spAutoFit/>
-          </a:bodyPr>
-          <a:lstStyle/>
-          <a:p>
-            <a:pPr algn="l">
-              <a:spcAft>
-                <a:spcPts val="0"/>
-              </a:spcAft>
-              <a:defRPr sz="1800" b="1">
-                <a:solidFill>
-                  <a:srgbClr val="BE3B3B"/>
-                </a:solidFill>
-                <a:latin typeface="Noto Sans CJK KR"/>
-              </a:defRPr>
-            </a:pPr>
-            <a:r>
-              <a:t>증상 1: RobotModel이 안 보임</a:t>
-            </a:r>
-          </a:p>
-        </p:txBody>
-      </p:sp>
-      <p:sp>
-        <p:nvSpPr>
-          <p:cNvPr id="9" name="TextBox 8"/>
-          <p:cNvSpPr txBox="1"/>
-          <p:nvPr/>
-        </p:nvSpPr>
-        <p:spPr>
-          <a:xfrm>
-            <a:off x="3794760" y="1883664"/>
-            <a:ext cx="7543800" cy="621792"/>
-          </a:xfrm>
-          <a:prstGeom prst="rect">
-            <a:avLst/>
-          </a:prstGeom>
-          <a:noFill/>
-        </p:spPr>
-        <p:txBody>
-          <a:bodyPr wrap="square" lIns="73152" rIns="73152" tIns="36576" bIns="36576">
-            <a:spAutoFit/>
-          </a:bodyPr>
-          <a:lstStyle/>
-          <a:p>
-            <a:pPr algn="l">
-              <a:spcAft>
-                <a:spcPts val="0"/>
-              </a:spcAft>
-              <a:defRPr sz="1600" b="0">
-                <a:solidFill>
-                  <a:srgbClr val="122C4E"/>
-                </a:solidFill>
-                <a:latin typeface="Noto Sans CJK KR"/>
-              </a:defRPr>
-            </a:pPr>
-            <a:r>
-              <a:t>우선 확인: robot_description·Fixed Frame·TF를 순서대로 확인한다.</a:t>
-            </a:r>
-            <a:br/>
-            <a:r>
-              <a:t>수정 후: ros2 topic info /robot_description</a:t>
-            </a:r>
-          </a:p>
-        </p:txBody>
-      </p:sp>
-      <p:sp>
-        <p:nvSpPr>
-          <p:cNvPr id="10" name="Rounded Rectangle 9"/>
-          <p:cNvSpPr/>
-          <p:nvPr/>
-        </p:nvSpPr>
-        <p:spPr>
-          <a:xfrm>
-            <a:off x="694944" y="3172968"/>
-            <a:ext cx="10972800" cy="1115568"/>
-          </a:xfrm>
-          <a:prstGeom prst="roundRect">
-            <a:avLst/>
-          </a:prstGeom>
-          <a:solidFill>
-            <a:srgbClr val="FFF7F4"/>
-          </a:solidFill>
-          <a:ln>
-            <a:solidFill>
-              <a:srgbClr val="EDBEB4"/>
-            </a:solidFill>
-          </a:ln>
-        </p:spPr>
-        <p:style>
-          <a:lnRef idx="1">
-            <a:schemeClr val="accent1"/>
-          </a:lnRef>
-          <a:fillRef idx="3">
-            <a:schemeClr val="accent1"/>
-          </a:fillRef>
-          <a:effectRef idx="2">
-            <a:schemeClr val="accent1"/>
-          </a:effectRef>
-          <a:fontRef idx="minor">
-            <a:schemeClr val="lt1"/>
-          </a:fontRef>
-        </p:style>
-        <p:txBody>
-          <a:bodyPr rtlCol="0" anchor="ctr"/>
-          <a:lstStyle/>
-          <a:p>
-            <a:pPr algn="ctr"/>
-          </a:p>
-        </p:txBody>
-      </p:sp>
-      <p:sp>
-        <p:nvSpPr>
-          <p:cNvPr id="11" name="TextBox 10"/>
-          <p:cNvSpPr txBox="1"/>
-          <p:nvPr/>
-        </p:nvSpPr>
-        <p:spPr>
-          <a:xfrm>
-            <a:off x="896112" y="3319272"/>
-            <a:ext cx="2926080" cy="274320"/>
-          </a:xfrm>
-          <a:prstGeom prst="rect">
-            <a:avLst/>
-          </a:prstGeom>
-          <a:noFill/>
-        </p:spPr>
-        <p:txBody>
-          <a:bodyPr wrap="square" lIns="73152" rIns="73152" tIns="36576" bIns="36576">
-            <a:spAutoFit/>
-          </a:bodyPr>
-          <a:lstStyle/>
-          <a:p>
-            <a:pPr algn="l">
-              <a:spcAft>
-                <a:spcPts val="0"/>
-              </a:spcAft>
-              <a:defRPr sz="1800" b="1">
-                <a:solidFill>
-                  <a:srgbClr val="BE3B3B"/>
-                </a:solidFill>
-                <a:latin typeface="Noto Sans CJK KR"/>
-              </a:defRPr>
-            </a:pPr>
-            <a:r>
-              <a:t>증상 2: LaserScan 위치가 이상함</a:t>
-            </a:r>
-          </a:p>
-        </p:txBody>
-      </p:sp>
-      <p:sp>
-        <p:nvSpPr>
-          <p:cNvPr id="12" name="TextBox 11"/>
-          <p:cNvSpPr txBox="1"/>
-          <p:nvPr/>
-        </p:nvSpPr>
-        <p:spPr>
-          <a:xfrm>
-            <a:off x="3794760" y="3300984"/>
-            <a:ext cx="7543800" cy="621792"/>
-          </a:xfrm>
-          <a:prstGeom prst="rect">
-            <a:avLst/>
-          </a:prstGeom>
-          <a:noFill/>
-        </p:spPr>
-        <p:txBody>
-          <a:bodyPr wrap="square" lIns="73152" rIns="73152" tIns="36576" bIns="36576">
-            <a:spAutoFit/>
-          </a:bodyPr>
-          <a:lstStyle/>
-          <a:p>
-            <a:pPr algn="l">
-              <a:spcAft>
-                <a:spcPts val="0"/>
-              </a:spcAft>
-              <a:defRPr sz="1600" b="0">
-                <a:solidFill>
-                  <a:srgbClr val="122C4E"/>
-                </a:solidFill>
-                <a:latin typeface="Noto Sans CJK KR"/>
-              </a:defRPr>
-            </a:pPr>
-            <a:r>
-              <a:t>우선 확인: scan header.frame_id와 lidar TF를 확인한다.</a:t>
-            </a:r>
-            <a:br/>
-            <a:r>
-              <a:t>수정 후: ros2 topic info /robot_description</a:t>
-            </a:r>
-          </a:p>
-        </p:txBody>
-      </p:sp>
-      <p:sp>
-        <p:nvSpPr>
-          <p:cNvPr id="13" name="TextBox 12"/>
-          <p:cNvSpPr txBox="1"/>
-          <p:nvPr/>
-        </p:nvSpPr>
-        <p:spPr>
-          <a:xfrm>
-            <a:off x="822960" y="5102352"/>
-            <a:ext cx="10607040" cy="402336"/>
+      <p:pic>
+        <p:nvPicPr>
+          <p:cNvPr id="6" name="Picture 5" descr="01_rviz_integrated_actual.png"/>
+          <p:cNvPicPr>
+            <a:picLocks noChangeAspect="1"/>
+          </p:cNvPicPr>
+          <p:nvPr/>
+        </p:nvPicPr>
+        <p:blipFill>
+          <a:blip r:embed="rId2"/>
+          <a:stretch>
+            <a:fillRect/>
+          </a:stretch>
+        </p:blipFill>
+        <p:spPr>
+          <a:xfrm>
+            <a:off x="2971409" y="1353312"/>
+            <a:ext cx="6246133" cy="4800600"/>
+          </a:xfrm>
+          <a:prstGeom prst="rect">
+            <a:avLst/>
+          </a:prstGeom>
+        </p:spPr>
+      </p:pic>
+      <p:sp>
+        <p:nvSpPr>
+          <p:cNvPr id="7" name="TextBox 6"/>
+          <p:cNvSpPr txBox="1"/>
+          <p:nvPr/>
+        </p:nvSpPr>
+        <p:spPr>
+          <a:xfrm>
+            <a:off x="777240" y="6144768"/>
+            <a:ext cx="10607040" cy="310896"/>
           </a:xfrm>
           <a:prstGeom prst="rect">
             <a:avLst/>
@@ -10089,15 +10727,15 @@
               <a:spcAft>
                 <a:spcPts val="0"/>
               </a:spcAft>
-              <a:defRPr sz="1800" b="1">
-                <a:solidFill>
-                  <a:srgbClr val="DB7E22"/>
-                </a:solidFill>
-                <a:latin typeface="Noto Sans CJK KR"/>
-              </a:defRPr>
-            </a:pPr>
-            <a:r>
-              <a:t>공통 순서: ① 현재 폴더 ② source ③ 파일 경로 ④ 이름/타입/단위 ⑤ build·source 후 재실행</a:t>
+              <a:defRPr sz="1100" b="1">
+                <a:solidFill>
+                  <a:srgbClr val="2A8B5A"/>
+                </a:solidFill>
+                <a:latin typeface="Noto Sans CJK KR"/>
+              </a:defRPr>
+            </a:pPr>
+            <a:r>
+              <a:t>화면에서 확인: Displays에서 LaserScan·Odometry가 활성화되어 있는지와 scan point가 TF 좌표계에 붙는지를 확인합니다.</a:t>
             </a:r>
           </a:p>
         </p:txBody>
@@ -10154,7 +10792,7 @@
               </a:defRPr>
             </a:pPr>
             <a:r>
-              <a:t>미니 실습: 값 하나를 바꾸고 결과를 비교한다</a:t>
+              <a:t>정상 결과: 실제 환경에서 확인한 출력</a:t>
             </a:r>
           </a:p>
         </p:txBody>
@@ -10193,7 +10831,7 @@
               </a:defRPr>
             </a:pPr>
             <a:r>
-              <a:t>정상 결과를 만든 뒤에는 한 번에 하나의 값만 바꿉니다.</a:t>
+              <a:t>실제 ROS 2 환경의 파일·패키지·구성 검증 로그</a:t>
             </a:r>
           </a:p>
         </p:txBody>
@@ -10276,157 +10914,65 @@
           </a:p>
         </p:txBody>
       </p:sp>
-      <p:sp>
-        <p:nvSpPr>
-          <p:cNvPr id="6" name="Rectangle 5"/>
-          <p:cNvSpPr/>
-          <p:nvPr/>
-        </p:nvSpPr>
-        <p:spPr>
-          <a:xfrm>
-            <a:off x="566928" y="1188720"/>
-            <a:ext cx="11064240" cy="347472"/>
-          </a:xfrm>
-          <a:prstGeom prst="rect">
-            <a:avLst/>
-          </a:prstGeom>
-          <a:solidFill>
-            <a:srgbClr val="F4F7FB"/>
-          </a:solidFill>
-          <a:ln>
-            <a:solidFill>
-              <a:srgbClr val="F4F7FB"/>
-            </a:solidFill>
-          </a:ln>
-        </p:spPr>
-        <p:style>
-          <a:lnRef idx="1">
-            <a:schemeClr val="accent1"/>
-          </a:lnRef>
-          <a:fillRef idx="3">
-            <a:schemeClr val="accent1"/>
-          </a:fillRef>
-          <a:effectRef idx="2">
-            <a:schemeClr val="accent1"/>
-          </a:effectRef>
-          <a:fontRef idx="minor">
-            <a:schemeClr val="lt1"/>
-          </a:fontRef>
-        </p:style>
-        <p:txBody>
-          <a:bodyPr rtlCol="0" anchor="ctr" wrap="square" lIns="73152" rIns="73152" tIns="36576" bIns="36576"/>
-          <a:lstStyle/>
-          <a:p>
-            <a:pPr algn="l">
-              <a:spcAft>
-                <a:spcPts val="0"/>
-              </a:spcAft>
-              <a:defRPr sz="1300" b="1">
-                <a:solidFill>
-                  <a:srgbClr val="122C4E"/>
-                </a:solidFill>
-                <a:latin typeface="Noto Sans CJK KR"/>
-              </a:defRPr>
-            </a:pPr>
-            <a:r>
-              <a:t>현재 단계 미니 실습    |    현재 폴더 ~/ros2_curri/my_agv_ws    |    현재 터미널</a:t>
-            </a:r>
-          </a:p>
-        </p:txBody>
-      </p:sp>
-      <p:sp>
-        <p:nvSpPr>
-          <p:cNvPr id="7" name="Rounded Rectangle 6"/>
-          <p:cNvSpPr/>
-          <p:nvPr/>
-        </p:nvSpPr>
-        <p:spPr>
-          <a:xfrm>
-            <a:off x="749808" y="1874519"/>
-            <a:ext cx="10652760" cy="1993392"/>
-          </a:xfrm>
-          <a:prstGeom prst="roundRect">
-            <a:avLst/>
-          </a:prstGeom>
-          <a:solidFill>
-            <a:srgbClr val="FFF8EB"/>
-          </a:solidFill>
-          <a:ln>
-            <a:solidFill>
-              <a:srgbClr val="ECC680"/>
-            </a:solidFill>
-          </a:ln>
-        </p:spPr>
-        <p:style>
-          <a:lnRef idx="1">
-            <a:schemeClr val="accent1"/>
-          </a:lnRef>
-          <a:fillRef idx="3">
-            <a:schemeClr val="accent1"/>
-          </a:fillRef>
-          <a:effectRef idx="2">
-            <a:schemeClr val="accent1"/>
-          </a:effectRef>
-          <a:fontRef idx="minor">
-            <a:schemeClr val="lt1"/>
-          </a:fontRef>
-        </p:style>
-        <p:txBody>
-          <a:bodyPr rtlCol="0" anchor="ctr" wrap="square" lIns="73152" rIns="73152" tIns="36576" bIns="36576"/>
+      <p:pic>
+        <p:nvPicPr>
+          <p:cNvPr id="6" name="Picture 5" descr="validation_terminal.png"/>
+          <p:cNvPicPr>
+            <a:picLocks noChangeAspect="1"/>
+          </p:cNvPicPr>
+          <p:nvPr/>
+        </p:nvPicPr>
+        <p:blipFill>
+          <a:blip r:embed="rId2"/>
+          <a:stretch>
+            <a:fillRect/>
+          </a:stretch>
+        </p:blipFill>
+        <p:spPr>
+          <a:xfrm>
+            <a:off x="790956" y="1884338"/>
+            <a:ext cx="10607040" cy="3738546"/>
+          </a:xfrm>
+          <a:prstGeom prst="rect">
+            <a:avLst/>
+          </a:prstGeom>
+        </p:spPr>
+      </p:pic>
+      <p:sp>
+        <p:nvSpPr>
+          <p:cNvPr id="7" name="TextBox 6"/>
+          <p:cNvSpPr txBox="1"/>
+          <p:nvPr/>
+        </p:nvSpPr>
+        <p:spPr>
+          <a:xfrm>
+            <a:off x="777240" y="6144768"/>
+            <a:ext cx="10607040" cy="310896"/>
+          </a:xfrm>
+          <a:prstGeom prst="rect">
+            <a:avLst/>
+          </a:prstGeom>
+          <a:noFill/>
+        </p:spPr>
+        <p:txBody>
+          <a:bodyPr wrap="square" lIns="73152" rIns="73152" tIns="36576" bIns="36576">
+            <a:spAutoFit/>
+          </a:bodyPr>
           <a:lstStyle/>
           <a:p>
             <a:pPr algn="ctr">
               <a:spcAft>
                 <a:spcPts val="0"/>
               </a:spcAft>
-              <a:defRPr sz="2300" b="1">
-                <a:solidFill>
-                  <a:srgbClr val="122C4E"/>
-                </a:solidFill>
-                <a:latin typeface="Noto Sans CJK KR"/>
-              </a:defRPr>
-            </a:pPr>
-            <a:r>
-              <a:t>Fixed Frame을 의도적으로 없는 이름으로 바꾼 뒤 Global Status 오류를 읽고 odom으로 되돌린다.</a:t>
-            </a:r>
-          </a:p>
-        </p:txBody>
-      </p:sp>
-      <p:sp>
-        <p:nvSpPr>
-          <p:cNvPr id="8" name="TextBox 7"/>
-          <p:cNvSpPr txBox="1"/>
-          <p:nvPr/>
-        </p:nvSpPr>
-        <p:spPr>
-          <a:xfrm>
-            <a:off x="877824" y="4590288"/>
-            <a:ext cx="10241280" cy="594360"/>
-          </a:xfrm>
-          <a:prstGeom prst="rect">
-            <a:avLst/>
-          </a:prstGeom>
-          <a:noFill/>
-        </p:spPr>
-        <p:txBody>
-          <a:bodyPr wrap="square" lIns="73152" rIns="73152" tIns="36576" bIns="36576">
-            <a:spAutoFit/>
-          </a:bodyPr>
-          <a:lstStyle/>
-          <a:p>
-            <a:pPr algn="ctr">
-              <a:spcAft>
-                <a:spcPts val="0"/>
-              </a:spcAft>
-              <a:defRPr sz="1900" b="1">
-                <a:solidFill>
-                  <a:srgbClr val="DB7E22"/>
-                </a:solidFill>
-                <a:latin typeface="Noto Sans CJK KR"/>
-              </a:defRPr>
-            </a:pPr>
-            <a:r>
-              <a:t>기록할 것: 바꾼 값(단위) · 기대한 변화 · 실제 출력/화면 · 원래 값으로 되돌린 결과</a:t>
+              <a:defRPr sz="1100" b="1">
+                <a:solidFill>
+                  <a:srgbClr val="2A8B5A"/>
+                </a:solidFill>
+                <a:latin typeface="Noto Sans CJK KR"/>
+              </a:defRPr>
+            </a:pPr>
+            <a:r>
+              <a:t>화면에서 확인: ① 명령/설정  ② 정상 출력 또는 화면  ③ 다음 검증 명령으로 재확인</a:t>
             </a:r>
           </a:p>
         </p:txBody>
@@ -10944,7 +11490,7 @@
               </a:defRPr>
             </a:pPr>
             <a:r>
-              <a:t>내 프로젝트 체크포인트를 저장하고 다음 모듈로 넘긴다</a:t>
+              <a:t>객관적 검증 명령으로 완료를 확인한다</a:t>
             </a:r>
           </a:p>
         </p:txBody>
@@ -10983,7 +11529,7 @@
               </a:defRPr>
             </a:pPr>
             <a:r>
-              <a:t>Complete는 복구용 비교 기준이고, 다음 단계는 내가 직접 만든 workspace에서 계속합니다.</a:t>
+              <a:t>화면만 보지 말고 topic·frame·파일·parameter를 다시 확인합니다.</a:t>
             </a:r>
           </a:p>
         </p:txBody>
@@ -11119,7 +11665,7 @@
               </a:defRPr>
             </a:pPr>
             <a:r>
-              <a:t>현재 단계 체크포인트    |    현재 폴더 ~/ros2_curri/my_agv_ws    |    현재 터미널</a:t>
+              <a:t>현재 단계 검증    |    현재 폴더 ~/ros2_curri/my_agv_ws    |    현재 터미널</a:t>
             </a:r>
           </a:p>
         </p:txBody>
@@ -11132,18 +11678,18 @@
         </p:nvSpPr>
         <p:spPr>
           <a:xfrm>
-            <a:off x="685800" y="1737360"/>
-            <a:ext cx="10972800" cy="3611880"/>
+            <a:off x="658368" y="1755648"/>
+            <a:ext cx="10972800" cy="2148840"/>
           </a:xfrm>
           <a:prstGeom prst="roundRect">
             <a:avLst/>
           </a:prstGeom>
           <a:solidFill>
-            <a:srgbClr val="F4F7FB"/>
+            <a:srgbClr val="1D232D"/>
           </a:solidFill>
           <a:ln>
             <a:solidFill>
-              <a:srgbClr val="D2DCE8"/>
+              <a:srgbClr val="1D232D"/>
             </a:solidFill>
           </a:ln>
         </p:spPr>
@@ -11162,40 +11708,155 @@
           </a:fontRef>
         </p:style>
         <p:txBody>
-          <a:bodyPr rtlCol="0" anchor="ctr"/>
-          <a:lstStyle/>
-          <a:p>
-            <a:pPr algn="ctr"/>
-          </a:p>
-        </p:txBody>
-      </p:sp>
-      <p:sp>
-        <p:nvSpPr>
-          <p:cNvPr id="8" name="TextBox 7"/>
-          <p:cNvSpPr txBox="1"/>
-          <p:nvPr/>
-        </p:nvSpPr>
-        <p:spPr>
-          <a:xfrm>
-            <a:off x="896112" y="1993392"/>
-            <a:ext cx="10332720" cy="2971800"/>
-          </a:xfrm>
-          <a:prstGeom prst="rect">
-            <a:avLst/>
-          </a:prstGeom>
-          <a:noFill/>
-        </p:spPr>
-        <p:txBody>
-          <a:bodyPr wrap="square" lIns="109728" rIns="109728">
-            <a:spAutoFit/>
-          </a:bodyPr>
-          <a:lstStyle/>
-          <a:p>
-            <a:pPr>
-              <a:spcAft>
-                <a:spcPts val="800"/>
-              </a:spcAft>
-              <a:defRPr sz="1800">
+          <a:bodyPr rtlCol="0" anchor="ctr" wrap="square" lIns="109728" rIns="109728" tIns="73152" bIns="73152"/>
+          <a:lstStyle/>
+          <a:p>
+            <a:pPr algn="l">
+              <a:spcAft>
+                <a:spcPts val="0"/>
+              </a:spcAft>
+              <a:defRPr sz="1600" b="0">
+                <a:solidFill>
+                  <a:srgbClr val="FFFFFF"/>
+                </a:solidFill>
+                <a:latin typeface="DejaVu Sans Mono"/>
+              </a:defRPr>
+            </a:pPr>
+            <a:r>
+              <a:t>ros2 topic info /robot_description</a:t>
+            </a:r>
+          </a:p>
+          <a:p>
+            <a:pPr algn="l">
+              <a:spcAft>
+                <a:spcPts val="0"/>
+              </a:spcAft>
+              <a:defRPr sz="1600" b="0">
+                <a:solidFill>
+                  <a:srgbClr val="FFFFFF"/>
+                </a:solidFill>
+                <a:latin typeface="DejaVu Sans Mono"/>
+              </a:defRPr>
+            </a:pPr>
+            <a:r>
+              <a:t>ros2 topic echo /scan --once</a:t>
+            </a:r>
+          </a:p>
+          <a:p>
+            <a:pPr algn="l">
+              <a:spcAft>
+                <a:spcPts val="0"/>
+              </a:spcAft>
+              <a:defRPr sz="1600" b="0">
+                <a:solidFill>
+                  <a:srgbClr val="FFFFFF"/>
+                </a:solidFill>
+                <a:latin typeface="DejaVu Sans Mono"/>
+              </a:defRPr>
+            </a:pPr>
+            <a:r>
+              <a:t>ros2 topic echo /odom --once</a:t>
+            </a:r>
+          </a:p>
+        </p:txBody>
+      </p:sp>
+      <p:sp>
+        <p:nvSpPr>
+          <p:cNvPr id="8" name="Rounded Rectangle 7"/>
+          <p:cNvSpPr/>
+          <p:nvPr/>
+        </p:nvSpPr>
+        <p:spPr>
+          <a:xfrm>
+            <a:off x="658368" y="4206240"/>
+            <a:ext cx="10972800" cy="1554480"/>
+          </a:xfrm>
+          <a:prstGeom prst="roundRect">
+            <a:avLst/>
+          </a:prstGeom>
+          <a:solidFill>
+            <a:srgbClr val="F4F7FB"/>
+          </a:solidFill>
+          <a:ln>
+            <a:solidFill>
+              <a:srgbClr val="D1DFD5"/>
+            </a:solidFill>
+          </a:ln>
+        </p:spPr>
+        <p:style>
+          <a:lnRef idx="1">
+            <a:schemeClr val="accent1"/>
+          </a:lnRef>
+          <a:fillRef idx="3">
+            <a:schemeClr val="accent1"/>
+          </a:fillRef>
+          <a:effectRef idx="2">
+            <a:schemeClr val="accent1"/>
+          </a:effectRef>
+          <a:fontRef idx="minor">
+            <a:schemeClr val="lt1"/>
+          </a:fontRef>
+        </p:style>
+        <p:txBody>
+          <a:bodyPr rtlCol="0" anchor="ctr" wrap="square" lIns="73152" rIns="73152" tIns="36576" bIns="36576"/>
+          <a:lstStyle/>
+          <a:p>
+            <a:pPr algn="l">
+              <a:spcAft>
+                <a:spcPts val="0"/>
+              </a:spcAft>
+              <a:defRPr sz="1800" b="1">
+                <a:solidFill>
+                  <a:srgbClr val="2A8B5A"/>
+                </a:solidFill>
+                <a:latin typeface="Noto Sans CJK KR"/>
+              </a:defRPr>
+            </a:pPr>
+            <a:r>
+              <a:t>완료 체크</a:t>
+            </a:r>
+            <a:br/>
+            <a:r>
+              <a:t>□ 명령이 오류 없이 실행된다.</a:t>
+            </a:r>
+            <a:br/>
+            <a:r>
+              <a:t>□ 기대한 파일·topic·frame·parameter 이름이 보인다.</a:t>
+            </a:r>
+            <a:br/>
+            <a:r>
+              <a:t>□ 값의 단위와 방향을 한 문장으로 설명할 수 있다.</a:t>
+            </a:r>
+          </a:p>
+        </p:txBody>
+      </p:sp>
+      <p:sp>
+        <p:nvSpPr>
+          <p:cNvPr id="9" name="TextBox 8"/>
+          <p:cNvSpPr txBox="1"/>
+          <p:nvPr/>
+        </p:nvSpPr>
+        <p:spPr>
+          <a:xfrm>
+            <a:off x="731520" y="5989320"/>
+            <a:ext cx="10789920" cy="237744"/>
+          </a:xfrm>
+          <a:prstGeom prst="rect">
+            <a:avLst/>
+          </a:prstGeom>
+          <a:noFill/>
+        </p:spPr>
+        <p:txBody>
+          <a:bodyPr wrap="square" lIns="73152" rIns="73152" tIns="36576" bIns="36576">
+            <a:spAutoFit/>
+          </a:bodyPr>
+          <a:lstStyle/>
+          <a:p>
+            <a:pPr algn="l">
+              <a:spcAft>
+                <a:spcPts val="0"/>
+              </a:spcAft>
+              <a:defRPr sz="1500" b="1">
                 <a:solidFill>
                   <a:srgbClr val="122C4E"/>
                 </a:solidFill>
@@ -11203,110 +11864,7 @@
               </a:defRPr>
             </a:pPr>
             <a:r>
-              <a:t>• □ 완료 화면: agv.rviz에 RobotModel·TF·LaserScan·Odometry 설정을 저장하고 실제 화면을 확인한다.</a:t>
-            </a:r>
-          </a:p>
-          <a:p>
-            <a:pPr>
-              <a:spcAft>
-                <a:spcPts val="800"/>
-              </a:spcAft>
-              <a:defRPr sz="1800">
-                <a:solidFill>
-                  <a:srgbClr val="122C4E"/>
-                </a:solidFill>
-                <a:latin typeface="Noto Sans CJK KR"/>
-              </a:defRPr>
-            </a:pPr>
-            <a:r>
-              <a:t>• □ 막혔을 때 비교할 Complete: blocks/C_drive_visualization/M11_rviz_integration/complete/</a:t>
-            </a:r>
-          </a:p>
-          <a:p>
-            <a:pPr>
-              <a:spcAft>
-                <a:spcPts val="800"/>
-              </a:spcAft>
-              <a:defRPr sz="1800">
-                <a:solidFill>
-                  <a:srgbClr val="122C4E"/>
-                </a:solidFill>
-                <a:latin typeface="Noto Sans CJK KR"/>
-              </a:defRPr>
-            </a:pPr>
-            <a:r>
-              <a:t>• □ 정상 로그·캡처: logs/validation.log, screenshots/validation_terminal.png</a:t>
-            </a:r>
-          </a:p>
-          <a:p>
-            <a:pPr>
-              <a:spcAft>
-                <a:spcPts val="800"/>
-              </a:spcAft>
-              <a:defRPr sz="1800">
-                <a:solidFill>
-                  <a:srgbClr val="122C4E"/>
-                </a:solidFill>
-                <a:latin typeface="Noto Sans CJK KR"/>
-              </a:defRPr>
-            </a:pPr>
-            <a:r>
-              <a:t>• □ 버전 식별: CHECKSUM_or_TAG.txt의 SHA-256 manifest</a:t>
-            </a:r>
-          </a:p>
-          <a:p>
-            <a:pPr>
-              <a:spcAft>
-                <a:spcPts val="800"/>
-              </a:spcAft>
-              <a:defRPr sz="1800">
-                <a:solidFill>
-                  <a:srgbClr val="122C4E"/>
-                </a:solidFill>
-                <a:latin typeface="Noto Sans CJK KR"/>
-              </a:defRPr>
-            </a:pPr>
-            <a:r>
-              <a:t>• □ 다음 시작 조건: M12~M15 센서 display</a:t>
-            </a:r>
-          </a:p>
-        </p:txBody>
-      </p:sp>
-      <p:sp>
-        <p:nvSpPr>
-          <p:cNvPr id="9" name="TextBox 8"/>
-          <p:cNvSpPr txBox="1"/>
-          <p:nvPr/>
-        </p:nvSpPr>
-        <p:spPr>
-          <a:xfrm>
-            <a:off x="868680" y="5596128"/>
-            <a:ext cx="10515600" cy="338328"/>
-          </a:xfrm>
-          <a:prstGeom prst="rect">
-            <a:avLst/>
-          </a:prstGeom>
-          <a:noFill/>
-        </p:spPr>
-        <p:txBody>
-          <a:bodyPr wrap="square" lIns="73152" rIns="73152" tIns="36576" bIns="36576">
-            <a:spAutoFit/>
-          </a:bodyPr>
-          <a:lstStyle/>
-          <a:p>
-            <a:pPr algn="ctr">
-              <a:spcAft>
-                <a:spcPts val="0"/>
-              </a:spcAft>
-              <a:defRPr sz="1700" b="1">
-                <a:solidFill>
-                  <a:srgbClr val="2A8B5A"/>
-                </a:solidFill>
-                <a:latin typeface="Noto Sans CJK KR"/>
-              </a:defRPr>
-            </a:pPr>
-            <a:r>
-              <a:t>다음 모듈을 시작하기 전, 내 src의 변경사항을 저장하고 현재 완료 조건을 다시 확인합니다.</a:t>
+              <a:t>완료 조건: agv.rviz에 RobotModel·TF·LaserScan·Odometry 설정을 저장하고 실제 화면을 확인한다.</a:t>
             </a:r>
           </a:p>
         </p:txBody>
@@ -11363,6 +11921,1279 @@
               </a:defRPr>
             </a:pPr>
             <a:r>
+              <a:t>막히면: 증상 → 우선 확인 → 재검증</a:t>
+            </a:r>
+          </a:p>
+        </p:txBody>
+      </p:sp>
+      <p:sp>
+        <p:nvSpPr>
+          <p:cNvPr id="3" name="TextBox 2"/>
+          <p:cNvSpPr txBox="1"/>
+          <p:nvPr/>
+        </p:nvSpPr>
+        <p:spPr>
+          <a:xfrm>
+            <a:off x="603504" y="859536"/>
+            <a:ext cx="10698480" cy="292608"/>
+          </a:xfrm>
+          <a:prstGeom prst="rect">
+            <a:avLst/>
+          </a:prstGeom>
+          <a:noFill/>
+        </p:spPr>
+        <p:txBody>
+          <a:bodyPr wrap="square" lIns="73152" rIns="73152" tIns="36576" bIns="36576">
+            <a:spAutoFit/>
+          </a:bodyPr>
+          <a:lstStyle/>
+          <a:p>
+            <a:pPr algn="l">
+              <a:spcAft>
+                <a:spcPts val="0"/>
+              </a:spcAft>
+              <a:defRPr sz="1700" b="0">
+                <a:solidFill>
+                  <a:srgbClr val="5C6672"/>
+                </a:solidFill>
+                <a:latin typeface="Noto Sans CJK KR"/>
+              </a:defRPr>
+            </a:pPr>
+            <a:r>
+              <a:t>오류 메시지를 숨기지 않고 같은 순서로 점검합니다.</a:t>
+            </a:r>
+          </a:p>
+        </p:txBody>
+      </p:sp>
+      <p:sp>
+        <p:nvSpPr>
+          <p:cNvPr id="4" name="TextBox 3"/>
+          <p:cNvSpPr txBox="1"/>
+          <p:nvPr/>
+        </p:nvSpPr>
+        <p:spPr>
+          <a:xfrm>
+            <a:off x="530352" y="6510528"/>
+            <a:ext cx="7772400" cy="201168"/>
+          </a:xfrm>
+          <a:prstGeom prst="rect">
+            <a:avLst/>
+          </a:prstGeom>
+          <a:noFill/>
+        </p:spPr>
+        <p:txBody>
+          <a:bodyPr wrap="square" lIns="73152" rIns="73152" tIns="36576" bIns="36576">
+            <a:spAutoFit/>
+          </a:bodyPr>
+          <a:lstStyle/>
+          <a:p>
+            <a:pPr algn="l">
+              <a:spcAft>
+                <a:spcPts val="0"/>
+              </a:spcAft>
+              <a:defRPr sz="900" b="0">
+                <a:solidFill>
+                  <a:srgbClr val="5C6672"/>
+                </a:solidFill>
+                <a:latin typeface="Noto Sans CJK KR"/>
+              </a:defRPr>
+            </a:pPr>
+            <a:r>
+              <a:t>ROS 2 기반 AGV End-to-End 개발 커리큘럼 · M11 · Block C</a:t>
+            </a:r>
+          </a:p>
+        </p:txBody>
+      </p:sp>
+      <p:sp>
+        <p:nvSpPr>
+          <p:cNvPr id="5" name="TextBox 4"/>
+          <p:cNvSpPr txBox="1"/>
+          <p:nvPr/>
+        </p:nvSpPr>
+        <p:spPr>
+          <a:xfrm>
+            <a:off x="9144000" y="6510528"/>
+            <a:ext cx="2468880" cy="201168"/>
+          </a:xfrm>
+          <a:prstGeom prst="rect">
+            <a:avLst/>
+          </a:prstGeom>
+          <a:noFill/>
+        </p:spPr>
+        <p:txBody>
+          <a:bodyPr wrap="square" lIns="73152" rIns="73152" tIns="36576" bIns="36576">
+            <a:spAutoFit/>
+          </a:bodyPr>
+          <a:lstStyle/>
+          <a:p>
+            <a:pPr algn="r">
+              <a:spcAft>
+                <a:spcPts val="0"/>
+              </a:spcAft>
+              <a:defRPr sz="1000" b="0">
+                <a:solidFill>
+                  <a:srgbClr val="5C6672"/>
+                </a:solidFill>
+                <a:latin typeface="Noto Sans CJK KR"/>
+              </a:defRPr>
+            </a:pPr>
+            <a:r>
+              <a:t>명령·파일 경로는 슬라이드에서 복사 가능</a:t>
+            </a:r>
+          </a:p>
+        </p:txBody>
+      </p:sp>
+      <p:sp>
+        <p:nvSpPr>
+          <p:cNvPr id="6" name="Rectangle 5"/>
+          <p:cNvSpPr/>
+          <p:nvPr/>
+        </p:nvSpPr>
+        <p:spPr>
+          <a:xfrm>
+            <a:off x="566928" y="1188720"/>
+            <a:ext cx="11064240" cy="347472"/>
+          </a:xfrm>
+          <a:prstGeom prst="rect">
+            <a:avLst/>
+          </a:prstGeom>
+          <a:solidFill>
+            <a:srgbClr val="F4F7FB"/>
+          </a:solidFill>
+          <a:ln>
+            <a:solidFill>
+              <a:srgbClr val="F4F7FB"/>
+            </a:solidFill>
+          </a:ln>
+        </p:spPr>
+        <p:style>
+          <a:lnRef idx="1">
+            <a:schemeClr val="accent1"/>
+          </a:lnRef>
+          <a:fillRef idx="3">
+            <a:schemeClr val="accent1"/>
+          </a:fillRef>
+          <a:effectRef idx="2">
+            <a:schemeClr val="accent1"/>
+          </a:effectRef>
+          <a:fontRef idx="minor">
+            <a:schemeClr val="lt1"/>
+          </a:fontRef>
+        </p:style>
+        <p:txBody>
+          <a:bodyPr rtlCol="0" anchor="ctr" wrap="square" lIns="73152" rIns="73152" tIns="36576" bIns="36576"/>
+          <a:lstStyle/>
+          <a:p>
+            <a:pPr algn="l">
+              <a:spcAft>
+                <a:spcPts val="0"/>
+              </a:spcAft>
+              <a:defRPr sz="1300" b="1">
+                <a:solidFill>
+                  <a:srgbClr val="122C4E"/>
+                </a:solidFill>
+                <a:latin typeface="Noto Sans CJK KR"/>
+              </a:defRPr>
+            </a:pPr>
+            <a:r>
+              <a:t>현재 단계 오류 대응    |    현재 폴더 ~/ros2_curri/my_agv_ws    |    현재 터미널</a:t>
+            </a:r>
+          </a:p>
+        </p:txBody>
+      </p:sp>
+      <p:sp>
+        <p:nvSpPr>
+          <p:cNvPr id="7" name="Rounded Rectangle 6"/>
+          <p:cNvSpPr/>
+          <p:nvPr/>
+        </p:nvSpPr>
+        <p:spPr>
+          <a:xfrm>
+            <a:off x="694944" y="1755648"/>
+            <a:ext cx="10972800" cy="1115568"/>
+          </a:xfrm>
+          <a:prstGeom prst="roundRect">
+            <a:avLst/>
+          </a:prstGeom>
+          <a:solidFill>
+            <a:srgbClr val="FFF7F4"/>
+          </a:solidFill>
+          <a:ln>
+            <a:solidFill>
+              <a:srgbClr val="EDBEB4"/>
+            </a:solidFill>
+          </a:ln>
+        </p:spPr>
+        <p:style>
+          <a:lnRef idx="1">
+            <a:schemeClr val="accent1"/>
+          </a:lnRef>
+          <a:fillRef idx="3">
+            <a:schemeClr val="accent1"/>
+          </a:fillRef>
+          <a:effectRef idx="2">
+            <a:schemeClr val="accent1"/>
+          </a:effectRef>
+          <a:fontRef idx="minor">
+            <a:schemeClr val="lt1"/>
+          </a:fontRef>
+        </p:style>
+        <p:txBody>
+          <a:bodyPr rtlCol="0" anchor="ctr"/>
+          <a:lstStyle/>
+          <a:p>
+            <a:pPr algn="ctr"/>
+          </a:p>
+        </p:txBody>
+      </p:sp>
+      <p:sp>
+        <p:nvSpPr>
+          <p:cNvPr id="8" name="TextBox 7"/>
+          <p:cNvSpPr txBox="1"/>
+          <p:nvPr/>
+        </p:nvSpPr>
+        <p:spPr>
+          <a:xfrm>
+            <a:off x="896112" y="1901952"/>
+            <a:ext cx="2926080" cy="274320"/>
+          </a:xfrm>
+          <a:prstGeom prst="rect">
+            <a:avLst/>
+          </a:prstGeom>
+          <a:noFill/>
+        </p:spPr>
+        <p:txBody>
+          <a:bodyPr wrap="square" lIns="73152" rIns="73152" tIns="36576" bIns="36576">
+            <a:spAutoFit/>
+          </a:bodyPr>
+          <a:lstStyle/>
+          <a:p>
+            <a:pPr algn="l">
+              <a:spcAft>
+                <a:spcPts val="0"/>
+              </a:spcAft>
+              <a:defRPr sz="1800" b="1">
+                <a:solidFill>
+                  <a:srgbClr val="BE3B3B"/>
+                </a:solidFill>
+                <a:latin typeface="Noto Sans CJK KR"/>
+              </a:defRPr>
+            </a:pPr>
+            <a:r>
+              <a:t>증상 1: RobotModel이 안 보임</a:t>
+            </a:r>
+          </a:p>
+        </p:txBody>
+      </p:sp>
+      <p:sp>
+        <p:nvSpPr>
+          <p:cNvPr id="9" name="TextBox 8"/>
+          <p:cNvSpPr txBox="1"/>
+          <p:nvPr/>
+        </p:nvSpPr>
+        <p:spPr>
+          <a:xfrm>
+            <a:off x="3794760" y="1883664"/>
+            <a:ext cx="7543800" cy="621792"/>
+          </a:xfrm>
+          <a:prstGeom prst="rect">
+            <a:avLst/>
+          </a:prstGeom>
+          <a:noFill/>
+        </p:spPr>
+        <p:txBody>
+          <a:bodyPr wrap="square" lIns="73152" rIns="73152" tIns="36576" bIns="36576">
+            <a:spAutoFit/>
+          </a:bodyPr>
+          <a:lstStyle/>
+          <a:p>
+            <a:pPr algn="l">
+              <a:spcAft>
+                <a:spcPts val="0"/>
+              </a:spcAft>
+              <a:defRPr sz="1600" b="0">
+                <a:solidFill>
+                  <a:srgbClr val="122C4E"/>
+                </a:solidFill>
+                <a:latin typeface="Noto Sans CJK KR"/>
+              </a:defRPr>
+            </a:pPr>
+            <a:r>
+              <a:t>우선 확인: robot_description·Fixed Frame·TF를 순서대로 확인한다.</a:t>
+            </a:r>
+            <a:br/>
+            <a:r>
+              <a:t>수정 후: ros2 topic info /robot_description</a:t>
+            </a:r>
+          </a:p>
+        </p:txBody>
+      </p:sp>
+      <p:sp>
+        <p:nvSpPr>
+          <p:cNvPr id="10" name="Rounded Rectangle 9"/>
+          <p:cNvSpPr/>
+          <p:nvPr/>
+        </p:nvSpPr>
+        <p:spPr>
+          <a:xfrm>
+            <a:off x="694944" y="3172968"/>
+            <a:ext cx="10972800" cy="1115568"/>
+          </a:xfrm>
+          <a:prstGeom prst="roundRect">
+            <a:avLst/>
+          </a:prstGeom>
+          <a:solidFill>
+            <a:srgbClr val="FFF7F4"/>
+          </a:solidFill>
+          <a:ln>
+            <a:solidFill>
+              <a:srgbClr val="EDBEB4"/>
+            </a:solidFill>
+          </a:ln>
+        </p:spPr>
+        <p:style>
+          <a:lnRef idx="1">
+            <a:schemeClr val="accent1"/>
+          </a:lnRef>
+          <a:fillRef idx="3">
+            <a:schemeClr val="accent1"/>
+          </a:fillRef>
+          <a:effectRef idx="2">
+            <a:schemeClr val="accent1"/>
+          </a:effectRef>
+          <a:fontRef idx="minor">
+            <a:schemeClr val="lt1"/>
+          </a:fontRef>
+        </p:style>
+        <p:txBody>
+          <a:bodyPr rtlCol="0" anchor="ctr"/>
+          <a:lstStyle/>
+          <a:p>
+            <a:pPr algn="ctr"/>
+          </a:p>
+        </p:txBody>
+      </p:sp>
+      <p:sp>
+        <p:nvSpPr>
+          <p:cNvPr id="11" name="TextBox 10"/>
+          <p:cNvSpPr txBox="1"/>
+          <p:nvPr/>
+        </p:nvSpPr>
+        <p:spPr>
+          <a:xfrm>
+            <a:off x="896112" y="3319272"/>
+            <a:ext cx="2926080" cy="274320"/>
+          </a:xfrm>
+          <a:prstGeom prst="rect">
+            <a:avLst/>
+          </a:prstGeom>
+          <a:noFill/>
+        </p:spPr>
+        <p:txBody>
+          <a:bodyPr wrap="square" lIns="73152" rIns="73152" tIns="36576" bIns="36576">
+            <a:spAutoFit/>
+          </a:bodyPr>
+          <a:lstStyle/>
+          <a:p>
+            <a:pPr algn="l">
+              <a:spcAft>
+                <a:spcPts val="0"/>
+              </a:spcAft>
+              <a:defRPr sz="1800" b="1">
+                <a:solidFill>
+                  <a:srgbClr val="BE3B3B"/>
+                </a:solidFill>
+                <a:latin typeface="Noto Sans CJK KR"/>
+              </a:defRPr>
+            </a:pPr>
+            <a:r>
+              <a:t>증상 2: LaserScan 위치가 이상함</a:t>
+            </a:r>
+          </a:p>
+        </p:txBody>
+      </p:sp>
+      <p:sp>
+        <p:nvSpPr>
+          <p:cNvPr id="12" name="TextBox 11"/>
+          <p:cNvSpPr txBox="1"/>
+          <p:nvPr/>
+        </p:nvSpPr>
+        <p:spPr>
+          <a:xfrm>
+            <a:off x="3794760" y="3300984"/>
+            <a:ext cx="7543800" cy="621792"/>
+          </a:xfrm>
+          <a:prstGeom prst="rect">
+            <a:avLst/>
+          </a:prstGeom>
+          <a:noFill/>
+        </p:spPr>
+        <p:txBody>
+          <a:bodyPr wrap="square" lIns="73152" rIns="73152" tIns="36576" bIns="36576">
+            <a:spAutoFit/>
+          </a:bodyPr>
+          <a:lstStyle/>
+          <a:p>
+            <a:pPr algn="l">
+              <a:spcAft>
+                <a:spcPts val="0"/>
+              </a:spcAft>
+              <a:defRPr sz="1600" b="0">
+                <a:solidFill>
+                  <a:srgbClr val="122C4E"/>
+                </a:solidFill>
+                <a:latin typeface="Noto Sans CJK KR"/>
+              </a:defRPr>
+            </a:pPr>
+            <a:r>
+              <a:t>우선 확인: scan header.frame_id와 lidar TF를 확인한다.</a:t>
+            </a:r>
+            <a:br/>
+            <a:r>
+              <a:t>수정 후: ros2 topic info /robot_description</a:t>
+            </a:r>
+          </a:p>
+        </p:txBody>
+      </p:sp>
+      <p:sp>
+        <p:nvSpPr>
+          <p:cNvPr id="13" name="TextBox 12"/>
+          <p:cNvSpPr txBox="1"/>
+          <p:nvPr/>
+        </p:nvSpPr>
+        <p:spPr>
+          <a:xfrm>
+            <a:off x="822960" y="5102352"/>
+            <a:ext cx="10607040" cy="402336"/>
+          </a:xfrm>
+          <a:prstGeom prst="rect">
+            <a:avLst/>
+          </a:prstGeom>
+          <a:noFill/>
+        </p:spPr>
+        <p:txBody>
+          <a:bodyPr wrap="square" lIns="73152" rIns="73152" tIns="36576" bIns="36576">
+            <a:spAutoFit/>
+          </a:bodyPr>
+          <a:lstStyle/>
+          <a:p>
+            <a:pPr algn="ctr">
+              <a:spcAft>
+                <a:spcPts val="0"/>
+              </a:spcAft>
+              <a:defRPr sz="1800" b="1">
+                <a:solidFill>
+                  <a:srgbClr val="DB7E22"/>
+                </a:solidFill>
+                <a:latin typeface="Noto Sans CJK KR"/>
+              </a:defRPr>
+            </a:pPr>
+            <a:r>
+              <a:t>공통 순서: ① 현재 폴더 ② source ③ 파일 경로 ④ 이름/타입/단위 ⑤ build·source 후 재실행</a:t>
+            </a:r>
+          </a:p>
+        </p:txBody>
+      </p:sp>
+    </p:spTree>
+  </p:cSld>
+  <p:clrMapOvr>
+    <a:masterClrMapping/>
+  </p:clrMapOvr>
+</p:sld>
+</file>
+
+<file path=ppt/slides/slide22.xml><?xml version="1.0" encoding="utf-8"?>
+<p:sld xmlns:a="http://schemas.openxmlformats.org/drawingml/2006/main" xmlns:p="http://schemas.openxmlformats.org/presentationml/2006/main" xmlns:r="http://schemas.openxmlformats.org/officeDocument/2006/relationships">
+  <p:cSld>
+    <p:spTree>
+      <p:nvGrpSpPr>
+        <p:cNvPr id="1" name=""/>
+        <p:cNvGrpSpPr/>
+        <p:nvPr/>
+      </p:nvGrpSpPr>
+      <p:grpSpPr/>
+      <p:sp>
+        <p:nvSpPr>
+          <p:cNvPr id="2" name="TextBox 1"/>
+          <p:cNvSpPr txBox="1"/>
+          <p:nvPr/>
+        </p:nvSpPr>
+        <p:spPr>
+          <a:xfrm>
+            <a:off x="566928" y="347472"/>
+            <a:ext cx="10881360" cy="438912"/>
+          </a:xfrm>
+          <a:prstGeom prst="rect">
+            <a:avLst/>
+          </a:prstGeom>
+          <a:noFill/>
+        </p:spPr>
+        <p:txBody>
+          <a:bodyPr wrap="square" lIns="73152" rIns="73152" tIns="36576" bIns="36576">
+            <a:spAutoFit/>
+          </a:bodyPr>
+          <a:lstStyle/>
+          <a:p>
+            <a:pPr algn="l">
+              <a:spcAft>
+                <a:spcPts val="0"/>
+              </a:spcAft>
+              <a:defRPr sz="3200" b="1">
+                <a:solidFill>
+                  <a:srgbClr val="122C4E"/>
+                </a:solidFill>
+                <a:latin typeface="Noto Sans CJK KR"/>
+              </a:defRPr>
+            </a:pPr>
+            <a:r>
+              <a:t>미니 실습: 값 하나를 바꾸고 결과를 비교한다</a:t>
+            </a:r>
+          </a:p>
+        </p:txBody>
+      </p:sp>
+      <p:sp>
+        <p:nvSpPr>
+          <p:cNvPr id="3" name="TextBox 2"/>
+          <p:cNvSpPr txBox="1"/>
+          <p:nvPr/>
+        </p:nvSpPr>
+        <p:spPr>
+          <a:xfrm>
+            <a:off x="603504" y="859536"/>
+            <a:ext cx="10698480" cy="292608"/>
+          </a:xfrm>
+          <a:prstGeom prst="rect">
+            <a:avLst/>
+          </a:prstGeom>
+          <a:noFill/>
+        </p:spPr>
+        <p:txBody>
+          <a:bodyPr wrap="square" lIns="73152" rIns="73152" tIns="36576" bIns="36576">
+            <a:spAutoFit/>
+          </a:bodyPr>
+          <a:lstStyle/>
+          <a:p>
+            <a:pPr algn="l">
+              <a:spcAft>
+                <a:spcPts val="0"/>
+              </a:spcAft>
+              <a:defRPr sz="1700" b="0">
+                <a:solidFill>
+                  <a:srgbClr val="5C6672"/>
+                </a:solidFill>
+                <a:latin typeface="Noto Sans CJK KR"/>
+              </a:defRPr>
+            </a:pPr>
+            <a:r>
+              <a:t>정상 결과를 만든 뒤에는 한 번에 하나의 값만 바꿉니다.</a:t>
+            </a:r>
+          </a:p>
+        </p:txBody>
+      </p:sp>
+      <p:sp>
+        <p:nvSpPr>
+          <p:cNvPr id="4" name="TextBox 3"/>
+          <p:cNvSpPr txBox="1"/>
+          <p:nvPr/>
+        </p:nvSpPr>
+        <p:spPr>
+          <a:xfrm>
+            <a:off x="530352" y="6510528"/>
+            <a:ext cx="7772400" cy="201168"/>
+          </a:xfrm>
+          <a:prstGeom prst="rect">
+            <a:avLst/>
+          </a:prstGeom>
+          <a:noFill/>
+        </p:spPr>
+        <p:txBody>
+          <a:bodyPr wrap="square" lIns="73152" rIns="73152" tIns="36576" bIns="36576">
+            <a:spAutoFit/>
+          </a:bodyPr>
+          <a:lstStyle/>
+          <a:p>
+            <a:pPr algn="l">
+              <a:spcAft>
+                <a:spcPts val="0"/>
+              </a:spcAft>
+              <a:defRPr sz="900" b="0">
+                <a:solidFill>
+                  <a:srgbClr val="5C6672"/>
+                </a:solidFill>
+                <a:latin typeface="Noto Sans CJK KR"/>
+              </a:defRPr>
+            </a:pPr>
+            <a:r>
+              <a:t>ROS 2 기반 AGV End-to-End 개발 커리큘럼 · M11 · Block C</a:t>
+            </a:r>
+          </a:p>
+        </p:txBody>
+      </p:sp>
+      <p:sp>
+        <p:nvSpPr>
+          <p:cNvPr id="5" name="TextBox 4"/>
+          <p:cNvSpPr txBox="1"/>
+          <p:nvPr/>
+        </p:nvSpPr>
+        <p:spPr>
+          <a:xfrm>
+            <a:off x="9144000" y="6510528"/>
+            <a:ext cx="2468880" cy="201168"/>
+          </a:xfrm>
+          <a:prstGeom prst="rect">
+            <a:avLst/>
+          </a:prstGeom>
+          <a:noFill/>
+        </p:spPr>
+        <p:txBody>
+          <a:bodyPr wrap="square" lIns="73152" rIns="73152" tIns="36576" bIns="36576">
+            <a:spAutoFit/>
+          </a:bodyPr>
+          <a:lstStyle/>
+          <a:p>
+            <a:pPr algn="r">
+              <a:spcAft>
+                <a:spcPts val="0"/>
+              </a:spcAft>
+              <a:defRPr sz="1000" b="0">
+                <a:solidFill>
+                  <a:srgbClr val="5C6672"/>
+                </a:solidFill>
+                <a:latin typeface="Noto Sans CJK KR"/>
+              </a:defRPr>
+            </a:pPr>
+            <a:r>
+              <a:t>명령·파일 경로는 슬라이드에서 복사 가능</a:t>
+            </a:r>
+          </a:p>
+        </p:txBody>
+      </p:sp>
+      <p:sp>
+        <p:nvSpPr>
+          <p:cNvPr id="6" name="Rectangle 5"/>
+          <p:cNvSpPr/>
+          <p:nvPr/>
+        </p:nvSpPr>
+        <p:spPr>
+          <a:xfrm>
+            <a:off x="566928" y="1188720"/>
+            <a:ext cx="11064240" cy="347472"/>
+          </a:xfrm>
+          <a:prstGeom prst="rect">
+            <a:avLst/>
+          </a:prstGeom>
+          <a:solidFill>
+            <a:srgbClr val="F4F7FB"/>
+          </a:solidFill>
+          <a:ln>
+            <a:solidFill>
+              <a:srgbClr val="F4F7FB"/>
+            </a:solidFill>
+          </a:ln>
+        </p:spPr>
+        <p:style>
+          <a:lnRef idx="1">
+            <a:schemeClr val="accent1"/>
+          </a:lnRef>
+          <a:fillRef idx="3">
+            <a:schemeClr val="accent1"/>
+          </a:fillRef>
+          <a:effectRef idx="2">
+            <a:schemeClr val="accent1"/>
+          </a:effectRef>
+          <a:fontRef idx="minor">
+            <a:schemeClr val="lt1"/>
+          </a:fontRef>
+        </p:style>
+        <p:txBody>
+          <a:bodyPr rtlCol="0" anchor="ctr" wrap="square" lIns="73152" rIns="73152" tIns="36576" bIns="36576"/>
+          <a:lstStyle/>
+          <a:p>
+            <a:pPr algn="l">
+              <a:spcAft>
+                <a:spcPts val="0"/>
+              </a:spcAft>
+              <a:defRPr sz="1300" b="1">
+                <a:solidFill>
+                  <a:srgbClr val="122C4E"/>
+                </a:solidFill>
+                <a:latin typeface="Noto Sans CJK KR"/>
+              </a:defRPr>
+            </a:pPr>
+            <a:r>
+              <a:t>현재 단계 미니 실습    |    현재 폴더 ~/ros2_curri/my_agv_ws    |    현재 터미널</a:t>
+            </a:r>
+          </a:p>
+        </p:txBody>
+      </p:sp>
+      <p:sp>
+        <p:nvSpPr>
+          <p:cNvPr id="7" name="Rounded Rectangle 6"/>
+          <p:cNvSpPr/>
+          <p:nvPr/>
+        </p:nvSpPr>
+        <p:spPr>
+          <a:xfrm>
+            <a:off x="749808" y="1874519"/>
+            <a:ext cx="10652760" cy="1993392"/>
+          </a:xfrm>
+          <a:prstGeom prst="roundRect">
+            <a:avLst/>
+          </a:prstGeom>
+          <a:solidFill>
+            <a:srgbClr val="FFF8EB"/>
+          </a:solidFill>
+          <a:ln>
+            <a:solidFill>
+              <a:srgbClr val="ECC680"/>
+            </a:solidFill>
+          </a:ln>
+        </p:spPr>
+        <p:style>
+          <a:lnRef idx="1">
+            <a:schemeClr val="accent1"/>
+          </a:lnRef>
+          <a:fillRef idx="3">
+            <a:schemeClr val="accent1"/>
+          </a:fillRef>
+          <a:effectRef idx="2">
+            <a:schemeClr val="accent1"/>
+          </a:effectRef>
+          <a:fontRef idx="minor">
+            <a:schemeClr val="lt1"/>
+          </a:fontRef>
+        </p:style>
+        <p:txBody>
+          <a:bodyPr rtlCol="0" anchor="ctr" wrap="square" lIns="73152" rIns="73152" tIns="36576" bIns="36576"/>
+          <a:lstStyle/>
+          <a:p>
+            <a:pPr algn="ctr">
+              <a:spcAft>
+                <a:spcPts val="0"/>
+              </a:spcAft>
+              <a:defRPr sz="2300" b="1">
+                <a:solidFill>
+                  <a:srgbClr val="122C4E"/>
+                </a:solidFill>
+                <a:latin typeface="Noto Sans CJK KR"/>
+              </a:defRPr>
+            </a:pPr>
+            <a:r>
+              <a:t>Fixed Frame을 의도적으로 없는 이름으로 바꾼 뒤 Global Status 오류를 읽고 odom으로 되돌린다.</a:t>
+            </a:r>
+          </a:p>
+        </p:txBody>
+      </p:sp>
+      <p:sp>
+        <p:nvSpPr>
+          <p:cNvPr id="8" name="TextBox 7"/>
+          <p:cNvSpPr txBox="1"/>
+          <p:nvPr/>
+        </p:nvSpPr>
+        <p:spPr>
+          <a:xfrm>
+            <a:off x="877824" y="4590288"/>
+            <a:ext cx="10241280" cy="594360"/>
+          </a:xfrm>
+          <a:prstGeom prst="rect">
+            <a:avLst/>
+          </a:prstGeom>
+          <a:noFill/>
+        </p:spPr>
+        <p:txBody>
+          <a:bodyPr wrap="square" lIns="73152" rIns="73152" tIns="36576" bIns="36576">
+            <a:spAutoFit/>
+          </a:bodyPr>
+          <a:lstStyle/>
+          <a:p>
+            <a:pPr algn="ctr">
+              <a:spcAft>
+                <a:spcPts val="0"/>
+              </a:spcAft>
+              <a:defRPr sz="1900" b="1">
+                <a:solidFill>
+                  <a:srgbClr val="DB7E22"/>
+                </a:solidFill>
+                <a:latin typeface="Noto Sans CJK KR"/>
+              </a:defRPr>
+            </a:pPr>
+            <a:r>
+              <a:t>기록할 것: 바꾼 값(단위) · 기대한 변화 · 실제 출력/화면 · 원래 값으로 되돌린 결과</a:t>
+            </a:r>
+          </a:p>
+        </p:txBody>
+      </p:sp>
+    </p:spTree>
+  </p:cSld>
+  <p:clrMapOvr>
+    <a:masterClrMapping/>
+  </p:clrMapOvr>
+</p:sld>
+</file>
+
+<file path=ppt/slides/slide23.xml><?xml version="1.0" encoding="utf-8"?>
+<p:sld xmlns:a="http://schemas.openxmlformats.org/drawingml/2006/main" xmlns:p="http://schemas.openxmlformats.org/presentationml/2006/main" xmlns:r="http://schemas.openxmlformats.org/officeDocument/2006/relationships">
+  <p:cSld>
+    <p:spTree>
+      <p:nvGrpSpPr>
+        <p:cNvPr id="1" name=""/>
+        <p:cNvGrpSpPr/>
+        <p:nvPr/>
+      </p:nvGrpSpPr>
+      <p:grpSpPr/>
+      <p:sp>
+        <p:nvSpPr>
+          <p:cNvPr id="2" name="TextBox 1"/>
+          <p:cNvSpPr txBox="1"/>
+          <p:nvPr/>
+        </p:nvSpPr>
+        <p:spPr>
+          <a:xfrm>
+            <a:off x="566928" y="347472"/>
+            <a:ext cx="10881360" cy="438912"/>
+          </a:xfrm>
+          <a:prstGeom prst="rect">
+            <a:avLst/>
+          </a:prstGeom>
+          <a:noFill/>
+        </p:spPr>
+        <p:txBody>
+          <a:bodyPr wrap="square" lIns="73152" rIns="73152" tIns="36576" bIns="36576">
+            <a:spAutoFit/>
+          </a:bodyPr>
+          <a:lstStyle/>
+          <a:p>
+            <a:pPr algn="l">
+              <a:spcAft>
+                <a:spcPts val="0"/>
+              </a:spcAft>
+              <a:defRPr sz="3200" b="1">
+                <a:solidFill>
+                  <a:srgbClr val="122C4E"/>
+                </a:solidFill>
+                <a:latin typeface="Noto Sans CJK KR"/>
+              </a:defRPr>
+            </a:pPr>
+            <a:r>
+              <a:t>내 프로젝트 체크포인트를 저장하고 다음 모듈로 넘긴다</a:t>
+            </a:r>
+          </a:p>
+        </p:txBody>
+      </p:sp>
+      <p:sp>
+        <p:nvSpPr>
+          <p:cNvPr id="3" name="TextBox 2"/>
+          <p:cNvSpPr txBox="1"/>
+          <p:nvPr/>
+        </p:nvSpPr>
+        <p:spPr>
+          <a:xfrm>
+            <a:off x="603504" y="859536"/>
+            <a:ext cx="10698480" cy="292608"/>
+          </a:xfrm>
+          <a:prstGeom prst="rect">
+            <a:avLst/>
+          </a:prstGeom>
+          <a:noFill/>
+        </p:spPr>
+        <p:txBody>
+          <a:bodyPr wrap="square" lIns="73152" rIns="73152" tIns="36576" bIns="36576">
+            <a:spAutoFit/>
+          </a:bodyPr>
+          <a:lstStyle/>
+          <a:p>
+            <a:pPr algn="l">
+              <a:spcAft>
+                <a:spcPts val="0"/>
+              </a:spcAft>
+              <a:defRPr sz="1700" b="0">
+                <a:solidFill>
+                  <a:srgbClr val="5C6672"/>
+                </a:solidFill>
+                <a:latin typeface="Noto Sans CJK KR"/>
+              </a:defRPr>
+            </a:pPr>
+            <a:r>
+              <a:t>Complete는 복구용 비교 기준이고, 다음 단계는 내가 직접 만든 workspace에서 계속합니다.</a:t>
+            </a:r>
+          </a:p>
+        </p:txBody>
+      </p:sp>
+      <p:sp>
+        <p:nvSpPr>
+          <p:cNvPr id="4" name="TextBox 3"/>
+          <p:cNvSpPr txBox="1"/>
+          <p:nvPr/>
+        </p:nvSpPr>
+        <p:spPr>
+          <a:xfrm>
+            <a:off x="530352" y="6510528"/>
+            <a:ext cx="7772400" cy="201168"/>
+          </a:xfrm>
+          <a:prstGeom prst="rect">
+            <a:avLst/>
+          </a:prstGeom>
+          <a:noFill/>
+        </p:spPr>
+        <p:txBody>
+          <a:bodyPr wrap="square" lIns="73152" rIns="73152" tIns="36576" bIns="36576">
+            <a:spAutoFit/>
+          </a:bodyPr>
+          <a:lstStyle/>
+          <a:p>
+            <a:pPr algn="l">
+              <a:spcAft>
+                <a:spcPts val="0"/>
+              </a:spcAft>
+              <a:defRPr sz="900" b="0">
+                <a:solidFill>
+                  <a:srgbClr val="5C6672"/>
+                </a:solidFill>
+                <a:latin typeface="Noto Sans CJK KR"/>
+              </a:defRPr>
+            </a:pPr>
+            <a:r>
+              <a:t>ROS 2 기반 AGV End-to-End 개발 커리큘럼 · M11 · Block C</a:t>
+            </a:r>
+          </a:p>
+        </p:txBody>
+      </p:sp>
+      <p:sp>
+        <p:nvSpPr>
+          <p:cNvPr id="5" name="TextBox 4"/>
+          <p:cNvSpPr txBox="1"/>
+          <p:nvPr/>
+        </p:nvSpPr>
+        <p:spPr>
+          <a:xfrm>
+            <a:off x="9144000" y="6510528"/>
+            <a:ext cx="2468880" cy="201168"/>
+          </a:xfrm>
+          <a:prstGeom prst="rect">
+            <a:avLst/>
+          </a:prstGeom>
+          <a:noFill/>
+        </p:spPr>
+        <p:txBody>
+          <a:bodyPr wrap="square" lIns="73152" rIns="73152" tIns="36576" bIns="36576">
+            <a:spAutoFit/>
+          </a:bodyPr>
+          <a:lstStyle/>
+          <a:p>
+            <a:pPr algn="r">
+              <a:spcAft>
+                <a:spcPts val="0"/>
+              </a:spcAft>
+              <a:defRPr sz="1000" b="0">
+                <a:solidFill>
+                  <a:srgbClr val="5C6672"/>
+                </a:solidFill>
+                <a:latin typeface="Noto Sans CJK KR"/>
+              </a:defRPr>
+            </a:pPr>
+            <a:r>
+              <a:t>명령·파일 경로는 슬라이드에서 복사 가능</a:t>
+            </a:r>
+          </a:p>
+        </p:txBody>
+      </p:sp>
+      <p:sp>
+        <p:nvSpPr>
+          <p:cNvPr id="6" name="Rectangle 5"/>
+          <p:cNvSpPr/>
+          <p:nvPr/>
+        </p:nvSpPr>
+        <p:spPr>
+          <a:xfrm>
+            <a:off x="566928" y="1188720"/>
+            <a:ext cx="11064240" cy="347472"/>
+          </a:xfrm>
+          <a:prstGeom prst="rect">
+            <a:avLst/>
+          </a:prstGeom>
+          <a:solidFill>
+            <a:srgbClr val="F4F7FB"/>
+          </a:solidFill>
+          <a:ln>
+            <a:solidFill>
+              <a:srgbClr val="F4F7FB"/>
+            </a:solidFill>
+          </a:ln>
+        </p:spPr>
+        <p:style>
+          <a:lnRef idx="1">
+            <a:schemeClr val="accent1"/>
+          </a:lnRef>
+          <a:fillRef idx="3">
+            <a:schemeClr val="accent1"/>
+          </a:fillRef>
+          <a:effectRef idx="2">
+            <a:schemeClr val="accent1"/>
+          </a:effectRef>
+          <a:fontRef idx="minor">
+            <a:schemeClr val="lt1"/>
+          </a:fontRef>
+        </p:style>
+        <p:txBody>
+          <a:bodyPr rtlCol="0" anchor="ctr" wrap="square" lIns="73152" rIns="73152" tIns="36576" bIns="36576"/>
+          <a:lstStyle/>
+          <a:p>
+            <a:pPr algn="l">
+              <a:spcAft>
+                <a:spcPts val="0"/>
+              </a:spcAft>
+              <a:defRPr sz="1300" b="1">
+                <a:solidFill>
+                  <a:srgbClr val="122C4E"/>
+                </a:solidFill>
+                <a:latin typeface="Noto Sans CJK KR"/>
+              </a:defRPr>
+            </a:pPr>
+            <a:r>
+              <a:t>현재 단계 체크포인트    |    현재 폴더 ~/ros2_curri/my_agv_ws    |    현재 터미널</a:t>
+            </a:r>
+          </a:p>
+        </p:txBody>
+      </p:sp>
+      <p:sp>
+        <p:nvSpPr>
+          <p:cNvPr id="7" name="Rounded Rectangle 6"/>
+          <p:cNvSpPr/>
+          <p:nvPr/>
+        </p:nvSpPr>
+        <p:spPr>
+          <a:xfrm>
+            <a:off x="685800" y="1737360"/>
+            <a:ext cx="10972800" cy="3611880"/>
+          </a:xfrm>
+          <a:prstGeom prst="roundRect">
+            <a:avLst/>
+          </a:prstGeom>
+          <a:solidFill>
+            <a:srgbClr val="F4F7FB"/>
+          </a:solidFill>
+          <a:ln>
+            <a:solidFill>
+              <a:srgbClr val="D2DCE8"/>
+            </a:solidFill>
+          </a:ln>
+        </p:spPr>
+        <p:style>
+          <a:lnRef idx="1">
+            <a:schemeClr val="accent1"/>
+          </a:lnRef>
+          <a:fillRef idx="3">
+            <a:schemeClr val="accent1"/>
+          </a:fillRef>
+          <a:effectRef idx="2">
+            <a:schemeClr val="accent1"/>
+          </a:effectRef>
+          <a:fontRef idx="minor">
+            <a:schemeClr val="lt1"/>
+          </a:fontRef>
+        </p:style>
+        <p:txBody>
+          <a:bodyPr rtlCol="0" anchor="ctr"/>
+          <a:lstStyle/>
+          <a:p>
+            <a:pPr algn="ctr"/>
+          </a:p>
+        </p:txBody>
+      </p:sp>
+      <p:sp>
+        <p:nvSpPr>
+          <p:cNvPr id="8" name="TextBox 7"/>
+          <p:cNvSpPr txBox="1"/>
+          <p:nvPr/>
+        </p:nvSpPr>
+        <p:spPr>
+          <a:xfrm>
+            <a:off x="896112" y="1993392"/>
+            <a:ext cx="10332720" cy="2971800"/>
+          </a:xfrm>
+          <a:prstGeom prst="rect">
+            <a:avLst/>
+          </a:prstGeom>
+          <a:noFill/>
+        </p:spPr>
+        <p:txBody>
+          <a:bodyPr wrap="square" lIns="109728" rIns="109728">
+            <a:spAutoFit/>
+          </a:bodyPr>
+          <a:lstStyle/>
+          <a:p>
+            <a:pPr>
+              <a:spcAft>
+                <a:spcPts val="800"/>
+              </a:spcAft>
+              <a:defRPr sz="1800">
+                <a:solidFill>
+                  <a:srgbClr val="122C4E"/>
+                </a:solidFill>
+                <a:latin typeface="Noto Sans CJK KR"/>
+              </a:defRPr>
+            </a:pPr>
+            <a:r>
+              <a:t>• □ 완료 화면: agv.rviz에 RobotModel·TF·LaserScan·Odometry 설정을 저장하고 실제 화면을 확인한다.</a:t>
+            </a:r>
+          </a:p>
+          <a:p>
+            <a:pPr>
+              <a:spcAft>
+                <a:spcPts val="800"/>
+              </a:spcAft>
+              <a:defRPr sz="1800">
+                <a:solidFill>
+                  <a:srgbClr val="122C4E"/>
+                </a:solidFill>
+                <a:latin typeface="Noto Sans CJK KR"/>
+              </a:defRPr>
+            </a:pPr>
+            <a:r>
+              <a:t>• □ 막혔을 때 비교할 Complete: blocks/C_drive_visualization/M11_rviz_integration/complete/</a:t>
+            </a:r>
+          </a:p>
+          <a:p>
+            <a:pPr>
+              <a:spcAft>
+                <a:spcPts val="800"/>
+              </a:spcAft>
+              <a:defRPr sz="1800">
+                <a:solidFill>
+                  <a:srgbClr val="122C4E"/>
+                </a:solidFill>
+                <a:latin typeface="Noto Sans CJK KR"/>
+              </a:defRPr>
+            </a:pPr>
+            <a:r>
+              <a:t>• □ 정상 로그·캡처: logs/validation.log, screenshots/validation_terminal.png</a:t>
+            </a:r>
+          </a:p>
+          <a:p>
+            <a:pPr>
+              <a:spcAft>
+                <a:spcPts val="800"/>
+              </a:spcAft>
+              <a:defRPr sz="1800">
+                <a:solidFill>
+                  <a:srgbClr val="122C4E"/>
+                </a:solidFill>
+                <a:latin typeface="Noto Sans CJK KR"/>
+              </a:defRPr>
+            </a:pPr>
+            <a:r>
+              <a:t>• □ 버전 식별: CHECKSUM_or_TAG.txt의 SHA-256 manifest</a:t>
+            </a:r>
+          </a:p>
+          <a:p>
+            <a:pPr>
+              <a:spcAft>
+                <a:spcPts val="800"/>
+              </a:spcAft>
+              <a:defRPr sz="1800">
+                <a:solidFill>
+                  <a:srgbClr val="122C4E"/>
+                </a:solidFill>
+                <a:latin typeface="Noto Sans CJK KR"/>
+              </a:defRPr>
+            </a:pPr>
+            <a:r>
+              <a:t>• □ 다음 시작 조건: M12~M15 센서 display</a:t>
+            </a:r>
+          </a:p>
+        </p:txBody>
+      </p:sp>
+      <p:sp>
+        <p:nvSpPr>
+          <p:cNvPr id="9" name="TextBox 8"/>
+          <p:cNvSpPr txBox="1"/>
+          <p:nvPr/>
+        </p:nvSpPr>
+        <p:spPr>
+          <a:xfrm>
+            <a:off x="868680" y="5596128"/>
+            <a:ext cx="10515600" cy="338328"/>
+          </a:xfrm>
+          <a:prstGeom prst="rect">
+            <a:avLst/>
+          </a:prstGeom>
+          <a:noFill/>
+        </p:spPr>
+        <p:txBody>
+          <a:bodyPr wrap="square" lIns="73152" rIns="73152" tIns="36576" bIns="36576">
+            <a:spAutoFit/>
+          </a:bodyPr>
+          <a:lstStyle/>
+          <a:p>
+            <a:pPr algn="ctr">
+              <a:spcAft>
+                <a:spcPts val="0"/>
+              </a:spcAft>
+              <a:defRPr sz="1700" b="1">
+                <a:solidFill>
+                  <a:srgbClr val="2A8B5A"/>
+                </a:solidFill>
+                <a:latin typeface="Noto Sans CJK KR"/>
+              </a:defRPr>
+            </a:pPr>
+            <a:r>
+              <a:t>다음 모듈을 시작하기 전, 내 src의 변경사항을 저장하고 현재 완료 조건을 다시 확인합니다.</a:t>
+            </a:r>
+          </a:p>
+        </p:txBody>
+      </p:sp>
+    </p:spTree>
+  </p:cSld>
+  <p:clrMapOvr>
+    <a:masterClrMapping/>
+  </p:clrMapOvr>
+</p:sld>
+</file>
+
+<file path=ppt/slides/slide24.xml><?xml version="1.0" encoding="utf-8"?>
+<p:sld xmlns:a="http://schemas.openxmlformats.org/drawingml/2006/main" xmlns:p="http://schemas.openxmlformats.org/presentationml/2006/main" xmlns:r="http://schemas.openxmlformats.org/officeDocument/2006/relationships">
+  <p:cSld>
+    <p:spTree>
+      <p:nvGrpSpPr>
+        <p:cNvPr id="1" name=""/>
+        <p:cNvGrpSpPr/>
+        <p:nvPr/>
+      </p:nvGrpSpPr>
+      <p:grpSpPr/>
+      <p:sp>
+        <p:nvSpPr>
+          <p:cNvPr id="2" name="TextBox 1"/>
+          <p:cNvSpPr txBox="1"/>
+          <p:nvPr/>
+        </p:nvSpPr>
+        <p:spPr>
+          <a:xfrm>
+            <a:off x="566928" y="347472"/>
+            <a:ext cx="10881360" cy="438912"/>
+          </a:xfrm>
+          <a:prstGeom prst="rect">
+            <a:avLst/>
+          </a:prstGeom>
+          <a:noFill/>
+        </p:spPr>
+        <p:txBody>
+          <a:bodyPr wrap="square" lIns="73152" rIns="73152" tIns="36576" bIns="36576">
+            <a:spAutoFit/>
+          </a:bodyPr>
+          <a:lstStyle/>
+          <a:p>
+            <a:pPr algn="l">
+              <a:spcAft>
+                <a:spcPts val="0"/>
+              </a:spcAft>
+              <a:defRPr sz="3200" b="1">
+                <a:solidFill>
+                  <a:srgbClr val="122C4E"/>
+                </a:solidFill>
+                <a:latin typeface="Noto Sans CJK KR"/>
+              </a:defRPr>
+            </a:pPr>
+            <a:r>
               <a:t>공식 참고 자료</a:t>
             </a:r>
           </a:p>
@@ -13410,7 +15241,7 @@
       </p:sp>
       <p:pic>
         <p:nvPicPr>
-          <p:cNvPr id="6" name="Picture 5" descr="01_rviz_integrated_actual.png"/>
+          <p:cNvPr id="6" name="Picture 5" descr="rviz_agv_sensors_actual.png"/>
           <p:cNvPicPr>
             <a:picLocks noChangeAspect="1"/>
           </p:cNvPicPr>
@@ -13424,8 +15255,8 @@
         </p:blipFill>
         <p:spPr>
           <a:xfrm>
-            <a:off x="3060639" y="1389888"/>
-            <a:ext cx="6067672" cy="4663440"/>
+            <a:off x="3284058" y="1389888"/>
+            <a:ext cx="5620834" cy="4663440"/>
           </a:xfrm>
           <a:prstGeom prst="rect">
             <a:avLst/>
@@ -13466,7 +15297,7 @@
               </a:defRPr>
             </a:pPr>
             <a:r>
-              <a:t>목표 화면: 실제 RViz2: RobotModel·TF·Odometry·LaserScan·Path·Marker display를 함께 연 상태  |  나중에 확인할 것: 명령·설정과 화면의 topic·frame·결과 이름을 대조합니다.</a:t>
+              <a:t>목표 화면: 실제 RViz2: RobotModel과 TF를 같은 Fixed Frame에서 확인한 화면  |  나중에 확인할 것: 왼쪽 Displays의 RobotModel·TF가 켜져 있고, 오른쪽에 차체·바퀴·sensor frame 축이 함께 보이는지 확인합니다.</a:t>
             </a:r>
           </a:p>
         </p:txBody>
@@ -13523,7 +15354,7 @@
               </a:defRPr>
             </a:pPr>
             <a:r>
-              <a:t>핵심 흐름을 한 장으로 이해하기</a:t>
+              <a:t>먼저 이번 단계의 완료 모습을 본다</a:t>
             </a:r>
           </a:p>
         </p:txBody>
@@ -13562,7 +15393,7 @@
               </a:defRPr>
             </a:pPr>
             <a:r>
-              <a:t>상자와 화살표의 방향을 따라 데이터 또는 제어의 흐름을 읽습니다.</a:t>
+              <a:t>지금부터 폴더·파일·코드를 만들면 아래의 실제 결과에 도달합니다. 보이는 기준을 기억한 뒤 구현합니다.</a:t>
             </a:r>
           </a:p>
         </p:txBody>
@@ -13645,285 +15476,65 @@
           </a:p>
         </p:txBody>
       </p:sp>
-      <p:sp>
-        <p:nvSpPr>
-          <p:cNvPr id="6" name="Rounded Rectangle 5"/>
-          <p:cNvSpPr/>
-          <p:nvPr/>
-        </p:nvSpPr>
-        <p:spPr>
-          <a:xfrm>
-            <a:off x="2738628" y="2743200"/>
-            <a:ext cx="2029968" cy="1051560"/>
-          </a:xfrm>
-          <a:prstGeom prst="roundRect">
-            <a:avLst/>
-          </a:prstGeom>
-          <a:solidFill>
-            <a:srgbClr val="FFFFFF"/>
-          </a:solidFill>
-          <a:ln>
-            <a:solidFill>
-              <a:srgbClr val="225B9B"/>
-            </a:solidFill>
-          </a:ln>
-        </p:spPr>
-        <p:style>
-          <a:lnRef idx="1">
-            <a:schemeClr val="accent1"/>
-          </a:lnRef>
-          <a:fillRef idx="3">
-            <a:schemeClr val="accent1"/>
-          </a:fillRef>
-          <a:effectRef idx="2">
-            <a:schemeClr val="accent1"/>
-          </a:effectRef>
-          <a:fontRef idx="minor">
-            <a:schemeClr val="lt1"/>
-          </a:fontRef>
-        </p:style>
-        <p:txBody>
-          <a:bodyPr rtlCol="0" anchor="ctr" wrap="square" lIns="73152" rIns="73152" tIns="36576" bIns="36576"/>
+      <p:pic>
+        <p:nvPicPr>
+          <p:cNvPr id="6" name="Picture 5" descr="01_rviz_integrated_actual.png"/>
+          <p:cNvPicPr>
+            <a:picLocks noChangeAspect="1"/>
+          </p:cNvPicPr>
+          <p:nvPr/>
+        </p:nvPicPr>
+        <p:blipFill>
+          <a:blip r:embed="rId2"/>
+          <a:stretch>
+            <a:fillRect/>
+          </a:stretch>
+        </p:blipFill>
+        <p:spPr>
+          <a:xfrm>
+            <a:off x="3060639" y="1389888"/>
+            <a:ext cx="6067672" cy="4663440"/>
+          </a:xfrm>
+          <a:prstGeom prst="rect">
+            <a:avLst/>
+          </a:prstGeom>
+        </p:spPr>
+      </p:pic>
+      <p:sp>
+        <p:nvSpPr>
+          <p:cNvPr id="7" name="TextBox 6"/>
+          <p:cNvSpPr txBox="1"/>
+          <p:nvPr/>
+        </p:nvSpPr>
+        <p:spPr>
+          <a:xfrm>
+            <a:off x="777240" y="6126480"/>
+            <a:ext cx="10607040" cy="228600"/>
+          </a:xfrm>
+          <a:prstGeom prst="rect">
+            <a:avLst/>
+          </a:prstGeom>
+          <a:noFill/>
+        </p:spPr>
+        <p:txBody>
+          <a:bodyPr wrap="square" lIns="73152" rIns="73152" tIns="36576" bIns="36576">
+            <a:spAutoFit/>
+          </a:bodyPr>
           <a:lstStyle/>
           <a:p>
             <a:pPr algn="ctr">
               <a:spcAft>
                 <a:spcPts val="0"/>
               </a:spcAft>
-              <a:defRPr sz="1900" b="1">
-                <a:solidFill>
-                  <a:srgbClr val="122C4E"/>
-                </a:solidFill>
-                <a:latin typeface="Noto Sans CJK KR"/>
-              </a:defRPr>
-            </a:pPr>
-            <a:r>
-              <a:t>robot_description</a:t>
-            </a:r>
-          </a:p>
-        </p:txBody>
-      </p:sp>
-      <p:cxnSp>
-        <p:nvCxnSpPr>
-          <p:cNvPr id="7" name="Connector 6"/>
-          <p:cNvCxnSpPr/>
-          <p:nvPr/>
-        </p:nvCxnSpPr>
-        <p:spPr>
-          <a:xfrm>
-            <a:off x="4768596" y="3264408"/>
-            <a:ext cx="283463" cy="0"/>
-          </a:xfrm>
-          <a:prstGeom prst="line">
-            <a:avLst/>
-          </a:prstGeom>
-          <a:ln w="31750">
-            <a:solidFill>
-              <a:srgbClr val="225B9B"/>
-            </a:solidFill>
-          </a:ln>
-        </p:spPr>
-        <p:style>
-          <a:lnRef idx="2">
-            <a:schemeClr val="accent1"/>
-          </a:lnRef>
-          <a:fillRef idx="0">
-            <a:schemeClr val="accent1"/>
-          </a:fillRef>
-          <a:effectRef idx="1">
-            <a:schemeClr val="accent1"/>
-          </a:effectRef>
-          <a:fontRef idx="minor">
-            <a:schemeClr val="tx1"/>
-          </a:fontRef>
-        </p:style>
-      </p:cxnSp>
-      <p:sp>
-        <p:nvSpPr>
-          <p:cNvPr id="8" name="Rounded Rectangle 7"/>
-          <p:cNvSpPr/>
-          <p:nvPr/>
-        </p:nvSpPr>
-        <p:spPr>
-          <a:xfrm>
-            <a:off x="5079492" y="2743200"/>
-            <a:ext cx="2029968" cy="1051560"/>
-          </a:xfrm>
-          <a:prstGeom prst="roundRect">
-            <a:avLst/>
-          </a:prstGeom>
-          <a:solidFill>
-            <a:srgbClr val="FFFFFF"/>
-          </a:solidFill>
-          <a:ln>
-            <a:solidFill>
-              <a:srgbClr val="225B9B"/>
-            </a:solidFill>
-          </a:ln>
-        </p:spPr>
-        <p:style>
-          <a:lnRef idx="1">
-            <a:schemeClr val="accent1"/>
-          </a:lnRef>
-          <a:fillRef idx="3">
-            <a:schemeClr val="accent1"/>
-          </a:fillRef>
-          <a:effectRef idx="2">
-            <a:schemeClr val="accent1"/>
-          </a:effectRef>
-          <a:fontRef idx="minor">
-            <a:schemeClr val="lt1"/>
-          </a:fontRef>
-        </p:style>
-        <p:txBody>
-          <a:bodyPr rtlCol="0" anchor="ctr" wrap="square" lIns="73152" rIns="73152" tIns="36576" bIns="36576"/>
-          <a:lstStyle/>
-          <a:p>
-            <a:pPr algn="ctr">
-              <a:spcAft>
-                <a:spcPts val="0"/>
-              </a:spcAft>
-              <a:defRPr sz="1900" b="1">
-                <a:solidFill>
-                  <a:srgbClr val="122C4E"/>
-                </a:solidFill>
-                <a:latin typeface="Noto Sans CJK KR"/>
-              </a:defRPr>
-            </a:pPr>
-            <a:r>
-              <a:t>TF / odom</a:t>
-            </a:r>
-          </a:p>
-        </p:txBody>
-      </p:sp>
-      <p:cxnSp>
-        <p:nvCxnSpPr>
-          <p:cNvPr id="9" name="Connector 8"/>
-          <p:cNvCxnSpPr/>
-          <p:nvPr/>
-        </p:nvCxnSpPr>
-        <p:spPr>
-          <a:xfrm>
-            <a:off x="7109460" y="3264408"/>
-            <a:ext cx="283464" cy="0"/>
-          </a:xfrm>
-          <a:prstGeom prst="line">
-            <a:avLst/>
-          </a:prstGeom>
-          <a:ln w="31750">
-            <a:solidFill>
-              <a:srgbClr val="225B9B"/>
-            </a:solidFill>
-          </a:ln>
-        </p:spPr>
-        <p:style>
-          <a:lnRef idx="2">
-            <a:schemeClr val="accent1"/>
-          </a:lnRef>
-          <a:fillRef idx="0">
-            <a:schemeClr val="accent1"/>
-          </a:fillRef>
-          <a:effectRef idx="1">
-            <a:schemeClr val="accent1"/>
-          </a:effectRef>
-          <a:fontRef idx="minor">
-            <a:schemeClr val="tx1"/>
-          </a:fontRef>
-        </p:style>
-      </p:cxnSp>
-      <p:sp>
-        <p:nvSpPr>
-          <p:cNvPr id="10" name="Rounded Rectangle 9"/>
-          <p:cNvSpPr/>
-          <p:nvPr/>
-        </p:nvSpPr>
-        <p:spPr>
-          <a:xfrm>
-            <a:off x="7420356" y="2743200"/>
-            <a:ext cx="2029968" cy="1051560"/>
-          </a:xfrm>
-          <a:prstGeom prst="roundRect">
-            <a:avLst/>
-          </a:prstGeom>
-          <a:solidFill>
-            <a:srgbClr val="FFFFFF"/>
-          </a:solidFill>
-          <a:ln>
-            <a:solidFill>
-              <a:srgbClr val="225B9B"/>
-            </a:solidFill>
-          </a:ln>
-        </p:spPr>
-        <p:style>
-          <a:lnRef idx="1">
-            <a:schemeClr val="accent1"/>
-          </a:lnRef>
-          <a:fillRef idx="3">
-            <a:schemeClr val="accent1"/>
-          </a:fillRef>
-          <a:effectRef idx="2">
-            <a:schemeClr val="accent1"/>
-          </a:effectRef>
-          <a:fontRef idx="minor">
-            <a:schemeClr val="lt1"/>
-          </a:fontRef>
-        </p:style>
-        <p:txBody>
-          <a:bodyPr rtlCol="0" anchor="ctr" wrap="square" lIns="73152" rIns="73152" tIns="36576" bIns="36576"/>
-          <a:lstStyle/>
-          <a:p>
-            <a:pPr algn="ctr">
-              <a:spcAft>
-                <a:spcPts val="0"/>
-              </a:spcAft>
-              <a:defRPr sz="1900" b="1">
-                <a:solidFill>
-                  <a:srgbClr val="122C4E"/>
-                </a:solidFill>
-                <a:latin typeface="Noto Sans CJK KR"/>
-              </a:defRPr>
-            </a:pPr>
-            <a:r>
-              <a:t>RViz Displays</a:t>
-            </a:r>
-          </a:p>
-        </p:txBody>
-      </p:sp>
-      <p:sp>
-        <p:nvSpPr>
-          <p:cNvPr id="11" name="TextBox 10"/>
-          <p:cNvSpPr txBox="1"/>
-          <p:nvPr/>
-        </p:nvSpPr>
-        <p:spPr>
-          <a:xfrm>
-            <a:off x="914400" y="4800600"/>
-            <a:ext cx="10332720" cy="502920"/>
-          </a:xfrm>
-          <a:prstGeom prst="rect">
-            <a:avLst/>
-          </a:prstGeom>
-          <a:noFill/>
-        </p:spPr>
-        <p:txBody>
-          <a:bodyPr wrap="square" lIns="73152" rIns="73152" tIns="36576" bIns="36576">
-            <a:spAutoFit/>
-          </a:bodyPr>
-          <a:lstStyle/>
-          <a:p>
-            <a:pPr algn="ctr">
-              <a:spcAft>
-                <a:spcPts val="0"/>
-              </a:spcAft>
-              <a:defRPr sz="2000" b="1">
-                <a:solidFill>
-                  <a:srgbClr val="225B9B"/>
-                </a:solidFill>
-                <a:latin typeface="Noto Sans CJK KR"/>
-              </a:defRPr>
-            </a:pPr>
-            <a:r>
-              <a:t>기억할 한 문장: 앞 단계의 출력이 다음 단계의 입력이 되도록 topic·frame·파일 이름을 끝까지 유지합니다.</a:t>
+              <a:defRPr sz="1000" b="1">
+                <a:solidFill>
+                  <a:srgbClr val="2A8B5A"/>
+                </a:solidFill>
+                <a:latin typeface="Noto Sans CJK KR"/>
+              </a:defRPr>
+            </a:pPr>
+            <a:r>
+              <a:t>목표 화면: 실제 RViz2: LaserScan·Odometry display를 RobotModel과 함께 켠 화면  |  나중에 확인할 것: Displays에서 LaserScan·Odometry가 활성화되어 있는지와 scan point가 TF 좌표계에 붙는지를 확인합니다.</a:t>
             </a:r>
           </a:p>
         </p:txBody>
@@ -13980,7 +15591,7 @@
               </a:defRPr>
             </a:pPr>
             <a:r>
-              <a:t>이번에 프로젝트 안에 새로 만드는 파일</a:t>
+              <a:t>핵심 흐름을 한 장으로 이해하기</a:t>
             </a:r>
           </a:p>
         </p:txBody>
@@ -14019,7 +15630,7 @@
               </a:defRPr>
             </a:pPr>
             <a:r>
-              <a:t>아래 파일은 완성본을 복사하지 않고, 다음 슬라이드에서 폴더·빈 파일부터 직접 만듭니다.</a:t>
+              <a:t>상자와 화살표의 방향을 따라 데이터 또는 제어의 흐름을 읽습니다.</a:t>
             </a:r>
           </a:p>
         </p:txBody>
@@ -14110,18 +15721,18 @@
         </p:nvSpPr>
         <p:spPr>
           <a:xfrm>
-            <a:off x="777240" y="1600200"/>
-            <a:ext cx="10789920" cy="4407408"/>
+            <a:off x="2738628" y="2743200"/>
+            <a:ext cx="2029968" cy="1051560"/>
           </a:xfrm>
           <a:prstGeom prst="roundRect">
             <a:avLst/>
           </a:prstGeom>
           <a:solidFill>
-            <a:srgbClr val="1D232D"/>
+            <a:srgbClr val="FFFFFF"/>
           </a:solidFill>
           <a:ln>
             <a:solidFill>
-              <a:srgbClr val="1D232D"/>
+              <a:srgbClr val="225B9B"/>
             </a:solidFill>
           </a:ln>
         </p:spPr>
@@ -14143,62 +15754,244 @@
           <a:bodyPr rtlCol="0" anchor="ctr" wrap="square" lIns="73152" rIns="73152" tIns="36576" bIns="36576"/>
           <a:lstStyle/>
           <a:p>
-            <a:pPr algn="l">
-              <a:spcAft>
-                <a:spcPts val="0"/>
-              </a:spcAft>
-              <a:defRPr sz="1600" b="0">
-                <a:solidFill>
-                  <a:srgbClr val="FFFFFF"/>
-                </a:solidFill>
-                <a:latin typeface="DejaVu Sans Mono"/>
-              </a:defRPr>
-            </a:pPr>
-            <a:r>
-              <a:t>~/ros2_curri/my_agv_ws/src/</a:t>
-            </a:r>
-            <a:br/>
-            <a:r>
-              <a:t>└── (M01은 사용자 파일 없이 ROS 2 내장 demo node를 사용합니다.)</a:t>
-            </a:r>
-          </a:p>
-        </p:txBody>
-      </p:sp>
-      <p:sp>
-        <p:nvSpPr>
-          <p:cNvPr id="7" name="TextBox 6"/>
-          <p:cNvSpPr txBox="1"/>
-          <p:nvPr/>
-        </p:nvSpPr>
-        <p:spPr>
-          <a:xfrm>
-            <a:off x="877824" y="6144768"/>
-            <a:ext cx="10332720" cy="201168"/>
-          </a:xfrm>
-          <a:prstGeom prst="rect">
-            <a:avLst/>
-          </a:prstGeom>
-          <a:noFill/>
-        </p:spPr>
-        <p:txBody>
-          <a:bodyPr wrap="square" lIns="73152" rIns="73152" tIns="36576" bIns="36576">
-            <a:spAutoFit/>
-          </a:bodyPr>
-          <a:lstStyle/>
-          <a:p>
             <a:pPr algn="ctr">
               <a:spcAft>
                 <a:spcPts val="0"/>
               </a:spcAft>
-              <a:defRPr sz="1100" b="0">
-                <a:solidFill>
-                  <a:srgbClr val="5C6672"/>
-                </a:solidFill>
-                <a:latin typeface="Noto Sans CJK KR"/>
-              </a:defRPr>
-            </a:pPr>
-            <a:r>
-              <a:t>파일 하나를 만들고 저장한 뒤에만 다음 파일로 넘어갑니다. Complete는 오류가 풀리지 않을 때만 비교합니다.</a:t>
+              <a:defRPr sz="1900" b="1">
+                <a:solidFill>
+                  <a:srgbClr val="122C4E"/>
+                </a:solidFill>
+                <a:latin typeface="Noto Sans CJK KR"/>
+              </a:defRPr>
+            </a:pPr>
+            <a:r>
+              <a:t>robot_description</a:t>
+            </a:r>
+          </a:p>
+        </p:txBody>
+      </p:sp>
+      <p:cxnSp>
+        <p:nvCxnSpPr>
+          <p:cNvPr id="7" name="Connector 6"/>
+          <p:cNvCxnSpPr/>
+          <p:nvPr/>
+        </p:nvCxnSpPr>
+        <p:spPr>
+          <a:xfrm>
+            <a:off x="4768596" y="3264408"/>
+            <a:ext cx="283463" cy="0"/>
+          </a:xfrm>
+          <a:prstGeom prst="line">
+            <a:avLst/>
+          </a:prstGeom>
+          <a:ln w="31750">
+            <a:solidFill>
+              <a:srgbClr val="225B9B"/>
+            </a:solidFill>
+          </a:ln>
+        </p:spPr>
+        <p:style>
+          <a:lnRef idx="2">
+            <a:schemeClr val="accent1"/>
+          </a:lnRef>
+          <a:fillRef idx="0">
+            <a:schemeClr val="accent1"/>
+          </a:fillRef>
+          <a:effectRef idx="1">
+            <a:schemeClr val="accent1"/>
+          </a:effectRef>
+          <a:fontRef idx="minor">
+            <a:schemeClr val="tx1"/>
+          </a:fontRef>
+        </p:style>
+      </p:cxnSp>
+      <p:sp>
+        <p:nvSpPr>
+          <p:cNvPr id="8" name="Rounded Rectangle 7"/>
+          <p:cNvSpPr/>
+          <p:nvPr/>
+        </p:nvSpPr>
+        <p:spPr>
+          <a:xfrm>
+            <a:off x="5079492" y="2743200"/>
+            <a:ext cx="2029968" cy="1051560"/>
+          </a:xfrm>
+          <a:prstGeom prst="roundRect">
+            <a:avLst/>
+          </a:prstGeom>
+          <a:solidFill>
+            <a:srgbClr val="FFFFFF"/>
+          </a:solidFill>
+          <a:ln>
+            <a:solidFill>
+              <a:srgbClr val="225B9B"/>
+            </a:solidFill>
+          </a:ln>
+        </p:spPr>
+        <p:style>
+          <a:lnRef idx="1">
+            <a:schemeClr val="accent1"/>
+          </a:lnRef>
+          <a:fillRef idx="3">
+            <a:schemeClr val="accent1"/>
+          </a:fillRef>
+          <a:effectRef idx="2">
+            <a:schemeClr val="accent1"/>
+          </a:effectRef>
+          <a:fontRef idx="minor">
+            <a:schemeClr val="lt1"/>
+          </a:fontRef>
+        </p:style>
+        <p:txBody>
+          <a:bodyPr rtlCol="0" anchor="ctr" wrap="square" lIns="73152" rIns="73152" tIns="36576" bIns="36576"/>
+          <a:lstStyle/>
+          <a:p>
+            <a:pPr algn="ctr">
+              <a:spcAft>
+                <a:spcPts val="0"/>
+              </a:spcAft>
+              <a:defRPr sz="1900" b="1">
+                <a:solidFill>
+                  <a:srgbClr val="122C4E"/>
+                </a:solidFill>
+                <a:latin typeface="Noto Sans CJK KR"/>
+              </a:defRPr>
+            </a:pPr>
+            <a:r>
+              <a:t>TF / odom</a:t>
+            </a:r>
+          </a:p>
+        </p:txBody>
+      </p:sp>
+      <p:cxnSp>
+        <p:nvCxnSpPr>
+          <p:cNvPr id="9" name="Connector 8"/>
+          <p:cNvCxnSpPr/>
+          <p:nvPr/>
+        </p:nvCxnSpPr>
+        <p:spPr>
+          <a:xfrm>
+            <a:off x="7109460" y="3264408"/>
+            <a:ext cx="283464" cy="0"/>
+          </a:xfrm>
+          <a:prstGeom prst="line">
+            <a:avLst/>
+          </a:prstGeom>
+          <a:ln w="31750">
+            <a:solidFill>
+              <a:srgbClr val="225B9B"/>
+            </a:solidFill>
+          </a:ln>
+        </p:spPr>
+        <p:style>
+          <a:lnRef idx="2">
+            <a:schemeClr val="accent1"/>
+          </a:lnRef>
+          <a:fillRef idx="0">
+            <a:schemeClr val="accent1"/>
+          </a:fillRef>
+          <a:effectRef idx="1">
+            <a:schemeClr val="accent1"/>
+          </a:effectRef>
+          <a:fontRef idx="minor">
+            <a:schemeClr val="tx1"/>
+          </a:fontRef>
+        </p:style>
+      </p:cxnSp>
+      <p:sp>
+        <p:nvSpPr>
+          <p:cNvPr id="10" name="Rounded Rectangle 9"/>
+          <p:cNvSpPr/>
+          <p:nvPr/>
+        </p:nvSpPr>
+        <p:spPr>
+          <a:xfrm>
+            <a:off x="7420356" y="2743200"/>
+            <a:ext cx="2029968" cy="1051560"/>
+          </a:xfrm>
+          <a:prstGeom prst="roundRect">
+            <a:avLst/>
+          </a:prstGeom>
+          <a:solidFill>
+            <a:srgbClr val="FFFFFF"/>
+          </a:solidFill>
+          <a:ln>
+            <a:solidFill>
+              <a:srgbClr val="225B9B"/>
+            </a:solidFill>
+          </a:ln>
+        </p:spPr>
+        <p:style>
+          <a:lnRef idx="1">
+            <a:schemeClr val="accent1"/>
+          </a:lnRef>
+          <a:fillRef idx="3">
+            <a:schemeClr val="accent1"/>
+          </a:fillRef>
+          <a:effectRef idx="2">
+            <a:schemeClr val="accent1"/>
+          </a:effectRef>
+          <a:fontRef idx="minor">
+            <a:schemeClr val="lt1"/>
+          </a:fontRef>
+        </p:style>
+        <p:txBody>
+          <a:bodyPr rtlCol="0" anchor="ctr" wrap="square" lIns="73152" rIns="73152" tIns="36576" bIns="36576"/>
+          <a:lstStyle/>
+          <a:p>
+            <a:pPr algn="ctr">
+              <a:spcAft>
+                <a:spcPts val="0"/>
+              </a:spcAft>
+              <a:defRPr sz="1900" b="1">
+                <a:solidFill>
+                  <a:srgbClr val="122C4E"/>
+                </a:solidFill>
+                <a:latin typeface="Noto Sans CJK KR"/>
+              </a:defRPr>
+            </a:pPr>
+            <a:r>
+              <a:t>RViz Displays</a:t>
+            </a:r>
+          </a:p>
+        </p:txBody>
+      </p:sp>
+      <p:sp>
+        <p:nvSpPr>
+          <p:cNvPr id="11" name="TextBox 10"/>
+          <p:cNvSpPr txBox="1"/>
+          <p:nvPr/>
+        </p:nvSpPr>
+        <p:spPr>
+          <a:xfrm>
+            <a:off x="914400" y="4800600"/>
+            <a:ext cx="10332720" cy="502920"/>
+          </a:xfrm>
+          <a:prstGeom prst="rect">
+            <a:avLst/>
+          </a:prstGeom>
+          <a:noFill/>
+        </p:spPr>
+        <p:txBody>
+          <a:bodyPr wrap="square" lIns="73152" rIns="73152" tIns="36576" bIns="36576">
+            <a:spAutoFit/>
+          </a:bodyPr>
+          <a:lstStyle/>
+          <a:p>
+            <a:pPr algn="ctr">
+              <a:spcAft>
+                <a:spcPts val="0"/>
+              </a:spcAft>
+              <a:defRPr sz="2000" b="1">
+                <a:solidFill>
+                  <a:srgbClr val="225B9B"/>
+                </a:solidFill>
+                <a:latin typeface="Noto Sans CJK KR"/>
+              </a:defRPr>
+            </a:pPr>
+            <a:r>
+              <a:t>기억할 한 문장: 앞 단계의 출력이 다음 단계의 입력이 되도록 topic·frame·파일 이름을 끝까지 유지합니다.</a:t>
             </a:r>
           </a:p>
         </p:txBody>
@@ -14255,7 +16048,7 @@
               </a:defRPr>
             </a:pPr>
             <a:r>
-              <a:t>명령어를 코드처럼 읽기 (1/3)</a:t>
+              <a:t>이번에 프로젝트 안에 새로 만드는 파일</a:t>
             </a:r>
           </a:p>
         </p:txBody>
@@ -14294,7 +16087,7 @@
               </a:defRPr>
             </a:pPr>
             <a:r>
-              <a:t>새 파일을 만들지 않는 모듈도 한 줄씩 뜻과 화면에서 확인할 결과를 먼저 읽습니다.</a:t>
+              <a:t>아래 파일은 완성본을 복사하지 않고, 다음 슬라이드에서 폴더·빈 파일부터 직접 만듭니다.</a:t>
             </a:r>
           </a:p>
         </p:txBody>
@@ -14379,24 +16172,24 @@
       </p:sp>
       <p:sp>
         <p:nvSpPr>
-          <p:cNvPr id="6" name="Rectangle 5"/>
+          <p:cNvPr id="6" name="Rounded Rectangle 5"/>
           <p:cNvSpPr/>
           <p:nvPr/>
         </p:nvSpPr>
         <p:spPr>
           <a:xfrm>
-            <a:off x="566928" y="1188720"/>
-            <a:ext cx="11064240" cy="347472"/>
-          </a:xfrm>
-          <a:prstGeom prst="rect">
+            <a:off x="777240" y="1600200"/>
+            <a:ext cx="10789920" cy="4407408"/>
+          </a:xfrm>
+          <a:prstGeom prst="roundRect">
             <a:avLst/>
           </a:prstGeom>
           <a:solidFill>
-            <a:srgbClr val="F4F7FB"/>
+            <a:srgbClr val="1D232D"/>
           </a:solidFill>
           <a:ln>
             <a:solidFill>
-              <a:srgbClr val="F4F7FB"/>
+              <a:srgbClr val="1D232D"/>
             </a:solidFill>
           </a:ln>
         </p:spPr>
@@ -14422,15 +16215,19 @@
               <a:spcAft>
                 <a:spcPts val="0"/>
               </a:spcAft>
-              <a:defRPr sz="1300" b="1">
-                <a:solidFill>
-                  <a:srgbClr val="122C4E"/>
-                </a:solidFill>
-                <a:latin typeface="Noto Sans CJK KR"/>
-              </a:defRPr>
-            </a:pPr>
-            <a:r>
-              <a:t>현재 단계 명령 해설    |    현재 폴더 ~/ros2_curri/my_agv_ws    |    현재 터미널</a:t>
+              <a:defRPr sz="1600" b="0">
+                <a:solidFill>
+                  <a:srgbClr val="FFFFFF"/>
+                </a:solidFill>
+                <a:latin typeface="DejaVu Sans Mono"/>
+              </a:defRPr>
+            </a:pPr>
+            <a:r>
+              <a:t>~/ros2_curri/my_agv_ws/src/</a:t>
+            </a:r>
+            <a:br/>
+            <a:r>
+              <a:t>└── (M01은 사용자 파일 없이 ROS 2 내장 demo node를 사용합니다.)</a:t>
             </a:r>
           </a:p>
         </p:txBody>
@@ -14443,8 +16240,8 @@
         </p:nvSpPr>
         <p:spPr>
           <a:xfrm>
-            <a:off x="694944" y="1664208"/>
-            <a:ext cx="10789920" cy="274320"/>
+            <a:off x="877824" y="6144768"/>
+            <a:ext cx="10332720" cy="201168"/>
           </a:xfrm>
           <a:prstGeom prst="rect">
             <a:avLst/>
@@ -14461,489 +16258,6 @@
               <a:spcAft>
                 <a:spcPts val="0"/>
               </a:spcAft>
-              <a:defRPr sz="1500" b="1">
-                <a:solidFill>
-                  <a:srgbClr val="DB7E22"/>
-                </a:solidFill>
-                <a:latin typeface="Noto Sans CJK KR"/>
-              </a:defRPr>
-            </a:pPr>
-            <a:r>
-              <a:t>말로 먼저 답해 보세요: 이 명령은 무엇을 시작하고, 성공하면 어디에 무엇이 보일까요?</a:t>
-            </a:r>
-          </a:p>
-        </p:txBody>
-      </p:sp>
-      <p:sp>
-        <p:nvSpPr>
-          <p:cNvPr id="8" name="Rounded Rectangle 7"/>
-          <p:cNvSpPr/>
-          <p:nvPr/>
-        </p:nvSpPr>
-        <p:spPr>
-          <a:xfrm>
-            <a:off x="658368" y="2359152"/>
-            <a:ext cx="4160520" cy="1417320"/>
-          </a:xfrm>
-          <a:prstGeom prst="roundRect">
-            <a:avLst/>
-          </a:prstGeom>
-          <a:solidFill>
-            <a:srgbClr val="1D232D"/>
-          </a:solidFill>
-          <a:ln>
-            <a:solidFill>
-              <a:srgbClr val="1D232D"/>
-            </a:solidFill>
-          </a:ln>
-        </p:spPr>
-        <p:style>
-          <a:lnRef idx="1">
-            <a:schemeClr val="accent1"/>
-          </a:lnRef>
-          <a:fillRef idx="3">
-            <a:schemeClr val="accent1"/>
-          </a:fillRef>
-          <a:effectRef idx="2">
-            <a:schemeClr val="accent1"/>
-          </a:effectRef>
-          <a:fontRef idx="minor">
-            <a:schemeClr val="lt1"/>
-          </a:fontRef>
-        </p:style>
-        <p:txBody>
-          <a:bodyPr rtlCol="0" anchor="ctr" wrap="square" lIns="73152" rIns="73152" tIns="36576" bIns="36576"/>
-          <a:lstStyle/>
-          <a:p>
-            <a:pPr algn="l">
-              <a:spcAft>
-                <a:spcPts val="0"/>
-              </a:spcAft>
-              <a:defRPr sz="1300" b="0">
-                <a:solidFill>
-                  <a:srgbClr val="FFFFFF"/>
-                </a:solidFill>
-                <a:latin typeface="DejaVu Sans Mono"/>
-              </a:defRPr>
-            </a:pPr>
-            <a:r>
-              <a:t>source ~/ros2_curri/my_agv_ws/install/setup.bash</a:t>
-            </a:r>
-          </a:p>
-        </p:txBody>
-      </p:sp>
-      <p:sp>
-        <p:nvSpPr>
-          <p:cNvPr id="9" name="Rounded Rectangle 8"/>
-          <p:cNvSpPr/>
-          <p:nvPr/>
-        </p:nvSpPr>
-        <p:spPr>
-          <a:xfrm>
-            <a:off x="5029200" y="2359152"/>
-            <a:ext cx="6537960" cy="1417320"/>
-          </a:xfrm>
-          <a:prstGeom prst="roundRect">
-            <a:avLst/>
-          </a:prstGeom>
-          <a:solidFill>
-            <a:srgbClr val="F4F7FB"/>
-          </a:solidFill>
-          <a:ln>
-            <a:solidFill>
-              <a:srgbClr val="225B9B"/>
-            </a:solidFill>
-          </a:ln>
-        </p:spPr>
-        <p:style>
-          <a:lnRef idx="1">
-            <a:schemeClr val="accent1"/>
-          </a:lnRef>
-          <a:fillRef idx="3">
-            <a:schemeClr val="accent1"/>
-          </a:fillRef>
-          <a:effectRef idx="2">
-            <a:schemeClr val="accent1"/>
-          </a:effectRef>
-          <a:fontRef idx="minor">
-            <a:schemeClr val="lt1"/>
-          </a:fontRef>
-        </p:style>
-        <p:txBody>
-          <a:bodyPr rtlCol="0" anchor="ctr"/>
-          <a:lstStyle/>
-          <a:p>
-            <a:pPr algn="ctr"/>
-          </a:p>
-        </p:txBody>
-      </p:sp>
-      <p:sp>
-        <p:nvSpPr>
-          <p:cNvPr id="10" name="TextBox 9"/>
-          <p:cNvSpPr txBox="1"/>
-          <p:nvPr/>
-        </p:nvSpPr>
-        <p:spPr>
-          <a:xfrm>
-            <a:off x="5239512" y="2468880"/>
-            <a:ext cx="594360" cy="219456"/>
-          </a:xfrm>
-          <a:prstGeom prst="rect">
-            <a:avLst/>
-          </a:prstGeom>
-          <a:noFill/>
-        </p:spPr>
-        <p:txBody>
-          <a:bodyPr wrap="square" lIns="73152" rIns="73152" tIns="36576" bIns="36576">
-            <a:spAutoFit/>
-          </a:bodyPr>
-          <a:lstStyle/>
-          <a:p>
-            <a:pPr algn="l">
-              <a:spcAft>
-                <a:spcPts val="0"/>
-              </a:spcAft>
-              <a:defRPr sz="1400" b="1">
-                <a:solidFill>
-                  <a:srgbClr val="225B9B"/>
-                </a:solidFill>
-                <a:latin typeface="Noto Sans CJK KR"/>
-              </a:defRPr>
-            </a:pPr>
-            <a:r>
-              <a:t>1.</a:t>
-            </a:r>
-          </a:p>
-        </p:txBody>
-      </p:sp>
-      <p:sp>
-        <p:nvSpPr>
-          <p:cNvPr id="11" name="TextBox 10"/>
-          <p:cNvSpPr txBox="1"/>
-          <p:nvPr/>
-        </p:nvSpPr>
-        <p:spPr>
-          <a:xfrm>
-            <a:off x="5596128" y="2450592"/>
-            <a:ext cx="5696712" cy="493776"/>
-          </a:xfrm>
-          <a:prstGeom prst="rect">
-            <a:avLst/>
-          </a:prstGeom>
-          <a:noFill/>
-        </p:spPr>
-        <p:txBody>
-          <a:bodyPr wrap="square" lIns="73152" rIns="73152" tIns="36576" bIns="36576">
-            <a:spAutoFit/>
-          </a:bodyPr>
-          <a:lstStyle/>
-          <a:p>
-            <a:pPr algn="l">
-              <a:spcAft>
-                <a:spcPts val="0"/>
-              </a:spcAft>
-              <a:defRPr sz="1300" b="0">
-                <a:solidFill>
-                  <a:srgbClr val="122C4E"/>
-                </a:solidFill>
-                <a:latin typeface="Noto Sans CJK KR"/>
-              </a:defRPr>
-            </a:pPr>
-            <a:r>
-              <a:t>뜻: 내 workspace에서 build한 package를 현재 terminal에 겹쳐 등록합니다.</a:t>
-            </a:r>
-          </a:p>
-        </p:txBody>
-      </p:sp>
-      <p:sp>
-        <p:nvSpPr>
-          <p:cNvPr id="12" name="TextBox 11"/>
-          <p:cNvSpPr txBox="1"/>
-          <p:nvPr/>
-        </p:nvSpPr>
-        <p:spPr>
-          <a:xfrm>
-            <a:off x="5596128" y="3108960"/>
-            <a:ext cx="5696712" cy="457200"/>
-          </a:xfrm>
-          <a:prstGeom prst="rect">
-            <a:avLst/>
-          </a:prstGeom>
-          <a:noFill/>
-        </p:spPr>
-        <p:txBody>
-          <a:bodyPr wrap="square" lIns="73152" rIns="73152" tIns="36576" bIns="36576">
-            <a:spAutoFit/>
-          </a:bodyPr>
-          <a:lstStyle/>
-          <a:p>
-            <a:pPr algn="l">
-              <a:spcAft>
-                <a:spcPts val="0"/>
-              </a:spcAft>
-              <a:defRPr sz="1200" b="0">
-                <a:solidFill>
-                  <a:srgbClr val="2A8B5A"/>
-                </a:solidFill>
-                <a:latin typeface="Noto Sans CJK KR"/>
-              </a:defRPr>
-            </a:pPr>
-            <a:r>
-              <a:t>실행에서: 이 줄 뒤 `ros2 run`이 내가 만든 package와 executable을 찾습니다.</a:t>
-            </a:r>
-          </a:p>
-        </p:txBody>
-      </p:sp>
-      <p:sp>
-        <p:nvSpPr>
-          <p:cNvPr id="13" name="Rounded Rectangle 12"/>
-          <p:cNvSpPr/>
-          <p:nvPr/>
-        </p:nvSpPr>
-        <p:spPr>
-          <a:xfrm>
-            <a:off x="658368" y="4078224"/>
-            <a:ext cx="4160520" cy="1417320"/>
-          </a:xfrm>
-          <a:prstGeom prst="roundRect">
-            <a:avLst/>
-          </a:prstGeom>
-          <a:solidFill>
-            <a:srgbClr val="1D232D"/>
-          </a:solidFill>
-          <a:ln>
-            <a:solidFill>
-              <a:srgbClr val="1D232D"/>
-            </a:solidFill>
-          </a:ln>
-        </p:spPr>
-        <p:style>
-          <a:lnRef idx="1">
-            <a:schemeClr val="accent1"/>
-          </a:lnRef>
-          <a:fillRef idx="3">
-            <a:schemeClr val="accent1"/>
-          </a:fillRef>
-          <a:effectRef idx="2">
-            <a:schemeClr val="accent1"/>
-          </a:effectRef>
-          <a:fontRef idx="minor">
-            <a:schemeClr val="lt1"/>
-          </a:fontRef>
-        </p:style>
-        <p:txBody>
-          <a:bodyPr rtlCol="0" anchor="ctr" wrap="square" lIns="73152" rIns="73152" tIns="36576" bIns="36576"/>
-          <a:lstStyle/>
-          <a:p>
-            <a:pPr algn="l">
-              <a:spcAft>
-                <a:spcPts val="0"/>
-              </a:spcAft>
-              <a:defRPr sz="1300" b="0">
-                <a:solidFill>
-                  <a:srgbClr val="FFFFFF"/>
-                </a:solidFill>
-                <a:latin typeface="DejaVu Sans Mono"/>
-              </a:defRPr>
-            </a:pPr>
-            <a:r>
-              <a:t>rviz2 -d</a:t>
-            </a:r>
-            <a:br/>
-            <a:r>
-              <a:t>~/ros2_curri/my_agv_ws/src/agv_description/rviz/agv.rviz</a:t>
-            </a:r>
-          </a:p>
-        </p:txBody>
-      </p:sp>
-      <p:sp>
-        <p:nvSpPr>
-          <p:cNvPr id="14" name="Rounded Rectangle 13"/>
-          <p:cNvSpPr/>
-          <p:nvPr/>
-        </p:nvSpPr>
-        <p:spPr>
-          <a:xfrm>
-            <a:off x="5029200" y="4078224"/>
-            <a:ext cx="6537960" cy="1417320"/>
-          </a:xfrm>
-          <a:prstGeom prst="roundRect">
-            <a:avLst/>
-          </a:prstGeom>
-          <a:solidFill>
-            <a:srgbClr val="F4F7FB"/>
-          </a:solidFill>
-          <a:ln>
-            <a:solidFill>
-              <a:srgbClr val="225B9B"/>
-            </a:solidFill>
-          </a:ln>
-        </p:spPr>
-        <p:style>
-          <a:lnRef idx="1">
-            <a:schemeClr val="accent1"/>
-          </a:lnRef>
-          <a:fillRef idx="3">
-            <a:schemeClr val="accent1"/>
-          </a:fillRef>
-          <a:effectRef idx="2">
-            <a:schemeClr val="accent1"/>
-          </a:effectRef>
-          <a:fontRef idx="minor">
-            <a:schemeClr val="lt1"/>
-          </a:fontRef>
-        </p:style>
-        <p:txBody>
-          <a:bodyPr rtlCol="0" anchor="ctr"/>
-          <a:lstStyle/>
-          <a:p>
-            <a:pPr algn="ctr"/>
-          </a:p>
-        </p:txBody>
-      </p:sp>
-      <p:sp>
-        <p:nvSpPr>
-          <p:cNvPr id="15" name="TextBox 14"/>
-          <p:cNvSpPr txBox="1"/>
-          <p:nvPr/>
-        </p:nvSpPr>
-        <p:spPr>
-          <a:xfrm>
-            <a:off x="5239512" y="4187952"/>
-            <a:ext cx="594360" cy="219456"/>
-          </a:xfrm>
-          <a:prstGeom prst="rect">
-            <a:avLst/>
-          </a:prstGeom>
-          <a:noFill/>
-        </p:spPr>
-        <p:txBody>
-          <a:bodyPr wrap="square" lIns="73152" rIns="73152" tIns="36576" bIns="36576">
-            <a:spAutoFit/>
-          </a:bodyPr>
-          <a:lstStyle/>
-          <a:p>
-            <a:pPr algn="l">
-              <a:spcAft>
-                <a:spcPts val="0"/>
-              </a:spcAft>
-              <a:defRPr sz="1400" b="1">
-                <a:solidFill>
-                  <a:srgbClr val="225B9B"/>
-                </a:solidFill>
-                <a:latin typeface="Noto Sans CJK KR"/>
-              </a:defRPr>
-            </a:pPr>
-            <a:r>
-              <a:t>2.</a:t>
-            </a:r>
-          </a:p>
-        </p:txBody>
-      </p:sp>
-      <p:sp>
-        <p:nvSpPr>
-          <p:cNvPr id="16" name="TextBox 15"/>
-          <p:cNvSpPr txBox="1"/>
-          <p:nvPr/>
-        </p:nvSpPr>
-        <p:spPr>
-          <a:xfrm>
-            <a:off x="5596128" y="4169663"/>
-            <a:ext cx="5696712" cy="493776"/>
-          </a:xfrm>
-          <a:prstGeom prst="rect">
-            <a:avLst/>
-          </a:prstGeom>
-          <a:noFill/>
-        </p:spPr>
-        <p:txBody>
-          <a:bodyPr wrap="square" lIns="73152" rIns="73152" tIns="36576" bIns="36576">
-            <a:spAutoFit/>
-          </a:bodyPr>
-          <a:lstStyle/>
-          <a:p>
-            <a:pPr algn="l">
-              <a:spcAft>
-                <a:spcPts val="0"/>
-              </a:spcAft>
-              <a:defRPr sz="1300" b="0">
-                <a:solidFill>
-                  <a:srgbClr val="122C4E"/>
-                </a:solidFill>
-                <a:latin typeface="Noto Sans CJK KR"/>
-              </a:defRPr>
-            </a:pPr>
-            <a:r>
-              <a:t>뜻: 저장해 둔 RViz 설정 파일을 열어 동일한 display 구성을 재현합니다.</a:t>
-            </a:r>
-          </a:p>
-        </p:txBody>
-      </p:sp>
-      <p:sp>
-        <p:nvSpPr>
-          <p:cNvPr id="17" name="TextBox 16"/>
-          <p:cNvSpPr txBox="1"/>
-          <p:nvPr/>
-        </p:nvSpPr>
-        <p:spPr>
-          <a:xfrm>
-            <a:off x="5596128" y="4828032"/>
-            <a:ext cx="5696712" cy="457200"/>
-          </a:xfrm>
-          <a:prstGeom prst="rect">
-            <a:avLst/>
-          </a:prstGeom>
-          <a:noFill/>
-        </p:spPr>
-        <p:txBody>
-          <a:bodyPr wrap="square" lIns="73152" rIns="73152" tIns="36576" bIns="36576">
-            <a:spAutoFit/>
-          </a:bodyPr>
-          <a:lstStyle/>
-          <a:p>
-            <a:pPr algn="l">
-              <a:spcAft>
-                <a:spcPts val="0"/>
-              </a:spcAft>
-              <a:defRPr sz="1200" b="0">
-                <a:solidFill>
-                  <a:srgbClr val="2A8B5A"/>
-                </a:solidFill>
-                <a:latin typeface="Noto Sans CJK KR"/>
-              </a:defRPr>
-            </a:pPr>
-            <a:r>
-              <a:t>실행에서: RobotModel·TF·LaserScan display가 설정 파일대로 보입니다.</a:t>
-            </a:r>
-          </a:p>
-        </p:txBody>
-      </p:sp>
-      <p:sp>
-        <p:nvSpPr>
-          <p:cNvPr id="18" name="TextBox 17"/>
-          <p:cNvSpPr txBox="1"/>
-          <p:nvPr/>
-        </p:nvSpPr>
-        <p:spPr>
-          <a:xfrm>
-            <a:off x="749808" y="6199632"/>
-            <a:ext cx="10698480" cy="182880"/>
-          </a:xfrm>
-          <a:prstGeom prst="rect">
-            <a:avLst/>
-          </a:prstGeom>
-          <a:noFill/>
-        </p:spPr>
-        <p:txBody>
-          <a:bodyPr wrap="square" lIns="73152" rIns="73152" tIns="36576" bIns="36576">
-            <a:spAutoFit/>
-          </a:bodyPr>
-          <a:lstStyle/>
-          <a:p>
-            <a:pPr algn="ctr">
-              <a:spcAft>
-                <a:spcPts val="0"/>
-              </a:spcAft>
               <a:defRPr sz="1100" b="0">
                 <a:solidFill>
                   <a:srgbClr val="5C6672"/>
@@ -14952,7 +16266,7 @@
               </a:defRPr>
             </a:pPr>
             <a:r>
-              <a:t>다음 실행 슬라이드에서는 이 명령을 직접 입력하고, 방금 말한 확인 결과가 보일 때까지 진행하지 않습니다.</a:t>
+              <a:t>파일 하나를 만들고 저장한 뒤에만 다음 파일로 넘어갑니다. Complete는 오류가 풀리지 않을 때만 비교합니다.</a:t>
             </a:r>
           </a:p>
         </p:txBody>
